--- a/project/project_background/Final Project Presentation - Ornit - Cancer Bioinfo March 2026.pptx
+++ b/project/project_background/Final Project Presentation - Ornit - Cancer Bioinfo March 2026.pptx
@@ -5,7 +5,7 @@
     <p:sldMasterId id="2147484297" r:id="rId1"/>
   </p:sldMasterIdLst>
   <p:notesMasterIdLst>
-    <p:notesMasterId r:id="rId18"/>
+    <p:notesMasterId r:id="rId23"/>
   </p:notesMasterIdLst>
   <p:sldIdLst>
     <p:sldId id="256" r:id="rId2"/>
@@ -22,8 +22,13 @@
     <p:sldId id="366" r:id="rId13"/>
     <p:sldId id="367" r:id="rId14"/>
     <p:sldId id="368" r:id="rId15"/>
-    <p:sldId id="369" r:id="rId16"/>
-    <p:sldId id="365" r:id="rId17"/>
+    <p:sldId id="374" r:id="rId16"/>
+    <p:sldId id="369" r:id="rId17"/>
+    <p:sldId id="365" r:id="rId18"/>
+    <p:sldId id="370" r:id="rId19"/>
+    <p:sldId id="371" r:id="rId20"/>
+    <p:sldId id="372" r:id="rId21"/>
+    <p:sldId id="373" r:id="rId22"/>
   </p:sldIdLst>
   <p:sldSz cx="12192000" cy="6858000"/>
   <p:notesSz cx="6858000" cy="9144000"/>
@@ -4239,6 +4244,114 @@
         <p:cNvPr id="1" name="">
           <a:extLst>
             <a:ext uri="{FF2B5EF4-FFF2-40B4-BE49-F238E27FC236}">
+              <a16:creationId xmlns:a16="http://schemas.microsoft.com/office/drawing/2014/main" id="{FA7CF7D1-D124-53BB-A836-93876410A1DF}"/>
+            </a:ext>
+          </a:extLst>
+        </p:cNvPr>
+        <p:cNvGrpSpPr/>
+        <p:nvPr/>
+      </p:nvGrpSpPr>
+      <p:grpSpPr>
+        <a:xfrm>
+          <a:off x="0" y="0"/>
+          <a:ext cx="0" cy="0"/>
+          <a:chOff x="0" y="0"/>
+          <a:chExt cx="0" cy="0"/>
+        </a:xfrm>
+      </p:grpSpPr>
+      <p:sp>
+        <p:nvSpPr>
+          <p:cNvPr id="2" name="Slide Image Placeholder 1">
+            <a:extLst>
+              <a:ext uri="{FF2B5EF4-FFF2-40B4-BE49-F238E27FC236}">
+                <a16:creationId xmlns:a16="http://schemas.microsoft.com/office/drawing/2014/main" id="{976F4C45-FA5A-F555-1F40-14DD12967C1F}"/>
+              </a:ext>
+            </a:extLst>
+          </p:cNvPr>
+          <p:cNvSpPr>
+            <a:spLocks noGrp="1" noRot="1" noChangeAspect="1"/>
+          </p:cNvSpPr>
+          <p:nvPr>
+            <p:ph type="sldImg"/>
+          </p:nvPr>
+        </p:nvSpPr>
+        <p:spPr/>
+      </p:sp>
+      <p:sp>
+        <p:nvSpPr>
+          <p:cNvPr id="3" name="Notes Placeholder 2">
+            <a:extLst>
+              <a:ext uri="{FF2B5EF4-FFF2-40B4-BE49-F238E27FC236}">
+                <a16:creationId xmlns:a16="http://schemas.microsoft.com/office/drawing/2014/main" id="{D689B0D2-2A59-6DB8-1B64-11E5BF2C8194}"/>
+              </a:ext>
+            </a:extLst>
+          </p:cNvPr>
+          <p:cNvSpPr>
+            <a:spLocks noGrp="1"/>
+          </p:cNvSpPr>
+          <p:nvPr>
+            <p:ph type="body" idx="1"/>
+          </p:nvPr>
+        </p:nvSpPr>
+        <p:spPr/>
+        <p:txBody>
+          <a:bodyPr/>
+          <a:lstStyle/>
+          <a:p>
+            <a:endParaRPr lang="en-IL" dirty="0"/>
+          </a:p>
+        </p:txBody>
+      </p:sp>
+      <p:sp>
+        <p:nvSpPr>
+          <p:cNvPr id="4" name="Slide Number Placeholder 3">
+            <a:extLst>
+              <a:ext uri="{FF2B5EF4-FFF2-40B4-BE49-F238E27FC236}">
+                <a16:creationId xmlns:a16="http://schemas.microsoft.com/office/drawing/2014/main" id="{96C1921B-77A7-152E-B244-6B2E6BCB634E}"/>
+              </a:ext>
+            </a:extLst>
+          </p:cNvPr>
+          <p:cNvSpPr>
+            <a:spLocks noGrp="1"/>
+          </p:cNvSpPr>
+          <p:nvPr>
+            <p:ph type="sldNum" sz="quarter" idx="5"/>
+          </p:nvPr>
+        </p:nvSpPr>
+        <p:spPr/>
+        <p:txBody>
+          <a:bodyPr/>
+          <a:lstStyle/>
+          <a:p>
+            <a:fld id="{7242DB82-1DC1-9846-88D7-11B539157949}" type="slidenum">
+              <a:rPr lang="en-IL" smtClean="0"/>
+              <a:t>15</a:t>
+            </a:fld>
+            <a:endParaRPr lang="en-IL"/>
+          </a:p>
+        </p:txBody>
+      </p:sp>
+    </p:spTree>
+    <p:extLst>
+      <p:ext uri="{BB962C8B-B14F-4D97-AF65-F5344CB8AC3E}">
+        <p14:creationId xmlns:p14="http://schemas.microsoft.com/office/powerpoint/2010/main" val="1591463100"/>
+      </p:ext>
+    </p:extLst>
+  </p:cSld>
+  <p:clrMapOvr>
+    <a:masterClrMapping/>
+  </p:clrMapOvr>
+</p:notes>
+</file>
+
+<file path=ppt/notesSlides/notesSlide16.xml><?xml version="1.0" encoding="utf-8"?>
+<p:notes xmlns:a="http://schemas.openxmlformats.org/drawingml/2006/main" xmlns:r="http://schemas.openxmlformats.org/officeDocument/2006/relationships" xmlns:p="http://schemas.openxmlformats.org/presentationml/2006/main">
+  <p:cSld>
+    <p:spTree>
+      <p:nvGrpSpPr>
+        <p:cNvPr id="1" name="">
+          <a:extLst>
+            <a:ext uri="{FF2B5EF4-FFF2-40B4-BE49-F238E27FC236}">
               <a16:creationId xmlns:a16="http://schemas.microsoft.com/office/drawing/2014/main" id="{8370C2FE-6C67-3C13-FFE5-BC922B1F3332}"/>
             </a:ext>
           </a:extLst>
@@ -4320,7 +4433,7 @@
           <a:p>
             <a:fld id="{7242DB82-1DC1-9846-88D7-11B539157949}" type="slidenum">
               <a:rPr lang="en-IL" smtClean="0"/>
-              <a:t>15</a:t>
+              <a:t>16</a:t>
             </a:fld>
             <a:endParaRPr lang="en-IL"/>
           </a:p>
@@ -4339,7 +4452,7 @@
 </p:notes>
 </file>
 
-<file path=ppt/notesSlides/notesSlide16.xml><?xml version="1.0" encoding="utf-8"?>
+<file path=ppt/notesSlides/notesSlide17.xml><?xml version="1.0" encoding="utf-8"?>
 <p:notes xmlns:a="http://schemas.openxmlformats.org/drawingml/2006/main" xmlns:r="http://schemas.openxmlformats.org/officeDocument/2006/relationships" xmlns:p="http://schemas.openxmlformats.org/presentationml/2006/main">
   <p:cSld>
     <p:spTree>
@@ -4428,7 +4541,7 @@
           <a:p>
             <a:fld id="{7242DB82-1DC1-9846-88D7-11B539157949}" type="slidenum">
               <a:rPr lang="en-IL" smtClean="0"/>
-              <a:t>16</a:t>
+              <a:t>17</a:t>
             </a:fld>
             <a:endParaRPr lang="en-IL"/>
           </a:p>
@@ -4438,6 +4551,222 @@
     <p:extLst>
       <p:ext uri="{BB962C8B-B14F-4D97-AF65-F5344CB8AC3E}">
         <p14:creationId xmlns:p14="http://schemas.microsoft.com/office/powerpoint/2010/main" val="2734332833"/>
+      </p:ext>
+    </p:extLst>
+  </p:cSld>
+  <p:clrMapOvr>
+    <a:masterClrMapping/>
+  </p:clrMapOvr>
+</p:notes>
+</file>
+
+<file path=ppt/notesSlides/notesSlide18.xml><?xml version="1.0" encoding="utf-8"?>
+<p:notes xmlns:a="http://schemas.openxmlformats.org/drawingml/2006/main" xmlns:r="http://schemas.openxmlformats.org/officeDocument/2006/relationships" xmlns:p="http://schemas.openxmlformats.org/presentationml/2006/main">
+  <p:cSld>
+    <p:spTree>
+      <p:nvGrpSpPr>
+        <p:cNvPr id="1" name="">
+          <a:extLst>
+            <a:ext uri="{FF2B5EF4-FFF2-40B4-BE49-F238E27FC236}">
+              <a16:creationId xmlns:a16="http://schemas.microsoft.com/office/drawing/2014/main" id="{E0960FEB-3EAA-8A17-381F-3641FB7CF4AC}"/>
+            </a:ext>
+          </a:extLst>
+        </p:cNvPr>
+        <p:cNvGrpSpPr/>
+        <p:nvPr/>
+      </p:nvGrpSpPr>
+      <p:grpSpPr>
+        <a:xfrm>
+          <a:off x="0" y="0"/>
+          <a:ext cx="0" cy="0"/>
+          <a:chOff x="0" y="0"/>
+          <a:chExt cx="0" cy="0"/>
+        </a:xfrm>
+      </p:grpSpPr>
+      <p:sp>
+        <p:nvSpPr>
+          <p:cNvPr id="2" name="Slide Image Placeholder 1">
+            <a:extLst>
+              <a:ext uri="{FF2B5EF4-FFF2-40B4-BE49-F238E27FC236}">
+                <a16:creationId xmlns:a16="http://schemas.microsoft.com/office/drawing/2014/main" id="{56F63B79-9EB2-B28B-C950-0F63B20F5BA6}"/>
+              </a:ext>
+            </a:extLst>
+          </p:cNvPr>
+          <p:cNvSpPr>
+            <a:spLocks noGrp="1" noRot="1" noChangeAspect="1"/>
+          </p:cNvSpPr>
+          <p:nvPr>
+            <p:ph type="sldImg"/>
+          </p:nvPr>
+        </p:nvSpPr>
+        <p:spPr/>
+      </p:sp>
+      <p:sp>
+        <p:nvSpPr>
+          <p:cNvPr id="3" name="Notes Placeholder 2">
+            <a:extLst>
+              <a:ext uri="{FF2B5EF4-FFF2-40B4-BE49-F238E27FC236}">
+                <a16:creationId xmlns:a16="http://schemas.microsoft.com/office/drawing/2014/main" id="{780BDA6B-38D1-673C-04A3-BDA28F353377}"/>
+              </a:ext>
+            </a:extLst>
+          </p:cNvPr>
+          <p:cNvSpPr>
+            <a:spLocks noGrp="1"/>
+          </p:cNvSpPr>
+          <p:nvPr>
+            <p:ph type="body" idx="1"/>
+          </p:nvPr>
+        </p:nvSpPr>
+        <p:spPr/>
+        <p:txBody>
+          <a:bodyPr/>
+          <a:lstStyle/>
+          <a:p>
+            <a:endParaRPr lang="en-IL" dirty="0"/>
+          </a:p>
+        </p:txBody>
+      </p:sp>
+      <p:sp>
+        <p:nvSpPr>
+          <p:cNvPr id="4" name="Slide Number Placeholder 3">
+            <a:extLst>
+              <a:ext uri="{FF2B5EF4-FFF2-40B4-BE49-F238E27FC236}">
+                <a16:creationId xmlns:a16="http://schemas.microsoft.com/office/drawing/2014/main" id="{17B6989F-53F0-9712-820E-9D4683B1860E}"/>
+              </a:ext>
+            </a:extLst>
+          </p:cNvPr>
+          <p:cNvSpPr>
+            <a:spLocks noGrp="1"/>
+          </p:cNvSpPr>
+          <p:nvPr>
+            <p:ph type="sldNum" sz="quarter" idx="5"/>
+          </p:nvPr>
+        </p:nvSpPr>
+        <p:spPr/>
+        <p:txBody>
+          <a:bodyPr/>
+          <a:lstStyle/>
+          <a:p>
+            <a:fld id="{7242DB82-1DC1-9846-88D7-11B539157949}" type="slidenum">
+              <a:rPr lang="en-IL" smtClean="0"/>
+              <a:t>18</a:t>
+            </a:fld>
+            <a:endParaRPr lang="en-IL"/>
+          </a:p>
+        </p:txBody>
+      </p:sp>
+    </p:spTree>
+    <p:extLst>
+      <p:ext uri="{BB962C8B-B14F-4D97-AF65-F5344CB8AC3E}">
+        <p14:creationId xmlns:p14="http://schemas.microsoft.com/office/powerpoint/2010/main" val="1775813623"/>
+      </p:ext>
+    </p:extLst>
+  </p:cSld>
+  <p:clrMapOvr>
+    <a:masterClrMapping/>
+  </p:clrMapOvr>
+</p:notes>
+</file>
+
+<file path=ppt/notesSlides/notesSlide19.xml><?xml version="1.0" encoding="utf-8"?>
+<p:notes xmlns:a="http://schemas.openxmlformats.org/drawingml/2006/main" xmlns:r="http://schemas.openxmlformats.org/officeDocument/2006/relationships" xmlns:p="http://schemas.openxmlformats.org/presentationml/2006/main">
+  <p:cSld>
+    <p:spTree>
+      <p:nvGrpSpPr>
+        <p:cNvPr id="1" name="">
+          <a:extLst>
+            <a:ext uri="{FF2B5EF4-FFF2-40B4-BE49-F238E27FC236}">
+              <a16:creationId xmlns:a16="http://schemas.microsoft.com/office/drawing/2014/main" id="{236BD74F-AEBA-8953-5957-21DA5B5E5A7D}"/>
+            </a:ext>
+          </a:extLst>
+        </p:cNvPr>
+        <p:cNvGrpSpPr/>
+        <p:nvPr/>
+      </p:nvGrpSpPr>
+      <p:grpSpPr>
+        <a:xfrm>
+          <a:off x="0" y="0"/>
+          <a:ext cx="0" cy="0"/>
+          <a:chOff x="0" y="0"/>
+          <a:chExt cx="0" cy="0"/>
+        </a:xfrm>
+      </p:grpSpPr>
+      <p:sp>
+        <p:nvSpPr>
+          <p:cNvPr id="2" name="Slide Image Placeholder 1">
+            <a:extLst>
+              <a:ext uri="{FF2B5EF4-FFF2-40B4-BE49-F238E27FC236}">
+                <a16:creationId xmlns:a16="http://schemas.microsoft.com/office/drawing/2014/main" id="{F181FBE0-C4F8-56CC-49FE-4D80F75B166C}"/>
+              </a:ext>
+            </a:extLst>
+          </p:cNvPr>
+          <p:cNvSpPr>
+            <a:spLocks noGrp="1" noRot="1" noChangeAspect="1"/>
+          </p:cNvSpPr>
+          <p:nvPr>
+            <p:ph type="sldImg"/>
+          </p:nvPr>
+        </p:nvSpPr>
+        <p:spPr/>
+      </p:sp>
+      <p:sp>
+        <p:nvSpPr>
+          <p:cNvPr id="3" name="Notes Placeholder 2">
+            <a:extLst>
+              <a:ext uri="{FF2B5EF4-FFF2-40B4-BE49-F238E27FC236}">
+                <a16:creationId xmlns:a16="http://schemas.microsoft.com/office/drawing/2014/main" id="{DBD1C479-4B61-32ED-2058-C6E2381053B8}"/>
+              </a:ext>
+            </a:extLst>
+          </p:cNvPr>
+          <p:cNvSpPr>
+            <a:spLocks noGrp="1"/>
+          </p:cNvSpPr>
+          <p:nvPr>
+            <p:ph type="body" idx="1"/>
+          </p:nvPr>
+        </p:nvSpPr>
+        <p:spPr/>
+        <p:txBody>
+          <a:bodyPr/>
+          <a:lstStyle/>
+          <a:p>
+            <a:endParaRPr lang="en-IL" dirty="0"/>
+          </a:p>
+        </p:txBody>
+      </p:sp>
+      <p:sp>
+        <p:nvSpPr>
+          <p:cNvPr id="4" name="Slide Number Placeholder 3">
+            <a:extLst>
+              <a:ext uri="{FF2B5EF4-FFF2-40B4-BE49-F238E27FC236}">
+                <a16:creationId xmlns:a16="http://schemas.microsoft.com/office/drawing/2014/main" id="{C540340E-3F34-C6D4-E1EC-5C655231E989}"/>
+              </a:ext>
+            </a:extLst>
+          </p:cNvPr>
+          <p:cNvSpPr>
+            <a:spLocks noGrp="1"/>
+          </p:cNvSpPr>
+          <p:nvPr>
+            <p:ph type="sldNum" sz="quarter" idx="5"/>
+          </p:nvPr>
+        </p:nvSpPr>
+        <p:spPr/>
+        <p:txBody>
+          <a:bodyPr/>
+          <a:lstStyle/>
+          <a:p>
+            <a:fld id="{7242DB82-1DC1-9846-88D7-11B539157949}" type="slidenum">
+              <a:rPr lang="en-IL" smtClean="0"/>
+              <a:t>19</a:t>
+            </a:fld>
+            <a:endParaRPr lang="en-IL"/>
+          </a:p>
+        </p:txBody>
+      </p:sp>
+    </p:spTree>
+    <p:extLst>
+      <p:ext uri="{BB962C8B-B14F-4D97-AF65-F5344CB8AC3E}">
+        <p14:creationId xmlns:p14="http://schemas.microsoft.com/office/powerpoint/2010/main" val="553818819"/>
       </p:ext>
     </p:extLst>
   </p:cSld>
@@ -4547,6 +4876,264 @@
     <p:extLst>
       <p:ext uri="{BB962C8B-B14F-4D97-AF65-F5344CB8AC3E}">
         <p14:creationId xmlns:p14="http://schemas.microsoft.com/office/powerpoint/2010/main" val="230172384"/>
+      </p:ext>
+    </p:extLst>
+  </p:cSld>
+  <p:clrMapOvr>
+    <a:masterClrMapping/>
+  </p:clrMapOvr>
+</p:notes>
+</file>
+
+<file path=ppt/notesSlides/notesSlide20.xml><?xml version="1.0" encoding="utf-8"?>
+<p:notes xmlns:a="http://schemas.openxmlformats.org/drawingml/2006/main" xmlns:r="http://schemas.openxmlformats.org/officeDocument/2006/relationships" xmlns:p="http://schemas.openxmlformats.org/presentationml/2006/main">
+  <p:cSld>
+    <p:spTree>
+      <p:nvGrpSpPr>
+        <p:cNvPr id="1" name="">
+          <a:extLst>
+            <a:ext uri="{FF2B5EF4-FFF2-40B4-BE49-F238E27FC236}">
+              <a16:creationId xmlns:a16="http://schemas.microsoft.com/office/drawing/2014/main" id="{C893C9C7-0A84-19E0-282D-872CF81B60D7}"/>
+            </a:ext>
+          </a:extLst>
+        </p:cNvPr>
+        <p:cNvGrpSpPr/>
+        <p:nvPr/>
+      </p:nvGrpSpPr>
+      <p:grpSpPr>
+        <a:xfrm>
+          <a:off x="0" y="0"/>
+          <a:ext cx="0" cy="0"/>
+          <a:chOff x="0" y="0"/>
+          <a:chExt cx="0" cy="0"/>
+        </a:xfrm>
+      </p:grpSpPr>
+      <p:sp>
+        <p:nvSpPr>
+          <p:cNvPr id="2" name="Slide Image Placeholder 1">
+            <a:extLst>
+              <a:ext uri="{FF2B5EF4-FFF2-40B4-BE49-F238E27FC236}">
+                <a16:creationId xmlns:a16="http://schemas.microsoft.com/office/drawing/2014/main" id="{8A07D94A-7328-5289-D8F9-F0AD4D9AD1B6}"/>
+              </a:ext>
+            </a:extLst>
+          </p:cNvPr>
+          <p:cNvSpPr>
+            <a:spLocks noGrp="1" noRot="1" noChangeAspect="1"/>
+          </p:cNvSpPr>
+          <p:nvPr>
+            <p:ph type="sldImg"/>
+          </p:nvPr>
+        </p:nvSpPr>
+        <p:spPr/>
+      </p:sp>
+      <p:sp>
+        <p:nvSpPr>
+          <p:cNvPr id="3" name="Notes Placeholder 2">
+            <a:extLst>
+              <a:ext uri="{FF2B5EF4-FFF2-40B4-BE49-F238E27FC236}">
+                <a16:creationId xmlns:a16="http://schemas.microsoft.com/office/drawing/2014/main" id="{83E45201-1E61-EE11-C528-A54632CD2F0B}"/>
+              </a:ext>
+            </a:extLst>
+          </p:cNvPr>
+          <p:cNvSpPr>
+            <a:spLocks noGrp="1"/>
+          </p:cNvSpPr>
+          <p:nvPr>
+            <p:ph type="body" idx="1"/>
+          </p:nvPr>
+        </p:nvSpPr>
+        <p:spPr/>
+        <p:txBody>
+          <a:bodyPr/>
+          <a:lstStyle/>
+          <a:p>
+            <a:endParaRPr lang="en-IL" dirty="0"/>
+          </a:p>
+        </p:txBody>
+      </p:sp>
+      <p:sp>
+        <p:nvSpPr>
+          <p:cNvPr id="4" name="Slide Number Placeholder 3">
+            <a:extLst>
+              <a:ext uri="{FF2B5EF4-FFF2-40B4-BE49-F238E27FC236}">
+                <a16:creationId xmlns:a16="http://schemas.microsoft.com/office/drawing/2014/main" id="{2EB256CB-51C4-A26F-AE16-ABE7BD5E5E3B}"/>
+              </a:ext>
+            </a:extLst>
+          </p:cNvPr>
+          <p:cNvSpPr>
+            <a:spLocks noGrp="1"/>
+          </p:cNvSpPr>
+          <p:nvPr>
+            <p:ph type="sldNum" sz="quarter" idx="5"/>
+          </p:nvPr>
+        </p:nvSpPr>
+        <p:spPr/>
+        <p:txBody>
+          <a:bodyPr/>
+          <a:lstStyle/>
+          <a:p>
+            <a:fld id="{7242DB82-1DC1-9846-88D7-11B539157949}" type="slidenum">
+              <a:rPr lang="en-IL" smtClean="0"/>
+              <a:t>20</a:t>
+            </a:fld>
+            <a:endParaRPr lang="en-IL"/>
+          </a:p>
+        </p:txBody>
+      </p:sp>
+    </p:spTree>
+    <p:extLst>
+      <p:ext uri="{BB962C8B-B14F-4D97-AF65-F5344CB8AC3E}">
+        <p14:creationId xmlns:p14="http://schemas.microsoft.com/office/powerpoint/2010/main" val="941794388"/>
+      </p:ext>
+    </p:extLst>
+  </p:cSld>
+  <p:clrMapOvr>
+    <a:masterClrMapping/>
+  </p:clrMapOvr>
+</p:notes>
+</file>
+
+<file path=ppt/notesSlides/notesSlide21.xml><?xml version="1.0" encoding="utf-8"?>
+<p:notes xmlns:a="http://schemas.openxmlformats.org/drawingml/2006/main" xmlns:r="http://schemas.openxmlformats.org/officeDocument/2006/relationships" xmlns:p="http://schemas.openxmlformats.org/presentationml/2006/main">
+  <p:cSld>
+    <p:spTree>
+      <p:nvGrpSpPr>
+        <p:cNvPr id="1" name="">
+          <a:extLst>
+            <a:ext uri="{FF2B5EF4-FFF2-40B4-BE49-F238E27FC236}">
+              <a16:creationId xmlns:a16="http://schemas.microsoft.com/office/drawing/2014/main" id="{E4ACCE8D-9330-B3DB-5B69-D303099550DD}"/>
+            </a:ext>
+          </a:extLst>
+        </p:cNvPr>
+        <p:cNvGrpSpPr/>
+        <p:nvPr/>
+      </p:nvGrpSpPr>
+      <p:grpSpPr>
+        <a:xfrm>
+          <a:off x="0" y="0"/>
+          <a:ext cx="0" cy="0"/>
+          <a:chOff x="0" y="0"/>
+          <a:chExt cx="0" cy="0"/>
+        </a:xfrm>
+      </p:grpSpPr>
+      <p:sp>
+        <p:nvSpPr>
+          <p:cNvPr id="2" name="Slide Image Placeholder 1">
+            <a:extLst>
+              <a:ext uri="{FF2B5EF4-FFF2-40B4-BE49-F238E27FC236}">
+                <a16:creationId xmlns:a16="http://schemas.microsoft.com/office/drawing/2014/main" id="{EC3B9118-304F-2BE6-8422-0DD687862C2D}"/>
+              </a:ext>
+            </a:extLst>
+          </p:cNvPr>
+          <p:cNvSpPr>
+            <a:spLocks noGrp="1" noRot="1" noChangeAspect="1"/>
+          </p:cNvSpPr>
+          <p:nvPr>
+            <p:ph type="sldImg"/>
+          </p:nvPr>
+        </p:nvSpPr>
+        <p:spPr/>
+      </p:sp>
+      <p:sp>
+        <p:nvSpPr>
+          <p:cNvPr id="3" name="Notes Placeholder 2">
+            <a:extLst>
+              <a:ext uri="{FF2B5EF4-FFF2-40B4-BE49-F238E27FC236}">
+                <a16:creationId xmlns:a16="http://schemas.microsoft.com/office/drawing/2014/main" id="{3797C7D5-11A5-3A69-7067-279DCBDAB834}"/>
+              </a:ext>
+            </a:extLst>
+          </p:cNvPr>
+          <p:cNvSpPr>
+            <a:spLocks noGrp="1"/>
+          </p:cNvSpPr>
+          <p:nvPr>
+            <p:ph type="body" idx="1"/>
+          </p:nvPr>
+        </p:nvSpPr>
+        <p:spPr/>
+        <p:txBody>
+          <a:bodyPr/>
+          <a:lstStyle/>
+          <a:p>
+            <a:pPr marL="0" algn="r" defTabSz="914400" rtl="1" eaLnBrk="1" latinLnBrk="0" hangingPunct="1"/>
+            <a:r>
+              <a:rPr lang="he-IL" dirty="0"/>
+              <a:t>שלום לכולם אני </a:t>
+            </a:r>
+            <a:r>
+              <a:rPr lang="he-IL" dirty="0" err="1"/>
+              <a:t>אורנית</a:t>
+            </a:r>
+            <a:r>
+              <a:rPr lang="he-IL" dirty="0"/>
+              <a:t>, ואני הולכת לדבר על הפרויקט שלי שנקרא ... </a:t>
+            </a:r>
+          </a:p>
+          <a:p>
+            <a:pPr marL="0" algn="r" defTabSz="914400" rtl="1" eaLnBrk="1" latinLnBrk="0" hangingPunct="1"/>
+            <a:r>
+              <a:rPr lang="he-IL" dirty="0"/>
+              <a:t>כדי להבין מה הפרויקט הזה אומר, אני צריכה להסביר מה זה </a:t>
+            </a:r>
+            <a:r>
+              <a:rPr lang="en-US" dirty="0"/>
+              <a:t>TP53</a:t>
+            </a:r>
+            <a:r>
+              <a:rPr lang="he-IL" dirty="0"/>
+              <a:t> ו-</a:t>
+            </a:r>
+            <a:r>
+              <a:rPr lang="en-US" dirty="0"/>
+              <a:t>CNV</a:t>
+            </a:r>
+            <a:r>
+              <a:rPr lang="he-IL" dirty="0"/>
+              <a:t>.</a:t>
+            </a:r>
+          </a:p>
+          <a:p>
+            <a:pPr marL="0" algn="r" defTabSz="914400" rtl="1" eaLnBrk="1" latinLnBrk="0" hangingPunct="1"/>
+            <a:r>
+              <a:rPr lang="he-IL" dirty="0"/>
+              <a:t>אלה שני נושאים שמוזכרים לפעמים יחד בהקשר לסרטן ותכף אסביר למה</a:t>
+            </a:r>
+          </a:p>
+        </p:txBody>
+      </p:sp>
+      <p:sp>
+        <p:nvSpPr>
+          <p:cNvPr id="4" name="Slide Number Placeholder 3">
+            <a:extLst>
+              <a:ext uri="{FF2B5EF4-FFF2-40B4-BE49-F238E27FC236}">
+                <a16:creationId xmlns:a16="http://schemas.microsoft.com/office/drawing/2014/main" id="{D056188F-620B-449A-B931-04C627F70D9A}"/>
+              </a:ext>
+            </a:extLst>
+          </p:cNvPr>
+          <p:cNvSpPr>
+            <a:spLocks noGrp="1"/>
+          </p:cNvSpPr>
+          <p:nvPr>
+            <p:ph type="sldNum" sz="quarter" idx="5"/>
+          </p:nvPr>
+        </p:nvSpPr>
+        <p:spPr/>
+        <p:txBody>
+          <a:bodyPr/>
+          <a:lstStyle/>
+          <a:p>
+            <a:fld id="{7242DB82-1DC1-9846-88D7-11B539157949}" type="slidenum">
+              <a:rPr lang="en-IL" smtClean="0"/>
+              <a:t>21</a:t>
+            </a:fld>
+            <a:endParaRPr lang="en-IL"/>
+          </a:p>
+        </p:txBody>
+      </p:sp>
+    </p:spTree>
+    <p:extLst>
+      <p:ext uri="{BB962C8B-B14F-4D97-AF65-F5344CB8AC3E}">
+        <p14:creationId xmlns:p14="http://schemas.microsoft.com/office/powerpoint/2010/main" val="1189219837"/>
       </p:ext>
     </p:extLst>
   </p:cSld>
@@ -11958,6 +12545,281 @@
         <p:cNvPr id="1" name="">
           <a:extLst>
             <a:ext uri="{FF2B5EF4-FFF2-40B4-BE49-F238E27FC236}">
+              <a16:creationId xmlns:a16="http://schemas.microsoft.com/office/drawing/2014/main" id="{B71F9D83-37A7-8B2B-13EA-9778AA5CEE89}"/>
+            </a:ext>
+          </a:extLst>
+        </p:cNvPr>
+        <p:cNvGrpSpPr/>
+        <p:nvPr/>
+      </p:nvGrpSpPr>
+      <p:grpSpPr>
+        <a:xfrm>
+          <a:off x="0" y="0"/>
+          <a:ext cx="0" cy="0"/>
+          <a:chOff x="0" y="0"/>
+          <a:chExt cx="0" cy="0"/>
+        </a:xfrm>
+      </p:grpSpPr>
+      <p:sp>
+        <p:nvSpPr>
+          <p:cNvPr id="4" name="TextBox 3">
+            <a:extLst>
+              <a:ext uri="{FF2B5EF4-FFF2-40B4-BE49-F238E27FC236}">
+                <a16:creationId xmlns:a16="http://schemas.microsoft.com/office/drawing/2014/main" id="{29B4E23B-D913-7F67-0C59-89B31B5CA576}"/>
+              </a:ext>
+            </a:extLst>
+          </p:cNvPr>
+          <p:cNvSpPr txBox="1"/>
+          <p:nvPr/>
+        </p:nvSpPr>
+        <p:spPr>
+          <a:xfrm>
+            <a:off x="4244454" y="6210"/>
+            <a:ext cx="3698414" cy="468000"/>
+          </a:xfrm>
+          <a:prstGeom prst="rect">
+            <a:avLst/>
+          </a:prstGeom>
+          <a:solidFill>
+            <a:srgbClr val="903063"/>
+          </a:solidFill>
+        </p:spPr>
+        <p:txBody>
+          <a:bodyPr wrap="square" rtlCol="0">
+            <a:spAutoFit/>
+          </a:bodyPr>
+          <a:lstStyle/>
+          <a:p>
+            <a:pPr algn="ctr"/>
+            <a:endParaRPr lang="en-IL" sz="700" dirty="0">
+              <a:solidFill>
+                <a:schemeClr val="bg1"/>
+              </a:solidFill>
+            </a:endParaRPr>
+          </a:p>
+          <a:p>
+            <a:pPr algn="ctr"/>
+            <a:r>
+              <a:rPr lang="en-IL" sz="1400" i="1" dirty="0">
+                <a:solidFill>
+                  <a:schemeClr val="bg1"/>
+                </a:solidFill>
+                <a:latin typeface="Abadi MT Condensed Light" panose="020B0306030101010103" pitchFamily="34" charset="77"/>
+                <a:ea typeface="Batang" panose="02030600000101010101" pitchFamily="18" charset="-127"/>
+                <a:cs typeface="Corsiva Hebrew" pitchFamily="2" charset="-79"/>
+              </a:rPr>
+              <a:t>Results</a:t>
+            </a:r>
+          </a:p>
+        </p:txBody>
+      </p:sp>
+      <p:sp>
+        <p:nvSpPr>
+          <p:cNvPr id="7" name="Title 1">
+            <a:extLst>
+              <a:ext uri="{FF2B5EF4-FFF2-40B4-BE49-F238E27FC236}">
+                <a16:creationId xmlns:a16="http://schemas.microsoft.com/office/drawing/2014/main" id="{A044A0AF-B79F-783D-A827-DC56678B4433}"/>
+              </a:ext>
+            </a:extLst>
+          </p:cNvPr>
+          <p:cNvSpPr txBox="1">
+            <a:spLocks/>
+          </p:cNvSpPr>
+          <p:nvPr/>
+        </p:nvSpPr>
+        <p:spPr>
+          <a:xfrm>
+            <a:off x="1020801" y="822800"/>
+            <a:ext cx="10395551" cy="624060"/>
+          </a:xfrm>
+          <a:prstGeom prst="rect">
+            <a:avLst/>
+          </a:prstGeom>
+        </p:spPr>
+        <p:txBody>
+          <a:bodyPr vert="horz" lIns="91440" tIns="45720" rIns="91440" bIns="45720" rtlCol="0" anchor="b">
+            <a:normAutofit/>
+          </a:bodyPr>
+          <a:lstStyle>
+            <a:lvl1pPr algn="l" defTabSz="457200" rtl="0" eaLnBrk="1" latinLnBrk="0" hangingPunct="1">
+              <a:spcBef>
+                <a:spcPct val="0"/>
+              </a:spcBef>
+              <a:buNone/>
+              <a:defRPr sz="2800" b="0" kern="1200" cap="all">
+                <a:solidFill>
+                  <a:schemeClr val="bg1"/>
+                </a:solidFill>
+                <a:latin typeface="+mj-lt"/>
+                <a:ea typeface="+mj-ea"/>
+                <a:cs typeface="+mj-cs"/>
+              </a:defRPr>
+            </a:lvl1pPr>
+            <a:lvl2pPr eaLnBrk="1" hangingPunct="1">
+              <a:defRPr>
+                <a:solidFill>
+                  <a:schemeClr val="tx2"/>
+                </a:solidFill>
+              </a:defRPr>
+            </a:lvl2pPr>
+            <a:lvl3pPr eaLnBrk="1" hangingPunct="1">
+              <a:defRPr>
+                <a:solidFill>
+                  <a:schemeClr val="tx2"/>
+                </a:solidFill>
+              </a:defRPr>
+            </a:lvl3pPr>
+            <a:lvl4pPr eaLnBrk="1" hangingPunct="1">
+              <a:defRPr>
+                <a:solidFill>
+                  <a:schemeClr val="tx2"/>
+                </a:solidFill>
+              </a:defRPr>
+            </a:lvl4pPr>
+            <a:lvl5pPr eaLnBrk="1" hangingPunct="1">
+              <a:defRPr>
+                <a:solidFill>
+                  <a:schemeClr val="tx2"/>
+                </a:solidFill>
+              </a:defRPr>
+            </a:lvl5pPr>
+            <a:lvl6pPr eaLnBrk="1" hangingPunct="1">
+              <a:defRPr>
+                <a:solidFill>
+                  <a:schemeClr val="tx2"/>
+                </a:solidFill>
+              </a:defRPr>
+            </a:lvl6pPr>
+            <a:lvl7pPr eaLnBrk="1" hangingPunct="1">
+              <a:defRPr>
+                <a:solidFill>
+                  <a:schemeClr val="tx2"/>
+                </a:solidFill>
+              </a:defRPr>
+            </a:lvl7pPr>
+            <a:lvl8pPr eaLnBrk="1" hangingPunct="1">
+              <a:defRPr>
+                <a:solidFill>
+                  <a:schemeClr val="tx2"/>
+                </a:solidFill>
+              </a:defRPr>
+            </a:lvl8pPr>
+            <a:lvl9pPr eaLnBrk="1" hangingPunct="1">
+              <a:defRPr>
+                <a:solidFill>
+                  <a:schemeClr val="tx2"/>
+                </a:solidFill>
+              </a:defRPr>
+            </a:lvl9pPr>
+          </a:lstStyle>
+          <a:p>
+            <a:r>
+              <a:rPr lang="en-US" dirty="0"/>
+              <a:t>WHICH specific </a:t>
+            </a:r>
+            <a:r>
+              <a:rPr lang="en-US" dirty="0" err="1"/>
+              <a:t>cnaS</a:t>
+            </a:r>
+            <a:r>
+              <a:rPr lang="en-US" dirty="0"/>
+              <a:t> OCCUR WHEN tp53 is mutated?</a:t>
+            </a:r>
+          </a:p>
+        </p:txBody>
+      </p:sp>
+      <p:sp>
+        <p:nvSpPr>
+          <p:cNvPr id="13" name="TextBox 12">
+            <a:extLst>
+              <a:ext uri="{FF2B5EF4-FFF2-40B4-BE49-F238E27FC236}">
+                <a16:creationId xmlns:a16="http://schemas.microsoft.com/office/drawing/2014/main" id="{85491A5D-BF4D-4D90-0CCC-5AF81947488E}"/>
+              </a:ext>
+            </a:extLst>
+          </p:cNvPr>
+          <p:cNvSpPr txBox="1"/>
+          <p:nvPr/>
+        </p:nvSpPr>
+        <p:spPr>
+          <a:xfrm>
+            <a:off x="2908919" y="6035200"/>
+            <a:ext cx="6619313" cy="646331"/>
+          </a:xfrm>
+          <a:prstGeom prst="rect">
+            <a:avLst/>
+          </a:prstGeom>
+          <a:noFill/>
+        </p:spPr>
+        <p:txBody>
+          <a:bodyPr wrap="none" rtlCol="0">
+            <a:spAutoFit/>
+          </a:bodyPr>
+          <a:lstStyle/>
+          <a:p>
+            <a:r>
+              <a:rPr lang="en-US" dirty="0"/>
+              <a:t>Amplified genes (left panel) — oncogenes being turned ON</a:t>
+            </a:r>
+          </a:p>
+          <a:p>
+            <a:r>
+              <a:rPr lang="en-US" dirty="0"/>
+              <a:t>Deleted genes (right panel) — tumor suppressors being turned OFF</a:t>
+            </a:r>
+          </a:p>
+        </p:txBody>
+      </p:sp>
+      <p:pic>
+        <p:nvPicPr>
+          <p:cNvPr id="2" name="Picture 1">
+            <a:extLst>
+              <a:ext uri="{FF2B5EF4-FFF2-40B4-BE49-F238E27FC236}">
+                <a16:creationId xmlns:a16="http://schemas.microsoft.com/office/drawing/2014/main" id="{E27A9F89-4795-F6D5-36DF-485D3CEDCFFA}"/>
+              </a:ext>
+            </a:extLst>
+          </p:cNvPr>
+          <p:cNvPicPr>
+            <a:picLocks noChangeAspect="1"/>
+          </p:cNvPicPr>
+          <p:nvPr/>
+        </p:nvPicPr>
+        <p:blipFill>
+          <a:blip r:embed="rId3"/>
+          <a:stretch>
+            <a:fillRect/>
+          </a:stretch>
+        </p:blipFill>
+        <p:spPr>
+          <a:xfrm>
+            <a:off x="2301135" y="1947450"/>
+            <a:ext cx="7589729" cy="3914062"/>
+          </a:xfrm>
+          <a:prstGeom prst="rect">
+            <a:avLst/>
+          </a:prstGeom>
+        </p:spPr>
+      </p:pic>
+    </p:spTree>
+    <p:extLst>
+      <p:ext uri="{BB962C8B-B14F-4D97-AF65-F5344CB8AC3E}">
+        <p14:creationId xmlns:p14="http://schemas.microsoft.com/office/powerpoint/2010/main" val="1861490624"/>
+      </p:ext>
+    </p:extLst>
+  </p:cSld>
+  <p:clrMapOvr>
+    <a:masterClrMapping/>
+  </p:clrMapOvr>
+</p:sld>
+</file>
+
+<file path=ppt/slides/slide16.xml><?xml version="1.0" encoding="utf-8"?>
+<p:sld xmlns:a="http://schemas.openxmlformats.org/drawingml/2006/main" xmlns:r="http://schemas.openxmlformats.org/officeDocument/2006/relationships" xmlns:p="http://schemas.openxmlformats.org/presentationml/2006/main">
+  <p:cSld>
+    <p:spTree>
+      <p:nvGrpSpPr>
+        <p:cNvPr id="1" name="">
+          <a:extLst>
+            <a:ext uri="{FF2B5EF4-FFF2-40B4-BE49-F238E27FC236}">
               <a16:creationId xmlns:a16="http://schemas.microsoft.com/office/drawing/2014/main" id="{1E1A3BEB-D12B-CB91-CABF-F7664DD59EE9}"/>
             </a:ext>
           </a:extLst>
@@ -12148,7 +13010,7 @@
         <p:spPr>
           <a:xfrm>
             <a:off x="1826190" y="5996699"/>
-            <a:ext cx="8534942" cy="646331"/>
+            <a:ext cx="9079595" cy="646331"/>
           </a:xfrm>
           <a:prstGeom prst="rect">
             <a:avLst/>
@@ -12211,7 +13073,7 @@
 </p:sld>
 </file>
 
-<file path=ppt/slides/slide16.xml><?xml version="1.0" encoding="utf-8"?>
+<file path=ppt/slides/slide17.xml><?xml version="1.0" encoding="utf-8"?>
 <p:sld xmlns:a="http://schemas.openxmlformats.org/drawingml/2006/main" xmlns:r="http://schemas.openxmlformats.org/officeDocument/2006/relationships" xmlns:p="http://schemas.openxmlformats.org/presentationml/2006/main">
   <p:cSld>
     <p:bg>
@@ -12402,10 +13264,676 @@
           </a:p>
         </p:txBody>
       </p:sp>
+      <p:sp>
+        <p:nvSpPr>
+          <p:cNvPr id="7" name="TextBox 6">
+            <a:extLst>
+              <a:ext uri="{FF2B5EF4-FFF2-40B4-BE49-F238E27FC236}">
+                <a16:creationId xmlns:a16="http://schemas.microsoft.com/office/drawing/2014/main" id="{4E8F13B0-6EAA-EE2F-2862-05D00F6DFCC3}"/>
+              </a:ext>
+            </a:extLst>
+          </p:cNvPr>
+          <p:cNvSpPr txBox="1"/>
+          <p:nvPr/>
+        </p:nvSpPr>
+        <p:spPr>
+          <a:xfrm>
+            <a:off x="1020801" y="2333767"/>
+            <a:ext cx="10395550" cy="954107"/>
+          </a:xfrm>
+          <a:prstGeom prst="rect">
+            <a:avLst/>
+          </a:prstGeom>
+          <a:noFill/>
+        </p:spPr>
+        <p:txBody>
+          <a:bodyPr wrap="square" rtlCol="0">
+            <a:spAutoFit/>
+          </a:bodyPr>
+          <a:lstStyle/>
+          <a:p>
+            <a:pPr marL="285750" indent="-285750">
+              <a:buFont typeface="Wingdings" pitchFamily="2" charset="2"/>
+              <a:buChar char="Ø"/>
+            </a:pPr>
+            <a:r>
+              <a:rPr lang="en-US" sz="2800" dirty="0"/>
+              <a:t>The binary effect (mutant vs WT) is stronger than the continuous effect (EFS vs FGA).</a:t>
+            </a:r>
+            <a:endParaRPr lang="en-IL" sz="2800" dirty="0"/>
+          </a:p>
+        </p:txBody>
+      </p:sp>
+      <p:sp>
+        <p:nvSpPr>
+          <p:cNvPr id="8" name="TextBox 7">
+            <a:extLst>
+              <a:ext uri="{FF2B5EF4-FFF2-40B4-BE49-F238E27FC236}">
+                <a16:creationId xmlns:a16="http://schemas.microsoft.com/office/drawing/2014/main" id="{CEABEF96-7F43-EBF9-A13B-2B3AD8DA053F}"/>
+              </a:ext>
+            </a:extLst>
+          </p:cNvPr>
+          <p:cNvSpPr txBox="1"/>
+          <p:nvPr/>
+        </p:nvSpPr>
+        <p:spPr>
+          <a:xfrm>
+            <a:off x="1020799" y="3632964"/>
+            <a:ext cx="10395551" cy="1384995"/>
+          </a:xfrm>
+          <a:prstGeom prst="rect">
+            <a:avLst/>
+          </a:prstGeom>
+          <a:noFill/>
+        </p:spPr>
+        <p:txBody>
+          <a:bodyPr wrap="square" rtlCol="0">
+            <a:spAutoFit/>
+          </a:bodyPr>
+          <a:lstStyle/>
+          <a:p>
+            <a:pPr marL="285750" indent="-285750">
+              <a:buFont typeface="Wingdings" pitchFamily="2" charset="2"/>
+              <a:buChar char="Ø"/>
+            </a:pPr>
+            <a:r>
+              <a:rPr lang="en-US" sz="2800" dirty="0"/>
+              <a:t>This suggests a </a:t>
+            </a:r>
+            <a:r>
+              <a:rPr lang="en-US" sz="2800" u="sng" dirty="0"/>
+              <a:t>threshold model</a:t>
+            </a:r>
+            <a:r>
+              <a:rPr lang="en-US" sz="2800" dirty="0"/>
+              <a:t>: once TP53 loses function, genomic chaos follows, but the </a:t>
+            </a:r>
+            <a:r>
+              <a:rPr lang="en-US" sz="2800" u="sng" dirty="0"/>
+              <a:t>specific degree</a:t>
+            </a:r>
+            <a:r>
+              <a:rPr lang="en-US" sz="2800" dirty="0"/>
+              <a:t> of functional loss matters less than its </a:t>
+            </a:r>
+            <a:r>
+              <a:rPr lang="en-US" sz="2800" u="sng" dirty="0"/>
+              <a:t>presence</a:t>
+            </a:r>
+            <a:endParaRPr lang="en-IL" sz="2800" dirty="0"/>
+          </a:p>
+        </p:txBody>
+      </p:sp>
+      <p:sp>
+        <p:nvSpPr>
+          <p:cNvPr id="9" name="TextBox 8">
+            <a:extLst>
+              <a:ext uri="{FF2B5EF4-FFF2-40B4-BE49-F238E27FC236}">
+                <a16:creationId xmlns:a16="http://schemas.microsoft.com/office/drawing/2014/main" id="{91CF58FC-D142-D3D0-2598-79549E45F738}"/>
+              </a:ext>
+            </a:extLst>
+          </p:cNvPr>
+          <p:cNvSpPr txBox="1"/>
+          <p:nvPr/>
+        </p:nvSpPr>
+        <p:spPr>
+          <a:xfrm>
+            <a:off x="1020800" y="5363049"/>
+            <a:ext cx="10395551" cy="523220"/>
+          </a:xfrm>
+          <a:prstGeom prst="rect">
+            <a:avLst/>
+          </a:prstGeom>
+          <a:noFill/>
+        </p:spPr>
+        <p:txBody>
+          <a:bodyPr wrap="square" rtlCol="0">
+            <a:spAutoFit/>
+          </a:bodyPr>
+          <a:lstStyle/>
+          <a:p>
+            <a:pPr marL="285750" indent="-285750">
+              <a:buFont typeface="Wingdings" pitchFamily="2" charset="2"/>
+              <a:buChar char="Ø"/>
+            </a:pPr>
+            <a:r>
+              <a:rPr lang="en-US" sz="2800" dirty="0"/>
+              <a:t>Other tumor-intrinsic and tissue-specific factors play a larger role</a:t>
+            </a:r>
+            <a:endParaRPr lang="en-IL" sz="2800" dirty="0"/>
+          </a:p>
+        </p:txBody>
+      </p:sp>
     </p:spTree>
     <p:extLst>
       <p:ext uri="{BB962C8B-B14F-4D97-AF65-F5344CB8AC3E}">
         <p14:creationId xmlns:p14="http://schemas.microsoft.com/office/powerpoint/2010/main" val="1065089303"/>
+      </p:ext>
+    </p:extLst>
+  </p:cSld>
+  <p:clrMapOvr>
+    <a:masterClrMapping/>
+  </p:clrMapOvr>
+</p:sld>
+</file>
+
+<file path=ppt/slides/slide18.xml><?xml version="1.0" encoding="utf-8"?>
+<p:sld xmlns:a="http://schemas.openxmlformats.org/drawingml/2006/main" xmlns:r="http://schemas.openxmlformats.org/officeDocument/2006/relationships" xmlns:p="http://schemas.openxmlformats.org/presentationml/2006/main">
+  <p:cSld>
+    <p:bg>
+      <p:bgPr>
+        <a:solidFill>
+          <a:schemeClr val="bg1"/>
+        </a:solidFill>
+        <a:effectLst/>
+      </p:bgPr>
+    </p:bg>
+    <p:spTree>
+      <p:nvGrpSpPr>
+        <p:cNvPr id="1" name="">
+          <a:extLst>
+            <a:ext uri="{FF2B5EF4-FFF2-40B4-BE49-F238E27FC236}">
+              <a16:creationId xmlns:a16="http://schemas.microsoft.com/office/drawing/2014/main" id="{996F576C-EB48-52F6-5A79-0822C7E173B7}"/>
+            </a:ext>
+          </a:extLst>
+        </p:cNvPr>
+        <p:cNvGrpSpPr/>
+        <p:nvPr/>
+      </p:nvGrpSpPr>
+      <p:grpSpPr>
+        <a:xfrm>
+          <a:off x="0" y="0"/>
+          <a:ext cx="0" cy="0"/>
+          <a:chOff x="0" y="0"/>
+          <a:chExt cx="0" cy="0"/>
+        </a:xfrm>
+      </p:grpSpPr>
+      <p:sp>
+        <p:nvSpPr>
+          <p:cNvPr id="5" name="TextBox 4">
+            <a:extLst>
+              <a:ext uri="{FF2B5EF4-FFF2-40B4-BE49-F238E27FC236}">
+                <a16:creationId xmlns:a16="http://schemas.microsoft.com/office/drawing/2014/main" id="{43D6910E-825C-3411-A9AA-7AC88F9B34F8}"/>
+              </a:ext>
+            </a:extLst>
+          </p:cNvPr>
+          <p:cNvSpPr txBox="1"/>
+          <p:nvPr/>
+        </p:nvSpPr>
+        <p:spPr>
+          <a:xfrm>
+            <a:off x="8043084" y="0"/>
+            <a:ext cx="3700815" cy="468000"/>
+          </a:xfrm>
+          <a:prstGeom prst="rect">
+            <a:avLst/>
+          </a:prstGeom>
+          <a:solidFill>
+            <a:srgbClr val="96A0A7"/>
+          </a:solidFill>
+        </p:spPr>
+        <p:txBody>
+          <a:bodyPr wrap="square" rtlCol="0">
+            <a:spAutoFit/>
+          </a:bodyPr>
+          <a:lstStyle/>
+          <a:p>
+            <a:pPr algn="ctr"/>
+            <a:endParaRPr lang="en-IL" sz="700" dirty="0">
+              <a:solidFill>
+                <a:schemeClr val="bg1"/>
+              </a:solidFill>
+            </a:endParaRPr>
+          </a:p>
+          <a:p>
+            <a:pPr algn="ctr"/>
+            <a:r>
+              <a:rPr lang="en-IL" sz="1400" i="1" dirty="0">
+                <a:solidFill>
+                  <a:schemeClr val="bg1"/>
+                </a:solidFill>
+                <a:latin typeface="Abadi MT Condensed Light" panose="020B0306030101010103" pitchFamily="34" charset="77"/>
+                <a:ea typeface="Batang" panose="02030600000101010101" pitchFamily="18" charset="-127"/>
+                <a:cs typeface="Corsiva Hebrew" pitchFamily="2" charset="-79"/>
+              </a:rPr>
+              <a:t>Discussion</a:t>
+            </a:r>
+          </a:p>
+        </p:txBody>
+      </p:sp>
+      <p:sp>
+        <p:nvSpPr>
+          <p:cNvPr id="3" name="Title 1">
+            <a:extLst>
+              <a:ext uri="{FF2B5EF4-FFF2-40B4-BE49-F238E27FC236}">
+                <a16:creationId xmlns:a16="http://schemas.microsoft.com/office/drawing/2014/main" id="{9C31A4FE-D124-BE44-DCE1-8BF1EAF1A6BD}"/>
+              </a:ext>
+            </a:extLst>
+          </p:cNvPr>
+          <p:cNvSpPr txBox="1">
+            <a:spLocks/>
+          </p:cNvSpPr>
+          <p:nvPr/>
+        </p:nvSpPr>
+        <p:spPr>
+          <a:xfrm>
+            <a:off x="1020801" y="822800"/>
+            <a:ext cx="10395551" cy="624060"/>
+          </a:xfrm>
+          <a:prstGeom prst="rect">
+            <a:avLst/>
+          </a:prstGeom>
+        </p:spPr>
+        <p:txBody>
+          <a:bodyPr vert="horz" lIns="91440" tIns="45720" rIns="91440" bIns="45720" rtlCol="0" anchor="b">
+            <a:normAutofit/>
+          </a:bodyPr>
+          <a:lstStyle>
+            <a:lvl1pPr algn="l" defTabSz="457200" rtl="0" eaLnBrk="1" latinLnBrk="0" hangingPunct="1">
+              <a:spcBef>
+                <a:spcPct val="0"/>
+              </a:spcBef>
+              <a:buNone/>
+              <a:defRPr sz="2800" b="0" kern="1200" cap="all">
+                <a:solidFill>
+                  <a:schemeClr val="bg1"/>
+                </a:solidFill>
+                <a:latin typeface="+mj-lt"/>
+                <a:ea typeface="+mj-ea"/>
+                <a:cs typeface="+mj-cs"/>
+              </a:defRPr>
+            </a:lvl1pPr>
+            <a:lvl2pPr eaLnBrk="1" hangingPunct="1">
+              <a:defRPr>
+                <a:solidFill>
+                  <a:schemeClr val="tx2"/>
+                </a:solidFill>
+              </a:defRPr>
+            </a:lvl2pPr>
+            <a:lvl3pPr eaLnBrk="1" hangingPunct="1">
+              <a:defRPr>
+                <a:solidFill>
+                  <a:schemeClr val="tx2"/>
+                </a:solidFill>
+              </a:defRPr>
+            </a:lvl3pPr>
+            <a:lvl4pPr eaLnBrk="1" hangingPunct="1">
+              <a:defRPr>
+                <a:solidFill>
+                  <a:schemeClr val="tx2"/>
+                </a:solidFill>
+              </a:defRPr>
+            </a:lvl4pPr>
+            <a:lvl5pPr eaLnBrk="1" hangingPunct="1">
+              <a:defRPr>
+                <a:solidFill>
+                  <a:schemeClr val="tx2"/>
+                </a:solidFill>
+              </a:defRPr>
+            </a:lvl5pPr>
+            <a:lvl6pPr eaLnBrk="1" hangingPunct="1">
+              <a:defRPr>
+                <a:solidFill>
+                  <a:schemeClr val="tx2"/>
+                </a:solidFill>
+              </a:defRPr>
+            </a:lvl6pPr>
+            <a:lvl7pPr eaLnBrk="1" hangingPunct="1">
+              <a:defRPr>
+                <a:solidFill>
+                  <a:schemeClr val="tx2"/>
+                </a:solidFill>
+              </a:defRPr>
+            </a:lvl7pPr>
+            <a:lvl8pPr eaLnBrk="1" hangingPunct="1">
+              <a:defRPr>
+                <a:solidFill>
+                  <a:schemeClr val="tx2"/>
+                </a:solidFill>
+              </a:defRPr>
+            </a:lvl8pPr>
+            <a:lvl9pPr eaLnBrk="1" hangingPunct="1">
+              <a:defRPr>
+                <a:solidFill>
+                  <a:schemeClr val="tx2"/>
+                </a:solidFill>
+              </a:defRPr>
+            </a:lvl9pPr>
+          </a:lstStyle>
+          <a:p>
+            <a:r>
+              <a:rPr lang="en-US" dirty="0"/>
+              <a:t>The hotspot paradox</a:t>
+            </a:r>
+          </a:p>
+        </p:txBody>
+      </p:sp>
+      <p:sp>
+        <p:nvSpPr>
+          <p:cNvPr id="7" name="TextBox 6">
+            <a:extLst>
+              <a:ext uri="{FF2B5EF4-FFF2-40B4-BE49-F238E27FC236}">
+                <a16:creationId xmlns:a16="http://schemas.microsoft.com/office/drawing/2014/main" id="{C2BD100E-D4DA-1C6C-09A5-C56EC2A38BBE}"/>
+              </a:ext>
+            </a:extLst>
+          </p:cNvPr>
+          <p:cNvSpPr txBox="1"/>
+          <p:nvPr/>
+        </p:nvSpPr>
+        <p:spPr>
+          <a:xfrm>
+            <a:off x="1020801" y="2333767"/>
+            <a:ext cx="9931527" cy="1815882"/>
+          </a:xfrm>
+          <a:prstGeom prst="rect">
+            <a:avLst/>
+          </a:prstGeom>
+          <a:noFill/>
+        </p:spPr>
+        <p:txBody>
+          <a:bodyPr wrap="square" rtlCol="0">
+            <a:spAutoFit/>
+          </a:bodyPr>
+          <a:lstStyle/>
+          <a:p>
+            <a:pPr marL="285750" indent="-285750">
+              <a:buFont typeface="Wingdings" pitchFamily="2" charset="2"/>
+              <a:buChar char="Ø"/>
+            </a:pPr>
+            <a:r>
+              <a:rPr lang="en-US" sz="2800" dirty="0"/>
+              <a:t>Hotspot mutations dominate in tumors not because they're functionally the worst (Giacomelli showed this), but because their DNA sequences are highly mutable. Yet they still drive genomic instability, consistent with the threshold model.</a:t>
+            </a:r>
+          </a:p>
+        </p:txBody>
+      </p:sp>
+    </p:spTree>
+    <p:extLst>
+      <p:ext uri="{BB962C8B-B14F-4D97-AF65-F5344CB8AC3E}">
+        <p14:creationId xmlns:p14="http://schemas.microsoft.com/office/powerpoint/2010/main" val="16790379"/>
+      </p:ext>
+    </p:extLst>
+  </p:cSld>
+  <p:clrMapOvr>
+    <a:masterClrMapping/>
+  </p:clrMapOvr>
+</p:sld>
+</file>
+
+<file path=ppt/slides/slide19.xml><?xml version="1.0" encoding="utf-8"?>
+<p:sld xmlns:a="http://schemas.openxmlformats.org/drawingml/2006/main" xmlns:r="http://schemas.openxmlformats.org/officeDocument/2006/relationships" xmlns:p="http://schemas.openxmlformats.org/presentationml/2006/main">
+  <p:cSld>
+    <p:bg>
+      <p:bgPr>
+        <a:solidFill>
+          <a:schemeClr val="bg1"/>
+        </a:solidFill>
+        <a:effectLst/>
+      </p:bgPr>
+    </p:bg>
+    <p:spTree>
+      <p:nvGrpSpPr>
+        <p:cNvPr id="1" name="">
+          <a:extLst>
+            <a:ext uri="{FF2B5EF4-FFF2-40B4-BE49-F238E27FC236}">
+              <a16:creationId xmlns:a16="http://schemas.microsoft.com/office/drawing/2014/main" id="{804B59AA-C2FC-5D5B-688C-2CB4457CBB3D}"/>
+            </a:ext>
+          </a:extLst>
+        </p:cNvPr>
+        <p:cNvGrpSpPr/>
+        <p:nvPr/>
+      </p:nvGrpSpPr>
+      <p:grpSpPr>
+        <a:xfrm>
+          <a:off x="0" y="0"/>
+          <a:ext cx="0" cy="0"/>
+          <a:chOff x="0" y="0"/>
+          <a:chExt cx="0" cy="0"/>
+        </a:xfrm>
+      </p:grpSpPr>
+      <p:sp>
+        <p:nvSpPr>
+          <p:cNvPr id="5" name="TextBox 4">
+            <a:extLst>
+              <a:ext uri="{FF2B5EF4-FFF2-40B4-BE49-F238E27FC236}">
+                <a16:creationId xmlns:a16="http://schemas.microsoft.com/office/drawing/2014/main" id="{C51EFF4C-6D0D-B1A7-7ACD-A1722EFC2D36}"/>
+              </a:ext>
+            </a:extLst>
+          </p:cNvPr>
+          <p:cNvSpPr txBox="1"/>
+          <p:nvPr/>
+        </p:nvSpPr>
+        <p:spPr>
+          <a:xfrm>
+            <a:off x="8043084" y="0"/>
+            <a:ext cx="3700815" cy="468000"/>
+          </a:xfrm>
+          <a:prstGeom prst="rect">
+            <a:avLst/>
+          </a:prstGeom>
+          <a:solidFill>
+            <a:srgbClr val="96A0A7"/>
+          </a:solidFill>
+        </p:spPr>
+        <p:txBody>
+          <a:bodyPr wrap="square" rtlCol="0">
+            <a:spAutoFit/>
+          </a:bodyPr>
+          <a:lstStyle/>
+          <a:p>
+            <a:pPr algn="ctr"/>
+            <a:endParaRPr lang="en-IL" sz="700" dirty="0">
+              <a:solidFill>
+                <a:schemeClr val="bg1"/>
+              </a:solidFill>
+            </a:endParaRPr>
+          </a:p>
+          <a:p>
+            <a:pPr algn="ctr"/>
+            <a:r>
+              <a:rPr lang="en-IL" sz="1400" i="1" dirty="0">
+                <a:solidFill>
+                  <a:schemeClr val="bg1"/>
+                </a:solidFill>
+                <a:latin typeface="Abadi MT Condensed Light" panose="020B0306030101010103" pitchFamily="34" charset="77"/>
+                <a:ea typeface="Batang" panose="02030600000101010101" pitchFamily="18" charset="-127"/>
+                <a:cs typeface="Corsiva Hebrew" pitchFamily="2" charset="-79"/>
+              </a:rPr>
+              <a:t>Discussion</a:t>
+            </a:r>
+          </a:p>
+        </p:txBody>
+      </p:sp>
+      <p:sp>
+        <p:nvSpPr>
+          <p:cNvPr id="3" name="Title 1">
+            <a:extLst>
+              <a:ext uri="{FF2B5EF4-FFF2-40B4-BE49-F238E27FC236}">
+                <a16:creationId xmlns:a16="http://schemas.microsoft.com/office/drawing/2014/main" id="{763DACFC-91D9-69A5-56DC-A764E8036EC8}"/>
+              </a:ext>
+            </a:extLst>
+          </p:cNvPr>
+          <p:cNvSpPr txBox="1">
+            <a:spLocks/>
+          </p:cNvSpPr>
+          <p:nvPr/>
+        </p:nvSpPr>
+        <p:spPr>
+          <a:xfrm>
+            <a:off x="1020801" y="822800"/>
+            <a:ext cx="10395551" cy="624060"/>
+          </a:xfrm>
+          <a:prstGeom prst="rect">
+            <a:avLst/>
+          </a:prstGeom>
+        </p:spPr>
+        <p:txBody>
+          <a:bodyPr vert="horz" lIns="91440" tIns="45720" rIns="91440" bIns="45720" rtlCol="0" anchor="b">
+            <a:normAutofit/>
+          </a:bodyPr>
+          <a:lstStyle>
+            <a:lvl1pPr algn="l" defTabSz="457200" rtl="0" eaLnBrk="1" latinLnBrk="0" hangingPunct="1">
+              <a:spcBef>
+                <a:spcPct val="0"/>
+              </a:spcBef>
+              <a:buNone/>
+              <a:defRPr sz="2800" b="0" kern="1200" cap="all">
+                <a:solidFill>
+                  <a:schemeClr val="bg1"/>
+                </a:solidFill>
+                <a:latin typeface="+mj-lt"/>
+                <a:ea typeface="+mj-ea"/>
+                <a:cs typeface="+mj-cs"/>
+              </a:defRPr>
+            </a:lvl1pPr>
+            <a:lvl2pPr eaLnBrk="1" hangingPunct="1">
+              <a:defRPr>
+                <a:solidFill>
+                  <a:schemeClr val="tx2"/>
+                </a:solidFill>
+              </a:defRPr>
+            </a:lvl2pPr>
+            <a:lvl3pPr eaLnBrk="1" hangingPunct="1">
+              <a:defRPr>
+                <a:solidFill>
+                  <a:schemeClr val="tx2"/>
+                </a:solidFill>
+              </a:defRPr>
+            </a:lvl3pPr>
+            <a:lvl4pPr eaLnBrk="1" hangingPunct="1">
+              <a:defRPr>
+                <a:solidFill>
+                  <a:schemeClr val="tx2"/>
+                </a:solidFill>
+              </a:defRPr>
+            </a:lvl4pPr>
+            <a:lvl5pPr eaLnBrk="1" hangingPunct="1">
+              <a:defRPr>
+                <a:solidFill>
+                  <a:schemeClr val="tx2"/>
+                </a:solidFill>
+              </a:defRPr>
+            </a:lvl5pPr>
+            <a:lvl6pPr eaLnBrk="1" hangingPunct="1">
+              <a:defRPr>
+                <a:solidFill>
+                  <a:schemeClr val="tx2"/>
+                </a:solidFill>
+              </a:defRPr>
+            </a:lvl6pPr>
+            <a:lvl7pPr eaLnBrk="1" hangingPunct="1">
+              <a:defRPr>
+                <a:solidFill>
+                  <a:schemeClr val="tx2"/>
+                </a:solidFill>
+              </a:defRPr>
+            </a:lvl7pPr>
+            <a:lvl8pPr eaLnBrk="1" hangingPunct="1">
+              <a:defRPr>
+                <a:solidFill>
+                  <a:schemeClr val="tx2"/>
+                </a:solidFill>
+              </a:defRPr>
+            </a:lvl8pPr>
+            <a:lvl9pPr eaLnBrk="1" hangingPunct="1">
+              <a:defRPr>
+                <a:solidFill>
+                  <a:schemeClr val="tx2"/>
+                </a:solidFill>
+              </a:defRPr>
+            </a:lvl9pPr>
+          </a:lstStyle>
+          <a:p>
+            <a:r>
+              <a:rPr lang="en-US" dirty="0" err="1"/>
+              <a:t>lIMITATIONS</a:t>
+            </a:r>
+            <a:endParaRPr lang="en-US" dirty="0"/>
+          </a:p>
+        </p:txBody>
+      </p:sp>
+      <p:sp>
+        <p:nvSpPr>
+          <p:cNvPr id="7" name="TextBox 6">
+            <a:extLst>
+              <a:ext uri="{FF2B5EF4-FFF2-40B4-BE49-F238E27FC236}">
+                <a16:creationId xmlns:a16="http://schemas.microsoft.com/office/drawing/2014/main" id="{B5508A9F-418E-84DC-5FE9-AABEE2687AFA}"/>
+              </a:ext>
+            </a:extLst>
+          </p:cNvPr>
+          <p:cNvSpPr txBox="1"/>
+          <p:nvPr/>
+        </p:nvSpPr>
+        <p:spPr>
+          <a:xfrm>
+            <a:off x="1020801" y="2333767"/>
+            <a:ext cx="9931527" cy="954107"/>
+          </a:xfrm>
+          <a:prstGeom prst="rect">
+            <a:avLst/>
+          </a:prstGeom>
+          <a:noFill/>
+        </p:spPr>
+        <p:txBody>
+          <a:bodyPr wrap="square" rtlCol="0">
+            <a:spAutoFit/>
+          </a:bodyPr>
+          <a:lstStyle/>
+          <a:p>
+            <a:pPr marL="285750" indent="-285750">
+              <a:buFont typeface="Wingdings" pitchFamily="2" charset="2"/>
+              <a:buChar char="Ø"/>
+            </a:pPr>
+            <a:r>
+              <a:rPr lang="en-US" sz="2800" dirty="0"/>
+              <a:t>EFS derived from one lung cell line. That may not generalize across tissues</a:t>
+            </a:r>
+          </a:p>
+        </p:txBody>
+      </p:sp>
+      <p:sp>
+        <p:nvSpPr>
+          <p:cNvPr id="2" name="TextBox 1">
+            <a:extLst>
+              <a:ext uri="{FF2B5EF4-FFF2-40B4-BE49-F238E27FC236}">
+                <a16:creationId xmlns:a16="http://schemas.microsoft.com/office/drawing/2014/main" id="{5B443CA9-DD0B-9E6C-F746-8A4B863685D0}"/>
+              </a:ext>
+            </a:extLst>
+          </p:cNvPr>
+          <p:cNvSpPr txBox="1"/>
+          <p:nvPr/>
+        </p:nvSpPr>
+        <p:spPr>
+          <a:xfrm>
+            <a:off x="1020801" y="3570127"/>
+            <a:ext cx="9931527" cy="954107"/>
+          </a:xfrm>
+          <a:prstGeom prst="rect">
+            <a:avLst/>
+          </a:prstGeom>
+          <a:noFill/>
+        </p:spPr>
+        <p:txBody>
+          <a:bodyPr wrap="square" rtlCol="0">
+            <a:spAutoFit/>
+          </a:bodyPr>
+          <a:lstStyle/>
+          <a:p>
+            <a:pPr marL="285750" indent="-285750">
+              <a:buFont typeface="Wingdings" pitchFamily="2" charset="2"/>
+              <a:buChar char="Ø"/>
+            </a:pPr>
+            <a:r>
+              <a:rPr lang="en-US" sz="2800" dirty="0"/>
+              <a:t>FGA is a bulk measure, and it doesn’t capture which specific chromosomal regions break</a:t>
+            </a:r>
+          </a:p>
+        </p:txBody>
+      </p:sp>
+    </p:spTree>
+    <p:extLst>
+      <p:ext uri="{BB962C8B-B14F-4D97-AF65-F5344CB8AC3E}">
+        <p14:creationId xmlns:p14="http://schemas.microsoft.com/office/powerpoint/2010/main" val="1871680158"/>
       </p:ext>
     </p:extLst>
   </p:cSld>
@@ -12498,7 +14026,7 @@
         </p:nvSpPr>
         <p:spPr>
           <a:xfrm>
-            <a:off x="455182" y="4556358"/>
+            <a:off x="359208" y="4801891"/>
             <a:ext cx="11473581" cy="1758483"/>
           </a:xfrm>
           <a:prstGeom prst="rect">
@@ -12785,8 +14313,8 @@
         </p:blipFill>
         <p:spPr bwMode="auto">
           <a:xfrm>
-            <a:off x="3411300" y="609600"/>
-            <a:ext cx="8447386" cy="3276218"/>
+            <a:off x="2734115" y="1948624"/>
+            <a:ext cx="6723769" cy="2607734"/>
           </a:xfrm>
           <a:prstGeom prst="rect">
             <a:avLst/>
@@ -13043,6 +14571,343 @@
       </p:par>
     </p:tnLst>
   </p:timing>
+</p:sld>
+</file>
+
+<file path=ppt/slides/slide20.xml><?xml version="1.0" encoding="utf-8"?>
+<p:sld xmlns:a="http://schemas.openxmlformats.org/drawingml/2006/main" xmlns:r="http://schemas.openxmlformats.org/officeDocument/2006/relationships" xmlns:p="http://schemas.openxmlformats.org/presentationml/2006/main">
+  <p:cSld>
+    <p:bg>
+      <p:bgPr>
+        <a:solidFill>
+          <a:schemeClr val="bg1"/>
+        </a:solidFill>
+        <a:effectLst/>
+      </p:bgPr>
+    </p:bg>
+    <p:spTree>
+      <p:nvGrpSpPr>
+        <p:cNvPr id="1" name="">
+          <a:extLst>
+            <a:ext uri="{FF2B5EF4-FFF2-40B4-BE49-F238E27FC236}">
+              <a16:creationId xmlns:a16="http://schemas.microsoft.com/office/drawing/2014/main" id="{C4659005-9761-7A24-3731-DDAE032BB353}"/>
+            </a:ext>
+          </a:extLst>
+        </p:cNvPr>
+        <p:cNvGrpSpPr/>
+        <p:nvPr/>
+      </p:nvGrpSpPr>
+      <p:grpSpPr>
+        <a:xfrm>
+          <a:off x="0" y="0"/>
+          <a:ext cx="0" cy="0"/>
+          <a:chOff x="0" y="0"/>
+          <a:chExt cx="0" cy="0"/>
+        </a:xfrm>
+      </p:grpSpPr>
+      <p:sp>
+        <p:nvSpPr>
+          <p:cNvPr id="5" name="TextBox 4">
+            <a:extLst>
+              <a:ext uri="{FF2B5EF4-FFF2-40B4-BE49-F238E27FC236}">
+                <a16:creationId xmlns:a16="http://schemas.microsoft.com/office/drawing/2014/main" id="{9D08189D-EE63-A69D-B4E2-FAAF437EAC02}"/>
+              </a:ext>
+            </a:extLst>
+          </p:cNvPr>
+          <p:cNvSpPr txBox="1"/>
+          <p:nvPr/>
+        </p:nvSpPr>
+        <p:spPr>
+          <a:xfrm>
+            <a:off x="8043084" y="0"/>
+            <a:ext cx="3700815" cy="468000"/>
+          </a:xfrm>
+          <a:prstGeom prst="rect">
+            <a:avLst/>
+          </a:prstGeom>
+          <a:solidFill>
+            <a:srgbClr val="96A0A7"/>
+          </a:solidFill>
+        </p:spPr>
+        <p:txBody>
+          <a:bodyPr wrap="square" rtlCol="0">
+            <a:spAutoFit/>
+          </a:bodyPr>
+          <a:lstStyle/>
+          <a:p>
+            <a:pPr algn="ctr"/>
+            <a:endParaRPr lang="en-IL" sz="700" dirty="0">
+              <a:solidFill>
+                <a:schemeClr val="bg1"/>
+              </a:solidFill>
+            </a:endParaRPr>
+          </a:p>
+          <a:p>
+            <a:pPr algn="ctr"/>
+            <a:r>
+              <a:rPr lang="en-IL" sz="1400" i="1" dirty="0">
+                <a:solidFill>
+                  <a:schemeClr val="bg1"/>
+                </a:solidFill>
+                <a:latin typeface="Abadi MT Condensed Light" panose="020B0306030101010103" pitchFamily="34" charset="77"/>
+                <a:ea typeface="Batang" panose="02030600000101010101" pitchFamily="18" charset="-127"/>
+                <a:cs typeface="Corsiva Hebrew" pitchFamily="2" charset="-79"/>
+              </a:rPr>
+              <a:t>Discussion</a:t>
+            </a:r>
+          </a:p>
+        </p:txBody>
+      </p:sp>
+      <p:sp>
+        <p:nvSpPr>
+          <p:cNvPr id="3" name="Title 1">
+            <a:extLst>
+              <a:ext uri="{FF2B5EF4-FFF2-40B4-BE49-F238E27FC236}">
+                <a16:creationId xmlns:a16="http://schemas.microsoft.com/office/drawing/2014/main" id="{2315B551-78A5-80AC-8BF1-AFBB22F5C9A4}"/>
+              </a:ext>
+            </a:extLst>
+          </p:cNvPr>
+          <p:cNvSpPr txBox="1">
+            <a:spLocks/>
+          </p:cNvSpPr>
+          <p:nvPr/>
+        </p:nvSpPr>
+        <p:spPr>
+          <a:xfrm>
+            <a:off x="1020801" y="822800"/>
+            <a:ext cx="10395551" cy="624060"/>
+          </a:xfrm>
+          <a:prstGeom prst="rect">
+            <a:avLst/>
+          </a:prstGeom>
+        </p:spPr>
+        <p:txBody>
+          <a:bodyPr vert="horz" lIns="91440" tIns="45720" rIns="91440" bIns="45720" rtlCol="0" anchor="b">
+            <a:normAutofit/>
+          </a:bodyPr>
+          <a:lstStyle>
+            <a:lvl1pPr algn="l" defTabSz="457200" rtl="0" eaLnBrk="1" latinLnBrk="0" hangingPunct="1">
+              <a:spcBef>
+                <a:spcPct val="0"/>
+              </a:spcBef>
+              <a:buNone/>
+              <a:defRPr sz="2800" b="0" kern="1200" cap="all">
+                <a:solidFill>
+                  <a:schemeClr val="bg1"/>
+                </a:solidFill>
+                <a:latin typeface="+mj-lt"/>
+                <a:ea typeface="+mj-ea"/>
+                <a:cs typeface="+mj-cs"/>
+              </a:defRPr>
+            </a:lvl1pPr>
+            <a:lvl2pPr eaLnBrk="1" hangingPunct="1">
+              <a:defRPr>
+                <a:solidFill>
+                  <a:schemeClr val="tx2"/>
+                </a:solidFill>
+              </a:defRPr>
+            </a:lvl2pPr>
+            <a:lvl3pPr eaLnBrk="1" hangingPunct="1">
+              <a:defRPr>
+                <a:solidFill>
+                  <a:schemeClr val="tx2"/>
+                </a:solidFill>
+              </a:defRPr>
+            </a:lvl3pPr>
+            <a:lvl4pPr eaLnBrk="1" hangingPunct="1">
+              <a:defRPr>
+                <a:solidFill>
+                  <a:schemeClr val="tx2"/>
+                </a:solidFill>
+              </a:defRPr>
+            </a:lvl4pPr>
+            <a:lvl5pPr eaLnBrk="1" hangingPunct="1">
+              <a:defRPr>
+                <a:solidFill>
+                  <a:schemeClr val="tx2"/>
+                </a:solidFill>
+              </a:defRPr>
+            </a:lvl5pPr>
+            <a:lvl6pPr eaLnBrk="1" hangingPunct="1">
+              <a:defRPr>
+                <a:solidFill>
+                  <a:schemeClr val="tx2"/>
+                </a:solidFill>
+              </a:defRPr>
+            </a:lvl6pPr>
+            <a:lvl7pPr eaLnBrk="1" hangingPunct="1">
+              <a:defRPr>
+                <a:solidFill>
+                  <a:schemeClr val="tx2"/>
+                </a:solidFill>
+              </a:defRPr>
+            </a:lvl7pPr>
+            <a:lvl8pPr eaLnBrk="1" hangingPunct="1">
+              <a:defRPr>
+                <a:solidFill>
+                  <a:schemeClr val="tx2"/>
+                </a:solidFill>
+              </a:defRPr>
+            </a:lvl8pPr>
+            <a:lvl9pPr eaLnBrk="1" hangingPunct="1">
+              <a:defRPr>
+                <a:solidFill>
+                  <a:schemeClr val="tx2"/>
+                </a:solidFill>
+              </a:defRPr>
+            </a:lvl9pPr>
+          </a:lstStyle>
+          <a:p>
+            <a:r>
+              <a:rPr lang="en-US" dirty="0"/>
+              <a:t>Conclusions</a:t>
+            </a:r>
+          </a:p>
+        </p:txBody>
+      </p:sp>
+      <p:sp>
+        <p:nvSpPr>
+          <p:cNvPr id="7" name="TextBox 6">
+            <a:extLst>
+              <a:ext uri="{FF2B5EF4-FFF2-40B4-BE49-F238E27FC236}">
+                <a16:creationId xmlns:a16="http://schemas.microsoft.com/office/drawing/2014/main" id="{515D867E-2040-5650-B54E-F434E6687274}"/>
+              </a:ext>
+            </a:extLst>
+          </p:cNvPr>
+          <p:cNvSpPr txBox="1"/>
+          <p:nvPr/>
+        </p:nvSpPr>
+        <p:spPr>
+          <a:xfrm>
+            <a:off x="1020801" y="2333767"/>
+            <a:ext cx="9931527" cy="1815882"/>
+          </a:xfrm>
+          <a:prstGeom prst="rect">
+            <a:avLst/>
+          </a:prstGeom>
+          <a:noFill/>
+        </p:spPr>
+        <p:txBody>
+          <a:bodyPr wrap="square" rtlCol="0">
+            <a:spAutoFit/>
+          </a:bodyPr>
+          <a:lstStyle/>
+          <a:p>
+            <a:pPr marL="285750" indent="-285750">
+              <a:buFont typeface="Wingdings" pitchFamily="2" charset="2"/>
+              <a:buChar char="Ø"/>
+            </a:pPr>
+            <a:r>
+              <a:rPr lang="en-US" sz="2800" dirty="0"/>
+              <a:t>TP53 loss </a:t>
+            </a:r>
+            <a:r>
+              <a:rPr lang="en-US" sz="2800" dirty="0" err="1"/>
+              <a:t>drived</a:t>
+            </a:r>
+            <a:r>
+              <a:rPr lang="en-US" sz="2800" dirty="0"/>
+              <a:t> genomic instability as a class effect, which in turn selectively amplifies oncogenic growth pathways, which explains why TP53 mutation is such a universal and aggressive cancer event.</a:t>
+            </a:r>
+          </a:p>
+        </p:txBody>
+      </p:sp>
+    </p:spTree>
+    <p:extLst>
+      <p:ext uri="{BB962C8B-B14F-4D97-AF65-F5344CB8AC3E}">
+        <p14:creationId xmlns:p14="http://schemas.microsoft.com/office/powerpoint/2010/main" val="1256860430"/>
+      </p:ext>
+    </p:extLst>
+  </p:cSld>
+  <p:clrMapOvr>
+    <a:masterClrMapping/>
+  </p:clrMapOvr>
+</p:sld>
+</file>
+
+<file path=ppt/slides/slide21.xml><?xml version="1.0" encoding="utf-8"?>
+<p:sld xmlns:a="http://schemas.openxmlformats.org/drawingml/2006/main" xmlns:r="http://schemas.openxmlformats.org/officeDocument/2006/relationships" xmlns:p="http://schemas.openxmlformats.org/presentationml/2006/main">
+  <p:cSld>
+    <p:bg>
+      <p:bgPr>
+        <a:solidFill>
+          <a:schemeClr val="bg1"/>
+        </a:solidFill>
+        <a:effectLst/>
+      </p:bgPr>
+    </p:bg>
+    <p:spTree>
+      <p:nvGrpSpPr>
+        <p:cNvPr id="1" name="">
+          <a:extLst>
+            <a:ext uri="{FF2B5EF4-FFF2-40B4-BE49-F238E27FC236}">
+              <a16:creationId xmlns:a16="http://schemas.microsoft.com/office/drawing/2014/main" id="{0C7B6FD1-38A4-D753-E777-86AD4369D57A}"/>
+            </a:ext>
+          </a:extLst>
+        </p:cNvPr>
+        <p:cNvGrpSpPr/>
+        <p:nvPr/>
+      </p:nvGrpSpPr>
+      <p:grpSpPr>
+        <a:xfrm>
+          <a:off x="0" y="0"/>
+          <a:ext cx="0" cy="0"/>
+          <a:chOff x="0" y="0"/>
+          <a:chExt cx="0" cy="0"/>
+        </a:xfrm>
+      </p:grpSpPr>
+      <p:sp>
+        <p:nvSpPr>
+          <p:cNvPr id="2" name="Title 1">
+            <a:extLst>
+              <a:ext uri="{FF2B5EF4-FFF2-40B4-BE49-F238E27FC236}">
+                <a16:creationId xmlns:a16="http://schemas.microsoft.com/office/drawing/2014/main" id="{42BE7E1C-DBED-BE8A-25C1-FF54E557790A}"/>
+              </a:ext>
+            </a:extLst>
+          </p:cNvPr>
+          <p:cNvSpPr>
+            <a:spLocks noGrp="1"/>
+          </p:cNvSpPr>
+          <p:nvPr>
+            <p:ph type="ctrTitle"/>
+          </p:nvPr>
+        </p:nvSpPr>
+        <p:spPr>
+          <a:xfrm>
+            <a:off x="1852977" y="378485"/>
+            <a:ext cx="8486046" cy="2876471"/>
+          </a:xfrm>
+        </p:spPr>
+        <p:txBody>
+          <a:bodyPr anchor="ctr">
+            <a:normAutofit/>
+          </a:bodyPr>
+          <a:lstStyle/>
+          <a:p>
+            <a:pPr algn="ctr"/>
+            <a:r>
+              <a:rPr lang="en-US" dirty="0">
+                <a:solidFill>
+                  <a:schemeClr val="accent1">
+                    <a:lumMod val="50000"/>
+                  </a:schemeClr>
+                </a:solidFill>
+              </a:rPr>
+              <a:t>Thank you!</a:t>
+            </a:r>
+          </a:p>
+        </p:txBody>
+      </p:sp>
+    </p:spTree>
+    <p:extLst>
+      <p:ext uri="{BB962C8B-B14F-4D97-AF65-F5344CB8AC3E}">
+        <p14:creationId xmlns:p14="http://schemas.microsoft.com/office/powerpoint/2010/main" val="3900602769"/>
+      </p:ext>
+    </p:extLst>
+  </p:cSld>
+  <p:clrMapOvr>
+    <a:masterClrMapping/>
+  </p:clrMapOvr>
 </p:sld>
 </file>
 

--- a/project/project_background/Final Project Presentation - Ornit - Cancer Bioinfo March 2026.pptx
+++ b/project/project_background/Final Project Presentation - Ornit - Cancer Bioinfo March 2026.pptx
@@ -4839,7 +4839,125 @@
           <a:lstStyle/>
           <a:p>
             <a:pPr marL="0" algn="r" defTabSz="914400" rtl="1" eaLnBrk="1" latinLnBrk="0" hangingPunct="1"/>
+            <a:r>
+              <a:rPr lang="he-IL" dirty="0"/>
+              <a:t>אני אעשה </a:t>
+            </a:r>
+            <a:r>
+              <a:rPr lang="he-IL" dirty="0" err="1"/>
+              <a:t>ריקאפ</a:t>
+            </a:r>
+            <a:r>
+              <a:rPr lang="he-IL" dirty="0"/>
+              <a:t> להסברים שנתתי בפעם הקודמת: </a:t>
+            </a:r>
+            <a:r>
+              <a:rPr lang="en-US" dirty="0"/>
+              <a:t>TP53</a:t>
+            </a:r>
+            <a:r>
+              <a:rPr lang="he-IL" dirty="0"/>
+              <a:t> הוא בעצם </a:t>
+            </a:r>
+            <a:r>
+              <a:rPr lang="he-IL" dirty="0" err="1"/>
+              <a:t>טומר</a:t>
+            </a:r>
+            <a:r>
+              <a:rPr lang="he-IL" dirty="0"/>
+              <a:t> </a:t>
+            </a:r>
+            <a:r>
+              <a:rPr lang="he-IL" dirty="0" err="1"/>
+              <a:t>סופרסור</a:t>
+            </a:r>
+            <a:r>
+              <a:rPr lang="he-IL" dirty="0"/>
+              <a:t> מרכזי, שמתפקד כמעין </a:t>
+            </a:r>
+            <a:r>
+              <a:rPr lang="he-IL" dirty="0" err="1"/>
+              <a:t>סופרהירו</a:t>
+            </a:r>
+            <a:r>
+              <a:rPr lang="he-IL" dirty="0"/>
+              <a:t> של התא: אם יש צורך להפעיל סטרס </a:t>
+            </a:r>
+            <a:r>
+              <a:rPr lang="he-IL" dirty="0" err="1"/>
+              <a:t>ריספונס</a:t>
+            </a:r>
+            <a:r>
+              <a:rPr lang="he-IL" dirty="0"/>
+              <a:t>, הליכי תיקון דנ״א, </a:t>
+            </a:r>
+            <a:r>
+              <a:rPr lang="he-IL" dirty="0" err="1"/>
+              <a:t>אפופטוזיס</a:t>
+            </a:r>
+            <a:r>
+              <a:rPr lang="he-IL" dirty="0"/>
+              <a:t> וכן הלאה, </a:t>
+            </a:r>
+            <a:r>
+              <a:rPr lang="en-US" dirty="0"/>
+              <a:t>TP53</a:t>
+            </a:r>
+            <a:r>
+              <a:rPr lang="he-IL" dirty="0"/>
+              <a:t> נמצא שם ומניע את התהליכים האלו. מוטציות ב-</a:t>
+            </a:r>
+            <a:r>
+              <a:rPr lang="en-US" dirty="0"/>
+              <a:t>TP53</a:t>
+            </a:r>
+            <a:r>
+              <a:rPr lang="he-IL" dirty="0"/>
+              <a:t> יכולות להשפיע על התהליכים האלו, והן יושבות על איזשהו ספקטרום מבחינת הפנוטיפ שהן גורמות לו, ז״א מוטציות שונות ב-</a:t>
+            </a:r>
+            <a:r>
+              <a:rPr lang="en-US" dirty="0"/>
+              <a:t>TP53</a:t>
+            </a:r>
+            <a:r>
+              <a:rPr lang="he-IL" dirty="0"/>
+              <a:t> יובילו לקשת של </a:t>
+            </a:r>
+            <a:r>
+              <a:rPr lang="he-IL" dirty="0" err="1"/>
+              <a:t>פנוטיפים</a:t>
+            </a:r>
+            <a:r>
+              <a:rPr lang="he-IL" dirty="0"/>
+              <a:t> ולא מדובר באחד יחיד.</a:t>
+            </a:r>
+          </a:p>
+          <a:p>
+            <a:pPr marL="0" algn="r" defTabSz="914400" rtl="1" eaLnBrk="1" latinLnBrk="0" hangingPunct="1"/>
             <a:endParaRPr lang="he-IL" dirty="0"/>
+          </a:p>
+          <a:p>
+            <a:pPr marL="0" algn="r" defTabSz="914400" rtl="1" eaLnBrk="1" latinLnBrk="0" hangingPunct="1"/>
+            <a:r>
+              <a:rPr lang="he-IL" dirty="0"/>
+              <a:t>אחד הדברים שאפשר להגיד ש-</a:t>
+            </a:r>
+            <a:r>
+              <a:rPr lang="en-US" dirty="0"/>
+              <a:t>TP53</a:t>
+            </a:r>
+            <a:r>
+              <a:rPr lang="he-IL" dirty="0"/>
+              <a:t> יכול להוביל אליהם כשהוא פגום זה </a:t>
+            </a:r>
+            <a:r>
+              <a:rPr lang="en-US" dirty="0"/>
+              <a:t>Copy number variation</a:t>
+            </a:r>
+            <a:r>
+              <a:rPr lang="he-IL" dirty="0"/>
+              <a:t>.</a:t>
+            </a:r>
           </a:p>
         </p:txBody>
       </p:sp>
@@ -5206,7 +5324,34 @@
           <a:lstStyle/>
           <a:p>
             <a:pPr marL="0" algn="r" defTabSz="914400" rtl="1" eaLnBrk="1" latinLnBrk="0" hangingPunct="1"/>
-            <a:endParaRPr lang="he-IL" dirty="0"/>
+            <a:r>
+              <a:rPr lang="he-IL" dirty="0"/>
+              <a:t>מה זה </a:t>
+            </a:r>
+            <a:r>
+              <a:rPr lang="en-US" dirty="0"/>
+              <a:t>Copy number variation</a:t>
+            </a:r>
+            <a:r>
+              <a:rPr lang="he-IL" dirty="0"/>
+              <a:t>? מדובר במספר עותקים שונה מהרגיל של גן מסוים, בין אם זה מחיקה של גן או אמפליפיקציה של גן. בהתאמה, אם יש לנו הרבה עותקים מגן מסוים, יהיה לנו יותר רנ״א וסביר להניח שיהיה לנו יותר חלבון. אותו דבר אם יש לנו החסרה של עותק, ככל הנראה יהיה לנו פחות חלבון. זה בעייתי אם פתאום יש לנו החסרה של גן </a:t>
+            </a:r>
+            <a:r>
+              <a:rPr lang="he-IL" dirty="0" err="1"/>
+              <a:t>טומר</a:t>
+            </a:r>
+            <a:r>
+              <a:rPr lang="he-IL" dirty="0"/>
+              <a:t> </a:t>
+            </a:r>
+            <a:r>
+              <a:rPr lang="he-IL" dirty="0" err="1"/>
+              <a:t>סופרסור</a:t>
+            </a:r>
+            <a:r>
+              <a:rPr lang="he-IL" dirty="0"/>
+              <a:t>, שאחראי למשל על בקרת חלוקת התא. אם יש לנו החסרה של עותקים ממנו, אנחנו עלולים לקבל חלוקה בלתי נשלטת של התא.</a:t>
+            </a:r>
           </a:p>
         </p:txBody>
       </p:sp>
@@ -5333,7 +5478,27 @@
             </a:pPr>
             <a:r>
               <a:rPr lang="he-IL" dirty="0"/>
-              <a:t>ההיפותזה שלי מבוססת על מאמר שפורסם </a:t>
+              <a:t>כדי למדוד </a:t>
+            </a:r>
+            <a:r>
+              <a:rPr lang="en-US" dirty="0"/>
+              <a:t>CNA</a:t>
+            </a:r>
+            <a:r>
+              <a:rPr lang="he-IL" dirty="0"/>
+              <a:t>, נעזרתי במאמר של </a:t>
+            </a:r>
+            <a:r>
+              <a:rPr lang="en-US" dirty="0" err="1"/>
+              <a:t>Giancomelli</a:t>
+            </a:r>
+            <a:r>
+              <a:rPr lang="en-US" dirty="0"/>
+              <a:t> et al</a:t>
+            </a:r>
+            <a:r>
+              <a:rPr lang="he-IL" dirty="0"/>
+              <a:t> שפורסם </a:t>
             </a:r>
             <a:r>
               <a:rPr lang="he-IL" dirty="0" err="1"/>
@@ -5341,7 +5506,7 @@
             </a:r>
             <a:r>
               <a:rPr lang="he-IL" dirty="0"/>
-              <a:t> לפני כמה שנים שהם עשו דבר מאוד מעניין שם, הם יצרו ספרייה ענקית שכוללת כמעט את כל המוטציות האפשריות ב-</a:t>
+              <a:t> לפני כמה שנים. הם יצרו שם ספרייה ענקית שכוללת כמעט את כל המוטציות האפשריות ב-</a:t>
             </a:r>
             <a:r>
               <a:rPr lang="en-US" dirty="0"/>
@@ -5349,108 +5514,17 @@
             </a:r>
             <a:r>
               <a:rPr lang="he-IL" dirty="0"/>
-              <a:t>, בעיקר </a:t>
-            </a:r>
-            <a:r>
-              <a:rPr lang="he-IL" dirty="0" err="1"/>
-              <a:t>מיסנס</a:t>
+              <a:t>, סה״כ </a:t>
+            </a:r>
+            <a:r>
+              <a:rPr lang="en-US" dirty="0"/>
+              <a:t>8,258</a:t>
             </a:r>
             <a:r>
               <a:rPr lang="he-IL" dirty="0"/>
-              <a:t> אבל גם נונסנס. כל מוטציה הוכנסה לתאים אנושיים וסומנה בברקוד כדי לעקוב אחריה בריצוף. הם הכניסו לתאים עותק מוטנטי של </a:t>
-            </a:r>
-            <a:r>
-              <a:rPr lang="en-US" dirty="0"/>
-              <a:t>TP53</a:t>
-            </a:r>
-            <a:r>
-              <a:rPr lang="he-IL" dirty="0"/>
-              <a:t> ובדקו מה ההשפעה של זה בתא.</a:t>
-            </a:r>
-            <a:endParaRPr lang="he-IL" b="0" dirty="0"/>
-          </a:p>
-          <a:p>
-            <a:pPr marL="0" algn="r" defTabSz="914400" rtl="1" eaLnBrk="1" latinLnBrk="0" hangingPunct="1"/>
+              <a:t> וריאנטים. כל מוטציה הוכנסה לתאים אנושיים וסומנה בברקוד כדי לעקוב אחרי בריצוף ובדקו מה ההשפעה על התא מבחינת קצב הגידול של תאים סרטניים.</a:t>
+            </a:r>
             <a:endParaRPr lang="en-US" dirty="0"/>
-          </a:p>
-          <a:p>
-            <a:pPr marL="0" algn="r" defTabSz="914400" rtl="1" eaLnBrk="1" latinLnBrk="0" hangingPunct="1"/>
-            <a:r>
-              <a:rPr lang="he-IL" dirty="0"/>
-              <a:t>במאמר של </a:t>
-            </a:r>
-            <a:r>
-              <a:rPr lang="en-US" sz="1200" b="0" i="0" kern="1200" dirty="0">
-                <a:solidFill>
-                  <a:schemeClr val="tx1"/>
-                </a:solidFill>
-                <a:effectLst/>
-                <a:latin typeface="+mn-lt"/>
-                <a:ea typeface="+mn-ea"/>
-                <a:cs typeface="+mn-cs"/>
-              </a:rPr>
-              <a:t>Giacomelli et al.</a:t>
-            </a:r>
-            <a:r>
-              <a:rPr lang="he-IL" sz="1200" b="0" i="0" kern="1200" dirty="0">
-                <a:solidFill>
-                  <a:schemeClr val="tx1"/>
-                </a:solidFill>
-                <a:effectLst/>
-                <a:latin typeface="+mn-lt"/>
-                <a:ea typeface="+mn-ea"/>
-                <a:cs typeface="+mn-cs"/>
-              </a:rPr>
-              <a:t>, הם לקחו את </a:t>
-            </a:r>
-            <a:r>
-              <a:rPr lang="en-US" sz="1200" b="0" i="0" kern="1200" dirty="0">
-                <a:solidFill>
-                  <a:schemeClr val="tx1"/>
-                </a:solidFill>
-                <a:effectLst/>
-                <a:latin typeface="+mn-lt"/>
-                <a:ea typeface="+mn-ea"/>
-                <a:cs typeface="+mn-cs"/>
-              </a:rPr>
-              <a:t>p53</a:t>
-            </a:r>
-            <a:r>
-              <a:rPr lang="he-IL" sz="1200" b="0" i="0" kern="1200" dirty="0">
-                <a:solidFill>
-                  <a:schemeClr val="tx1"/>
-                </a:solidFill>
-                <a:effectLst/>
-                <a:latin typeface="+mn-lt"/>
-                <a:ea typeface="+mn-ea"/>
-                <a:cs typeface="+mn-cs"/>
-              </a:rPr>
-              <a:t>, החליפו כל חומצה אמינית אחת והחליפו באחרת, בעצם יצרו מפה של כל המוטציות האפשריות ב-</a:t>
-            </a:r>
-            <a:r>
-              <a:rPr lang="en-US" sz="1200" b="0" i="0" kern="1200" dirty="0">
-                <a:solidFill>
-                  <a:schemeClr val="tx1"/>
-                </a:solidFill>
-                <a:effectLst/>
-                <a:latin typeface="+mn-lt"/>
-                <a:ea typeface="+mn-ea"/>
-                <a:cs typeface="+mn-cs"/>
-              </a:rPr>
-              <a:t>p53</a:t>
-            </a:r>
-            <a:r>
-              <a:rPr lang="he-IL" sz="1200" b="0" i="0" kern="1200" dirty="0">
-                <a:solidFill>
-                  <a:schemeClr val="tx1"/>
-                </a:solidFill>
-                <a:effectLst/>
-                <a:latin typeface="+mn-lt"/>
-                <a:ea typeface="+mn-ea"/>
-                <a:cs typeface="+mn-cs"/>
-              </a:rPr>
-              <a:t>, כדי לראות את האפקט של כל מוטציה וכמה היא משפיעה על התפקוד של התא מבחינת קצב הגידול של התאים הסרטניים.</a:t>
-            </a:r>
           </a:p>
           <a:p>
             <a:pPr marL="0" algn="r" defTabSz="914400" rtl="1" eaLnBrk="1" latinLnBrk="0" hangingPunct="1"/>
@@ -5548,55 +5622,7 @@
                 <a:ea typeface="+mn-ea"/>
                 <a:cs typeface="+mn-cs"/>
               </a:rPr>
-              <a:t> תקין ואחד בלי, וטיפלו בהם ב-</a:t>
-            </a:r>
-            <a:r>
-              <a:rPr lang="en-US" sz="1200" b="0" i="0" kern="1200" dirty="0">
-                <a:solidFill>
-                  <a:schemeClr val="tx1"/>
-                </a:solidFill>
-                <a:effectLst/>
-                <a:latin typeface="+mn-lt"/>
-                <a:ea typeface="+mn-ea"/>
-                <a:cs typeface="+mn-cs"/>
-              </a:rPr>
-              <a:t>nultlin-3</a:t>
-            </a:r>
-            <a:r>
-              <a:rPr lang="he-IL" sz="1200" b="0" i="0" kern="1200" dirty="0">
-                <a:solidFill>
-                  <a:schemeClr val="tx1"/>
-                </a:solidFill>
-                <a:effectLst/>
-                <a:latin typeface="+mn-lt"/>
-                <a:ea typeface="+mn-ea"/>
-                <a:cs typeface="+mn-cs"/>
-              </a:rPr>
-              <a:t> או ב-</a:t>
-            </a:r>
-            <a:r>
-              <a:rPr lang="en-US" sz="1200" b="0" i="0" kern="1200" dirty="0">
-                <a:solidFill>
-                  <a:schemeClr val="tx1"/>
-                </a:solidFill>
-                <a:effectLst/>
-                <a:latin typeface="+mn-lt"/>
-                <a:ea typeface="+mn-ea"/>
-                <a:cs typeface="+mn-cs"/>
-              </a:rPr>
-              <a:t>etoposide</a:t>
-            </a:r>
-            <a:r>
-              <a:rPr lang="he-IL" sz="1200" b="0" i="0" kern="1200" dirty="0">
-                <a:solidFill>
-                  <a:schemeClr val="tx1"/>
-                </a:solidFill>
-                <a:effectLst/>
-                <a:latin typeface="+mn-lt"/>
-                <a:ea typeface="+mn-ea"/>
-                <a:cs typeface="+mn-cs"/>
-              </a:rPr>
-              <a:t>. אחרי 12 ימים הם ריצפו את התאים  ששרדו כדי לראות אילו אללים נשארו בחיים.</a:t>
+              <a:t> תקין ואחד בלי</a:t>
             </a:r>
             <a:endParaRPr lang="en-US" sz="1200" b="0" i="0" kern="1200" dirty="0">
               <a:solidFill>
@@ -5732,55 +5758,7 @@
               <a:defRPr/>
             </a:pPr>
             <a:r>
-              <a:rPr lang="he-IL" dirty="0"/>
-              <a:t>ההיפותזה שלי מבוססת על מאמר שפורסם </a:t>
-            </a:r>
-            <a:r>
-              <a:rPr lang="he-IL" dirty="0" err="1"/>
-              <a:t>בנייצ׳ר</a:t>
-            </a:r>
-            <a:r>
-              <a:rPr lang="he-IL" dirty="0"/>
-              <a:t> לפני כמה שנים שהם עשו דבר מאוד מעניין שם, הם יצרו ספרייה ענקית שכוללת כמעט את כל המוטציות האפשריות ב-</a:t>
-            </a:r>
-            <a:r>
-              <a:rPr lang="en-US" dirty="0"/>
-              <a:t>TP53</a:t>
-            </a:r>
-            <a:r>
-              <a:rPr lang="he-IL" dirty="0"/>
-              <a:t>, בעיקר </a:t>
-            </a:r>
-            <a:r>
-              <a:rPr lang="he-IL" dirty="0" err="1"/>
-              <a:t>מיסנס</a:t>
-            </a:r>
-            <a:r>
-              <a:rPr lang="he-IL" dirty="0"/>
-              <a:t> אבל גם נונסנס. כל מוטציה הוכנסה לתאים אנושיים וסומנה בברקוד כדי לעקוב אחריה בריצוף. הם הכניסו לתאים עותק מוטנטי של </a:t>
-            </a:r>
-            <a:r>
-              <a:rPr lang="en-US" dirty="0"/>
-              <a:t>TP53</a:t>
-            </a:r>
-            <a:r>
-              <a:rPr lang="he-IL" dirty="0"/>
-              <a:t> ובדקו מה ההשפעה של זה בתא.</a:t>
-            </a:r>
-            <a:endParaRPr lang="he-IL" b="0" dirty="0"/>
-          </a:p>
-          <a:p>
-            <a:pPr marL="0" algn="r" defTabSz="914400" rtl="1" eaLnBrk="1" latinLnBrk="0" hangingPunct="1"/>
-            <a:endParaRPr lang="en-US" dirty="0"/>
-          </a:p>
-          <a:p>
-            <a:pPr marL="0" algn="r" defTabSz="914400" rtl="1" eaLnBrk="1" latinLnBrk="0" hangingPunct="1"/>
-            <a:r>
-              <a:rPr lang="he-IL" dirty="0"/>
-              <a:t>במאמר של </a:t>
-            </a:r>
-            <a:r>
-              <a:rPr lang="en-US" sz="1200" b="0" i="0" kern="1200" dirty="0">
+              <a:rPr lang="he-IL" sz="1200" b="0" i="0" kern="1200" dirty="0">
                 <a:solidFill>
                   <a:schemeClr val="tx1"/>
                 </a:solidFill>
@@ -5789,10 +5767,10 @@
                 <a:ea typeface="+mn-ea"/>
                 <a:cs typeface="+mn-cs"/>
               </a:rPr>
-              <a:t>Giacomelli et al.</a:t>
-            </a:r>
-            <a:r>
-              <a:rPr lang="he-IL" sz="1200" b="0" i="0" kern="1200" dirty="0">
+              <a:t>בשלב השני הם רצו למדוד את שכיחות האלל הספציפי שהם בודקים. אחרי 12 ימים הם ריצפו את התאים ששרדו כדי לראות אילו אללים נשארו בחיים. לכל אלל חישבו </a:t>
+            </a:r>
+            <a:r>
+              <a:rPr lang="en-US" sz="1200" b="0" i="0" kern="1200" dirty="0">
                 <a:solidFill>
                   <a:schemeClr val="tx1"/>
                 </a:solidFill>
@@ -5801,10 +5779,10 @@
                 <a:ea typeface="+mn-ea"/>
                 <a:cs typeface="+mn-cs"/>
               </a:rPr>
-              <a:t>, הם לקחו את </a:t>
-            </a:r>
-            <a:r>
-              <a:rPr lang="en-US" sz="1200" b="0" i="0" kern="1200" dirty="0">
+              <a:t>log2FoldChange</a:t>
+            </a:r>
+            <a:r>
+              <a:rPr lang="he-IL" sz="1200" b="0" i="0" kern="1200" dirty="0">
                 <a:solidFill>
                   <a:schemeClr val="tx1"/>
                 </a:solidFill>
@@ -5813,10 +5791,10 @@
                 <a:ea typeface="+mn-ea"/>
                 <a:cs typeface="+mn-cs"/>
               </a:rPr>
-              <a:t>p53</a:t>
-            </a:r>
-            <a:r>
-              <a:rPr lang="he-IL" sz="1200" b="0" i="0" kern="1200" dirty="0">
+              <a:t> ביחס לנקודת הזמן הבסיסית, ז״א האם האלל התעשר או הידלל תחת הלחץ, ונרמלו ל-</a:t>
+            </a:r>
+            <a:r>
+              <a:rPr lang="en-US" sz="1200" b="0" i="0" kern="1200" dirty="0">
                 <a:solidFill>
                   <a:schemeClr val="tx1"/>
                 </a:solidFill>
@@ -5825,10 +5803,10 @@
                 <a:ea typeface="+mn-ea"/>
                 <a:cs typeface="+mn-cs"/>
               </a:rPr>
-              <a:t>, החליפו כל חומצה אמינית אחת והחליפו באחרת, בעצם יצרו מפה של כל המוטציות האפשריות ב-</a:t>
-            </a:r>
-            <a:r>
-              <a:rPr lang="en-US" sz="1200" b="0" i="0" kern="1200" dirty="0">
+              <a:t>z-scores</a:t>
+            </a:r>
+            <a:r>
+              <a:rPr lang="he-IL" sz="1200" b="0" i="0" kern="1200" dirty="0">
                 <a:solidFill>
                   <a:schemeClr val="tx1"/>
                 </a:solidFill>
@@ -5837,166 +5815,7 @@
                 <a:ea typeface="+mn-ea"/>
                 <a:cs typeface="+mn-cs"/>
               </a:rPr>
-              <a:t>p53</a:t>
-            </a:r>
-            <a:r>
-              <a:rPr lang="he-IL" sz="1200" b="0" i="0" kern="1200" dirty="0">
-                <a:solidFill>
-                  <a:schemeClr val="tx1"/>
-                </a:solidFill>
-                <a:effectLst/>
-                <a:latin typeface="+mn-lt"/>
-                <a:ea typeface="+mn-ea"/>
-                <a:cs typeface="+mn-cs"/>
-              </a:rPr>
-              <a:t>, כדי לראות את האפקט של כל מוטציה וכמה היא משפיעה על התפקוד של התא מבחינת קצב הגידול של התאים הסרטניים.</a:t>
-            </a:r>
-          </a:p>
-          <a:p>
-            <a:pPr marL="0" algn="r" defTabSz="914400" rtl="1" eaLnBrk="1" latinLnBrk="0" hangingPunct="1"/>
-            <a:endParaRPr lang="he-IL" sz="1200" b="0" i="0" kern="1200" dirty="0">
-              <a:solidFill>
-                <a:schemeClr val="tx1"/>
-              </a:solidFill>
-              <a:effectLst/>
-              <a:latin typeface="+mn-lt"/>
-              <a:ea typeface="+mn-ea"/>
-              <a:cs typeface="+mn-cs"/>
-            </a:endParaRPr>
-          </a:p>
-          <a:p>
-            <a:pPr marL="0" algn="r" defTabSz="914400" rtl="1" eaLnBrk="1" latinLnBrk="0" hangingPunct="1"/>
-            <a:r>
-              <a:rPr lang="he-IL" sz="1200" b="0" i="0" kern="1200" dirty="0">
-                <a:solidFill>
-                  <a:schemeClr val="tx1"/>
-                </a:solidFill>
-                <a:effectLst/>
-                <a:latin typeface="+mn-lt"/>
-                <a:ea typeface="+mn-ea"/>
-                <a:cs typeface="+mn-cs"/>
-              </a:rPr>
-              <a:t>בשלב הראשון הם סרקו 8,258 וריאנטים של </a:t>
-            </a:r>
-            <a:r>
-              <a:rPr lang="en-US" sz="1200" b="0" i="0" kern="1200" dirty="0">
-                <a:solidFill>
-                  <a:schemeClr val="tx1"/>
-                </a:solidFill>
-                <a:effectLst/>
-                <a:latin typeface="+mn-lt"/>
-                <a:ea typeface="+mn-ea"/>
-                <a:cs typeface="+mn-cs"/>
-              </a:rPr>
-              <a:t>TP53</a:t>
-            </a:r>
-            <a:r>
-              <a:rPr lang="he-IL" sz="1200" b="0" i="0" kern="1200" dirty="0">
-                <a:solidFill>
-                  <a:schemeClr val="tx1"/>
-                </a:solidFill>
-                <a:effectLst/>
-                <a:latin typeface="+mn-lt"/>
-                <a:ea typeface="+mn-ea"/>
-                <a:cs typeface="+mn-cs"/>
-              </a:rPr>
-              <a:t> ע״י הכנסתם לשני קווי תאים </a:t>
-            </a:r>
-            <a:r>
-              <a:rPr lang="he-IL" sz="1200" b="0" i="0" kern="1200" dirty="0" err="1">
-                <a:solidFill>
-                  <a:schemeClr val="tx1"/>
-                </a:solidFill>
-                <a:effectLst/>
-                <a:latin typeface="+mn-lt"/>
-                <a:ea typeface="+mn-ea"/>
-                <a:cs typeface="+mn-cs"/>
-              </a:rPr>
-              <a:t>איזוגניים</a:t>
-            </a:r>
-            <a:r>
-              <a:rPr lang="he-IL" sz="1200" b="0" i="0" kern="1200" dirty="0">
-                <a:solidFill>
-                  <a:schemeClr val="tx1"/>
-                </a:solidFill>
-                <a:effectLst/>
-                <a:latin typeface="+mn-lt"/>
-                <a:ea typeface="+mn-ea"/>
-                <a:cs typeface="+mn-cs"/>
-              </a:rPr>
-              <a:t>: אחד עם </a:t>
-            </a:r>
-            <a:r>
-              <a:rPr lang="en-US" sz="1200" b="0" i="0" kern="1200" dirty="0">
-                <a:solidFill>
-                  <a:schemeClr val="tx1"/>
-                </a:solidFill>
-                <a:effectLst/>
-                <a:latin typeface="+mn-lt"/>
-                <a:ea typeface="+mn-ea"/>
-                <a:cs typeface="+mn-cs"/>
-              </a:rPr>
-              <a:t>p53</a:t>
-            </a:r>
-            <a:r>
-              <a:rPr lang="he-IL" sz="1200" b="0" i="0" kern="1200" dirty="0">
-                <a:solidFill>
-                  <a:schemeClr val="tx1"/>
-                </a:solidFill>
-                <a:effectLst/>
-                <a:latin typeface="+mn-lt"/>
-                <a:ea typeface="+mn-ea"/>
-                <a:cs typeface="+mn-cs"/>
-              </a:rPr>
-              <a:t> תקין ואחד בלי, וטיפלו בהם ב-</a:t>
-            </a:r>
-            <a:r>
-              <a:rPr lang="en-US" sz="1200" b="0" i="0" kern="1200" dirty="0">
-                <a:solidFill>
-                  <a:schemeClr val="tx1"/>
-                </a:solidFill>
-                <a:effectLst/>
-                <a:latin typeface="+mn-lt"/>
-                <a:ea typeface="+mn-ea"/>
-                <a:cs typeface="+mn-cs"/>
-              </a:rPr>
-              <a:t>nultlin-3</a:t>
-            </a:r>
-            <a:r>
-              <a:rPr lang="he-IL" sz="1200" b="0" i="0" kern="1200" dirty="0">
-                <a:solidFill>
-                  <a:schemeClr val="tx1"/>
-                </a:solidFill>
-                <a:effectLst/>
-                <a:latin typeface="+mn-lt"/>
-                <a:ea typeface="+mn-ea"/>
-                <a:cs typeface="+mn-cs"/>
-              </a:rPr>
-              <a:t> או ב-</a:t>
-            </a:r>
-            <a:r>
-              <a:rPr lang="en-US" sz="1200" b="0" i="0" kern="1200" dirty="0">
-                <a:solidFill>
-                  <a:schemeClr val="tx1"/>
-                </a:solidFill>
-                <a:effectLst/>
-                <a:latin typeface="+mn-lt"/>
-                <a:ea typeface="+mn-ea"/>
-                <a:cs typeface="+mn-cs"/>
-              </a:rPr>
-              <a:t>etoposide</a:t>
-            </a:r>
-            <a:r>
-              <a:rPr lang="he-IL" sz="1200" b="0" i="0" kern="1200" dirty="0">
-                <a:solidFill>
-                  <a:schemeClr val="tx1"/>
-                </a:solidFill>
-                <a:effectLst/>
-                <a:latin typeface="+mn-lt"/>
-                <a:ea typeface="+mn-ea"/>
-                <a:cs typeface="+mn-cs"/>
-              </a:rPr>
-              <a:t>. אחרי 12 ימים הם ריצפו את התאים  ששרדו כדי לראות אילו אללים נשארו בחיים.</a:t>
+              <a:t> כך שכל אלל קיבל ציון יחסי לכל אחד משלושת התנאים</a:t>
             </a:r>
             <a:endParaRPr lang="en-US" sz="1200" b="0" i="0" kern="1200" dirty="0">
               <a:solidFill>
@@ -6133,270 +5952,39 @@
             </a:pPr>
             <a:r>
               <a:rPr lang="he-IL" dirty="0"/>
-              <a:t>ההיפותזה שלי מבוססת על מאמר שפורסם </a:t>
+              <a:t>בשלב השלישי הם חיברו את כל ה-</a:t>
+            </a:r>
+            <a:r>
+              <a:rPr lang="en-US" dirty="0"/>
+              <a:t>z-scores</a:t>
+            </a:r>
+            <a:r>
+              <a:rPr lang="he-IL" dirty="0"/>
+              <a:t> כדי </a:t>
             </a:r>
             <a:r>
               <a:rPr lang="he-IL" dirty="0" err="1"/>
-              <a:t>בנייצ׳ר</a:t>
+              <a:t>לכבר</a:t>
             </a:r>
             <a:r>
               <a:rPr lang="he-IL" dirty="0"/>
-              <a:t> לפני כמה שנים שהם עשו דבר מאוד מעניין שם, הם יצרו ספרייה ענקית שכוללת כמעט את כל המוטציות האפשריות ב-</a:t>
+              <a:t> מספר יחיד לכל אלל, שזהו ה-</a:t>
             </a:r>
             <a:r>
               <a:rPr lang="en-US" dirty="0"/>
-              <a:t>TP53</a:t>
+              <a:t>Experimental Functional Score</a:t>
             </a:r>
             <a:r>
               <a:rPr lang="he-IL" dirty="0"/>
-              <a:t>, בעיקר </a:t>
-            </a:r>
-            <a:r>
-              <a:rPr lang="he-IL" dirty="0" err="1"/>
-              <a:t>מיסנס</a:t>
+              <a:t> שהשתמשתי בו. ציון נמוך משמע אובדן תפקוד, ציון גבוה = התנהגות דומה ל-</a:t>
+            </a:r>
+            <a:r>
+              <a:rPr lang="en-US" dirty="0"/>
+              <a:t>p53</a:t>
             </a:r>
             <a:r>
               <a:rPr lang="he-IL" dirty="0"/>
-              <a:t> אבל גם נונסנס. כל מוטציה הוכנסה לתאים אנושיים וסומנה בברקוד כדי לעקוב אחריה בריצוף. הם הכניסו לתאים עותק מוטנטי של </a:t>
-            </a:r>
-            <a:r>
-              <a:rPr lang="en-US" dirty="0"/>
-              <a:t>TP53</a:t>
-            </a:r>
-            <a:r>
-              <a:rPr lang="he-IL" dirty="0"/>
-              <a:t> ובדקו מה ההשפעה של זה בתא.</a:t>
-            </a:r>
-            <a:endParaRPr lang="he-IL" b="0" dirty="0"/>
-          </a:p>
-          <a:p>
-            <a:pPr marL="0" algn="r" defTabSz="914400" rtl="1" eaLnBrk="1" latinLnBrk="0" hangingPunct="1"/>
-            <a:endParaRPr lang="en-US" dirty="0"/>
-          </a:p>
-          <a:p>
-            <a:pPr marL="0" algn="r" defTabSz="914400" rtl="1" eaLnBrk="1" latinLnBrk="0" hangingPunct="1"/>
-            <a:r>
-              <a:rPr lang="he-IL" dirty="0"/>
-              <a:t>במאמר של </a:t>
-            </a:r>
-            <a:r>
-              <a:rPr lang="en-US" sz="1200" b="0" i="0" kern="1200" dirty="0">
-                <a:solidFill>
-                  <a:schemeClr val="tx1"/>
-                </a:solidFill>
-                <a:effectLst/>
-                <a:latin typeface="+mn-lt"/>
-                <a:ea typeface="+mn-ea"/>
-                <a:cs typeface="+mn-cs"/>
-              </a:rPr>
-              <a:t>Giacomelli et al.</a:t>
-            </a:r>
-            <a:r>
-              <a:rPr lang="he-IL" sz="1200" b="0" i="0" kern="1200" dirty="0">
-                <a:solidFill>
-                  <a:schemeClr val="tx1"/>
-                </a:solidFill>
-                <a:effectLst/>
-                <a:latin typeface="+mn-lt"/>
-                <a:ea typeface="+mn-ea"/>
-                <a:cs typeface="+mn-cs"/>
-              </a:rPr>
-              <a:t>, הם לקחו את </a:t>
-            </a:r>
-            <a:r>
-              <a:rPr lang="en-US" sz="1200" b="0" i="0" kern="1200" dirty="0">
-                <a:solidFill>
-                  <a:schemeClr val="tx1"/>
-                </a:solidFill>
-                <a:effectLst/>
-                <a:latin typeface="+mn-lt"/>
-                <a:ea typeface="+mn-ea"/>
-                <a:cs typeface="+mn-cs"/>
-              </a:rPr>
-              <a:t>p53</a:t>
-            </a:r>
-            <a:r>
-              <a:rPr lang="he-IL" sz="1200" b="0" i="0" kern="1200" dirty="0">
-                <a:solidFill>
-                  <a:schemeClr val="tx1"/>
-                </a:solidFill>
-                <a:effectLst/>
-                <a:latin typeface="+mn-lt"/>
-                <a:ea typeface="+mn-ea"/>
-                <a:cs typeface="+mn-cs"/>
-              </a:rPr>
-              <a:t>, החליפו כל חומצה אמינית אחת והחליפו באחרת, בעצם יצרו מפה של כל המוטציות האפשריות ב-</a:t>
-            </a:r>
-            <a:r>
-              <a:rPr lang="en-US" sz="1200" b="0" i="0" kern="1200" dirty="0">
-                <a:solidFill>
-                  <a:schemeClr val="tx1"/>
-                </a:solidFill>
-                <a:effectLst/>
-                <a:latin typeface="+mn-lt"/>
-                <a:ea typeface="+mn-ea"/>
-                <a:cs typeface="+mn-cs"/>
-              </a:rPr>
-              <a:t>p53</a:t>
-            </a:r>
-            <a:r>
-              <a:rPr lang="he-IL" sz="1200" b="0" i="0" kern="1200" dirty="0">
-                <a:solidFill>
-                  <a:schemeClr val="tx1"/>
-                </a:solidFill>
-                <a:effectLst/>
-                <a:latin typeface="+mn-lt"/>
-                <a:ea typeface="+mn-ea"/>
-                <a:cs typeface="+mn-cs"/>
-              </a:rPr>
-              <a:t>, כדי לראות את האפקט של כל מוטציה וכמה היא משפיעה על התפקוד של התא מבחינת קצב הגידול של התאים הסרטניים.</a:t>
-            </a:r>
-          </a:p>
-          <a:p>
-            <a:pPr marL="0" algn="r" defTabSz="914400" rtl="1" eaLnBrk="1" latinLnBrk="0" hangingPunct="1"/>
-            <a:endParaRPr lang="he-IL" sz="1200" b="0" i="0" kern="1200" dirty="0">
-              <a:solidFill>
-                <a:schemeClr val="tx1"/>
-              </a:solidFill>
-              <a:effectLst/>
-              <a:latin typeface="+mn-lt"/>
-              <a:ea typeface="+mn-ea"/>
-              <a:cs typeface="+mn-cs"/>
-            </a:endParaRPr>
-          </a:p>
-          <a:p>
-            <a:pPr marL="0" algn="r" defTabSz="914400" rtl="1" eaLnBrk="1" latinLnBrk="0" hangingPunct="1"/>
-            <a:r>
-              <a:rPr lang="he-IL" sz="1200" b="0" i="0" kern="1200" dirty="0">
-                <a:solidFill>
-                  <a:schemeClr val="tx1"/>
-                </a:solidFill>
-                <a:effectLst/>
-                <a:latin typeface="+mn-lt"/>
-                <a:ea typeface="+mn-ea"/>
-                <a:cs typeface="+mn-cs"/>
-              </a:rPr>
-              <a:t>בשלב הראשון הם סרקו 8,258 וריאנטים של </a:t>
-            </a:r>
-            <a:r>
-              <a:rPr lang="en-US" sz="1200" b="0" i="0" kern="1200" dirty="0">
-                <a:solidFill>
-                  <a:schemeClr val="tx1"/>
-                </a:solidFill>
-                <a:effectLst/>
-                <a:latin typeface="+mn-lt"/>
-                <a:ea typeface="+mn-ea"/>
-                <a:cs typeface="+mn-cs"/>
-              </a:rPr>
-              <a:t>TP53</a:t>
-            </a:r>
-            <a:r>
-              <a:rPr lang="he-IL" sz="1200" b="0" i="0" kern="1200" dirty="0">
-                <a:solidFill>
-                  <a:schemeClr val="tx1"/>
-                </a:solidFill>
-                <a:effectLst/>
-                <a:latin typeface="+mn-lt"/>
-                <a:ea typeface="+mn-ea"/>
-                <a:cs typeface="+mn-cs"/>
-              </a:rPr>
-              <a:t> ע״י הכנסתם לשני קווי תאים </a:t>
-            </a:r>
-            <a:r>
-              <a:rPr lang="he-IL" sz="1200" b="0" i="0" kern="1200" dirty="0" err="1">
-                <a:solidFill>
-                  <a:schemeClr val="tx1"/>
-                </a:solidFill>
-                <a:effectLst/>
-                <a:latin typeface="+mn-lt"/>
-                <a:ea typeface="+mn-ea"/>
-                <a:cs typeface="+mn-cs"/>
-              </a:rPr>
-              <a:t>איזוגניים</a:t>
-            </a:r>
-            <a:r>
-              <a:rPr lang="he-IL" sz="1200" b="0" i="0" kern="1200" dirty="0">
-                <a:solidFill>
-                  <a:schemeClr val="tx1"/>
-                </a:solidFill>
-                <a:effectLst/>
-                <a:latin typeface="+mn-lt"/>
-                <a:ea typeface="+mn-ea"/>
-                <a:cs typeface="+mn-cs"/>
-              </a:rPr>
-              <a:t>: אחד עם </a:t>
-            </a:r>
-            <a:r>
-              <a:rPr lang="en-US" sz="1200" b="0" i="0" kern="1200" dirty="0">
-                <a:solidFill>
-                  <a:schemeClr val="tx1"/>
-                </a:solidFill>
-                <a:effectLst/>
-                <a:latin typeface="+mn-lt"/>
-                <a:ea typeface="+mn-ea"/>
-                <a:cs typeface="+mn-cs"/>
-              </a:rPr>
-              <a:t>p53</a:t>
-            </a:r>
-            <a:r>
-              <a:rPr lang="he-IL" sz="1200" b="0" i="0" kern="1200" dirty="0">
-                <a:solidFill>
-                  <a:schemeClr val="tx1"/>
-                </a:solidFill>
-                <a:effectLst/>
-                <a:latin typeface="+mn-lt"/>
-                <a:ea typeface="+mn-ea"/>
-                <a:cs typeface="+mn-cs"/>
-              </a:rPr>
-              <a:t> תקין ואחד בלי, וטיפלו בהם ב-</a:t>
-            </a:r>
-            <a:r>
-              <a:rPr lang="en-US" sz="1200" b="0" i="0" kern="1200" dirty="0">
-                <a:solidFill>
-                  <a:schemeClr val="tx1"/>
-                </a:solidFill>
-                <a:effectLst/>
-                <a:latin typeface="+mn-lt"/>
-                <a:ea typeface="+mn-ea"/>
-                <a:cs typeface="+mn-cs"/>
-              </a:rPr>
-              <a:t>nultlin-3</a:t>
-            </a:r>
-            <a:r>
-              <a:rPr lang="he-IL" sz="1200" b="0" i="0" kern="1200" dirty="0">
-                <a:solidFill>
-                  <a:schemeClr val="tx1"/>
-                </a:solidFill>
-                <a:effectLst/>
-                <a:latin typeface="+mn-lt"/>
-                <a:ea typeface="+mn-ea"/>
-                <a:cs typeface="+mn-cs"/>
-              </a:rPr>
-              <a:t> או ב-</a:t>
-            </a:r>
-            <a:r>
-              <a:rPr lang="en-US" sz="1200" b="0" i="0" kern="1200" dirty="0">
-                <a:solidFill>
-                  <a:schemeClr val="tx1"/>
-                </a:solidFill>
-                <a:effectLst/>
-                <a:latin typeface="+mn-lt"/>
-                <a:ea typeface="+mn-ea"/>
-                <a:cs typeface="+mn-cs"/>
-              </a:rPr>
-              <a:t>etoposide</a:t>
-            </a:r>
-            <a:r>
-              <a:rPr lang="he-IL" sz="1200" b="0" i="0" kern="1200" dirty="0">
-                <a:solidFill>
-                  <a:schemeClr val="tx1"/>
-                </a:solidFill>
-                <a:effectLst/>
-                <a:latin typeface="+mn-lt"/>
-                <a:ea typeface="+mn-ea"/>
-                <a:cs typeface="+mn-cs"/>
-              </a:rPr>
-              <a:t>. אחרי 12 ימים הם ריצפו את התאים  ששרדו כדי לראות אילו אללים נשארו בחיים.</a:t>
+              <a:t> תקין.</a:t>
             </a:r>
             <a:endParaRPr lang="en-US" sz="1200" b="0" i="0" kern="1200" dirty="0">
               <a:solidFill>

--- a/project/project_background/Final Project Presentation - Ornit - Cancer Bioinfo March 2026.pptx
+++ b/project/project_background/Final Project Presentation - Ornit - Cancer Bioinfo March 2026.pptx
@@ -5352,6 +5352,26 @@
               <a:rPr lang="he-IL" dirty="0"/>
               <a:t>, שאחראי למשל על בקרת חלוקת התא. אם יש לנו החסרה של עותקים ממנו, אנחנו עלולים לקבל חלוקה בלתי נשלטת של התא.</a:t>
             </a:r>
+            <a:endParaRPr lang="en-US" dirty="0"/>
+          </a:p>
+          <a:p>
+            <a:pPr marL="0" algn="r" defTabSz="914400" rtl="1" eaLnBrk="1" latinLnBrk="0" hangingPunct="1"/>
+            <a:endParaRPr lang="en-US" dirty="0"/>
+          </a:p>
+          <a:p>
+            <a:pPr marL="0" algn="r" defTabSz="914400" rtl="1" eaLnBrk="1" latinLnBrk="0" hangingPunct="1"/>
+            <a:r>
+              <a:rPr lang="he-IL" dirty="0"/>
+              <a:t>אני אשתמש במדד שנקרא </a:t>
+            </a:r>
+            <a:r>
+              <a:rPr lang="en-US" dirty="0"/>
+              <a:t>FGA</a:t>
+            </a:r>
+            <a:r>
+              <a:rPr lang="he-IL" dirty="0"/>
+              <a:t>, </a:t>
+            </a:r>
           </a:p>
         </p:txBody>
       </p:sp>
@@ -6131,7 +6151,23 @@
             </a:r>
             <a:r>
               <a:rPr lang="he-IL" b="0" dirty="0"/>
-              <a:t> נמוך, יהיה אחוז גבוה יותר של כאוס </a:t>
+              <a:t> נמוך</a:t>
+            </a:r>
+            <a:r>
+              <a:rPr lang="en-US" b="0" dirty="0"/>
+              <a:t> </a:t>
+            </a:r>
+            <a:r>
+              <a:rPr lang="he-IL" b="0" dirty="0"/>
+              <a:t>(</a:t>
+            </a:r>
+            <a:r>
+              <a:rPr lang="en-US" b="0" dirty="0"/>
+              <a:t>EFS</a:t>
+            </a:r>
+            <a:r>
+              <a:rPr lang="he-IL" b="0" dirty="0"/>
+              <a:t>), יהיה אחוז גבוה יותר של כאוס </a:t>
             </a:r>
             <a:r>
               <a:rPr lang="he-IL" b="0" dirty="0" err="1"/>
@@ -6139,7 +6175,23 @@
             </a:r>
             <a:r>
               <a:rPr lang="he-IL" b="0" dirty="0"/>
-              <a:t>.</a:t>
+              <a:t> (</a:t>
+            </a:r>
+            <a:r>
+              <a:rPr lang="en-US" b="0" dirty="0"/>
+              <a:t>FGA</a:t>
+            </a:r>
+            <a:r>
+              <a:rPr lang="he-IL" b="0" dirty="0"/>
+              <a:t>), שזה בעצם המדד שאני משתמשת בו כדי להעריך מה ה-</a:t>
+            </a:r>
+            <a:r>
+              <a:rPr lang="en-US" b="0" dirty="0"/>
+              <a:t>CNA</a:t>
+            </a:r>
+            <a:r>
+              <a:rPr lang="he-IL" b="0" dirty="0"/>
+              <a:t> בתא.</a:t>
             </a:r>
           </a:p>
           <a:p>
@@ -6458,7 +6510,7 @@
                 <a:ea typeface="+mn-ea"/>
                 <a:cs typeface="+mn-cs"/>
               </a:rPr>
-              <a:t>האם מדובר בכל סוגי הסרטן או שאמצע את הקורלציה רק בסוגי סרטן ספציפיים?</a:t>
+              <a:t>האם מדובר בכל סוגי הסרטן או שאמצא את הקורלציה רק בסוגי סרטן ספציפיים?</a:t>
             </a:r>
             <a:endParaRPr lang="he-IL" dirty="0"/>
           </a:p>
@@ -6567,6 +6619,127 @@
           <a:lstStyle/>
           <a:p>
             <a:pPr marL="0" algn="r" defTabSz="914400" rtl="1" eaLnBrk="1" latinLnBrk="0" hangingPunct="1"/>
+            <a:r>
+              <a:rPr lang="he-IL" dirty="0"/>
+              <a:t>ל-</a:t>
+            </a:r>
+            <a:r>
+              <a:rPr lang="en-US" dirty="0"/>
+              <a:t>GENIE</a:t>
+            </a:r>
+            <a:r>
+              <a:rPr lang="he-IL" dirty="0"/>
+              <a:t> מתוך 271 אלף </a:t>
+            </a:r>
+            <a:r>
+              <a:rPr lang="he-IL" dirty="0" err="1"/>
+              <a:t>סאמפלים</a:t>
+            </a:r>
+            <a:r>
+              <a:rPr lang="he-IL" dirty="0"/>
+              <a:t>, בערך 100 אלף עם פרמטר בשם </a:t>
+            </a:r>
+            <a:r>
+              <a:rPr lang="en-US" dirty="0"/>
+              <a:t>Fraction Genome Altered</a:t>
+            </a:r>
+            <a:r>
+              <a:rPr lang="he-IL" dirty="0"/>
+              <a:t>, שהוא בעצם פרמטר שמתאר את כל ה-</a:t>
+            </a:r>
+            <a:r>
+              <a:rPr lang="en-US" dirty="0"/>
+              <a:t>CNA</a:t>
+            </a:r>
+            <a:r>
+              <a:rPr lang="he-IL" dirty="0"/>
+              <a:t> רק לכל הגנום.</a:t>
+            </a:r>
+          </a:p>
+          <a:p>
+            <a:pPr algn="r"/>
+            <a:r>
+              <a:rPr lang="en-US" sz="1200" b="1" i="0" kern="1200" dirty="0">
+                <a:solidFill>
+                  <a:schemeClr val="tx1"/>
+                </a:solidFill>
+                <a:effectLst/>
+                <a:latin typeface="+mn-lt"/>
+                <a:ea typeface="+mn-ea"/>
+                <a:cs typeface="+mn-cs"/>
+              </a:rPr>
+              <a:t>FGA = (number of base pairs with copy number gain or loss) / (total base pairs profiled)</a:t>
+            </a:r>
+            <a:endParaRPr lang="en-US" sz="1200" b="0" i="0" kern="1200" dirty="0">
+              <a:solidFill>
+                <a:schemeClr val="tx1"/>
+              </a:solidFill>
+              <a:effectLst/>
+              <a:latin typeface="+mn-lt"/>
+              <a:ea typeface="+mn-ea"/>
+              <a:cs typeface="+mn-cs"/>
+            </a:endParaRPr>
+          </a:p>
+          <a:p>
+            <a:pPr algn="r" rtl="1"/>
+            <a:r>
+              <a:rPr lang="he-IL" dirty="0"/>
+              <a:t>אז </a:t>
+            </a:r>
+            <a:r>
+              <a:rPr lang="en-US" dirty="0"/>
+              <a:t>FGA</a:t>
+            </a:r>
+            <a:r>
+              <a:rPr lang="he-IL" dirty="0"/>
+              <a:t> בודק בכמה מהגנום יש לנו </a:t>
+            </a:r>
+            <a:r>
+              <a:rPr lang="en-US" dirty="0"/>
+              <a:t>CNA</a:t>
+            </a:r>
+            <a:r>
+              <a:rPr lang="he-IL" dirty="0"/>
+              <a:t>.</a:t>
+            </a:r>
+          </a:p>
+          <a:p>
+            <a:pPr algn="r" rtl="1"/>
+            <a:r>
+              <a:rPr lang="en-US" dirty="0"/>
+              <a:t>CNA</a:t>
+            </a:r>
+            <a:r>
+              <a:rPr lang="he-IL" dirty="0"/>
+              <a:t> מתייחס למקרה ספציפי, </a:t>
+            </a:r>
+            <a:r>
+              <a:rPr lang="en-US" dirty="0"/>
+              <a:t>FGA</a:t>
+            </a:r>
+            <a:r>
+              <a:rPr lang="he-IL" dirty="0"/>
+              <a:t> הוא </a:t>
+            </a:r>
+            <a:r>
+              <a:rPr lang="he-IL" dirty="0" err="1"/>
+              <a:t>סקאלר</a:t>
+            </a:r>
+            <a:r>
+              <a:rPr lang="he-IL" dirty="0"/>
+              <a:t> אחד שמתאר את ה-</a:t>
+            </a:r>
+            <a:r>
+              <a:rPr lang="en-US" dirty="0"/>
+              <a:t>burden</a:t>
+            </a:r>
+            <a:r>
+              <a:rPr lang="he-IL" dirty="0"/>
+              <a:t> של כל האירועים האלו.</a:t>
+            </a:r>
+          </a:p>
+          <a:p>
+            <a:pPr algn="r"/>
             <a:endParaRPr lang="he-IL" dirty="0"/>
           </a:p>
         </p:txBody>
@@ -10987,7 +11160,7 @@
         </p:nvSpPr>
         <p:spPr>
           <a:xfrm>
-            <a:off x="2294591" y="6275695"/>
+            <a:off x="2692664" y="6216715"/>
             <a:ext cx="6806672" cy="369332"/>
           </a:xfrm>
           <a:prstGeom prst="rect">
@@ -11014,10 +11187,10 @@
       </p:sp>
       <p:sp>
         <p:nvSpPr>
-          <p:cNvPr id="6" name="TextBox 5">
+          <p:cNvPr id="9" name="TextBox 8">
             <a:extLst>
               <a:ext uri="{FF2B5EF4-FFF2-40B4-BE49-F238E27FC236}">
-                <a16:creationId xmlns:a16="http://schemas.microsoft.com/office/drawing/2014/main" id="{DE6ACFC5-0DEE-FEDB-43D9-76D291C4AF84}"/>
+                <a16:creationId xmlns:a16="http://schemas.microsoft.com/office/drawing/2014/main" id="{81385257-0E5C-B594-BC2A-4AAAC6E6631F}"/>
               </a:ext>
             </a:extLst>
           </p:cNvPr>
@@ -11026,8 +11199,8 @@
         </p:nvSpPr>
         <p:spPr>
           <a:xfrm>
-            <a:off x="441533" y="-1"/>
-            <a:ext cx="3707385" cy="468000"/>
+            <a:off x="446568" y="-1"/>
+            <a:ext cx="3712984" cy="468000"/>
           </a:xfrm>
           <a:prstGeom prst="rect">
             <a:avLst/>
@@ -13933,8 +14106,8 @@
         </p:nvSpPr>
         <p:spPr>
           <a:xfrm>
-            <a:off x="441533" y="-1"/>
-            <a:ext cx="3707385" cy="468000"/>
+            <a:off x="446568" y="-1"/>
+            <a:ext cx="3712984" cy="468000"/>
           </a:xfrm>
           <a:prstGeom prst="rect">
             <a:avLst/>
@@ -14682,8 +14855,8 @@
         </p:nvSpPr>
         <p:spPr>
           <a:xfrm>
-            <a:off x="441533" y="-1"/>
-            <a:ext cx="3707385" cy="468000"/>
+            <a:off x="446568" y="-1"/>
+            <a:ext cx="3712984" cy="468000"/>
           </a:xfrm>
           <a:prstGeom prst="rect">
             <a:avLst/>
@@ -16804,10 +16977,10 @@
       </p:sp>
       <p:sp>
         <p:nvSpPr>
-          <p:cNvPr id="46" name="TextBox 45">
+          <p:cNvPr id="49" name="TextBox 48">
             <a:extLst>
               <a:ext uri="{FF2B5EF4-FFF2-40B4-BE49-F238E27FC236}">
-                <a16:creationId xmlns:a16="http://schemas.microsoft.com/office/drawing/2014/main" id="{ADC8943F-6955-FEC9-02F6-F0851680E012}"/>
+                <a16:creationId xmlns:a16="http://schemas.microsoft.com/office/drawing/2014/main" id="{A3346886-1E0C-9717-3143-983684FF5096}"/>
               </a:ext>
             </a:extLst>
           </p:cNvPr>
@@ -16816,8 +16989,8 @@
         </p:nvSpPr>
         <p:spPr>
           <a:xfrm>
-            <a:off x="441533" y="-1"/>
-            <a:ext cx="3707385" cy="468000"/>
+            <a:off x="446568" y="-1"/>
+            <a:ext cx="3712984" cy="468000"/>
           </a:xfrm>
           <a:prstGeom prst="rect">
             <a:avLst/>
@@ -18540,10 +18713,10 @@
       </p:grpSp>
       <p:sp>
         <p:nvSpPr>
-          <p:cNvPr id="11" name="TextBox 10">
+          <p:cNvPr id="33" name="TextBox 32">
             <a:extLst>
               <a:ext uri="{FF2B5EF4-FFF2-40B4-BE49-F238E27FC236}">
-                <a16:creationId xmlns:a16="http://schemas.microsoft.com/office/drawing/2014/main" id="{15457CE1-C743-9EEB-4399-59428B79CED6}"/>
+                <a16:creationId xmlns:a16="http://schemas.microsoft.com/office/drawing/2014/main" id="{5D6697AC-B138-08EF-B17D-EE1452D055FB}"/>
               </a:ext>
             </a:extLst>
           </p:cNvPr>
@@ -18552,8 +18725,8 @@
         </p:nvSpPr>
         <p:spPr>
           <a:xfrm>
-            <a:off x="441533" y="-1"/>
-            <a:ext cx="3707385" cy="468000"/>
+            <a:off x="446568" y="-1"/>
+            <a:ext cx="3712984" cy="468000"/>
           </a:xfrm>
           <a:prstGeom prst="rect">
             <a:avLst/>
@@ -20270,10 +20443,10 @@
       </p:grpSp>
       <p:sp>
         <p:nvSpPr>
-          <p:cNvPr id="11" name="TextBox 10">
+          <p:cNvPr id="33" name="TextBox 32">
             <a:extLst>
               <a:ext uri="{FF2B5EF4-FFF2-40B4-BE49-F238E27FC236}">
-                <a16:creationId xmlns:a16="http://schemas.microsoft.com/office/drawing/2014/main" id="{53149D16-B372-C4F2-14C7-6A69F94B8CEB}"/>
+                <a16:creationId xmlns:a16="http://schemas.microsoft.com/office/drawing/2014/main" id="{011AC7CC-5E93-8896-B9C3-F186819264CE}"/>
               </a:ext>
             </a:extLst>
           </p:cNvPr>
@@ -20282,8 +20455,8 @@
         </p:nvSpPr>
         <p:spPr>
           <a:xfrm>
-            <a:off x="441533" y="-1"/>
-            <a:ext cx="3707385" cy="468000"/>
+            <a:off x="446568" y="-1"/>
+            <a:ext cx="3712984" cy="468000"/>
           </a:xfrm>
           <a:prstGeom prst="rect">
             <a:avLst/>
@@ -20543,10 +20716,10 @@
       </p:sp>
       <p:sp>
         <p:nvSpPr>
-          <p:cNvPr id="7" name="TextBox 6">
+          <p:cNvPr id="13" name="TextBox 12">
             <a:extLst>
               <a:ext uri="{FF2B5EF4-FFF2-40B4-BE49-F238E27FC236}">
-                <a16:creationId xmlns:a16="http://schemas.microsoft.com/office/drawing/2014/main" id="{068359B8-3272-03D0-1E14-4E2191D01541}"/>
+                <a16:creationId xmlns:a16="http://schemas.microsoft.com/office/drawing/2014/main" id="{55CA4A04-F3CC-E50D-A930-C2617987304C}"/>
               </a:ext>
             </a:extLst>
           </p:cNvPr>
@@ -20555,8 +20728,8 @@
         </p:nvSpPr>
         <p:spPr>
           <a:xfrm>
-            <a:off x="441533" y="-1"/>
-            <a:ext cx="3707385" cy="468000"/>
+            <a:off x="446568" y="-1"/>
+            <a:ext cx="3712984" cy="468000"/>
           </a:xfrm>
           <a:prstGeom prst="rect">
             <a:avLst/>
@@ -20701,10 +20874,10 @@
       </p:graphicFrame>
       <p:sp>
         <p:nvSpPr>
-          <p:cNvPr id="3" name="TextBox 2">
+          <p:cNvPr id="6" name="TextBox 5">
             <a:extLst>
               <a:ext uri="{FF2B5EF4-FFF2-40B4-BE49-F238E27FC236}">
-                <a16:creationId xmlns:a16="http://schemas.microsoft.com/office/drawing/2014/main" id="{7BC5E143-32E1-DE53-DD19-600E8BB22E4A}"/>
+                <a16:creationId xmlns:a16="http://schemas.microsoft.com/office/drawing/2014/main" id="{47A52DF3-CC9E-2060-FEF8-AF5B00368D9C}"/>
               </a:ext>
             </a:extLst>
           </p:cNvPr>
@@ -20713,8 +20886,8 @@
         </p:nvSpPr>
         <p:spPr>
           <a:xfrm>
-            <a:off x="441533" y="-1"/>
-            <a:ext cx="3707385" cy="468000"/>
+            <a:off x="446568" y="-1"/>
+            <a:ext cx="3712984" cy="468000"/>
           </a:xfrm>
           <a:prstGeom prst="rect">
             <a:avLst/>
@@ -20861,7 +21034,7 @@
           <a:p>
             <a:r>
               <a:rPr lang="en-US" dirty="0"/>
-              <a:t>Giacomelli et al., Nature Genetics, 2018 (25,217 variants)</a:t>
+              <a:t>Giacomelli et al., Nature Genetics, 2018 (25,217 variants, 8,274 unique)</a:t>
             </a:r>
           </a:p>
           <a:p>
@@ -21221,8 +21394,8 @@
         </p:nvSpPr>
         <p:spPr>
           <a:xfrm>
-            <a:off x="2141709" y="6262047"/>
-            <a:ext cx="7859844" cy="369332"/>
+            <a:off x="2104783" y="6187700"/>
+            <a:ext cx="7945508" cy="369332"/>
           </a:xfrm>
           <a:prstGeom prst="rect">
             <a:avLst/>
@@ -21242,17 +21415,17 @@
                   <a:srgbClr val="C00000"/>
                 </a:solidFill>
               </a:rPr>
-              <a:t>Goal: show that the physical structure of the genome is breaking down</a:t>
+              <a:t>Goal: to show that the physical structure of the genome is breaking down</a:t>
             </a:r>
           </a:p>
         </p:txBody>
       </p:sp>
       <p:sp>
         <p:nvSpPr>
-          <p:cNvPr id="7" name="TextBox 6">
+          <p:cNvPr id="10" name="TextBox 9">
             <a:extLst>
               <a:ext uri="{FF2B5EF4-FFF2-40B4-BE49-F238E27FC236}">
-                <a16:creationId xmlns:a16="http://schemas.microsoft.com/office/drawing/2014/main" id="{F423C7A6-5923-08E0-84D4-4B075D6794FF}"/>
+                <a16:creationId xmlns:a16="http://schemas.microsoft.com/office/drawing/2014/main" id="{F180386E-378B-FAFF-E227-36C13857EF32}"/>
               </a:ext>
             </a:extLst>
           </p:cNvPr>
@@ -21261,8 +21434,8 @@
         </p:nvSpPr>
         <p:spPr>
           <a:xfrm>
-            <a:off x="441533" y="-1"/>
-            <a:ext cx="3707385" cy="468000"/>
+            <a:off x="446568" y="-1"/>
+            <a:ext cx="3712984" cy="468000"/>
           </a:xfrm>
           <a:prstGeom prst="rect">
             <a:avLst/>

--- a/project/project_background/Final Project Presentation - Ornit - Cancer Bioinfo March 2026.pptx
+++ b/project/project_background/Final Project Presentation - Ornit - Cancer Bioinfo March 2026.pptx
@@ -3742,7 +3742,15 @@
             </a:r>
             <a:r>
               <a:rPr lang="he-IL" dirty="0"/>
-              <a:t> ורציתי לראות את ההשפעה על כל הגנום, אילו גנים מוגברים, אילו גנים מושתקים או נמחקים בכל הגנום, לא רק </a:t>
+              <a:t> ורציתי לראות את ההשפעה על הגנום, </a:t>
+            </a:r>
+            <a:r>
+              <a:rPr lang="en-US" dirty="0"/>
+              <a:t> </a:t>
+            </a:r>
+            <a:r>
+              <a:rPr lang="he-IL" dirty="0"/>
+              <a:t>ובאופן ספציפי, גנים של סרטן, אילו גנים מוגברים, אילו גנים מושתקים או נמחקים בכל הגנום, לא רק </a:t>
             </a:r>
             <a:r>
               <a:rPr lang="en-US" dirty="0"/>
@@ -3750,15 +3758,7 @@
             </a:r>
             <a:r>
               <a:rPr lang="he-IL" dirty="0"/>
-              <a:t>. </a:t>
-            </a:r>
-            <a:r>
-              <a:rPr lang="en-US" dirty="0"/>
-              <a:t>GENIE</a:t>
-            </a:r>
-            <a:r>
-              <a:rPr lang="he-IL" dirty="0"/>
-              <a:t> של כל הגנום לא נמצא בגישה ציבורית, ולכן לא יכולתי להשתמש בזה.</a:t>
+              <a:t>.</a:t>
             </a:r>
           </a:p>
           <a:p>
@@ -3872,6 +3872,7 @@
           <a:bodyPr/>
           <a:lstStyle/>
           <a:p>
+            <a:pPr marL="0" algn="r" defTabSz="914400" rtl="1" eaLnBrk="1" latinLnBrk="0" hangingPunct="1"/>
             <a:endParaRPr lang="en-IL" dirty="0"/>
           </a:p>
         </p:txBody>
@@ -11497,7 +11498,15 @@
           <a:p>
             <a:r>
               <a:rPr lang="en-US" dirty="0"/>
-              <a:t>TP53 mutant tumors have significantly higher FGA than WT (median 0.182 vs 0.037, p &lt; 1×10⁻³⁰⁰)</a:t>
+              <a:t>TP53 mutant tumors have significantly higher FGA than WT (median 0.182 vs 0.037, p &lt; 1×10⁻</a:t>
+            </a:r>
+            <a:r>
+              <a:rPr lang="en-US" baseline="30000" dirty="0"/>
+              <a:t>300</a:t>
+            </a:r>
+            <a:r>
+              <a:rPr lang="en-US" dirty="0"/>
+              <a:t>)</a:t>
             </a:r>
           </a:p>
         </p:txBody>

--- a/project/project_background/Final Project Presentation - Ornit - Cancer Bioinfo March 2026.pptx
+++ b/project/project_background/Final Project Presentation - Ornit - Cancer Bioinfo March 2026.pptx
@@ -11095,7 +11095,7 @@
           <a:p>
             <a:r>
               <a:rPr lang="en-US" dirty="0"/>
-              <a:t>MSK-IMPACT 50K (53,292 samples, 505 cancer genes).</a:t>
+              <a:t>MSK-IMPACT (53,292 samples, 505 cancer genes).</a:t>
             </a:r>
           </a:p>
           <a:p>
@@ -11438,12 +11438,55 @@
           </a:p>
         </p:txBody>
       </p:sp>
+      <p:sp>
+        <p:nvSpPr>
+          <p:cNvPr id="13" name="TextBox 12">
+            <a:extLst>
+              <a:ext uri="{FF2B5EF4-FFF2-40B4-BE49-F238E27FC236}">
+                <a16:creationId xmlns:a16="http://schemas.microsoft.com/office/drawing/2014/main" id="{C7149966-4352-0034-EA18-0391EB8BAE2C}"/>
+              </a:ext>
+            </a:extLst>
+          </p:cNvPr>
+          <p:cNvSpPr txBox="1"/>
+          <p:nvPr/>
+        </p:nvSpPr>
+        <p:spPr>
+          <a:xfrm>
+            <a:off x="1537775" y="6076144"/>
+            <a:ext cx="9361602" cy="369332"/>
+          </a:xfrm>
+          <a:prstGeom prst="rect">
+            <a:avLst/>
+          </a:prstGeom>
+          <a:noFill/>
+        </p:spPr>
+        <p:txBody>
+          <a:bodyPr wrap="none" rtlCol="0">
+            <a:spAutoFit/>
+          </a:bodyPr>
+          <a:lstStyle/>
+          <a:p>
+            <a:r>
+              <a:rPr lang="en-US" dirty="0"/>
+              <a:t>TP53 mutant tumors have significantly higher FGA than WT (median 0.182 vs 0.037, p &lt; 1×10⁻</a:t>
+            </a:r>
+            <a:r>
+              <a:rPr lang="en-US" baseline="30000" dirty="0"/>
+              <a:t>300</a:t>
+            </a:r>
+            <a:r>
+              <a:rPr lang="en-US" dirty="0"/>
+              <a:t>)</a:t>
+            </a:r>
+          </a:p>
+        </p:txBody>
+      </p:sp>
       <p:pic>
         <p:nvPicPr>
-          <p:cNvPr id="12" name="Picture 11">
+          <p:cNvPr id="14" name="Picture 13">
             <a:extLst>
               <a:ext uri="{FF2B5EF4-FFF2-40B4-BE49-F238E27FC236}">
-                <a16:creationId xmlns:a16="http://schemas.microsoft.com/office/drawing/2014/main" id="{A2838C1F-E20B-84B8-C130-2CB38576B4F1}"/>
+                <a16:creationId xmlns:a16="http://schemas.microsoft.com/office/drawing/2014/main" id="{3295D02F-25C7-4C16-5200-8AF8D295E981}"/>
               </a:ext>
             </a:extLst>
           </p:cNvPr>
@@ -11460,57 +11503,14 @@
         </p:blipFill>
         <p:spPr>
           <a:xfrm>
-            <a:off x="1026011" y="2431007"/>
-            <a:ext cx="10139977" cy="3280581"/>
+            <a:off x="2207461" y="2231141"/>
+            <a:ext cx="7772400" cy="3671624"/>
           </a:xfrm>
           <a:prstGeom prst="rect">
             <a:avLst/>
           </a:prstGeom>
         </p:spPr>
       </p:pic>
-      <p:sp>
-        <p:nvSpPr>
-          <p:cNvPr id="13" name="TextBox 12">
-            <a:extLst>
-              <a:ext uri="{FF2B5EF4-FFF2-40B4-BE49-F238E27FC236}">
-                <a16:creationId xmlns:a16="http://schemas.microsoft.com/office/drawing/2014/main" id="{C7149966-4352-0034-EA18-0391EB8BAE2C}"/>
-              </a:ext>
-            </a:extLst>
-          </p:cNvPr>
-          <p:cNvSpPr txBox="1"/>
-          <p:nvPr/>
-        </p:nvSpPr>
-        <p:spPr>
-          <a:xfrm>
-            <a:off x="1537775" y="6076144"/>
-            <a:ext cx="9361602" cy="369332"/>
-          </a:xfrm>
-          <a:prstGeom prst="rect">
-            <a:avLst/>
-          </a:prstGeom>
-          <a:noFill/>
-        </p:spPr>
-        <p:txBody>
-          <a:bodyPr wrap="none" rtlCol="0">
-            <a:spAutoFit/>
-          </a:bodyPr>
-          <a:lstStyle/>
-          <a:p>
-            <a:r>
-              <a:rPr lang="en-US" dirty="0"/>
-              <a:t>TP53 mutant tumors have significantly higher FGA than WT (median 0.182 vs 0.037, p &lt; 1×10⁻</a:t>
-            </a:r>
-            <a:r>
-              <a:rPr lang="en-US" baseline="30000" dirty="0"/>
-              <a:t>300</a:t>
-            </a:r>
-            <a:r>
-              <a:rPr lang="en-US" dirty="0"/>
-              <a:t>)</a:t>
-            </a:r>
-          </a:p>
-        </p:txBody>
-      </p:sp>
     </p:spTree>
     <p:extLst>
       <p:ext uri="{BB962C8B-B14F-4D97-AF65-F5344CB8AC3E}">

--- a/project/project_background/Final Project Presentation - Ornit - Cancer Bioinfo March 2026.pptx
+++ b/project/project_background/Final Project Presentation - Ornit - Cancer Bioinfo March 2026.pptx
@@ -3873,7 +3873,229 @@
           <a:lstStyle/>
           <a:p>
             <a:pPr marL="0" algn="r" defTabSz="914400" rtl="1" eaLnBrk="1" latinLnBrk="0" hangingPunct="1"/>
-            <a:endParaRPr lang="en-IL" dirty="0"/>
+            <a:r>
+              <a:rPr lang="he-IL" dirty="0"/>
+              <a:t>כאן לקחתי את </a:t>
+            </a:r>
+            <a:r>
+              <a:rPr lang="he-IL" dirty="0" err="1"/>
+              <a:t>הדטא</a:t>
+            </a:r>
+            <a:r>
+              <a:rPr lang="he-IL" dirty="0"/>
+              <a:t> של </a:t>
+            </a:r>
+            <a:r>
+              <a:rPr lang="he-IL" dirty="0" err="1"/>
+              <a:t>ג׳יני</a:t>
+            </a:r>
+            <a:r>
+              <a:rPr lang="he-IL" dirty="0"/>
+              <a:t> עם פרופיל  tp53 לכל אחד </a:t>
+            </a:r>
+            <a:r>
+              <a:rPr lang="he-IL" dirty="0" err="1"/>
+              <a:t>מהסאמפלים</a:t>
+            </a:r>
+            <a:r>
+              <a:rPr lang="he-IL" dirty="0"/>
+              <a:t> (מוטנט או לא).</a:t>
+            </a:r>
+          </a:p>
+          <a:p>
+            <a:pPr marL="0" algn="r" defTabSz="914400" rtl="1" eaLnBrk="1" latinLnBrk="0" hangingPunct="1"/>
+            <a:endParaRPr lang="he-IL" dirty="0"/>
+          </a:p>
+          <a:p>
+            <a:pPr marL="0" algn="r" defTabSz="914400" rtl="1" eaLnBrk="1" latinLnBrk="0" hangingPunct="1"/>
+            <a:r>
+              <a:rPr lang="he-IL" dirty="0"/>
+              <a:t>ב-</a:t>
+            </a:r>
+            <a:r>
+              <a:rPr lang="en-US" dirty="0"/>
+              <a:t>TP53 CNA values</a:t>
+            </a:r>
+            <a:r>
+              <a:rPr lang="he-IL" dirty="0"/>
+              <a:t>: 0 אומר </a:t>
+            </a:r>
+            <a:r>
+              <a:rPr lang="en-US" dirty="0"/>
+              <a:t>WT</a:t>
+            </a:r>
+            <a:r>
+              <a:rPr lang="he-IL" dirty="0"/>
+              <a:t>, ז״א אין </a:t>
+            </a:r>
+            <a:r>
+              <a:rPr lang="en-US" dirty="0"/>
+              <a:t>copy number change</a:t>
+            </a:r>
+            <a:r>
+              <a:rPr lang="he-IL" dirty="0"/>
+              <a:t>, </a:t>
+            </a:r>
+            <a:r>
+              <a:rPr lang="en-US" dirty="0"/>
+              <a:t>-1</a:t>
+            </a:r>
+            <a:r>
+              <a:rPr lang="he-IL" dirty="0"/>
+              <a:t> זה </a:t>
+            </a:r>
+            <a:r>
+              <a:rPr lang="en-US" dirty="0"/>
+              <a:t>shallow deletion</a:t>
+            </a:r>
+            <a:r>
+              <a:rPr lang="he-IL" dirty="0"/>
+              <a:t>, </a:t>
+            </a:r>
+            <a:r>
+              <a:rPr lang="en-US" dirty="0"/>
+              <a:t>-2</a:t>
+            </a:r>
+            <a:r>
+              <a:rPr lang="he-IL" dirty="0"/>
+              <a:t> זה </a:t>
+            </a:r>
+            <a:r>
+              <a:rPr lang="en-US" dirty="0"/>
+              <a:t>deep deletion</a:t>
+            </a:r>
+            <a:r>
+              <a:rPr lang="he-IL" dirty="0"/>
+              <a:t>, 1 זה </a:t>
+            </a:r>
+            <a:r>
+              <a:rPr lang="en-US" dirty="0"/>
+              <a:t>low amplification</a:t>
+            </a:r>
+            <a:r>
+              <a:rPr lang="he-IL" dirty="0"/>
+              <a:t>, 2 זה </a:t>
+            </a:r>
+            <a:r>
+              <a:rPr lang="en-US" dirty="0"/>
+              <a:t>high amplification</a:t>
+            </a:r>
+            <a:r>
+              <a:rPr lang="he-IL" dirty="0"/>
+              <a:t>. </a:t>
+            </a:r>
+            <a:r>
+              <a:rPr lang="en-US" dirty="0"/>
+              <a:t>NP</a:t>
+            </a:r>
+            <a:r>
+              <a:rPr lang="he-IL" dirty="0"/>
+              <a:t> אומר שזה </a:t>
+            </a:r>
+            <a:r>
+              <a:rPr lang="en-US" dirty="0"/>
+              <a:t>not profiled</a:t>
+            </a:r>
+            <a:r>
+              <a:rPr lang="he-IL" dirty="0"/>
+              <a:t>. אז כאן, כל מה שהוא 0 הוא </a:t>
+            </a:r>
+            <a:r>
+              <a:rPr lang="en-US" dirty="0"/>
+              <a:t>WT</a:t>
+            </a:r>
+            <a:r>
+              <a:rPr lang="he-IL" dirty="0"/>
+              <a:t>. את זה בדקתי מול </a:t>
+            </a:r>
+            <a:r>
+              <a:rPr lang="en-US" dirty="0" err="1"/>
+              <a:t>mutantions.txt</a:t>
+            </a:r>
+            <a:r>
+              <a:rPr lang="he-IL" dirty="0"/>
+              <a:t> </a:t>
+            </a:r>
+            <a:r>
+              <a:rPr lang="he-IL" dirty="0" err="1"/>
+              <a:t>מג׳יני</a:t>
+            </a:r>
+            <a:r>
+              <a:rPr lang="he-IL" dirty="0"/>
+              <a:t>, שם מצוין לכל </a:t>
+            </a:r>
+            <a:r>
+              <a:rPr lang="he-IL" dirty="0" err="1"/>
+              <a:t>סאמפל</a:t>
+            </a:r>
+            <a:r>
+              <a:rPr lang="he-IL" dirty="0"/>
+              <a:t> איזו מוטציה של </a:t>
+            </a:r>
+            <a:r>
+              <a:rPr lang="en-US" dirty="0"/>
+              <a:t>TP53</a:t>
+            </a:r>
+            <a:r>
+              <a:rPr lang="he-IL" dirty="0"/>
+              <a:t> יש לו. </a:t>
+            </a:r>
+            <a:r>
+              <a:rPr lang="en-US" dirty="0"/>
+              <a:t>WT</a:t>
+            </a:r>
+            <a:r>
+              <a:rPr lang="he-IL" dirty="0"/>
+              <a:t> אמיתי זה כשאין לנו מוטציה ואין לנו </a:t>
+            </a:r>
+            <a:r>
+              <a:rPr lang="en-US" dirty="0"/>
+              <a:t>CNA</a:t>
+            </a:r>
+            <a:r>
+              <a:rPr lang="he-IL" dirty="0"/>
+              <a:t>. מוטציה מוגדרת </a:t>
+            </a:r>
+            <a:r>
+              <a:rPr lang="he-IL" dirty="0" err="1"/>
+              <a:t>ככזו</a:t>
+            </a:r>
+            <a:r>
+              <a:rPr lang="he-IL" dirty="0"/>
+              <a:t> אם מצוין ב-</a:t>
+            </a:r>
+            <a:r>
+              <a:rPr lang="en-US" dirty="0" err="1"/>
+              <a:t>mutations.txt</a:t>
+            </a:r>
+            <a:r>
+              <a:rPr lang="he-IL" dirty="0"/>
+              <a:t> שיש פה </a:t>
+            </a:r>
+            <a:r>
+              <a:rPr lang="en-US" dirty="0"/>
+              <a:t>somatic point mutation</a:t>
+            </a:r>
+            <a:r>
+              <a:rPr lang="he-IL" dirty="0"/>
+              <a:t>, לא משנה אם יש לנו </a:t>
+            </a:r>
+            <a:r>
+              <a:rPr lang="en-US" dirty="0"/>
+              <a:t>CNA</a:t>
+            </a:r>
+            <a:r>
+              <a:rPr lang="he-IL" dirty="0"/>
+              <a:t> עליו או לא. אם יש רק </a:t>
+            </a:r>
+            <a:r>
+              <a:rPr lang="en-US" dirty="0"/>
+              <a:t>CNA</a:t>
+            </a:r>
+            <a:r>
+              <a:rPr lang="he-IL" dirty="0"/>
+              <a:t>, אז לא החשבתי את זה כמוטציה.</a:t>
+            </a:r>
           </a:p>
         </p:txBody>
       </p:sp>
@@ -3975,7 +4197,168 @@
           <a:bodyPr/>
           <a:lstStyle/>
           <a:p>
-            <a:endParaRPr lang="en-IL" dirty="0"/>
+            <a:pPr marL="0" algn="r" defTabSz="914400" rtl="1" eaLnBrk="1" latinLnBrk="0" hangingPunct="1"/>
+            <a:r>
+              <a:rPr lang="he-IL" dirty="0"/>
+              <a:t>אז ראיתי </a:t>
+            </a:r>
+            <a:r>
+              <a:rPr lang="he-IL" dirty="0" err="1"/>
+              <a:t>שסאמפלים</a:t>
+            </a:r>
+            <a:r>
+              <a:rPr lang="he-IL" dirty="0"/>
+              <a:t> עם מוטציות ב-</a:t>
+            </a:r>
+            <a:r>
+              <a:rPr lang="en-US" dirty="0"/>
+              <a:t>TP53</a:t>
+            </a:r>
+            <a:r>
+              <a:rPr lang="he-IL" dirty="0"/>
+              <a:t> יש להן יותר כאוס </a:t>
+            </a:r>
+            <a:r>
+              <a:rPr lang="he-IL" dirty="0" err="1"/>
+              <a:t>גנומי</a:t>
+            </a:r>
+            <a:r>
+              <a:rPr lang="he-IL" dirty="0"/>
+              <a:t>, אבל האם יש איזושהי קורלציה בין כמה המוטציה פונקציונאלית לבין הכאוס </a:t>
+            </a:r>
+            <a:r>
+              <a:rPr lang="he-IL" dirty="0" err="1"/>
+              <a:t>הגנומי</a:t>
+            </a:r>
+            <a:r>
+              <a:rPr lang="he-IL" dirty="0"/>
+              <a:t> שמדדנו? ז״א האם ככל שמוטציה פחות פונקציונאלית ככה יש לנו יותר כאוס?</a:t>
+            </a:r>
+          </a:p>
+          <a:p>
+            <a:pPr marL="0" algn="r" defTabSz="914400" rtl="1" eaLnBrk="1" latinLnBrk="0" hangingPunct="1"/>
+            <a:r>
+              <a:rPr lang="he-IL" dirty="0"/>
+              <a:t>את ה-</a:t>
+            </a:r>
+            <a:r>
+              <a:rPr lang="en-US" dirty="0"/>
+              <a:t>EFS</a:t>
+            </a:r>
+            <a:r>
+              <a:rPr lang="he-IL" dirty="0"/>
+              <a:t> הוצאתי מ-</a:t>
+            </a:r>
+            <a:r>
+              <a:rPr lang="en-US" dirty="0" err="1"/>
+              <a:t>Giancomelli</a:t>
+            </a:r>
+            <a:r>
+              <a:rPr lang="he-IL" dirty="0"/>
+              <a:t>.</a:t>
+            </a:r>
+          </a:p>
+          <a:p>
+            <a:pPr marL="0" algn="r" defTabSz="914400" rtl="1" eaLnBrk="1" latinLnBrk="0" hangingPunct="1"/>
+            <a:r>
+              <a:rPr lang="he-IL" dirty="0"/>
+              <a:t>הקו הכחול הוא ה-</a:t>
+            </a:r>
+            <a:r>
+              <a:rPr lang="en-US" dirty="0"/>
+              <a:t>linear regression fit</a:t>
+            </a:r>
+            <a:r>
+              <a:rPr lang="he-IL" dirty="0"/>
+              <a:t>.</a:t>
+            </a:r>
+          </a:p>
+          <a:p>
+            <a:pPr marL="0" algn="r" defTabSz="914400" rtl="1" eaLnBrk="1" latinLnBrk="0" hangingPunct="1"/>
+            <a:r>
+              <a:rPr lang="he-IL" dirty="0"/>
+              <a:t>לקחתי את שם המוטציה (נניח </a:t>
+            </a:r>
+            <a:r>
+              <a:rPr lang="en-US" dirty="0"/>
+              <a:t>R175H</a:t>
+            </a:r>
+            <a:r>
+              <a:rPr lang="he-IL" dirty="0"/>
+              <a:t>) </a:t>
+            </a:r>
+            <a:r>
+              <a:rPr lang="he-IL" dirty="0" err="1"/>
+              <a:t>מג׳יני</a:t>
+            </a:r>
+            <a:r>
+              <a:rPr lang="he-IL" dirty="0"/>
+              <a:t> ובדקתי </a:t>
+            </a:r>
+            <a:r>
+              <a:rPr lang="he-IL" dirty="0" err="1"/>
+              <a:t>בדטא</a:t>
+            </a:r>
+            <a:r>
+              <a:rPr lang="he-IL" dirty="0"/>
+              <a:t> של </a:t>
+            </a:r>
+            <a:r>
+              <a:rPr lang="en-US" dirty="0"/>
+              <a:t>Giacomelli</a:t>
+            </a:r>
+            <a:r>
+              <a:rPr lang="he-IL" dirty="0"/>
+              <a:t> מה ה-</a:t>
+            </a:r>
+            <a:r>
+              <a:rPr lang="en-US" dirty="0"/>
+              <a:t>EFS</a:t>
+            </a:r>
+            <a:r>
+              <a:rPr lang="he-IL" dirty="0"/>
+              <a:t> של המוטציה הזו. </a:t>
+            </a:r>
+          </a:p>
+          <a:p>
+            <a:pPr marL="0" algn="r" defTabSz="914400" rtl="1" eaLnBrk="1" latinLnBrk="0" hangingPunct="1"/>
+            <a:r>
+              <a:rPr lang="he-IL" dirty="0"/>
+              <a:t>הקורלציה קיימת, אבל האפקט הוא די נמוך. יצא לי </a:t>
+            </a:r>
+            <a:r>
+              <a:rPr lang="he-IL" dirty="0" err="1"/>
+              <a:t>סיגניפיקנטי</a:t>
+            </a:r>
+            <a:r>
+              <a:rPr lang="he-IL" dirty="0"/>
+              <a:t> ככל הנראה בגלל כמות </a:t>
+            </a:r>
+            <a:r>
+              <a:rPr lang="he-IL" dirty="0" err="1"/>
+              <a:t>סאמפלים</a:t>
+            </a:r>
+            <a:r>
+              <a:rPr lang="he-IL" dirty="0"/>
+              <a:t> גבוהה, אבל האפקט הביולוגי די נמוך, ז״א כמה </a:t>
+            </a:r>
+            <a:r>
+              <a:rPr lang="en-US" dirty="0"/>
+              <a:t>TP53</a:t>
+            </a:r>
+            <a:r>
+              <a:rPr lang="he-IL" dirty="0"/>
+              <a:t> לא פונקציונלי לא בהכרח חוזה לנו כמה כאוס </a:t>
+            </a:r>
+            <a:r>
+              <a:rPr lang="he-IL" dirty="0" err="1"/>
+              <a:t>גנומי</a:t>
+            </a:r>
+            <a:r>
+              <a:rPr lang="he-IL"/>
+              <a:t> יהיה.</a:t>
+            </a:r>
+            <a:endParaRPr lang="he-IL" dirty="0"/>
           </a:p>
         </p:txBody>
       </p:sp>
@@ -11764,8 +12147,8 @@
         </p:blipFill>
         <p:spPr>
           <a:xfrm>
-            <a:off x="2207461" y="2344398"/>
-            <a:ext cx="7772400" cy="3288323"/>
+            <a:off x="2081147" y="2344398"/>
+            <a:ext cx="8029705" cy="3397183"/>
           </a:xfrm>
           <a:prstGeom prst="rect">
             <a:avLst/>

--- a/project/project_background/Final Project Presentation - Ornit - Cancer Bioinfo March 2026.pptx
+++ b/project/project_background/Final Project Presentation - Ornit - Cancer Bioinfo March 2026.pptx
@@ -4355,10 +4355,9 @@
               <a:t>גנומי</a:t>
             </a:r>
             <a:r>
-              <a:rPr lang="he-IL"/>
+              <a:rPr lang="he-IL" dirty="0"/>
               <a:t> יהיה.</a:t>
             </a:r>
-            <a:endParaRPr lang="he-IL" dirty="0"/>
           </a:p>
         </p:txBody>
       </p:sp>
@@ -12127,10 +12126,10 @@
       </p:sp>
       <p:pic>
         <p:nvPicPr>
-          <p:cNvPr id="2" name="Picture 1">
+          <p:cNvPr id="5" name="Picture 4">
             <a:extLst>
               <a:ext uri="{FF2B5EF4-FFF2-40B4-BE49-F238E27FC236}">
-                <a16:creationId xmlns:a16="http://schemas.microsoft.com/office/drawing/2014/main" id="{ADBE5B33-E5F3-6AD4-8C1B-5F54D4152DFB}"/>
+                <a16:creationId xmlns:a16="http://schemas.microsoft.com/office/drawing/2014/main" id="{4BDB3D5D-6379-7396-68F4-896AC6A7FB60}"/>
               </a:ext>
             </a:extLst>
           </p:cNvPr>
@@ -12147,8 +12146,8 @@
         </p:blipFill>
         <p:spPr>
           <a:xfrm>
-            <a:off x="2081147" y="2344398"/>
-            <a:ext cx="8029705" cy="3397183"/>
+            <a:off x="1977685" y="2195771"/>
+            <a:ext cx="8236629" cy="3492647"/>
           </a:xfrm>
           <a:prstGeom prst="rect">
             <a:avLst/>
@@ -12408,8 +12407,8 @@
         </p:blipFill>
         <p:spPr>
           <a:xfrm>
-            <a:off x="1815753" y="2526850"/>
-            <a:ext cx="8560493" cy="3215895"/>
+            <a:off x="1410281" y="2286001"/>
+            <a:ext cx="9371437" cy="3520540"/>
           </a:xfrm>
           <a:prstGeom prst="rect">
             <a:avLst/>

--- a/project/project_background/Final Project Presentation - Ornit - Cancer Bioinfo March 2026.pptx
+++ b/project/project_background/Final Project Presentation - Ornit - Cancer Bioinfo March 2026.pptx
@@ -4465,6 +4465,39 @@
           <a:bodyPr/>
           <a:lstStyle/>
           <a:p>
+            <a:pPr marL="0" algn="r" defTabSz="914400" rtl="1" eaLnBrk="1" latinLnBrk="0" hangingPunct="1"/>
+            <a:r>
+              <a:rPr lang="he-IL" dirty="0"/>
+              <a:t>כאן רציתי לבדוק האם מוטציות </a:t>
+            </a:r>
+            <a:r>
+              <a:rPr lang="he-IL" dirty="0" err="1"/>
+              <a:t>הוטספוט</a:t>
+            </a:r>
+            <a:r>
+              <a:rPr lang="he-IL" dirty="0"/>
+              <a:t> גורמות ליותר </a:t>
+            </a:r>
+            <a:r>
+              <a:rPr lang="en-US" dirty="0"/>
+              <a:t>FGA</a:t>
+            </a:r>
+            <a:r>
+              <a:rPr lang="he-IL" dirty="0"/>
+              <a:t> לעומת מוטציות נדירות. הגרף השמאלי מראה את המוטציות הכי שכיחות ב-</a:t>
+            </a:r>
+            <a:r>
+              <a:rPr lang="en-US" dirty="0"/>
+              <a:t>TP53</a:t>
+            </a:r>
+            <a:r>
+              <a:rPr lang="he-IL" dirty="0"/>
+              <a:t>, מסודרות עפ״י חציון </a:t>
+            </a:r>
+            <a:r>
+              <a:rPr lang="he-IL"/>
+              <a:t>יורד משמאל לימין.</a:t>
+            </a:r>
             <a:endParaRPr lang="en-IL" dirty="0"/>
           </a:p>
         </p:txBody>
@@ -12407,8 +12440,8 @@
         </p:blipFill>
         <p:spPr>
           <a:xfrm>
-            <a:off x="1410281" y="2286001"/>
-            <a:ext cx="9371437" cy="3520540"/>
+            <a:off x="1213708" y="2286001"/>
+            <a:ext cx="9764583" cy="3668232"/>
           </a:xfrm>
           <a:prstGeom prst="rect">
             <a:avLst/>

--- a/project/project_background/Final Project Presentation - Ornit - Cancer Bioinfo March 2026.pptx
+++ b/project/project_background/Final Project Presentation - Ornit - Cancer Bioinfo March 2026.pptx
@@ -4492,11 +4492,39 @@
             </a:r>
             <a:r>
               <a:rPr lang="he-IL" dirty="0"/>
-              <a:t>, מסודרות עפ״י חציון </a:t>
-            </a:r>
-            <a:r>
-              <a:rPr lang="he-IL"/>
-              <a:t>יורד משמאל לימין.</a:t>
+              <a:t>, מסודרות עפ״י חציון יורד משמאל לימין. הקו המקווקו הכחול זה החציון של ה-</a:t>
+            </a:r>
+            <a:r>
+              <a:rPr lang="en-US" dirty="0"/>
+              <a:t>FGA</a:t>
+            </a:r>
+            <a:r>
+              <a:rPr lang="he-IL" dirty="0"/>
+              <a:t> של ה-</a:t>
+            </a:r>
+            <a:r>
+              <a:rPr lang="en-US" dirty="0"/>
+              <a:t>WT</a:t>
+            </a:r>
+            <a:r>
+              <a:rPr lang="he-IL" dirty="0"/>
+              <a:t>. בבירור רואים פה שהחציונים של כל המוטציות הכי שכיחות הם הרבה מעל הממוצע של ה-</a:t>
+            </a:r>
+            <a:r>
+              <a:rPr lang="en-US" dirty="0"/>
+              <a:t>WT</a:t>
+            </a:r>
+            <a:r>
+              <a:rPr lang="he-IL" dirty="0"/>
+              <a:t>, ז״א כולן גורמות לכאוס </a:t>
+            </a:r>
+            <a:r>
+              <a:rPr lang="he-IL" dirty="0" err="1"/>
+              <a:t>גנומי</a:t>
+            </a:r>
+            <a:r>
+              <a:rPr lang="he-IL" dirty="0"/>
+              <a:t>.</a:t>
             </a:r>
             <a:endParaRPr lang="en-IL" dirty="0"/>
           </a:p>
@@ -12434,14 +12462,15 @@
         </p:nvPicPr>
         <p:blipFill>
           <a:blip r:embed="rId3"/>
+          <a:srcRect r="50000"/>
           <a:stretch>
             <a:fillRect/>
           </a:stretch>
         </p:blipFill>
         <p:spPr>
           <a:xfrm>
-            <a:off x="1213708" y="2286001"/>
-            <a:ext cx="9764583" cy="3668232"/>
+            <a:off x="597021" y="2199726"/>
+            <a:ext cx="5092447" cy="3826128"/>
           </a:xfrm>
           <a:prstGeom prst="rect">
             <a:avLst/>

--- a/project/project_background/Final Project Presentation - Ornit - Cancer Bioinfo March 2026.pptx
+++ b/project/project_background/Final Project Presentation - Ornit - Cancer Bioinfo March 2026.pptx
@@ -5,7 +5,7 @@
     <p:sldMasterId id="2147484297" r:id="rId1"/>
   </p:sldMasterIdLst>
   <p:notesMasterIdLst>
-    <p:notesMasterId r:id="rId23"/>
+    <p:notesMasterId r:id="rId24"/>
   </p:notesMasterIdLst>
   <p:sldIdLst>
     <p:sldId id="256" r:id="rId2"/>
@@ -21,14 +21,15 @@
     <p:sldId id="271" r:id="rId12"/>
     <p:sldId id="366" r:id="rId13"/>
     <p:sldId id="367" r:id="rId14"/>
-    <p:sldId id="368" r:id="rId15"/>
-    <p:sldId id="374" r:id="rId16"/>
-    <p:sldId id="369" r:id="rId17"/>
-    <p:sldId id="365" r:id="rId18"/>
-    <p:sldId id="370" r:id="rId19"/>
-    <p:sldId id="371" r:id="rId20"/>
-    <p:sldId id="372" r:id="rId21"/>
-    <p:sldId id="373" r:id="rId22"/>
+    <p:sldId id="375" r:id="rId15"/>
+    <p:sldId id="368" r:id="rId16"/>
+    <p:sldId id="374" r:id="rId17"/>
+    <p:sldId id="369" r:id="rId18"/>
+    <p:sldId id="365" r:id="rId19"/>
+    <p:sldId id="370" r:id="rId20"/>
+    <p:sldId id="371" r:id="rId21"/>
+    <p:sldId id="372" r:id="rId22"/>
+    <p:sldId id="373" r:id="rId23"/>
   </p:sldIdLst>
   <p:sldSz cx="12192000" cy="6858000"/>
   <p:notesSz cx="6858000" cy="9144000"/>
@@ -4468,15 +4469,7 @@
             <a:pPr marL="0" algn="r" defTabSz="914400" rtl="1" eaLnBrk="1" latinLnBrk="0" hangingPunct="1"/>
             <a:r>
               <a:rPr lang="he-IL" dirty="0"/>
-              <a:t>כאן רציתי לבדוק האם מוטציות </a:t>
-            </a:r>
-            <a:r>
-              <a:rPr lang="he-IL" dirty="0" err="1"/>
-              <a:t>הוטספוט</a:t>
-            </a:r>
-            <a:r>
-              <a:rPr lang="he-IL" dirty="0"/>
-              <a:t> גורמות ליותר </a:t>
+              <a:t>כאן רציתי לבדוק האם מוטציות שכיחות גורמות ליותר </a:t>
             </a:r>
             <a:r>
               <a:rPr lang="en-US" dirty="0"/>
@@ -4508,7 +4501,7 @@
             </a:r>
             <a:r>
               <a:rPr lang="he-IL" dirty="0"/>
-              <a:t>. בבירור רואים פה שהחציונים של כל המוטציות הכי שכיחות הם הרבה מעל הממוצע של ה-</a:t>
+              <a:t>. אפשר לראות די ברור שהחציונים של כל המוטציות הכי שכיחות הן מעל הממוצע של ה-</a:t>
             </a:r>
             <a:r>
               <a:rPr lang="en-US" dirty="0"/>
@@ -4524,9 +4517,48 @@
             </a:r>
             <a:r>
               <a:rPr lang="he-IL" dirty="0"/>
-              <a:t>.</a:t>
-            </a:r>
-            <a:endParaRPr lang="en-IL" dirty="0"/>
+              <a:t>, אבל המוטציות הנדירות גורמות ליותר כאוס, וגם הן יותר </a:t>
+            </a:r>
+            <a:r>
+              <a:rPr lang="he-IL" dirty="0" err="1"/>
+              <a:t>וריאביליות</a:t>
+            </a:r>
+            <a:r>
+              <a:rPr lang="he-IL" dirty="0"/>
+              <a:t>. ההבדל גם </a:t>
+            </a:r>
+            <a:r>
+              <a:rPr lang="he-IL" dirty="0" err="1"/>
+              <a:t>סיגניפיקנטי</a:t>
+            </a:r>
+            <a:r>
+              <a:rPr lang="he-IL" dirty="0"/>
+              <a:t> סטטיסטית. מה שכן, לקחתי את המוטציות הנדירות ביותר עם </a:t>
+            </a:r>
+            <a:r>
+              <a:rPr lang="en-US" dirty="0"/>
+              <a:t>n=10</a:t>
+            </a:r>
+            <a:r>
+              <a:rPr lang="he-IL" dirty="0"/>
+              <a:t> לעומת השכיחות יותר, עם מאות </a:t>
+            </a:r>
+            <a:r>
+              <a:rPr lang="he-IL" dirty="0" err="1"/>
+              <a:t>סאמפלים</a:t>
+            </a:r>
+            <a:r>
+              <a:rPr lang="he-IL" dirty="0"/>
+              <a:t> לכל אחד, אז החציון הוא לא בהכרח יציב. אם היו לנו יותר </a:t>
+            </a:r>
+            <a:r>
+              <a:rPr lang="he-IL" dirty="0" err="1"/>
+              <a:t>סאמפלים</a:t>
+            </a:r>
+            <a:r>
+              <a:rPr lang="he-IL" dirty="0"/>
+              <a:t> אולי התמונה הייתה אחרת.</a:t>
+            </a:r>
           </a:p>
         </p:txBody>
       </p:sp>
@@ -4573,6 +4605,182 @@
 </file>
 
 <file path=ppt/notesSlides/notesSlide14.xml><?xml version="1.0" encoding="utf-8"?>
+<p:notes xmlns:a="http://schemas.openxmlformats.org/drawingml/2006/main" xmlns:r="http://schemas.openxmlformats.org/officeDocument/2006/relationships" xmlns:p="http://schemas.openxmlformats.org/presentationml/2006/main">
+  <p:cSld>
+    <p:spTree>
+      <p:nvGrpSpPr>
+        <p:cNvPr id="1" name="">
+          <a:extLst>
+            <a:ext uri="{FF2B5EF4-FFF2-40B4-BE49-F238E27FC236}">
+              <a16:creationId xmlns:a16="http://schemas.microsoft.com/office/drawing/2014/main" id="{832C97C8-0AD7-A969-2D58-74FFA090CCC3}"/>
+            </a:ext>
+          </a:extLst>
+        </p:cNvPr>
+        <p:cNvGrpSpPr/>
+        <p:nvPr/>
+      </p:nvGrpSpPr>
+      <p:grpSpPr>
+        <a:xfrm>
+          <a:off x="0" y="0"/>
+          <a:ext cx="0" cy="0"/>
+          <a:chOff x="0" y="0"/>
+          <a:chExt cx="0" cy="0"/>
+        </a:xfrm>
+      </p:grpSpPr>
+      <p:sp>
+        <p:nvSpPr>
+          <p:cNvPr id="2" name="Slide Image Placeholder 1">
+            <a:extLst>
+              <a:ext uri="{FF2B5EF4-FFF2-40B4-BE49-F238E27FC236}">
+                <a16:creationId xmlns:a16="http://schemas.microsoft.com/office/drawing/2014/main" id="{F179C487-C3B3-3743-7553-535131712D59}"/>
+              </a:ext>
+            </a:extLst>
+          </p:cNvPr>
+          <p:cNvSpPr>
+            <a:spLocks noGrp="1" noRot="1" noChangeAspect="1"/>
+          </p:cNvSpPr>
+          <p:nvPr>
+            <p:ph type="sldImg"/>
+          </p:nvPr>
+        </p:nvSpPr>
+        <p:spPr/>
+      </p:sp>
+      <p:sp>
+        <p:nvSpPr>
+          <p:cNvPr id="3" name="Notes Placeholder 2">
+            <a:extLst>
+              <a:ext uri="{FF2B5EF4-FFF2-40B4-BE49-F238E27FC236}">
+                <a16:creationId xmlns:a16="http://schemas.microsoft.com/office/drawing/2014/main" id="{6CCD741E-53C0-A2DA-D837-CF9F972924C9}"/>
+              </a:ext>
+            </a:extLst>
+          </p:cNvPr>
+          <p:cNvSpPr>
+            <a:spLocks noGrp="1"/>
+          </p:cNvSpPr>
+          <p:nvPr>
+            <p:ph type="body" idx="1"/>
+          </p:nvPr>
+        </p:nvSpPr>
+        <p:spPr/>
+        <p:txBody>
+          <a:bodyPr/>
+          <a:lstStyle/>
+          <a:p>
+            <a:pPr marL="0" algn="r" defTabSz="914400" rtl="1" eaLnBrk="1" latinLnBrk="0" hangingPunct="1"/>
+            <a:r>
+              <a:rPr lang="he-IL" dirty="0"/>
+              <a:t>פה רציתי לעשות אנליזה עפ״י מיקום החומצות האמיניות. רציתי לראות האם יש אזורים מסוימים בגנום עם יותר מוטציות או לא.</a:t>
+            </a:r>
+          </a:p>
+          <a:p>
+            <a:pPr marL="0" algn="r" defTabSz="914400" rtl="1" eaLnBrk="1" latinLnBrk="0" hangingPunct="1"/>
+            <a:r>
+              <a:rPr lang="he-IL" dirty="0"/>
+              <a:t>בצד שמאל אפשר לראות את האזורים הכי שכיחים נמצאים סביב חומצות אמינו </a:t>
+            </a:r>
+            <a:r>
+              <a:rPr lang="en-US" dirty="0"/>
+              <a:t>245</a:t>
+            </a:r>
+            <a:r>
+              <a:rPr lang="he-IL" dirty="0"/>
+              <a:t>, </a:t>
+            </a:r>
+            <a:r>
+              <a:rPr lang="en-US" dirty="0"/>
+              <a:t>248</a:t>
+            </a:r>
+            <a:r>
+              <a:rPr lang="he-IL" dirty="0"/>
+              <a:t>, </a:t>
+            </a:r>
+            <a:r>
+              <a:rPr lang="en-US" dirty="0"/>
+              <a:t>273</a:t>
+            </a:r>
+            <a:r>
+              <a:rPr lang="he-IL" dirty="0"/>
+              <a:t>, 175. אלו </a:t>
+            </a:r>
+            <a:r>
+              <a:rPr lang="he-IL" dirty="0" err="1"/>
+              <a:t>הוטספוט</a:t>
+            </a:r>
+            <a:r>
+              <a:rPr lang="he-IL" dirty="0"/>
+              <a:t> קנוניים, כולם נמצאים ב-</a:t>
+            </a:r>
+            <a:r>
+              <a:rPr lang="en-US" dirty="0"/>
+              <a:t>DNA binding domains</a:t>
+            </a:r>
+            <a:r>
+              <a:rPr lang="he-IL" dirty="0"/>
+              <a:t> (שהוא בעצמו </a:t>
+            </a:r>
+            <a:r>
+              <a:rPr lang="he-IL" dirty="0" err="1"/>
+              <a:t>באיזור</a:t>
+            </a:r>
+            <a:r>
+              <a:rPr lang="he-IL" dirty="0"/>
+              <a:t> ה-100-290 חומצות אמיניות). כן אפשר להגיד שרוב המוטציות נמצאות באזור הזה, אבל עפ״י הגרף הימני, אי אפשר להגיד שזה אומר שבהכרח שנקבל יותר כאוס </a:t>
+            </a:r>
+            <a:r>
+              <a:rPr lang="he-IL" dirty="0" err="1"/>
+              <a:t>גנומי</a:t>
+            </a:r>
+            <a:r>
+              <a:rPr lang="he-IL" dirty="0"/>
+              <a:t>. המוטציות ההרסניות ביותר הן גם הנדירות ביותר.</a:t>
+            </a:r>
+            <a:endParaRPr lang="en-IL" dirty="0"/>
+          </a:p>
+        </p:txBody>
+      </p:sp>
+      <p:sp>
+        <p:nvSpPr>
+          <p:cNvPr id="4" name="Slide Number Placeholder 3">
+            <a:extLst>
+              <a:ext uri="{FF2B5EF4-FFF2-40B4-BE49-F238E27FC236}">
+                <a16:creationId xmlns:a16="http://schemas.microsoft.com/office/drawing/2014/main" id="{8F9381B7-4819-DE5A-FAA1-23DF5608550E}"/>
+              </a:ext>
+            </a:extLst>
+          </p:cNvPr>
+          <p:cNvSpPr>
+            <a:spLocks noGrp="1"/>
+          </p:cNvSpPr>
+          <p:nvPr>
+            <p:ph type="sldNum" sz="quarter" idx="5"/>
+          </p:nvPr>
+        </p:nvSpPr>
+        <p:spPr/>
+        <p:txBody>
+          <a:bodyPr/>
+          <a:lstStyle/>
+          <a:p>
+            <a:fld id="{7242DB82-1DC1-9846-88D7-11B539157949}" type="slidenum">
+              <a:rPr lang="en-IL" smtClean="0"/>
+              <a:t>14</a:t>
+            </a:fld>
+            <a:endParaRPr lang="en-IL"/>
+          </a:p>
+        </p:txBody>
+      </p:sp>
+    </p:spTree>
+    <p:extLst>
+      <p:ext uri="{BB962C8B-B14F-4D97-AF65-F5344CB8AC3E}">
+        <p14:creationId xmlns:p14="http://schemas.microsoft.com/office/powerpoint/2010/main" val="3328523982"/>
+      </p:ext>
+    </p:extLst>
+  </p:cSld>
+  <p:clrMapOvr>
+    <a:masterClrMapping/>
+  </p:clrMapOvr>
+</p:notes>
+</file>
+
+<file path=ppt/notesSlides/notesSlide15.xml><?xml version="1.0" encoding="utf-8"?>
 <p:notes xmlns:a="http://schemas.openxmlformats.org/drawingml/2006/main" xmlns:r="http://schemas.openxmlformats.org/officeDocument/2006/relationships" xmlns:p="http://schemas.openxmlformats.org/presentationml/2006/main">
   <p:cSld>
     <p:spTree>
@@ -4661,7 +4869,7 @@
           <a:p>
             <a:fld id="{7242DB82-1DC1-9846-88D7-11B539157949}" type="slidenum">
               <a:rPr lang="en-IL" smtClean="0"/>
-              <a:t>14</a:t>
+              <a:t>15</a:t>
             </a:fld>
             <a:endParaRPr lang="en-IL"/>
           </a:p>
@@ -4680,7 +4888,7 @@
 </p:notes>
 </file>
 
-<file path=ppt/notesSlides/notesSlide15.xml><?xml version="1.0" encoding="utf-8"?>
+<file path=ppt/notesSlides/notesSlide16.xml><?xml version="1.0" encoding="utf-8"?>
 <p:notes xmlns:a="http://schemas.openxmlformats.org/drawingml/2006/main" xmlns:r="http://schemas.openxmlformats.org/officeDocument/2006/relationships" xmlns:p="http://schemas.openxmlformats.org/presentationml/2006/main">
   <p:cSld>
     <p:spTree>
@@ -4769,7 +4977,7 @@
           <a:p>
             <a:fld id="{7242DB82-1DC1-9846-88D7-11B539157949}" type="slidenum">
               <a:rPr lang="en-IL" smtClean="0"/>
-              <a:t>15</a:t>
+              <a:t>16</a:t>
             </a:fld>
             <a:endParaRPr lang="en-IL"/>
           </a:p>
@@ -4788,7 +4996,7 @@
 </p:notes>
 </file>
 
-<file path=ppt/notesSlides/notesSlide16.xml><?xml version="1.0" encoding="utf-8"?>
+<file path=ppt/notesSlides/notesSlide17.xml><?xml version="1.0" encoding="utf-8"?>
 <p:notes xmlns:a="http://schemas.openxmlformats.org/drawingml/2006/main" xmlns:r="http://schemas.openxmlformats.org/officeDocument/2006/relationships" xmlns:p="http://schemas.openxmlformats.org/presentationml/2006/main">
   <p:cSld>
     <p:spTree>
@@ -4877,7 +5085,7 @@
           <a:p>
             <a:fld id="{7242DB82-1DC1-9846-88D7-11B539157949}" type="slidenum">
               <a:rPr lang="en-IL" smtClean="0"/>
-              <a:t>16</a:t>
+              <a:t>17</a:t>
             </a:fld>
             <a:endParaRPr lang="en-IL"/>
           </a:p>
@@ -4896,7 +5104,7 @@
 </p:notes>
 </file>
 
-<file path=ppt/notesSlides/notesSlide17.xml><?xml version="1.0" encoding="utf-8"?>
+<file path=ppt/notesSlides/notesSlide18.xml><?xml version="1.0" encoding="utf-8"?>
 <p:notes xmlns:a="http://schemas.openxmlformats.org/drawingml/2006/main" xmlns:r="http://schemas.openxmlformats.org/officeDocument/2006/relationships" xmlns:p="http://schemas.openxmlformats.org/presentationml/2006/main">
   <p:cSld>
     <p:spTree>
@@ -4985,7 +5193,7 @@
           <a:p>
             <a:fld id="{7242DB82-1DC1-9846-88D7-11B539157949}" type="slidenum">
               <a:rPr lang="en-IL" smtClean="0"/>
-              <a:t>17</a:t>
+              <a:t>18</a:t>
             </a:fld>
             <a:endParaRPr lang="en-IL"/>
           </a:p>
@@ -5004,7 +5212,7 @@
 </p:notes>
 </file>
 
-<file path=ppt/notesSlides/notesSlide18.xml><?xml version="1.0" encoding="utf-8"?>
+<file path=ppt/notesSlides/notesSlide19.xml><?xml version="1.0" encoding="utf-8"?>
 <p:notes xmlns:a="http://schemas.openxmlformats.org/drawingml/2006/main" xmlns:r="http://schemas.openxmlformats.org/officeDocument/2006/relationships" xmlns:p="http://schemas.openxmlformats.org/presentationml/2006/main">
   <p:cSld>
     <p:spTree>
@@ -5093,7 +5301,7 @@
           <a:p>
             <a:fld id="{7242DB82-1DC1-9846-88D7-11B539157949}" type="slidenum">
               <a:rPr lang="en-IL" smtClean="0"/>
-              <a:t>18</a:t>
+              <a:t>19</a:t>
             </a:fld>
             <a:endParaRPr lang="en-IL"/>
           </a:p>
@@ -5103,114 +5311,6 @@
     <p:extLst>
       <p:ext uri="{BB962C8B-B14F-4D97-AF65-F5344CB8AC3E}">
         <p14:creationId xmlns:p14="http://schemas.microsoft.com/office/powerpoint/2010/main" val="1775813623"/>
-      </p:ext>
-    </p:extLst>
-  </p:cSld>
-  <p:clrMapOvr>
-    <a:masterClrMapping/>
-  </p:clrMapOvr>
-</p:notes>
-</file>
-
-<file path=ppt/notesSlides/notesSlide19.xml><?xml version="1.0" encoding="utf-8"?>
-<p:notes xmlns:a="http://schemas.openxmlformats.org/drawingml/2006/main" xmlns:r="http://schemas.openxmlformats.org/officeDocument/2006/relationships" xmlns:p="http://schemas.openxmlformats.org/presentationml/2006/main">
-  <p:cSld>
-    <p:spTree>
-      <p:nvGrpSpPr>
-        <p:cNvPr id="1" name="">
-          <a:extLst>
-            <a:ext uri="{FF2B5EF4-FFF2-40B4-BE49-F238E27FC236}">
-              <a16:creationId xmlns:a16="http://schemas.microsoft.com/office/drawing/2014/main" id="{236BD74F-AEBA-8953-5957-21DA5B5E5A7D}"/>
-            </a:ext>
-          </a:extLst>
-        </p:cNvPr>
-        <p:cNvGrpSpPr/>
-        <p:nvPr/>
-      </p:nvGrpSpPr>
-      <p:grpSpPr>
-        <a:xfrm>
-          <a:off x="0" y="0"/>
-          <a:ext cx="0" cy="0"/>
-          <a:chOff x="0" y="0"/>
-          <a:chExt cx="0" cy="0"/>
-        </a:xfrm>
-      </p:grpSpPr>
-      <p:sp>
-        <p:nvSpPr>
-          <p:cNvPr id="2" name="Slide Image Placeholder 1">
-            <a:extLst>
-              <a:ext uri="{FF2B5EF4-FFF2-40B4-BE49-F238E27FC236}">
-                <a16:creationId xmlns:a16="http://schemas.microsoft.com/office/drawing/2014/main" id="{F181FBE0-C4F8-56CC-49FE-4D80F75B166C}"/>
-              </a:ext>
-            </a:extLst>
-          </p:cNvPr>
-          <p:cNvSpPr>
-            <a:spLocks noGrp="1" noRot="1" noChangeAspect="1"/>
-          </p:cNvSpPr>
-          <p:nvPr>
-            <p:ph type="sldImg"/>
-          </p:nvPr>
-        </p:nvSpPr>
-        <p:spPr/>
-      </p:sp>
-      <p:sp>
-        <p:nvSpPr>
-          <p:cNvPr id="3" name="Notes Placeholder 2">
-            <a:extLst>
-              <a:ext uri="{FF2B5EF4-FFF2-40B4-BE49-F238E27FC236}">
-                <a16:creationId xmlns:a16="http://schemas.microsoft.com/office/drawing/2014/main" id="{DBD1C479-4B61-32ED-2058-C6E2381053B8}"/>
-              </a:ext>
-            </a:extLst>
-          </p:cNvPr>
-          <p:cNvSpPr>
-            <a:spLocks noGrp="1"/>
-          </p:cNvSpPr>
-          <p:nvPr>
-            <p:ph type="body" idx="1"/>
-          </p:nvPr>
-        </p:nvSpPr>
-        <p:spPr/>
-        <p:txBody>
-          <a:bodyPr/>
-          <a:lstStyle/>
-          <a:p>
-            <a:endParaRPr lang="en-IL" dirty="0"/>
-          </a:p>
-        </p:txBody>
-      </p:sp>
-      <p:sp>
-        <p:nvSpPr>
-          <p:cNvPr id="4" name="Slide Number Placeholder 3">
-            <a:extLst>
-              <a:ext uri="{FF2B5EF4-FFF2-40B4-BE49-F238E27FC236}">
-                <a16:creationId xmlns:a16="http://schemas.microsoft.com/office/drawing/2014/main" id="{C540340E-3F34-C6D4-E1EC-5C655231E989}"/>
-              </a:ext>
-            </a:extLst>
-          </p:cNvPr>
-          <p:cNvSpPr>
-            <a:spLocks noGrp="1"/>
-          </p:cNvSpPr>
-          <p:nvPr>
-            <p:ph type="sldNum" sz="quarter" idx="5"/>
-          </p:nvPr>
-        </p:nvSpPr>
-        <p:spPr/>
-        <p:txBody>
-          <a:bodyPr/>
-          <a:lstStyle/>
-          <a:p>
-            <a:fld id="{7242DB82-1DC1-9846-88D7-11B539157949}" type="slidenum">
-              <a:rPr lang="en-IL" smtClean="0"/>
-              <a:t>19</a:t>
-            </a:fld>
-            <a:endParaRPr lang="en-IL"/>
-          </a:p>
-        </p:txBody>
-      </p:sp>
-    </p:spTree>
-    <p:extLst>
-      <p:ext uri="{BB962C8B-B14F-4D97-AF65-F5344CB8AC3E}">
-        <p14:creationId xmlns:p14="http://schemas.microsoft.com/office/powerpoint/2010/main" val="553818819"/>
       </p:ext>
     </p:extLst>
   </p:cSld>
@@ -5455,6 +5555,114 @@
         <p:cNvPr id="1" name="">
           <a:extLst>
             <a:ext uri="{FF2B5EF4-FFF2-40B4-BE49-F238E27FC236}">
+              <a16:creationId xmlns:a16="http://schemas.microsoft.com/office/drawing/2014/main" id="{236BD74F-AEBA-8953-5957-21DA5B5E5A7D}"/>
+            </a:ext>
+          </a:extLst>
+        </p:cNvPr>
+        <p:cNvGrpSpPr/>
+        <p:nvPr/>
+      </p:nvGrpSpPr>
+      <p:grpSpPr>
+        <a:xfrm>
+          <a:off x="0" y="0"/>
+          <a:ext cx="0" cy="0"/>
+          <a:chOff x="0" y="0"/>
+          <a:chExt cx="0" cy="0"/>
+        </a:xfrm>
+      </p:grpSpPr>
+      <p:sp>
+        <p:nvSpPr>
+          <p:cNvPr id="2" name="Slide Image Placeholder 1">
+            <a:extLst>
+              <a:ext uri="{FF2B5EF4-FFF2-40B4-BE49-F238E27FC236}">
+                <a16:creationId xmlns:a16="http://schemas.microsoft.com/office/drawing/2014/main" id="{F181FBE0-C4F8-56CC-49FE-4D80F75B166C}"/>
+              </a:ext>
+            </a:extLst>
+          </p:cNvPr>
+          <p:cNvSpPr>
+            <a:spLocks noGrp="1" noRot="1" noChangeAspect="1"/>
+          </p:cNvSpPr>
+          <p:nvPr>
+            <p:ph type="sldImg"/>
+          </p:nvPr>
+        </p:nvSpPr>
+        <p:spPr/>
+      </p:sp>
+      <p:sp>
+        <p:nvSpPr>
+          <p:cNvPr id="3" name="Notes Placeholder 2">
+            <a:extLst>
+              <a:ext uri="{FF2B5EF4-FFF2-40B4-BE49-F238E27FC236}">
+                <a16:creationId xmlns:a16="http://schemas.microsoft.com/office/drawing/2014/main" id="{DBD1C479-4B61-32ED-2058-C6E2381053B8}"/>
+              </a:ext>
+            </a:extLst>
+          </p:cNvPr>
+          <p:cNvSpPr>
+            <a:spLocks noGrp="1"/>
+          </p:cNvSpPr>
+          <p:nvPr>
+            <p:ph type="body" idx="1"/>
+          </p:nvPr>
+        </p:nvSpPr>
+        <p:spPr/>
+        <p:txBody>
+          <a:bodyPr/>
+          <a:lstStyle/>
+          <a:p>
+            <a:endParaRPr lang="en-IL" dirty="0"/>
+          </a:p>
+        </p:txBody>
+      </p:sp>
+      <p:sp>
+        <p:nvSpPr>
+          <p:cNvPr id="4" name="Slide Number Placeholder 3">
+            <a:extLst>
+              <a:ext uri="{FF2B5EF4-FFF2-40B4-BE49-F238E27FC236}">
+                <a16:creationId xmlns:a16="http://schemas.microsoft.com/office/drawing/2014/main" id="{C540340E-3F34-C6D4-E1EC-5C655231E989}"/>
+              </a:ext>
+            </a:extLst>
+          </p:cNvPr>
+          <p:cNvSpPr>
+            <a:spLocks noGrp="1"/>
+          </p:cNvSpPr>
+          <p:nvPr>
+            <p:ph type="sldNum" sz="quarter" idx="5"/>
+          </p:nvPr>
+        </p:nvSpPr>
+        <p:spPr/>
+        <p:txBody>
+          <a:bodyPr/>
+          <a:lstStyle/>
+          <a:p>
+            <a:fld id="{7242DB82-1DC1-9846-88D7-11B539157949}" type="slidenum">
+              <a:rPr lang="en-IL" smtClean="0"/>
+              <a:t>20</a:t>
+            </a:fld>
+            <a:endParaRPr lang="en-IL"/>
+          </a:p>
+        </p:txBody>
+      </p:sp>
+    </p:spTree>
+    <p:extLst>
+      <p:ext uri="{BB962C8B-B14F-4D97-AF65-F5344CB8AC3E}">
+        <p14:creationId xmlns:p14="http://schemas.microsoft.com/office/powerpoint/2010/main" val="553818819"/>
+      </p:ext>
+    </p:extLst>
+  </p:cSld>
+  <p:clrMapOvr>
+    <a:masterClrMapping/>
+  </p:clrMapOvr>
+</p:notes>
+</file>
+
+<file path=ppt/notesSlides/notesSlide21.xml><?xml version="1.0" encoding="utf-8"?>
+<p:notes xmlns:a="http://schemas.openxmlformats.org/drawingml/2006/main" xmlns:r="http://schemas.openxmlformats.org/officeDocument/2006/relationships" xmlns:p="http://schemas.openxmlformats.org/presentationml/2006/main">
+  <p:cSld>
+    <p:spTree>
+      <p:nvGrpSpPr>
+        <p:cNvPr id="1" name="">
+          <a:extLst>
+            <a:ext uri="{FF2B5EF4-FFF2-40B4-BE49-F238E27FC236}">
               <a16:creationId xmlns:a16="http://schemas.microsoft.com/office/drawing/2014/main" id="{C893C9C7-0A84-19E0-282D-872CF81B60D7}"/>
             </a:ext>
           </a:extLst>
@@ -5536,7 +5744,7 @@
           <a:p>
             <a:fld id="{7242DB82-1DC1-9846-88D7-11B539157949}" type="slidenum">
               <a:rPr lang="en-IL" smtClean="0"/>
-              <a:t>20</a:t>
+              <a:t>21</a:t>
             </a:fld>
             <a:endParaRPr lang="en-IL"/>
           </a:p>
@@ -5555,7 +5763,7 @@
 </p:notes>
 </file>
 
-<file path=ppt/notesSlides/notesSlide21.xml><?xml version="1.0" encoding="utf-8"?>
+<file path=ppt/notesSlides/notesSlide22.xml><?xml version="1.0" encoding="utf-8"?>
 <p:notes xmlns:a="http://schemas.openxmlformats.org/drawingml/2006/main" xmlns:r="http://schemas.openxmlformats.org/officeDocument/2006/relationships" xmlns:p="http://schemas.openxmlformats.org/presentationml/2006/main">
   <p:cSld>
     <p:spTree>
@@ -5686,7 +5894,7 @@
           <a:p>
             <a:fld id="{7242DB82-1DC1-9846-88D7-11B539157949}" type="slidenum">
               <a:rPr lang="en-IL" smtClean="0"/>
-              <a:t>21</a:t>
+              <a:t>22</a:t>
             </a:fld>
             <a:endParaRPr lang="en-IL"/>
           </a:p>
@@ -11968,7 +12176,7 @@
 </file>
 
 <file path=ppt/slides/slide12.xml><?xml version="1.0" encoding="utf-8"?>
-<p:sld xmlns:a="http://schemas.openxmlformats.org/drawingml/2006/main" xmlns:r="http://schemas.openxmlformats.org/officeDocument/2006/relationships" xmlns:p="http://schemas.openxmlformats.org/presentationml/2006/main">
+<p:sld xmlns:a="http://schemas.openxmlformats.org/drawingml/2006/main" xmlns:r="http://schemas.openxmlformats.org/officeDocument/2006/relationships" xmlns:p="http://schemas.openxmlformats.org/presentationml/2006/main" show="0">
   <p:cSld>
     <p:spTree>
       <p:nvGrpSpPr>
@@ -12320,8 +12528,8 @@
         </p:nvSpPr>
         <p:spPr>
           <a:xfrm>
-            <a:off x="1020801" y="781856"/>
-            <a:ext cx="10395551" cy="624060"/>
+            <a:off x="705067" y="991992"/>
+            <a:ext cx="11037048" cy="624060"/>
           </a:xfrm>
           <a:prstGeom prst="rect">
             <a:avLst/>
@@ -12329,7 +12537,7 @@
         </p:spPr>
         <p:txBody>
           <a:bodyPr vert="horz" lIns="91440" tIns="45720" rIns="91440" bIns="45720" rtlCol="0" anchor="b">
-            <a:normAutofit fontScale="77500" lnSpcReduction="20000"/>
+            <a:normAutofit fontScale="70000" lnSpcReduction="20000"/>
           </a:bodyPr>
           <a:lstStyle>
             <a:lvl1pPr algn="l" defTabSz="457200" rtl="0" eaLnBrk="1" latinLnBrk="0" hangingPunct="1">
@@ -12406,8 +12614,11 @@
           <a:p>
             <a:r>
               <a:rPr lang="en-US" dirty="0"/>
-              <a:t>Do hotspot mutations drive more instability than rare mutations?</a:t>
-            </a:r>
+              <a:t>Do "Hotspot" mutations drive higher genomic instability than rare mutations?</a:t>
+            </a:r>
+          </a:p>
+          <a:p>
+            <a:endParaRPr lang="en-US" dirty="0"/>
           </a:p>
         </p:txBody>
       </p:sp>
@@ -12417,6 +12628,160 @@
             <a:extLst>
               <a:ext uri="{FF2B5EF4-FFF2-40B4-BE49-F238E27FC236}">
                 <a16:creationId xmlns:a16="http://schemas.microsoft.com/office/drawing/2014/main" id="{7E0EF9D9-E489-49CE-71A9-5D56630B5D83}"/>
+              </a:ext>
+            </a:extLst>
+          </p:cNvPr>
+          <p:cNvSpPr txBox="1"/>
+          <p:nvPr/>
+        </p:nvSpPr>
+        <p:spPr>
+          <a:xfrm>
+            <a:off x="1018041" y="6174992"/>
+            <a:ext cx="10151240" cy="369332"/>
+          </a:xfrm>
+          <a:prstGeom prst="rect">
+            <a:avLst/>
+          </a:prstGeom>
+          <a:noFill/>
+        </p:spPr>
+        <p:txBody>
+          <a:bodyPr wrap="none" rtlCol="0">
+            <a:spAutoFit/>
+          </a:bodyPr>
+          <a:lstStyle/>
+          <a:p>
+            <a:r>
+              <a:rPr lang="en-US" dirty="0"/>
+              <a:t>Rare mutations have higher median FGA. ”Hotspot” mutations have lower FGA median than rare mutations</a:t>
+            </a:r>
+          </a:p>
+        </p:txBody>
+      </p:sp>
+      <p:pic>
+        <p:nvPicPr>
+          <p:cNvPr id="10" name="Picture 9">
+            <a:extLst>
+              <a:ext uri="{FF2B5EF4-FFF2-40B4-BE49-F238E27FC236}">
+                <a16:creationId xmlns:a16="http://schemas.microsoft.com/office/drawing/2014/main" id="{B9EED151-DAE9-8272-1813-D69686A9F18D}"/>
+              </a:ext>
+            </a:extLst>
+          </p:cNvPr>
+          <p:cNvPicPr>
+            <a:picLocks noChangeAspect="1"/>
+          </p:cNvPicPr>
+          <p:nvPr/>
+        </p:nvPicPr>
+        <p:blipFill>
+          <a:blip r:embed="rId3"/>
+          <a:stretch>
+            <a:fillRect/>
+          </a:stretch>
+        </p:blipFill>
+        <p:spPr>
+          <a:xfrm>
+            <a:off x="577476" y="2133835"/>
+            <a:ext cx="11037048" cy="3799132"/>
+          </a:xfrm>
+          <a:prstGeom prst="rect">
+            <a:avLst/>
+          </a:prstGeom>
+        </p:spPr>
+      </p:pic>
+    </p:spTree>
+    <p:extLst>
+      <p:ext uri="{BB962C8B-B14F-4D97-AF65-F5344CB8AC3E}">
+        <p14:creationId xmlns:p14="http://schemas.microsoft.com/office/powerpoint/2010/main" val="276528172"/>
+      </p:ext>
+    </p:extLst>
+  </p:cSld>
+  <p:clrMapOvr>
+    <a:masterClrMapping/>
+  </p:clrMapOvr>
+</p:sld>
+</file>
+
+<file path=ppt/slides/slide14.xml><?xml version="1.0" encoding="utf-8"?>
+<p:sld xmlns:a="http://schemas.openxmlformats.org/drawingml/2006/main" xmlns:r="http://schemas.openxmlformats.org/officeDocument/2006/relationships" xmlns:p="http://schemas.openxmlformats.org/presentationml/2006/main">
+  <p:cSld>
+    <p:spTree>
+      <p:nvGrpSpPr>
+        <p:cNvPr id="1" name="">
+          <a:extLst>
+            <a:ext uri="{FF2B5EF4-FFF2-40B4-BE49-F238E27FC236}">
+              <a16:creationId xmlns:a16="http://schemas.microsoft.com/office/drawing/2014/main" id="{6C6CE85B-3309-1B69-BD5B-E101E2A88CCE}"/>
+            </a:ext>
+          </a:extLst>
+        </p:cNvPr>
+        <p:cNvGrpSpPr/>
+        <p:nvPr/>
+      </p:nvGrpSpPr>
+      <p:grpSpPr>
+        <a:xfrm>
+          <a:off x="0" y="0"/>
+          <a:ext cx="0" cy="0"/>
+          <a:chOff x="0" y="0"/>
+          <a:chExt cx="0" cy="0"/>
+        </a:xfrm>
+      </p:grpSpPr>
+      <p:sp>
+        <p:nvSpPr>
+          <p:cNvPr id="4" name="TextBox 3">
+            <a:extLst>
+              <a:ext uri="{FF2B5EF4-FFF2-40B4-BE49-F238E27FC236}">
+                <a16:creationId xmlns:a16="http://schemas.microsoft.com/office/drawing/2014/main" id="{01B9404A-6A00-538C-10D9-D01D95DC6116}"/>
+              </a:ext>
+            </a:extLst>
+          </p:cNvPr>
+          <p:cNvSpPr txBox="1"/>
+          <p:nvPr/>
+        </p:nvSpPr>
+        <p:spPr>
+          <a:xfrm>
+            <a:off x="4244454" y="6210"/>
+            <a:ext cx="3698414" cy="468000"/>
+          </a:xfrm>
+          <a:prstGeom prst="rect">
+            <a:avLst/>
+          </a:prstGeom>
+          <a:solidFill>
+            <a:srgbClr val="903063"/>
+          </a:solidFill>
+        </p:spPr>
+        <p:txBody>
+          <a:bodyPr wrap="square" rtlCol="0">
+            <a:spAutoFit/>
+          </a:bodyPr>
+          <a:lstStyle/>
+          <a:p>
+            <a:pPr algn="ctr"/>
+            <a:endParaRPr lang="en-IL" sz="700" dirty="0">
+              <a:solidFill>
+                <a:schemeClr val="bg1"/>
+              </a:solidFill>
+            </a:endParaRPr>
+          </a:p>
+          <a:p>
+            <a:pPr algn="ctr"/>
+            <a:r>
+              <a:rPr lang="en-IL" sz="1400" i="1" dirty="0">
+                <a:solidFill>
+                  <a:schemeClr val="bg1"/>
+                </a:solidFill>
+                <a:latin typeface="Abadi MT Condensed Light" panose="020B0306030101010103" pitchFamily="34" charset="77"/>
+                <a:ea typeface="Batang" panose="02030600000101010101" pitchFamily="18" charset="-127"/>
+                <a:cs typeface="Corsiva Hebrew" pitchFamily="2" charset="-79"/>
+              </a:rPr>
+              <a:t>Results</a:t>
+            </a:r>
+          </a:p>
+        </p:txBody>
+      </p:sp>
+      <p:sp>
+        <p:nvSpPr>
+          <p:cNvPr id="13" name="TextBox 12">
+            <a:extLst>
+              <a:ext uri="{FF2B5EF4-FFF2-40B4-BE49-F238E27FC236}">
+                <a16:creationId xmlns:a16="http://schemas.microsoft.com/office/drawing/2014/main" id="{FD78E343-857C-92B0-92F1-B3E4ECE429F5}"/>
               </a:ext>
             </a:extLst>
           </p:cNvPr>
@@ -12448,10 +12813,10 @@
       </p:sp>
       <p:pic>
         <p:nvPicPr>
-          <p:cNvPr id="5" name="Picture 4">
+          <p:cNvPr id="8" name="Picture 7">
             <a:extLst>
               <a:ext uri="{FF2B5EF4-FFF2-40B4-BE49-F238E27FC236}">
-                <a16:creationId xmlns:a16="http://schemas.microsoft.com/office/drawing/2014/main" id="{6DF59E9A-8E0A-3F22-A3B9-753309CA8C57}"/>
+                <a16:creationId xmlns:a16="http://schemas.microsoft.com/office/drawing/2014/main" id="{FDE45903-0388-A24D-CF78-EB50EA792B9D}"/>
               </a:ext>
             </a:extLst>
           </p:cNvPr>
@@ -12462,25 +12827,135 @@
         </p:nvPicPr>
         <p:blipFill>
           <a:blip r:embed="rId3"/>
-          <a:srcRect r="50000"/>
+          <a:srcRect t="9479"/>
           <a:stretch>
             <a:fillRect/>
           </a:stretch>
         </p:blipFill>
         <p:spPr>
           <a:xfrm>
-            <a:off x="597021" y="2199726"/>
-            <a:ext cx="5092447" cy="3826128"/>
+            <a:off x="984518" y="2063261"/>
+            <a:ext cx="10222963" cy="3880339"/>
           </a:xfrm>
           <a:prstGeom prst="rect">
             <a:avLst/>
           </a:prstGeom>
         </p:spPr>
       </p:pic>
+      <p:sp>
+        <p:nvSpPr>
+          <p:cNvPr id="2" name="Title 1">
+            <a:extLst>
+              <a:ext uri="{FF2B5EF4-FFF2-40B4-BE49-F238E27FC236}">
+                <a16:creationId xmlns:a16="http://schemas.microsoft.com/office/drawing/2014/main" id="{E0895FE1-4970-5175-634D-1C6A90FF7541}"/>
+              </a:ext>
+            </a:extLst>
+          </p:cNvPr>
+          <p:cNvSpPr txBox="1">
+            <a:spLocks/>
+          </p:cNvSpPr>
+          <p:nvPr/>
+        </p:nvSpPr>
+        <p:spPr>
+          <a:xfrm>
+            <a:off x="705067" y="991992"/>
+            <a:ext cx="11037048" cy="624060"/>
+          </a:xfrm>
+          <a:prstGeom prst="rect">
+            <a:avLst/>
+          </a:prstGeom>
+        </p:spPr>
+        <p:txBody>
+          <a:bodyPr vert="horz" lIns="91440" tIns="45720" rIns="91440" bIns="45720" rtlCol="0" anchor="b">
+            <a:normAutofit fontScale="70000" lnSpcReduction="20000"/>
+          </a:bodyPr>
+          <a:lstStyle>
+            <a:lvl1pPr algn="l" defTabSz="457200" rtl="0" eaLnBrk="1" latinLnBrk="0" hangingPunct="1">
+              <a:spcBef>
+                <a:spcPct val="0"/>
+              </a:spcBef>
+              <a:buNone/>
+              <a:defRPr sz="2800" b="0" kern="1200" cap="all">
+                <a:solidFill>
+                  <a:schemeClr val="bg1"/>
+                </a:solidFill>
+                <a:latin typeface="+mj-lt"/>
+                <a:ea typeface="+mj-ea"/>
+                <a:cs typeface="+mj-cs"/>
+              </a:defRPr>
+            </a:lvl1pPr>
+            <a:lvl2pPr eaLnBrk="1" hangingPunct="1">
+              <a:defRPr>
+                <a:solidFill>
+                  <a:schemeClr val="tx2"/>
+                </a:solidFill>
+              </a:defRPr>
+            </a:lvl2pPr>
+            <a:lvl3pPr eaLnBrk="1" hangingPunct="1">
+              <a:defRPr>
+                <a:solidFill>
+                  <a:schemeClr val="tx2"/>
+                </a:solidFill>
+              </a:defRPr>
+            </a:lvl3pPr>
+            <a:lvl4pPr eaLnBrk="1" hangingPunct="1">
+              <a:defRPr>
+                <a:solidFill>
+                  <a:schemeClr val="tx2"/>
+                </a:solidFill>
+              </a:defRPr>
+            </a:lvl4pPr>
+            <a:lvl5pPr eaLnBrk="1" hangingPunct="1">
+              <a:defRPr>
+                <a:solidFill>
+                  <a:schemeClr val="tx2"/>
+                </a:solidFill>
+              </a:defRPr>
+            </a:lvl5pPr>
+            <a:lvl6pPr eaLnBrk="1" hangingPunct="1">
+              <a:defRPr>
+                <a:solidFill>
+                  <a:schemeClr val="tx2"/>
+                </a:solidFill>
+              </a:defRPr>
+            </a:lvl6pPr>
+            <a:lvl7pPr eaLnBrk="1" hangingPunct="1">
+              <a:defRPr>
+                <a:solidFill>
+                  <a:schemeClr val="tx2"/>
+                </a:solidFill>
+              </a:defRPr>
+            </a:lvl7pPr>
+            <a:lvl8pPr eaLnBrk="1" hangingPunct="1">
+              <a:defRPr>
+                <a:solidFill>
+                  <a:schemeClr val="tx2"/>
+                </a:solidFill>
+              </a:defRPr>
+            </a:lvl8pPr>
+            <a:lvl9pPr eaLnBrk="1" hangingPunct="1">
+              <a:defRPr>
+                <a:solidFill>
+                  <a:schemeClr val="tx2"/>
+                </a:solidFill>
+              </a:defRPr>
+            </a:lvl9pPr>
+          </a:lstStyle>
+          <a:p>
+            <a:r>
+              <a:rPr lang="en-US" dirty="0"/>
+              <a:t>Do "Hotspot" mutations drive higher genomic instability than rare mutations?</a:t>
+            </a:r>
+          </a:p>
+          <a:p>
+            <a:endParaRPr lang="en-US" dirty="0"/>
+          </a:p>
+        </p:txBody>
+      </p:sp>
     </p:spTree>
     <p:extLst>
       <p:ext uri="{BB962C8B-B14F-4D97-AF65-F5344CB8AC3E}">
-        <p14:creationId xmlns:p14="http://schemas.microsoft.com/office/powerpoint/2010/main" val="276528172"/>
+        <p14:creationId xmlns:p14="http://schemas.microsoft.com/office/powerpoint/2010/main" val="3540130279"/>
       </p:ext>
     </p:extLst>
   </p:cSld>
@@ -12490,7 +12965,7 @@
 </p:sld>
 </file>
 
-<file path=ppt/slides/slide14.xml><?xml version="1.0" encoding="utf-8"?>
+<file path=ppt/slides/slide15.xml><?xml version="1.0" encoding="utf-8"?>
 <p:sld xmlns:a="http://schemas.openxmlformats.org/drawingml/2006/main" xmlns:r="http://schemas.openxmlformats.org/officeDocument/2006/relationships" xmlns:p="http://schemas.openxmlformats.org/presentationml/2006/main">
   <p:cSld>
     <p:spTree>
@@ -12751,7 +13226,7 @@
 </p:sld>
 </file>
 
-<file path=ppt/slides/slide15.xml><?xml version="1.0" encoding="utf-8"?>
+<file path=ppt/slides/slide16.xml><?xml version="1.0" encoding="utf-8"?>
 <p:sld xmlns:a="http://schemas.openxmlformats.org/drawingml/2006/main" xmlns:r="http://schemas.openxmlformats.org/officeDocument/2006/relationships" xmlns:p="http://schemas.openxmlformats.org/presentationml/2006/main">
   <p:cSld>
     <p:spTree>
@@ -13026,7 +13501,7 @@
 </p:sld>
 </file>
 
-<file path=ppt/slides/slide16.xml><?xml version="1.0" encoding="utf-8"?>
+<file path=ppt/slides/slide17.xml><?xml version="1.0" encoding="utf-8"?>
 <p:sld xmlns:a="http://schemas.openxmlformats.org/drawingml/2006/main" xmlns:r="http://schemas.openxmlformats.org/officeDocument/2006/relationships" xmlns:p="http://schemas.openxmlformats.org/presentationml/2006/main">
   <p:cSld>
     <p:spTree>
@@ -13287,7 +13762,7 @@
 </p:sld>
 </file>
 
-<file path=ppt/slides/slide17.xml><?xml version="1.0" encoding="utf-8"?>
+<file path=ppt/slides/slide18.xml><?xml version="1.0" encoding="utf-8"?>
 <p:sld xmlns:a="http://schemas.openxmlformats.org/drawingml/2006/main" xmlns:r="http://schemas.openxmlformats.org/officeDocument/2006/relationships" xmlns:p="http://schemas.openxmlformats.org/presentationml/2006/main">
   <p:cSld>
     <p:bg>
@@ -13631,7 +14106,7 @@
 </p:sld>
 </file>
 
-<file path=ppt/slides/slide18.xml><?xml version="1.0" encoding="utf-8"?>
+<file path=ppt/slides/slide19.xml><?xml version="1.0" encoding="utf-8"?>
 <p:sld xmlns:a="http://schemas.openxmlformats.org/drawingml/2006/main" xmlns:r="http://schemas.openxmlformats.org/officeDocument/2006/relationships" xmlns:p="http://schemas.openxmlformats.org/presentationml/2006/main">
   <p:cSld>
     <p:bg>
@@ -13865,289 +14340,6 @@
     <p:extLst>
       <p:ext uri="{BB962C8B-B14F-4D97-AF65-F5344CB8AC3E}">
         <p14:creationId xmlns:p14="http://schemas.microsoft.com/office/powerpoint/2010/main" val="16790379"/>
-      </p:ext>
-    </p:extLst>
-  </p:cSld>
-  <p:clrMapOvr>
-    <a:masterClrMapping/>
-  </p:clrMapOvr>
-</p:sld>
-</file>
-
-<file path=ppt/slides/slide19.xml><?xml version="1.0" encoding="utf-8"?>
-<p:sld xmlns:a="http://schemas.openxmlformats.org/drawingml/2006/main" xmlns:r="http://schemas.openxmlformats.org/officeDocument/2006/relationships" xmlns:p="http://schemas.openxmlformats.org/presentationml/2006/main">
-  <p:cSld>
-    <p:bg>
-      <p:bgPr>
-        <a:solidFill>
-          <a:schemeClr val="bg1"/>
-        </a:solidFill>
-        <a:effectLst/>
-      </p:bgPr>
-    </p:bg>
-    <p:spTree>
-      <p:nvGrpSpPr>
-        <p:cNvPr id="1" name="">
-          <a:extLst>
-            <a:ext uri="{FF2B5EF4-FFF2-40B4-BE49-F238E27FC236}">
-              <a16:creationId xmlns:a16="http://schemas.microsoft.com/office/drawing/2014/main" id="{804B59AA-C2FC-5D5B-688C-2CB4457CBB3D}"/>
-            </a:ext>
-          </a:extLst>
-        </p:cNvPr>
-        <p:cNvGrpSpPr/>
-        <p:nvPr/>
-      </p:nvGrpSpPr>
-      <p:grpSpPr>
-        <a:xfrm>
-          <a:off x="0" y="0"/>
-          <a:ext cx="0" cy="0"/>
-          <a:chOff x="0" y="0"/>
-          <a:chExt cx="0" cy="0"/>
-        </a:xfrm>
-      </p:grpSpPr>
-      <p:sp>
-        <p:nvSpPr>
-          <p:cNvPr id="5" name="TextBox 4">
-            <a:extLst>
-              <a:ext uri="{FF2B5EF4-FFF2-40B4-BE49-F238E27FC236}">
-                <a16:creationId xmlns:a16="http://schemas.microsoft.com/office/drawing/2014/main" id="{C51EFF4C-6D0D-B1A7-7ACD-A1722EFC2D36}"/>
-              </a:ext>
-            </a:extLst>
-          </p:cNvPr>
-          <p:cNvSpPr txBox="1"/>
-          <p:nvPr/>
-        </p:nvSpPr>
-        <p:spPr>
-          <a:xfrm>
-            <a:off x="8043084" y="0"/>
-            <a:ext cx="3700815" cy="468000"/>
-          </a:xfrm>
-          <a:prstGeom prst="rect">
-            <a:avLst/>
-          </a:prstGeom>
-          <a:solidFill>
-            <a:srgbClr val="96A0A7"/>
-          </a:solidFill>
-        </p:spPr>
-        <p:txBody>
-          <a:bodyPr wrap="square" rtlCol="0">
-            <a:spAutoFit/>
-          </a:bodyPr>
-          <a:lstStyle/>
-          <a:p>
-            <a:pPr algn="ctr"/>
-            <a:endParaRPr lang="en-IL" sz="700" dirty="0">
-              <a:solidFill>
-                <a:schemeClr val="bg1"/>
-              </a:solidFill>
-            </a:endParaRPr>
-          </a:p>
-          <a:p>
-            <a:pPr algn="ctr"/>
-            <a:r>
-              <a:rPr lang="en-IL" sz="1400" i="1" dirty="0">
-                <a:solidFill>
-                  <a:schemeClr val="bg1"/>
-                </a:solidFill>
-                <a:latin typeface="Abadi MT Condensed Light" panose="020B0306030101010103" pitchFamily="34" charset="77"/>
-                <a:ea typeface="Batang" panose="02030600000101010101" pitchFamily="18" charset="-127"/>
-                <a:cs typeface="Corsiva Hebrew" pitchFamily="2" charset="-79"/>
-              </a:rPr>
-              <a:t>Discussion</a:t>
-            </a:r>
-          </a:p>
-        </p:txBody>
-      </p:sp>
-      <p:sp>
-        <p:nvSpPr>
-          <p:cNvPr id="3" name="Title 1">
-            <a:extLst>
-              <a:ext uri="{FF2B5EF4-FFF2-40B4-BE49-F238E27FC236}">
-                <a16:creationId xmlns:a16="http://schemas.microsoft.com/office/drawing/2014/main" id="{763DACFC-91D9-69A5-56DC-A764E8036EC8}"/>
-              </a:ext>
-            </a:extLst>
-          </p:cNvPr>
-          <p:cNvSpPr txBox="1">
-            <a:spLocks/>
-          </p:cNvSpPr>
-          <p:nvPr/>
-        </p:nvSpPr>
-        <p:spPr>
-          <a:xfrm>
-            <a:off x="1020801" y="822800"/>
-            <a:ext cx="10395551" cy="624060"/>
-          </a:xfrm>
-          <a:prstGeom prst="rect">
-            <a:avLst/>
-          </a:prstGeom>
-        </p:spPr>
-        <p:txBody>
-          <a:bodyPr vert="horz" lIns="91440" tIns="45720" rIns="91440" bIns="45720" rtlCol="0" anchor="b">
-            <a:normAutofit/>
-          </a:bodyPr>
-          <a:lstStyle>
-            <a:lvl1pPr algn="l" defTabSz="457200" rtl="0" eaLnBrk="1" latinLnBrk="0" hangingPunct="1">
-              <a:spcBef>
-                <a:spcPct val="0"/>
-              </a:spcBef>
-              <a:buNone/>
-              <a:defRPr sz="2800" b="0" kern="1200" cap="all">
-                <a:solidFill>
-                  <a:schemeClr val="bg1"/>
-                </a:solidFill>
-                <a:latin typeface="+mj-lt"/>
-                <a:ea typeface="+mj-ea"/>
-                <a:cs typeface="+mj-cs"/>
-              </a:defRPr>
-            </a:lvl1pPr>
-            <a:lvl2pPr eaLnBrk="1" hangingPunct="1">
-              <a:defRPr>
-                <a:solidFill>
-                  <a:schemeClr val="tx2"/>
-                </a:solidFill>
-              </a:defRPr>
-            </a:lvl2pPr>
-            <a:lvl3pPr eaLnBrk="1" hangingPunct="1">
-              <a:defRPr>
-                <a:solidFill>
-                  <a:schemeClr val="tx2"/>
-                </a:solidFill>
-              </a:defRPr>
-            </a:lvl3pPr>
-            <a:lvl4pPr eaLnBrk="1" hangingPunct="1">
-              <a:defRPr>
-                <a:solidFill>
-                  <a:schemeClr val="tx2"/>
-                </a:solidFill>
-              </a:defRPr>
-            </a:lvl4pPr>
-            <a:lvl5pPr eaLnBrk="1" hangingPunct="1">
-              <a:defRPr>
-                <a:solidFill>
-                  <a:schemeClr val="tx2"/>
-                </a:solidFill>
-              </a:defRPr>
-            </a:lvl5pPr>
-            <a:lvl6pPr eaLnBrk="1" hangingPunct="1">
-              <a:defRPr>
-                <a:solidFill>
-                  <a:schemeClr val="tx2"/>
-                </a:solidFill>
-              </a:defRPr>
-            </a:lvl6pPr>
-            <a:lvl7pPr eaLnBrk="1" hangingPunct="1">
-              <a:defRPr>
-                <a:solidFill>
-                  <a:schemeClr val="tx2"/>
-                </a:solidFill>
-              </a:defRPr>
-            </a:lvl7pPr>
-            <a:lvl8pPr eaLnBrk="1" hangingPunct="1">
-              <a:defRPr>
-                <a:solidFill>
-                  <a:schemeClr val="tx2"/>
-                </a:solidFill>
-              </a:defRPr>
-            </a:lvl8pPr>
-            <a:lvl9pPr eaLnBrk="1" hangingPunct="1">
-              <a:defRPr>
-                <a:solidFill>
-                  <a:schemeClr val="tx2"/>
-                </a:solidFill>
-              </a:defRPr>
-            </a:lvl9pPr>
-          </a:lstStyle>
-          <a:p>
-            <a:r>
-              <a:rPr lang="en-US" dirty="0" err="1"/>
-              <a:t>lIMITATIONS</a:t>
-            </a:r>
-            <a:endParaRPr lang="en-US" dirty="0"/>
-          </a:p>
-        </p:txBody>
-      </p:sp>
-      <p:sp>
-        <p:nvSpPr>
-          <p:cNvPr id="7" name="TextBox 6">
-            <a:extLst>
-              <a:ext uri="{FF2B5EF4-FFF2-40B4-BE49-F238E27FC236}">
-                <a16:creationId xmlns:a16="http://schemas.microsoft.com/office/drawing/2014/main" id="{B5508A9F-418E-84DC-5FE9-AABEE2687AFA}"/>
-              </a:ext>
-            </a:extLst>
-          </p:cNvPr>
-          <p:cNvSpPr txBox="1"/>
-          <p:nvPr/>
-        </p:nvSpPr>
-        <p:spPr>
-          <a:xfrm>
-            <a:off x="1020801" y="2333767"/>
-            <a:ext cx="9931527" cy="954107"/>
-          </a:xfrm>
-          <a:prstGeom prst="rect">
-            <a:avLst/>
-          </a:prstGeom>
-          <a:noFill/>
-        </p:spPr>
-        <p:txBody>
-          <a:bodyPr wrap="square" rtlCol="0">
-            <a:spAutoFit/>
-          </a:bodyPr>
-          <a:lstStyle/>
-          <a:p>
-            <a:pPr marL="285750" indent="-285750">
-              <a:buFont typeface="Wingdings" pitchFamily="2" charset="2"/>
-              <a:buChar char="Ø"/>
-            </a:pPr>
-            <a:r>
-              <a:rPr lang="en-US" sz="2800" dirty="0"/>
-              <a:t>EFS derived from one lung cell line. That may not generalize across tissues</a:t>
-            </a:r>
-          </a:p>
-        </p:txBody>
-      </p:sp>
-      <p:sp>
-        <p:nvSpPr>
-          <p:cNvPr id="2" name="TextBox 1">
-            <a:extLst>
-              <a:ext uri="{FF2B5EF4-FFF2-40B4-BE49-F238E27FC236}">
-                <a16:creationId xmlns:a16="http://schemas.microsoft.com/office/drawing/2014/main" id="{5B443CA9-DD0B-9E6C-F746-8A4B863685D0}"/>
-              </a:ext>
-            </a:extLst>
-          </p:cNvPr>
-          <p:cNvSpPr txBox="1"/>
-          <p:nvPr/>
-        </p:nvSpPr>
-        <p:spPr>
-          <a:xfrm>
-            <a:off x="1020801" y="3570127"/>
-            <a:ext cx="9931527" cy="954107"/>
-          </a:xfrm>
-          <a:prstGeom prst="rect">
-            <a:avLst/>
-          </a:prstGeom>
-          <a:noFill/>
-        </p:spPr>
-        <p:txBody>
-          <a:bodyPr wrap="square" rtlCol="0">
-            <a:spAutoFit/>
-          </a:bodyPr>
-          <a:lstStyle/>
-          <a:p>
-            <a:pPr marL="285750" indent="-285750">
-              <a:buFont typeface="Wingdings" pitchFamily="2" charset="2"/>
-              <a:buChar char="Ø"/>
-            </a:pPr>
-            <a:r>
-              <a:rPr lang="en-US" sz="2800" dirty="0"/>
-              <a:t>FGA is a bulk measure, and it doesn’t capture which specific chromosomal regions break</a:t>
-            </a:r>
-          </a:p>
-        </p:txBody>
-      </p:sp>
-    </p:spTree>
-    <p:extLst>
-      <p:ext uri="{BB962C8B-B14F-4D97-AF65-F5344CB8AC3E}">
-        <p14:creationId xmlns:p14="http://schemas.microsoft.com/office/powerpoint/2010/main" val="1871680158"/>
       </p:ext>
     </p:extLst>
   </p:cSld>
@@ -14804,6 +14996,289 @@
         <p:cNvPr id="1" name="">
           <a:extLst>
             <a:ext uri="{FF2B5EF4-FFF2-40B4-BE49-F238E27FC236}">
+              <a16:creationId xmlns:a16="http://schemas.microsoft.com/office/drawing/2014/main" id="{804B59AA-C2FC-5D5B-688C-2CB4457CBB3D}"/>
+            </a:ext>
+          </a:extLst>
+        </p:cNvPr>
+        <p:cNvGrpSpPr/>
+        <p:nvPr/>
+      </p:nvGrpSpPr>
+      <p:grpSpPr>
+        <a:xfrm>
+          <a:off x="0" y="0"/>
+          <a:ext cx="0" cy="0"/>
+          <a:chOff x="0" y="0"/>
+          <a:chExt cx="0" cy="0"/>
+        </a:xfrm>
+      </p:grpSpPr>
+      <p:sp>
+        <p:nvSpPr>
+          <p:cNvPr id="5" name="TextBox 4">
+            <a:extLst>
+              <a:ext uri="{FF2B5EF4-FFF2-40B4-BE49-F238E27FC236}">
+                <a16:creationId xmlns:a16="http://schemas.microsoft.com/office/drawing/2014/main" id="{C51EFF4C-6D0D-B1A7-7ACD-A1722EFC2D36}"/>
+              </a:ext>
+            </a:extLst>
+          </p:cNvPr>
+          <p:cNvSpPr txBox="1"/>
+          <p:nvPr/>
+        </p:nvSpPr>
+        <p:spPr>
+          <a:xfrm>
+            <a:off x="8043084" y="0"/>
+            <a:ext cx="3700815" cy="468000"/>
+          </a:xfrm>
+          <a:prstGeom prst="rect">
+            <a:avLst/>
+          </a:prstGeom>
+          <a:solidFill>
+            <a:srgbClr val="96A0A7"/>
+          </a:solidFill>
+        </p:spPr>
+        <p:txBody>
+          <a:bodyPr wrap="square" rtlCol="0">
+            <a:spAutoFit/>
+          </a:bodyPr>
+          <a:lstStyle/>
+          <a:p>
+            <a:pPr algn="ctr"/>
+            <a:endParaRPr lang="en-IL" sz="700" dirty="0">
+              <a:solidFill>
+                <a:schemeClr val="bg1"/>
+              </a:solidFill>
+            </a:endParaRPr>
+          </a:p>
+          <a:p>
+            <a:pPr algn="ctr"/>
+            <a:r>
+              <a:rPr lang="en-IL" sz="1400" i="1" dirty="0">
+                <a:solidFill>
+                  <a:schemeClr val="bg1"/>
+                </a:solidFill>
+                <a:latin typeface="Abadi MT Condensed Light" panose="020B0306030101010103" pitchFamily="34" charset="77"/>
+                <a:ea typeface="Batang" panose="02030600000101010101" pitchFamily="18" charset="-127"/>
+                <a:cs typeface="Corsiva Hebrew" pitchFamily="2" charset="-79"/>
+              </a:rPr>
+              <a:t>Discussion</a:t>
+            </a:r>
+          </a:p>
+        </p:txBody>
+      </p:sp>
+      <p:sp>
+        <p:nvSpPr>
+          <p:cNvPr id="3" name="Title 1">
+            <a:extLst>
+              <a:ext uri="{FF2B5EF4-FFF2-40B4-BE49-F238E27FC236}">
+                <a16:creationId xmlns:a16="http://schemas.microsoft.com/office/drawing/2014/main" id="{763DACFC-91D9-69A5-56DC-A764E8036EC8}"/>
+              </a:ext>
+            </a:extLst>
+          </p:cNvPr>
+          <p:cNvSpPr txBox="1">
+            <a:spLocks/>
+          </p:cNvSpPr>
+          <p:nvPr/>
+        </p:nvSpPr>
+        <p:spPr>
+          <a:xfrm>
+            <a:off x="1020801" y="822800"/>
+            <a:ext cx="10395551" cy="624060"/>
+          </a:xfrm>
+          <a:prstGeom prst="rect">
+            <a:avLst/>
+          </a:prstGeom>
+        </p:spPr>
+        <p:txBody>
+          <a:bodyPr vert="horz" lIns="91440" tIns="45720" rIns="91440" bIns="45720" rtlCol="0" anchor="b">
+            <a:normAutofit/>
+          </a:bodyPr>
+          <a:lstStyle>
+            <a:lvl1pPr algn="l" defTabSz="457200" rtl="0" eaLnBrk="1" latinLnBrk="0" hangingPunct="1">
+              <a:spcBef>
+                <a:spcPct val="0"/>
+              </a:spcBef>
+              <a:buNone/>
+              <a:defRPr sz="2800" b="0" kern="1200" cap="all">
+                <a:solidFill>
+                  <a:schemeClr val="bg1"/>
+                </a:solidFill>
+                <a:latin typeface="+mj-lt"/>
+                <a:ea typeface="+mj-ea"/>
+                <a:cs typeface="+mj-cs"/>
+              </a:defRPr>
+            </a:lvl1pPr>
+            <a:lvl2pPr eaLnBrk="1" hangingPunct="1">
+              <a:defRPr>
+                <a:solidFill>
+                  <a:schemeClr val="tx2"/>
+                </a:solidFill>
+              </a:defRPr>
+            </a:lvl2pPr>
+            <a:lvl3pPr eaLnBrk="1" hangingPunct="1">
+              <a:defRPr>
+                <a:solidFill>
+                  <a:schemeClr val="tx2"/>
+                </a:solidFill>
+              </a:defRPr>
+            </a:lvl3pPr>
+            <a:lvl4pPr eaLnBrk="1" hangingPunct="1">
+              <a:defRPr>
+                <a:solidFill>
+                  <a:schemeClr val="tx2"/>
+                </a:solidFill>
+              </a:defRPr>
+            </a:lvl4pPr>
+            <a:lvl5pPr eaLnBrk="1" hangingPunct="1">
+              <a:defRPr>
+                <a:solidFill>
+                  <a:schemeClr val="tx2"/>
+                </a:solidFill>
+              </a:defRPr>
+            </a:lvl5pPr>
+            <a:lvl6pPr eaLnBrk="1" hangingPunct="1">
+              <a:defRPr>
+                <a:solidFill>
+                  <a:schemeClr val="tx2"/>
+                </a:solidFill>
+              </a:defRPr>
+            </a:lvl6pPr>
+            <a:lvl7pPr eaLnBrk="1" hangingPunct="1">
+              <a:defRPr>
+                <a:solidFill>
+                  <a:schemeClr val="tx2"/>
+                </a:solidFill>
+              </a:defRPr>
+            </a:lvl7pPr>
+            <a:lvl8pPr eaLnBrk="1" hangingPunct="1">
+              <a:defRPr>
+                <a:solidFill>
+                  <a:schemeClr val="tx2"/>
+                </a:solidFill>
+              </a:defRPr>
+            </a:lvl8pPr>
+            <a:lvl9pPr eaLnBrk="1" hangingPunct="1">
+              <a:defRPr>
+                <a:solidFill>
+                  <a:schemeClr val="tx2"/>
+                </a:solidFill>
+              </a:defRPr>
+            </a:lvl9pPr>
+          </a:lstStyle>
+          <a:p>
+            <a:r>
+              <a:rPr lang="en-US" dirty="0" err="1"/>
+              <a:t>lIMITATIONS</a:t>
+            </a:r>
+            <a:endParaRPr lang="en-US" dirty="0"/>
+          </a:p>
+        </p:txBody>
+      </p:sp>
+      <p:sp>
+        <p:nvSpPr>
+          <p:cNvPr id="7" name="TextBox 6">
+            <a:extLst>
+              <a:ext uri="{FF2B5EF4-FFF2-40B4-BE49-F238E27FC236}">
+                <a16:creationId xmlns:a16="http://schemas.microsoft.com/office/drawing/2014/main" id="{B5508A9F-418E-84DC-5FE9-AABEE2687AFA}"/>
+              </a:ext>
+            </a:extLst>
+          </p:cNvPr>
+          <p:cNvSpPr txBox="1"/>
+          <p:nvPr/>
+        </p:nvSpPr>
+        <p:spPr>
+          <a:xfrm>
+            <a:off x="1020801" y="2333767"/>
+            <a:ext cx="9931527" cy="954107"/>
+          </a:xfrm>
+          <a:prstGeom prst="rect">
+            <a:avLst/>
+          </a:prstGeom>
+          <a:noFill/>
+        </p:spPr>
+        <p:txBody>
+          <a:bodyPr wrap="square" rtlCol="0">
+            <a:spAutoFit/>
+          </a:bodyPr>
+          <a:lstStyle/>
+          <a:p>
+            <a:pPr marL="285750" indent="-285750">
+              <a:buFont typeface="Wingdings" pitchFamily="2" charset="2"/>
+              <a:buChar char="Ø"/>
+            </a:pPr>
+            <a:r>
+              <a:rPr lang="en-US" sz="2800" dirty="0"/>
+              <a:t>EFS derived from one lung cell line. That may not generalize across tissues</a:t>
+            </a:r>
+          </a:p>
+        </p:txBody>
+      </p:sp>
+      <p:sp>
+        <p:nvSpPr>
+          <p:cNvPr id="2" name="TextBox 1">
+            <a:extLst>
+              <a:ext uri="{FF2B5EF4-FFF2-40B4-BE49-F238E27FC236}">
+                <a16:creationId xmlns:a16="http://schemas.microsoft.com/office/drawing/2014/main" id="{5B443CA9-DD0B-9E6C-F746-8A4B863685D0}"/>
+              </a:ext>
+            </a:extLst>
+          </p:cNvPr>
+          <p:cNvSpPr txBox="1"/>
+          <p:nvPr/>
+        </p:nvSpPr>
+        <p:spPr>
+          <a:xfrm>
+            <a:off x="1020801" y="3570127"/>
+            <a:ext cx="9931527" cy="954107"/>
+          </a:xfrm>
+          <a:prstGeom prst="rect">
+            <a:avLst/>
+          </a:prstGeom>
+          <a:noFill/>
+        </p:spPr>
+        <p:txBody>
+          <a:bodyPr wrap="square" rtlCol="0">
+            <a:spAutoFit/>
+          </a:bodyPr>
+          <a:lstStyle/>
+          <a:p>
+            <a:pPr marL="285750" indent="-285750">
+              <a:buFont typeface="Wingdings" pitchFamily="2" charset="2"/>
+              <a:buChar char="Ø"/>
+            </a:pPr>
+            <a:r>
+              <a:rPr lang="en-US" sz="2800" dirty="0"/>
+              <a:t>FGA is a bulk measure, and it doesn’t capture which specific chromosomal regions break</a:t>
+            </a:r>
+          </a:p>
+        </p:txBody>
+      </p:sp>
+    </p:spTree>
+    <p:extLst>
+      <p:ext uri="{BB962C8B-B14F-4D97-AF65-F5344CB8AC3E}">
+        <p14:creationId xmlns:p14="http://schemas.microsoft.com/office/powerpoint/2010/main" val="1871680158"/>
+      </p:ext>
+    </p:extLst>
+  </p:cSld>
+  <p:clrMapOvr>
+    <a:masterClrMapping/>
+  </p:clrMapOvr>
+</p:sld>
+</file>
+
+<file path=ppt/slides/slide21.xml><?xml version="1.0" encoding="utf-8"?>
+<p:sld xmlns:a="http://schemas.openxmlformats.org/drawingml/2006/main" xmlns:r="http://schemas.openxmlformats.org/officeDocument/2006/relationships" xmlns:p="http://schemas.openxmlformats.org/presentationml/2006/main">
+  <p:cSld>
+    <p:bg>
+      <p:bgPr>
+        <a:solidFill>
+          <a:schemeClr val="bg1"/>
+        </a:solidFill>
+        <a:effectLst/>
+      </p:bgPr>
+    </p:bg>
+    <p:spTree>
+      <p:nvGrpSpPr>
+        <p:cNvPr id="1" name="">
+          <a:extLst>
+            <a:ext uri="{FF2B5EF4-FFF2-40B4-BE49-F238E27FC236}">
               <a16:creationId xmlns:a16="http://schemas.microsoft.com/office/drawing/2014/main" id="{C4659005-9761-7A24-3731-DDAE032BB353}"/>
             </a:ext>
           </a:extLst>
@@ -15039,7 +15514,7 @@
 </p:sld>
 </file>
 
-<file path=ppt/slides/slide21.xml><?xml version="1.0" encoding="utf-8"?>
+<file path=ppt/slides/slide22.xml><?xml version="1.0" encoding="utf-8"?>
 <p:sld xmlns:a="http://schemas.openxmlformats.org/drawingml/2006/main" xmlns:r="http://schemas.openxmlformats.org/officeDocument/2006/relationships" xmlns:p="http://schemas.openxmlformats.org/presentationml/2006/main">
   <p:cSld>
     <p:bg>

--- a/project/project_background/Final Project Presentation - Ornit - Cancer Bioinfo March 2026.pptx
+++ b/project/project_background/Final Project Presentation - Ornit - Cancer Bioinfo March 2026.pptx
@@ -4734,6 +4734,37 @@
               <a:rPr lang="he-IL" dirty="0"/>
               <a:t>. המוטציות ההרסניות ביותר הן גם הנדירות ביותר.</a:t>
             </a:r>
+          </a:p>
+          <a:p>
+            <a:pPr marL="0" algn="r" defTabSz="914400" rtl="1" eaLnBrk="1" latinLnBrk="0" hangingPunct="1"/>
+            <a:r>
+              <a:rPr lang="he-IL" dirty="0"/>
+              <a:t>מה שכן, בגלל שאין הרבה מהמוטציות הנדירות ביותר, אי אפשר להגיד שבהכרח הן הכי הרסניות, כי </a:t>
+            </a:r>
+            <a:r>
+              <a:rPr lang="he-IL" dirty="0" err="1"/>
+              <a:t>הסאמפל</a:t>
+            </a:r>
+            <a:r>
+              <a:rPr lang="he-IL" dirty="0"/>
+              <a:t> </a:t>
+            </a:r>
+            <a:r>
+              <a:rPr lang="he-IL" dirty="0" err="1"/>
+              <a:t>סייז</a:t>
+            </a:r>
+            <a:r>
+              <a:rPr lang="he-IL" dirty="0"/>
+              <a:t> נמוך. ז״א היה מעניין לראות האם התוצאות האלה חוזרות על עצמן כשיש לנו את אותם מספר </a:t>
+            </a:r>
+            <a:r>
+              <a:rPr lang="he-IL" dirty="0" err="1"/>
+              <a:t>סאמפלים</a:t>
+            </a:r>
+            <a:r>
+              <a:rPr lang="he-IL" dirty="0"/>
+              <a:t>.</a:t>
+            </a:r>
             <a:endParaRPr lang="en-IL" dirty="0"/>
           </a:p>
         </p:txBody>
@@ -4842,6 +4873,182 @@
           <a:bodyPr/>
           <a:lstStyle/>
           <a:p>
+            <a:pPr marL="0" algn="r" defTabSz="914400" rtl="1" eaLnBrk="1" latinLnBrk="0" hangingPunct="1"/>
+            <a:r>
+              <a:rPr lang="he-IL" dirty="0"/>
+              <a:t>אחרי זה השאלה האחרונה שרציתי לענות עליה היא האם יש לסוגי סרטן מסוימים נטייה לאפקט חזק יותר של כאוס </a:t>
+            </a:r>
+            <a:r>
+              <a:rPr lang="he-IL" dirty="0" err="1"/>
+              <a:t>גנומי</a:t>
+            </a:r>
+            <a:r>
+              <a:rPr lang="he-IL" dirty="0"/>
+              <a:t>? בצד שמאל בדקתי </a:t>
+            </a:r>
+            <a:r>
+              <a:rPr lang="he-IL" dirty="0" err="1"/>
+              <a:t>מהה</a:t>
+            </a:r>
+            <a:r>
+              <a:rPr lang="he-IL" dirty="0"/>
+              <a:t>-</a:t>
+            </a:r>
+            <a:r>
+              <a:rPr lang="en-US" dirty="0"/>
+              <a:t>Fold Change</a:t>
+            </a:r>
+            <a:r>
+              <a:rPr lang="he-IL" dirty="0"/>
+              <a:t> בין מוטציה ל-</a:t>
+            </a:r>
+            <a:r>
+              <a:rPr lang="en-US" dirty="0"/>
+              <a:t>WT</a:t>
+            </a:r>
+            <a:r>
+              <a:rPr lang="he-IL" dirty="0"/>
+              <a:t>, ז״א ההבדלים הכי גדולים בין מוטציות ל-</a:t>
+            </a:r>
+            <a:r>
+              <a:rPr lang="en-US" dirty="0"/>
+              <a:t>WT</a:t>
+            </a:r>
+            <a:r>
+              <a:rPr lang="he-IL" dirty="0"/>
+              <a:t> קרו בסרטנים שנמצאים גבוה יותר. לקחתי סוגי סרטן עם לפחות 30 </a:t>
+            </a:r>
+            <a:r>
+              <a:rPr lang="he-IL" dirty="0" err="1"/>
+              <a:t>סאמפלים</a:t>
+            </a:r>
+            <a:r>
+              <a:rPr lang="he-IL" dirty="0"/>
+              <a:t>, גם מוטנט וגם ב-</a:t>
+            </a:r>
+            <a:r>
+              <a:rPr lang="en-US" dirty="0"/>
+              <a:t>WT</a:t>
+            </a:r>
+            <a:r>
+              <a:rPr lang="he-IL" dirty="0"/>
+              <a:t> (</a:t>
+            </a:r>
+            <a:r>
+              <a:rPr lang="en-US" dirty="0" err="1"/>
+              <a:t>mann-whitney</a:t>
+            </a:r>
+            <a:r>
+              <a:rPr lang="en-US" dirty="0"/>
+              <a:t> U test</a:t>
+            </a:r>
+            <a:r>
+              <a:rPr lang="he-IL" dirty="0"/>
+              <a:t>, </a:t>
+            </a:r>
+            <a:r>
+              <a:rPr lang="he-IL" dirty="0" err="1"/>
+              <a:t>וה</a:t>
+            </a:r>
+            <a:r>
+              <a:rPr lang="he-IL" dirty="0"/>
+              <a:t>-</a:t>
+            </a:r>
+            <a:r>
+              <a:rPr lang="en-US" dirty="0"/>
+              <a:t>p-values</a:t>
+            </a:r>
+            <a:r>
+              <a:rPr lang="he-IL" dirty="0"/>
+              <a:t> תוקנו ל-</a:t>
+            </a:r>
+            <a:r>
+              <a:rPr lang="en-US" dirty="0"/>
+              <a:t>FDR</a:t>
+            </a:r>
+            <a:r>
+              <a:rPr lang="he-IL" dirty="0"/>
+              <a:t>), את השאר העפתי.</a:t>
+            </a:r>
+          </a:p>
+          <a:p>
+            <a:pPr marL="0" algn="r" defTabSz="914400" rtl="1" eaLnBrk="1" latinLnBrk="0" hangingPunct="1"/>
+            <a:r>
+              <a:rPr lang="he-IL" dirty="0"/>
+              <a:t>בצד הימני בדקתי את ה-</a:t>
+            </a:r>
+            <a:r>
+              <a:rPr lang="en-US" dirty="0"/>
+              <a:t>raw FGA</a:t>
+            </a:r>
+            <a:r>
+              <a:rPr lang="he-IL" dirty="0"/>
+              <a:t> ל-</a:t>
+            </a:r>
+            <a:r>
+              <a:rPr lang="en-US" dirty="0" err="1"/>
+              <a:t>wt</a:t>
+            </a:r>
+            <a:r>
+              <a:rPr lang="he-IL" dirty="0"/>
+              <a:t> ומוטנט עפ״י סוג סרטן. כאן דווקא רואים משהו אחר, למשל סרטני דם (</a:t>
+            </a:r>
+            <a:r>
+              <a:rPr lang="en-US" dirty="0"/>
+              <a:t>blood cancer</a:t>
+            </a:r>
+            <a:r>
+              <a:rPr lang="he-IL" dirty="0"/>
+              <a:t>, </a:t>
+            </a:r>
+            <a:r>
+              <a:rPr lang="en-US" dirty="0"/>
+              <a:t>myelodysplastic syndromes</a:t>
+            </a:r>
+            <a:r>
+              <a:rPr lang="he-IL" dirty="0"/>
+              <a:t> ולוקמיה) אמנם יש להם </a:t>
+            </a:r>
+            <a:r>
+              <a:rPr lang="he-IL" dirty="0" err="1"/>
+              <a:t>פולד</a:t>
+            </a:r>
+            <a:r>
+              <a:rPr lang="he-IL" dirty="0"/>
+              <a:t> </a:t>
+            </a:r>
+            <a:r>
+              <a:rPr lang="he-IL" dirty="0" err="1"/>
+              <a:t>צ׳יינג</a:t>
+            </a:r>
+            <a:r>
+              <a:rPr lang="he-IL" dirty="0"/>
+              <a:t>׳ גבוה לכאורה, אבל בגלל שב-</a:t>
+            </a:r>
+            <a:r>
+              <a:rPr lang="en-US" dirty="0"/>
+              <a:t>WT</a:t>
+            </a:r>
+            <a:r>
+              <a:rPr lang="he-IL" dirty="0"/>
+              <a:t> ה-</a:t>
+            </a:r>
+            <a:r>
+              <a:rPr lang="en-US" dirty="0"/>
+              <a:t>FGA</a:t>
+            </a:r>
+            <a:r>
+              <a:rPr lang="he-IL" dirty="0"/>
+              <a:t> כל כך קרוב ל-0 כל עליה בערכים הופכת להיות משמעותית. לעומת זאת </a:t>
+            </a:r>
+            <a:r>
+              <a:rPr lang="en-US" dirty="0"/>
+              <a:t>solid tumors</a:t>
+            </a:r>
+            <a:r>
+              <a:rPr lang="he-IL" dirty="0"/>
+              <a:t> מראים אפקטים חזקים.</a:t>
+            </a:r>
             <a:endParaRPr lang="en-IL" dirty="0"/>
           </a:p>
         </p:txBody>
@@ -4950,7 +5157,223 @@
           <a:bodyPr/>
           <a:lstStyle/>
           <a:p>
-            <a:endParaRPr lang="en-IL" dirty="0"/>
+            <a:pPr marL="0" algn="r" defTabSz="914400" rtl="1" eaLnBrk="1" latinLnBrk="0" hangingPunct="1"/>
+            <a:r>
+              <a:rPr lang="he-IL" dirty="0"/>
+              <a:t>פה עברנו כבר לאנליזה המשנית, רציתי לבדוק באופן ספציפי אילו גנים נמחקים הכי הרבה ואילו גנים מוגברים הכי הרבה.</a:t>
+            </a:r>
+            <a:endParaRPr lang="en-US" dirty="0"/>
+          </a:p>
+          <a:p>
+            <a:pPr marL="0" algn="r" defTabSz="914400" rtl="1" eaLnBrk="1" latinLnBrk="0" hangingPunct="1"/>
+            <a:r>
+              <a:rPr lang="he-IL" dirty="0"/>
+              <a:t>לקחתי את </a:t>
+            </a:r>
+            <a:r>
+              <a:rPr lang="he-IL" dirty="0" err="1"/>
+              <a:t>הסאמפלים</a:t>
+            </a:r>
+            <a:r>
+              <a:rPr lang="he-IL" dirty="0"/>
+              <a:t> המוטנטים עם ה-</a:t>
+            </a:r>
+            <a:r>
+              <a:rPr lang="en-US" dirty="0"/>
+              <a:t>FGA</a:t>
+            </a:r>
+            <a:r>
+              <a:rPr lang="he-IL" dirty="0"/>
+              <a:t> הכי גבוה </a:t>
+            </a:r>
+            <a:r>
+              <a:rPr lang="he-IL" dirty="0" err="1"/>
+              <a:t>וסאמפלים</a:t>
+            </a:r>
+            <a:r>
+              <a:rPr lang="he-IL" dirty="0"/>
+              <a:t> </a:t>
+            </a:r>
+            <a:r>
+              <a:rPr lang="en-US" dirty="0"/>
+              <a:t>WT</a:t>
+            </a:r>
+            <a:r>
+              <a:rPr lang="he-IL" dirty="0"/>
+              <a:t> עם </a:t>
+            </a:r>
+            <a:r>
+              <a:rPr lang="en-US" dirty="0"/>
+              <a:t>FGA</a:t>
+            </a:r>
+            <a:r>
+              <a:rPr lang="he-IL" dirty="0"/>
+              <a:t> נמוך, ובדקתי מה האחוז של </a:t>
+            </a:r>
+            <a:r>
+              <a:rPr lang="he-IL" dirty="0" err="1"/>
+              <a:t>הסאמפלים</a:t>
+            </a:r>
+            <a:r>
+              <a:rPr lang="he-IL" dirty="0"/>
+              <a:t> עם המוטציות ב-</a:t>
+            </a:r>
+            <a:r>
+              <a:rPr lang="en-US" dirty="0"/>
+              <a:t>TP53</a:t>
+            </a:r>
+            <a:r>
+              <a:rPr lang="he-IL" dirty="0"/>
+              <a:t> עם </a:t>
+            </a:r>
+            <a:r>
+              <a:rPr lang="en-US" dirty="0"/>
+              <a:t>FGA</a:t>
+            </a:r>
+            <a:r>
+              <a:rPr lang="he-IL" dirty="0"/>
+              <a:t> גבוה יש להם גן מסוים שהוא מוגבר או נמחק, פחות האחוז של הגידולים עם </a:t>
+            </a:r>
+            <a:r>
+              <a:rPr lang="en-US" dirty="0"/>
+              <a:t>TP53</a:t>
+            </a:r>
+            <a:r>
+              <a:rPr lang="he-IL" dirty="0"/>
+              <a:t> שהוא </a:t>
+            </a:r>
+            <a:r>
+              <a:rPr lang="en-US" dirty="0"/>
+              <a:t>WT</a:t>
+            </a:r>
+            <a:r>
+              <a:rPr lang="he-IL" dirty="0"/>
+              <a:t> עם </a:t>
+            </a:r>
+            <a:r>
+              <a:rPr lang="en-US" dirty="0"/>
+              <a:t>FGA</a:t>
+            </a:r>
+            <a:r>
+              <a:rPr lang="he-IL" dirty="0"/>
+              <a:t> נמוך (</a:t>
+            </a:r>
+            <a:r>
+              <a:rPr lang="en-US" sz="1200" b="0" i="0" kern="1200" dirty="0" err="1">
+                <a:solidFill>
+                  <a:schemeClr val="tx1"/>
+                </a:solidFill>
+                <a:effectLst/>
+                <a:latin typeface="+mn-lt"/>
+                <a:ea typeface="+mn-ea"/>
+                <a:cs typeface="+mn-cs"/>
+              </a:rPr>
+              <a:t>fisher_exact</a:t>
+            </a:r>
+            <a:r>
+              <a:rPr lang="en-US" sz="1200" b="0" i="0" kern="1200" dirty="0">
+                <a:solidFill>
+                  <a:schemeClr val="tx1"/>
+                </a:solidFill>
+                <a:effectLst/>
+                <a:latin typeface="+mn-lt"/>
+                <a:ea typeface="+mn-ea"/>
+                <a:cs typeface="+mn-cs"/>
+              </a:rPr>
+              <a:t> method</a:t>
+            </a:r>
+            <a:r>
+              <a:rPr lang="he-IL" sz="1200" b="0" i="0" kern="1200" dirty="0">
+                <a:solidFill>
+                  <a:schemeClr val="tx1"/>
+                </a:solidFill>
+                <a:effectLst/>
+                <a:latin typeface="+mn-lt"/>
+                <a:ea typeface="+mn-ea"/>
+                <a:cs typeface="+mn-cs"/>
+              </a:rPr>
+              <a:t>)</a:t>
+            </a:r>
+            <a:endParaRPr lang="en-US" dirty="0"/>
+          </a:p>
+          <a:p>
+            <a:pPr marL="0" algn="r" defTabSz="914400" rtl="1" eaLnBrk="1" latinLnBrk="0" hangingPunct="1"/>
+            <a:r>
+              <a:rPr lang="he-IL" dirty="0"/>
+              <a:t>רואים פה בבירור שיש כאן </a:t>
+            </a:r>
+            <a:r>
+              <a:rPr lang="he-IL" dirty="0" err="1"/>
+              <a:t>אונקוגנים</a:t>
+            </a:r>
+            <a:r>
+              <a:rPr lang="he-IL" dirty="0"/>
+              <a:t> קלאסיים כמו </a:t>
+            </a:r>
+            <a:r>
+              <a:rPr lang="en-US" dirty="0"/>
+              <a:t>MYC</a:t>
+            </a:r>
+            <a:r>
+              <a:rPr lang="he-IL" dirty="0"/>
+              <a:t> לצד </a:t>
+            </a:r>
+            <a:r>
+              <a:rPr lang="he-IL" dirty="0" err="1"/>
+              <a:t>טומר</a:t>
+            </a:r>
+            <a:r>
+              <a:rPr lang="he-IL" dirty="0"/>
+              <a:t> </a:t>
+            </a:r>
+            <a:r>
+              <a:rPr lang="he-IL" dirty="0" err="1"/>
+              <a:t>סופרסורים</a:t>
+            </a:r>
+            <a:r>
+              <a:rPr lang="he-IL" dirty="0"/>
+              <a:t> שנמחקים כמו </a:t>
+            </a:r>
+            <a:r>
+              <a:rPr lang="en-US" dirty="0"/>
+              <a:t>CDKN2A</a:t>
+            </a:r>
+            <a:r>
+              <a:rPr lang="he-IL" dirty="0"/>
+              <a:t> ו-</a:t>
+            </a:r>
+            <a:r>
+              <a:rPr lang="en-US" dirty="0"/>
+              <a:t>PTEN</a:t>
+            </a:r>
+            <a:r>
+              <a:rPr lang="he-IL" dirty="0"/>
+              <a:t> או גנים שמבקרים </a:t>
+            </a:r>
+            <a:r>
+              <a:rPr lang="en-US" dirty="0"/>
+              <a:t>cell cycle</a:t>
+            </a:r>
+            <a:r>
+              <a:rPr lang="he-IL" dirty="0"/>
+              <a:t> כמו </a:t>
+            </a:r>
+            <a:r>
+              <a:rPr lang="en-US" dirty="0"/>
+              <a:t>RB1</a:t>
+            </a:r>
+            <a:r>
+              <a:rPr lang="he-IL" dirty="0"/>
+              <a:t> ו-</a:t>
+            </a:r>
+            <a:r>
+              <a:rPr lang="en-US" dirty="0"/>
+              <a:t>CDKN2B</a:t>
+            </a:r>
+            <a:r>
+              <a:rPr lang="he-IL" dirty="0"/>
+              <a:t>.</a:t>
+            </a:r>
           </a:p>
         </p:txBody>
       </p:sp>
@@ -5058,6 +5481,27 @@
           <a:bodyPr/>
           <a:lstStyle/>
           <a:p>
+            <a:pPr marL="0" algn="r" defTabSz="914400" rtl="1" eaLnBrk="1" latinLnBrk="0" hangingPunct="1"/>
+            <a:r>
+              <a:rPr lang="he-IL" dirty="0"/>
+              <a:t>כאן בעזרת </a:t>
+            </a:r>
+            <a:r>
+              <a:rPr lang="en-US" dirty="0" err="1"/>
+              <a:t>gseapy</a:t>
+            </a:r>
+            <a:r>
+              <a:rPr lang="he-IL" dirty="0"/>
+              <a:t> בדקתי אילו מסלולים מוגברים כתוצאה מכאוס </a:t>
+            </a:r>
+            <a:r>
+              <a:rPr lang="he-IL" dirty="0" err="1"/>
+              <a:t>גנומי</a:t>
+            </a:r>
+            <a:r>
+              <a:rPr lang="he-IL" dirty="0"/>
+              <a:t>. ובהתאמה למה שראינו בשקופית הקודמת, אנחנו רואים </a:t>
+            </a:r>
             <a:endParaRPr lang="en-IL" dirty="0"/>
           </a:p>
         </p:txBody>
@@ -11746,7 +12190,7 @@
           <a:p>
             <a:r>
               <a:rPr lang="en-US" dirty="0"/>
-              <a:t>MSK-IMPACT (53,292 samples, 505 cancer genes).</a:t>
+              <a:t>TCGA Pan-Cancer Atlas (~10K samples, genome-wide).</a:t>
             </a:r>
           </a:p>
           <a:p>
@@ -12790,8 +13234,8 @@
         </p:nvSpPr>
         <p:spPr>
           <a:xfrm>
-            <a:off x="2585456" y="6174992"/>
-            <a:ext cx="7016408" cy="369332"/>
+            <a:off x="2832736" y="6206143"/>
+            <a:ext cx="6521850" cy="369332"/>
           </a:xfrm>
           <a:prstGeom prst="rect">
             <a:avLst/>
@@ -12806,7 +13250,7 @@
           <a:p>
             <a:r>
               <a:rPr lang="en-US" dirty="0"/>
-              <a:t>Hotspot mutations show variable FGA. Not all hotspots behave the same</a:t>
+              <a:t>The loss of TP53 function itself drives genomic instability uniformly.</a:t>
             </a:r>
           </a:p>
         </p:txBody>
@@ -13162,8 +13606,8 @@
         </p:nvSpPr>
         <p:spPr>
           <a:xfrm>
-            <a:off x="958770" y="6250055"/>
-            <a:ext cx="10519611" cy="369332"/>
+            <a:off x="895881" y="5821166"/>
+            <a:ext cx="10395551" cy="923330"/>
           </a:xfrm>
           <a:prstGeom prst="rect">
             <a:avLst/>
@@ -13171,14 +13615,22 @@
           <a:noFill/>
         </p:spPr>
         <p:txBody>
-          <a:bodyPr wrap="none" rtlCol="0">
+          <a:bodyPr wrap="square" rtlCol="0">
             <a:spAutoFit/>
           </a:bodyPr>
           <a:lstStyle/>
           <a:p>
+            <a:pPr algn="ctr"/>
             <a:r>
               <a:rPr lang="en-US" dirty="0"/>
-              <a:t>EFS-FGA correlation varies substantially by cancer type. Some cancers show strong correlation, others none</a:t>
+              <a:t>All top absolute FGA cancers are solid tumors (Ovarian Cancer, Soft Tissue Sarcoma, and Colorectal Cancer).</a:t>
+            </a:r>
+          </a:p>
+          <a:p>
+            <a:pPr algn="ctr"/>
+            <a:r>
+              <a:rPr lang="en-US" dirty="0"/>
+              <a:t>The blood cancers have the highest fold change but tiny absolute FGA values (~0.03–0.07) because their WT baseline is essentially zero.</a:t>
             </a:r>
           </a:p>
         </p:txBody>
@@ -13205,7 +13657,7 @@
         </p:blipFill>
         <p:spPr>
           <a:xfrm>
-            <a:off x="1672354" y="2137559"/>
+            <a:off x="1672352" y="1934359"/>
             <a:ext cx="8842611" cy="3860973"/>
           </a:xfrm>
           <a:prstGeom prst="rect">
@@ -13408,7 +13860,7 @@
             </a:r>
             <a:r>
               <a:rPr lang="en-US" dirty="0" err="1"/>
-              <a:t>cnaS</a:t>
+              <a:t>cna</a:t>
             </a:r>
             <a:r>
               <a:rPr lang="en-US" dirty="0"/>
@@ -13431,8 +13883,8 @@
         </p:nvSpPr>
         <p:spPr>
           <a:xfrm>
-            <a:off x="2908919" y="6035200"/>
-            <a:ext cx="6619313" cy="646331"/>
+            <a:off x="3082043" y="6035200"/>
+            <a:ext cx="6273064" cy="646331"/>
           </a:xfrm>
           <a:prstGeom prst="rect">
             <a:avLst/>
@@ -13445,15 +13897,17 @@
           </a:bodyPr>
           <a:lstStyle/>
           <a:p>
+            <a:pPr algn="ctr"/>
             <a:r>
               <a:rPr lang="en-US" dirty="0"/>
-              <a:t>Amplified genes (left panel) — oncogenes being turned ON</a:t>
-            </a:r>
-          </a:p>
-          <a:p>
+              <a:t>Amplified genes (left panel): oncogenes being turned ON</a:t>
+            </a:r>
+          </a:p>
+          <a:p>
+            <a:pPr algn="ctr"/>
             <a:r>
               <a:rPr lang="en-US" dirty="0"/>
-              <a:t>Deleted genes (right panel) — tumor suppressors being turned OFF</a:t>
+              <a:t>Deleted genes (right panel): tumor suppressors being turned OFF</a:t>
             </a:r>
           </a:p>
         </p:txBody>
@@ -13698,7 +14152,7 @@
         </p:nvSpPr>
         <p:spPr>
           <a:xfrm>
-            <a:off x="1826190" y="5996699"/>
+            <a:off x="1826190" y="6035200"/>
             <a:ext cx="9079595" cy="646331"/>
           </a:xfrm>
           <a:prstGeom prst="rect">
@@ -13712,6 +14166,7 @@
           </a:bodyPr>
           <a:lstStyle/>
           <a:p>
+            <a:pPr algn="ctr"/>
             <a:r>
               <a:rPr lang="en-US" dirty="0"/>
               <a:t>When TP53 breaks and FGA is high, cell cycle control (E2F, G2-M) and growth signaling (PI3K/AKT/mTOR) pathways are the main downstream consequences</a:t>

--- a/project/project_background/Final Project Presentation - Ornit - Cancer Bioinfo March 2026.pptx
+++ b/project/project_background/Final Project Presentation - Ornit - Cancer Bioinfo March 2026.pptx
@@ -5500,7 +5500,11 @@
             </a:r>
             <a:r>
               <a:rPr lang="he-IL" dirty="0"/>
-              <a:t>. ובהתאמה למה שראינו בשקופית הקודמת, אנחנו רואים </a:t>
+              <a:t>. ובהתאמה למה שראינו בשקופית הקודמת, אנחנו </a:t>
+            </a:r>
+            <a:r>
+              <a:rPr lang="he-IL"/>
+              <a:t>רואים </a:t>
             </a:r>
             <a:endParaRPr lang="en-IL" dirty="0"/>
           </a:p>
@@ -12190,7 +12194,7 @@
           <a:p>
             <a:r>
               <a:rPr lang="en-US" dirty="0"/>
-              <a:t>TCGA Pan-Cancer Atlas (~10K samples, genome-wide).</a:t>
+              <a:t>MSK-IMPACT (53,292 samples, 505 cancer genes).</a:t>
             </a:r>
           </a:p>
           <a:p>

--- a/project/project_background/Final Project Presentation - Ornit - Cancer Bioinfo March 2026.pptx
+++ b/project/project_background/Final Project Presentation - Ornit - Cancer Bioinfo March 2026.pptx
@@ -3268,7 +3268,7 @@
           <a:p>
             <a:fld id="{4FCD6A08-F84D-254F-876D-619DDBFD23F2}" type="datetimeFigureOut">
               <a:rPr lang="en-IL" smtClean="0"/>
-              <a:t>12/03/2026</a:t>
+              <a:t>18/03/2026</a:t>
             </a:fld>
             <a:endParaRPr lang="en-IL"/>
           </a:p>
@@ -3784,6 +3784,7 @@
               <a:rPr lang="he-IL" dirty="0"/>
               <a:t> אמר לי מה נשבר.</a:t>
             </a:r>
+            <a:endParaRPr lang="en-US" dirty="0"/>
           </a:p>
         </p:txBody>
       </p:sp>
@@ -4023,7 +4024,7 @@
             </a:r>
             <a:r>
               <a:rPr lang="he-IL" dirty="0"/>
-              <a:t>, שם מצוין לכל </a:t>
+              <a:t>, ששם הם מציינים לכל </a:t>
             </a:r>
             <a:r>
               <a:rPr lang="he-IL" dirty="0" err="1"/>
@@ -4263,21 +4264,6 @@
             <a:pPr marL="0" algn="r" defTabSz="914400" rtl="1" eaLnBrk="1" latinLnBrk="0" hangingPunct="1"/>
             <a:r>
               <a:rPr lang="he-IL" dirty="0"/>
-              <a:t>הקו הכחול הוא ה-</a:t>
-            </a:r>
-            <a:r>
-              <a:rPr lang="en-US" dirty="0"/>
-              <a:t>linear regression fit</a:t>
-            </a:r>
-            <a:r>
-              <a:rPr lang="he-IL" dirty="0"/>
-              <a:t>.</a:t>
-            </a:r>
-          </a:p>
-          <a:p>
-            <a:pPr marL="0" algn="r" defTabSz="914400" rtl="1" eaLnBrk="1" latinLnBrk="0" hangingPunct="1"/>
-            <a:r>
-              <a:rPr lang="he-IL" dirty="0"/>
               <a:t>לקחתי את שם המוטציה (נניח </a:t>
             </a:r>
             <a:r>
@@ -5500,11 +5486,7 @@
             </a:r>
             <a:r>
               <a:rPr lang="he-IL" dirty="0"/>
-              <a:t>. ובהתאמה למה שראינו בשקופית הקודמת, אנחנו </a:t>
-            </a:r>
-            <a:r>
-              <a:rPr lang="he-IL"/>
-              <a:t>רואים </a:t>
+              <a:t>. ובהתאמה למה שראינו בשקופית הקודמת, אנחנו רואים </a:t>
             </a:r>
             <a:endParaRPr lang="en-IL" dirty="0"/>
           </a:p>
@@ -5614,6 +5596,7 @@
           <a:bodyPr/>
           <a:lstStyle/>
           <a:p>
+            <a:pPr marL="0" algn="r" defTabSz="914400" rtl="1" eaLnBrk="1" latinLnBrk="0" hangingPunct="1"/>
             <a:endParaRPr lang="en-IL" dirty="0"/>
           </a:p>
         </p:txBody>
@@ -5841,7 +5824,7 @@
             </a:r>
             <a:r>
               <a:rPr lang="he-IL" dirty="0"/>
-              <a:t> להסברים שנתתי בפעם הקודמת: </a:t>
+              <a:t> קצר: </a:t>
             </a:r>
             <a:r>
               <a:rPr lang="en-US" dirty="0"/>
@@ -5897,7 +5880,7 @@
             </a:r>
             <a:r>
               <a:rPr lang="he-IL" dirty="0"/>
-              <a:t> נמצא שם ומניע את התהליכים האלו. מוטציות ב-</a:t>
+              <a:t> נמצא שם ומניע או מבקר את התהליכים האלו. מוטציות ב-</a:t>
             </a:r>
             <a:r>
               <a:rPr lang="en-US" dirty="0"/>
@@ -5905,7 +5888,7 @@
             </a:r>
             <a:r>
               <a:rPr lang="he-IL" dirty="0"/>
-              <a:t> יכולות להשפיע על התהליכים האלו, והן יושבות על איזשהו ספקטרום מבחינת הפנוטיפ שהן גורמות לו, ז״א מוטציות שונות ב-</a:t>
+              <a:t> יכולות להשפיע על המסלולים האלו, והן יושבות על איזשהו ספקטרום מבחינת הפנוטיפ שהן גורמות לו, ז״א מוטציות שונות ב-</a:t>
             </a:r>
             <a:r>
               <a:rPr lang="en-US" dirty="0"/>
@@ -5929,10 +5912,26 @@
             <a:endParaRPr lang="he-IL" dirty="0"/>
           </a:p>
           <a:p>
-            <a:pPr marL="0" algn="r" defTabSz="914400" rtl="1" eaLnBrk="1" latinLnBrk="0" hangingPunct="1"/>
+            <a:pPr marL="0" marR="0" lvl="0" indent="0" algn="r" defTabSz="914400" rtl="1" eaLnBrk="1" fontAlgn="auto" latinLnBrk="0" hangingPunct="1">
+              <a:lnSpc>
+                <a:spcPct val="100000"/>
+              </a:lnSpc>
+              <a:spcBef>
+                <a:spcPts val="0"/>
+              </a:spcBef>
+              <a:spcAft>
+                <a:spcPts val="0"/>
+              </a:spcAft>
+              <a:buClrTx/>
+              <a:buSzTx/>
+              <a:buFontTx/>
+              <a:buNone/>
+              <a:tabLst/>
+              <a:defRPr/>
+            </a:pPr>
             <a:r>
               <a:rPr lang="he-IL" dirty="0"/>
-              <a:t>אחד הדברים שאפשר להגיד ש-</a:t>
+              <a:t>אחת ההשערות שלי היא ש-</a:t>
             </a:r>
             <a:r>
               <a:rPr lang="en-US" dirty="0"/>
@@ -5940,7 +5939,7 @@
             </a:r>
             <a:r>
               <a:rPr lang="he-IL" dirty="0"/>
-              <a:t> יכול להוביל אליהם כשהוא פגום זה </a:t>
+              <a:t> פגום יכול להוביל ל-</a:t>
             </a:r>
             <a:r>
               <a:rPr lang="en-US" dirty="0"/>
@@ -5948,8 +5947,20 @@
             </a:r>
             <a:r>
               <a:rPr lang="he-IL" dirty="0"/>
+              <a:t> וכתוצאה מכך לכאוס </a:t>
+            </a:r>
+            <a:r>
+              <a:rPr lang="he-IL" dirty="0" err="1"/>
+              <a:t>גנומי</a:t>
+            </a:r>
+            <a:r>
+              <a:rPr lang="he-IL" dirty="0"/>
               <a:t>.</a:t>
             </a:r>
+          </a:p>
+          <a:p>
+            <a:pPr marL="0" algn="r" defTabSz="914400" rtl="1" eaLnBrk="1" latinLnBrk="0" hangingPunct="1"/>
+            <a:endParaRPr lang="he-IL" dirty="0"/>
           </a:p>
         </p:txBody>
       </p:sp>
@@ -6274,48 +6285,7 @@
           <a:lstStyle/>
           <a:p>
             <a:pPr marL="0" algn="r" defTabSz="914400" rtl="1" eaLnBrk="1" latinLnBrk="0" hangingPunct="1"/>
-            <a:r>
-              <a:rPr lang="he-IL" dirty="0"/>
-              <a:t>שלום לכולם אני </a:t>
-            </a:r>
-            <a:r>
-              <a:rPr lang="he-IL" dirty="0" err="1"/>
-              <a:t>אורנית</a:t>
-            </a:r>
-            <a:r>
-              <a:rPr lang="he-IL" dirty="0"/>
-              <a:t>, ואני הולכת לדבר על הפרויקט שלי שנקרא ... </a:t>
-            </a:r>
-          </a:p>
-          <a:p>
-            <a:pPr marL="0" algn="r" defTabSz="914400" rtl="1" eaLnBrk="1" latinLnBrk="0" hangingPunct="1"/>
-            <a:r>
-              <a:rPr lang="he-IL" dirty="0"/>
-              <a:t>כדי להבין מה הפרויקט הזה אומר, אני צריכה להסביר מה זה </a:t>
-            </a:r>
-            <a:r>
-              <a:rPr lang="en-US" dirty="0"/>
-              <a:t>TP53</a:t>
-            </a:r>
-            <a:r>
-              <a:rPr lang="he-IL" dirty="0"/>
-              <a:t> ו-</a:t>
-            </a:r>
-            <a:r>
-              <a:rPr lang="en-US" dirty="0"/>
-              <a:t>CNV</a:t>
-            </a:r>
-            <a:r>
-              <a:rPr lang="he-IL" dirty="0"/>
-              <a:t>.</a:t>
-            </a:r>
-          </a:p>
-          <a:p>
-            <a:pPr marL="0" algn="r" defTabSz="914400" rtl="1" eaLnBrk="1" latinLnBrk="0" hangingPunct="1"/>
-            <a:r>
-              <a:rPr lang="he-IL" dirty="0"/>
-              <a:t>אלה שני נושאים שמוזכרים לפעמים יחד בהקשר לסרטן ותכף אסביר למה</a:t>
-            </a:r>
+            <a:endParaRPr lang="he-IL" dirty="0"/>
           </a:p>
         </p:txBody>
       </p:sp>
@@ -6470,8 +6440,134 @@
             </a:r>
             <a:r>
               <a:rPr lang="he-IL" dirty="0"/>
-              <a:t>, </a:t>
-            </a:r>
+              <a:t>.</a:t>
+            </a:r>
+            <a:endParaRPr lang="en-US" dirty="0"/>
+          </a:p>
+          <a:p>
+            <a:pPr marL="0" marR="0" lvl="0" indent="0" algn="r" defTabSz="914400" rtl="1" eaLnBrk="1" fontAlgn="auto" latinLnBrk="0" hangingPunct="1">
+              <a:lnSpc>
+                <a:spcPct val="100000"/>
+              </a:lnSpc>
+              <a:spcBef>
+                <a:spcPts val="0"/>
+              </a:spcBef>
+              <a:spcAft>
+                <a:spcPts val="0"/>
+              </a:spcAft>
+              <a:buClrTx/>
+              <a:buSzTx/>
+              <a:buFontTx/>
+              <a:buNone/>
+              <a:tabLst/>
+              <a:defRPr/>
+            </a:pPr>
+            <a:r>
+              <a:rPr lang="en-US" sz="1200" b="1" i="0" kern="1200" dirty="0">
+                <a:solidFill>
+                  <a:schemeClr val="tx1"/>
+                </a:solidFill>
+                <a:effectLst/>
+                <a:latin typeface="+mn-lt"/>
+                <a:ea typeface="+mn-ea"/>
+                <a:cs typeface="+mn-cs"/>
+              </a:rPr>
+              <a:t>FGA = (number of base pairs with copy number gain or loss) / (total base pairs profiled)</a:t>
+            </a:r>
+          </a:p>
+          <a:p>
+            <a:pPr algn="r" rtl="1"/>
+            <a:r>
+              <a:rPr lang="en-US" dirty="0"/>
+              <a:t>FGA</a:t>
+            </a:r>
+            <a:r>
+              <a:rPr lang="he-IL" dirty="0"/>
+              <a:t> בודק מה הגודל של ה-</a:t>
+            </a:r>
+            <a:r>
+              <a:rPr lang="en-US" dirty="0"/>
+              <a:t>fraction</a:t>
+            </a:r>
+            <a:r>
+              <a:rPr lang="he-IL" dirty="0"/>
+              <a:t> מהגנום שיש לו </a:t>
+            </a:r>
+            <a:r>
+              <a:rPr lang="en-US" dirty="0"/>
+              <a:t>CNV</a:t>
+            </a:r>
+            <a:r>
+              <a:rPr lang="he-IL" dirty="0"/>
+              <a:t>.</a:t>
+            </a:r>
+          </a:p>
+          <a:p>
+            <a:pPr algn="r" rtl="1"/>
+            <a:r>
+              <a:rPr lang="en-US" dirty="0"/>
+              <a:t>CNV</a:t>
+            </a:r>
+            <a:r>
+              <a:rPr lang="he-IL" dirty="0"/>
+              <a:t> מתייחס למקרה ספציפי, </a:t>
+            </a:r>
+            <a:r>
+              <a:rPr lang="en-US" dirty="0"/>
+              <a:t>FGA</a:t>
+            </a:r>
+            <a:r>
+              <a:rPr lang="he-IL" dirty="0"/>
+              <a:t> הוא </a:t>
+            </a:r>
+            <a:r>
+              <a:rPr lang="he-IL" dirty="0" err="1"/>
+              <a:t>סקאלאר</a:t>
+            </a:r>
+            <a:r>
+              <a:rPr lang="he-IL" dirty="0"/>
+              <a:t> אחד שמתאר את ה-</a:t>
+            </a:r>
+            <a:r>
+              <a:rPr lang="en-US" dirty="0"/>
+              <a:t>burden</a:t>
+            </a:r>
+            <a:r>
+              <a:rPr lang="he-IL" dirty="0"/>
+              <a:t> של כל האירועים האלו.</a:t>
+            </a:r>
+          </a:p>
+          <a:p>
+            <a:pPr marL="0" marR="0" lvl="0" indent="0" algn="r" defTabSz="914400" rtl="1" eaLnBrk="1" fontAlgn="auto" latinLnBrk="0" hangingPunct="1">
+              <a:lnSpc>
+                <a:spcPct val="100000"/>
+              </a:lnSpc>
+              <a:spcBef>
+                <a:spcPts val="0"/>
+              </a:spcBef>
+              <a:spcAft>
+                <a:spcPts val="0"/>
+              </a:spcAft>
+              <a:buClrTx/>
+              <a:buSzTx/>
+              <a:buFontTx/>
+              <a:buNone/>
+              <a:tabLst/>
+              <a:defRPr/>
+            </a:pPr>
+            <a:endParaRPr lang="en-US" sz="1200" b="0" i="0" kern="1200" dirty="0">
+              <a:solidFill>
+                <a:schemeClr val="tx1"/>
+              </a:solidFill>
+              <a:effectLst/>
+              <a:latin typeface="+mn-lt"/>
+              <a:ea typeface="+mn-ea"/>
+              <a:cs typeface="+mn-cs"/>
+            </a:endParaRPr>
+          </a:p>
+          <a:p>
+            <a:pPr marL="0" algn="r" defTabSz="914400" rtl="1" eaLnBrk="1" latinLnBrk="0" hangingPunct="1"/>
+            <a:endParaRPr lang="he-IL" dirty="0"/>
           </a:p>
         </p:txBody>
       </p:sp>
@@ -6661,88 +6757,63 @@
           <a:p>
             <a:pPr marL="0" algn="r" defTabSz="914400" rtl="1" eaLnBrk="1" latinLnBrk="0" hangingPunct="1"/>
             <a:r>
-              <a:rPr lang="he-IL" sz="1200" b="0" i="0" kern="1200" dirty="0">
-                <a:solidFill>
-                  <a:schemeClr val="tx1"/>
-                </a:solidFill>
-                <a:effectLst/>
-                <a:latin typeface="+mn-lt"/>
-                <a:ea typeface="+mn-ea"/>
-                <a:cs typeface="+mn-cs"/>
-              </a:rPr>
-              <a:t>בשלב הראשון הם סרקו 8,258 וריאנטים של </a:t>
-            </a:r>
-            <a:r>
-              <a:rPr lang="en-US" sz="1200" b="0" i="0" kern="1200" dirty="0">
-                <a:solidFill>
-                  <a:schemeClr val="tx1"/>
-                </a:solidFill>
-                <a:effectLst/>
-                <a:latin typeface="+mn-lt"/>
-                <a:ea typeface="+mn-ea"/>
-                <a:cs typeface="+mn-cs"/>
-              </a:rPr>
-              <a:t>TP53</a:t>
-            </a:r>
-            <a:r>
-              <a:rPr lang="he-IL" sz="1200" b="0" i="0" kern="1200" dirty="0">
-                <a:solidFill>
-                  <a:schemeClr val="tx1"/>
-                </a:solidFill>
-                <a:effectLst/>
-                <a:latin typeface="+mn-lt"/>
-                <a:ea typeface="+mn-ea"/>
-                <a:cs typeface="+mn-cs"/>
-              </a:rPr>
-              <a:t> ע״י הכנסתם לשני קווי תאים </a:t>
-            </a:r>
-            <a:r>
-              <a:rPr lang="he-IL" sz="1200" b="0" i="0" kern="1200" dirty="0" err="1">
-                <a:solidFill>
-                  <a:schemeClr val="tx1"/>
-                </a:solidFill>
-                <a:effectLst/>
-                <a:latin typeface="+mn-lt"/>
-                <a:ea typeface="+mn-ea"/>
-                <a:cs typeface="+mn-cs"/>
-              </a:rPr>
-              <a:t>איזוגניים</a:t>
-            </a:r>
-            <a:r>
-              <a:rPr lang="he-IL" sz="1200" b="0" i="0" kern="1200" dirty="0">
-                <a:solidFill>
-                  <a:schemeClr val="tx1"/>
-                </a:solidFill>
-                <a:effectLst/>
-                <a:latin typeface="+mn-lt"/>
-                <a:ea typeface="+mn-ea"/>
-                <a:cs typeface="+mn-cs"/>
-              </a:rPr>
-              <a:t>: אחד עם </a:t>
-            </a:r>
-            <a:r>
-              <a:rPr lang="en-US" sz="1200" b="0" i="0" kern="1200" dirty="0">
-                <a:solidFill>
-                  <a:schemeClr val="tx1"/>
-                </a:solidFill>
-                <a:effectLst/>
-                <a:latin typeface="+mn-lt"/>
-                <a:ea typeface="+mn-ea"/>
-                <a:cs typeface="+mn-cs"/>
-              </a:rPr>
-              <a:t>p53</a:t>
-            </a:r>
-            <a:r>
-              <a:rPr lang="he-IL" sz="1200" b="0" i="0" kern="1200" dirty="0">
-                <a:solidFill>
-                  <a:schemeClr val="tx1"/>
-                </a:solidFill>
-                <a:effectLst/>
-                <a:latin typeface="+mn-lt"/>
-                <a:ea typeface="+mn-ea"/>
-                <a:cs typeface="+mn-cs"/>
-              </a:rPr>
-              <a:t> תקין ואחד בלי</a:t>
+              <a:rPr lang="he-IL" dirty="0"/>
+              <a:t>כדי למדוד כמה כל מוטציה ב-</a:t>
+            </a:r>
+            <a:r>
+              <a:rPr lang="en-US" dirty="0"/>
+              <a:t>TP53 </a:t>
+            </a:r>
+            <a:r>
+              <a:rPr lang="he-IL" dirty="0"/>
+              <a:t>באמת פוגעת בתפקוד החלבון, השתמשתי בנתונים שלהם מניסוי </a:t>
+            </a:r>
+            <a:r>
+              <a:rPr lang="he-IL" dirty="0" err="1"/>
+              <a:t>קריספר</a:t>
+            </a:r>
+            <a:r>
+              <a:rPr lang="he-IL" dirty="0"/>
+              <a:t> שהם עשו, שבדק ניסויית למעלה מ-8,000 וריאנטים שונים של </a:t>
+            </a:r>
+            <a:r>
+              <a:rPr lang="en-US" dirty="0"/>
+              <a:t>TP53.</a:t>
+            </a:r>
+            <a:br>
+              <a:rPr lang="en-US" dirty="0"/>
+            </a:br>
+            <a:r>
+              <a:rPr lang="he-IL" dirty="0"/>
+              <a:t>הרעיון פשוט: הכניסו כל וריאנט לתאי סרטן ריאה, חלק עם </a:t>
+            </a:r>
+            <a:r>
+              <a:rPr lang="en-US" dirty="0"/>
+              <a:t>p53 </a:t>
+            </a:r>
+            <a:r>
+              <a:rPr lang="he-IL" dirty="0"/>
+              <a:t> תקין, וחלק ללא</a:t>
+            </a:r>
+            <a:r>
+              <a:rPr lang="en-US" dirty="0"/>
+              <a:t> p53 </a:t>
+            </a:r>
+            <a:r>
+              <a:rPr lang="he-IL" dirty="0"/>
+              <a:t>בכלל, ואז חשפו אותם לתרופות שמפעילות את הביטוי של </a:t>
+            </a:r>
+            <a:r>
+              <a:rPr lang="he-IL" dirty="0" err="1"/>
+              <a:t>p</a:t>
+            </a:r>
+            <a:r>
+              <a:rPr lang="en-US" dirty="0"/>
+              <a:t>53</a:t>
+            </a:r>
+            <a:r>
+              <a:rPr lang="he-IL" dirty="0"/>
+              <a:t>.</a:t>
             </a:r>
             <a:endParaRPr lang="en-US" sz="1200" b="0" i="0" kern="1200" dirty="0">
               <a:solidFill>
@@ -6887,7 +6958,7 @@
                 <a:ea typeface="+mn-ea"/>
                 <a:cs typeface="+mn-cs"/>
               </a:rPr>
-              <a:t>בשלב השני הם רצו למדוד את שכיחות האלל הספציפי שהם בודקים. אחרי 12 ימים הם ריצפו את התאים ששרדו כדי לראות אילו אללים נשארו בחיים. לכל אלל חישבו </a:t>
+              <a:t>בשלב השני הם רצו למדוד את שכיחות האלל הספציפי שהם בודקים. אחרי 12 ימים הם ריצפו את התאים ששרדו כדי לראות אילו וריאנטים נשארו בחיים. לכל אלל חישבו </a:t>
             </a:r>
             <a:r>
               <a:rPr lang="en-US" sz="1200" b="0" i="0" kern="1200" dirty="0">
@@ -6911,31 +6982,7 @@
                 <a:ea typeface="+mn-ea"/>
                 <a:cs typeface="+mn-cs"/>
               </a:rPr>
-              <a:t> ביחס לנקודת הזמן הבסיסית, ז״א האם האלל התעשר או הידלל תחת הלחץ, ונרמלו ל-</a:t>
-            </a:r>
-            <a:r>
-              <a:rPr lang="en-US" sz="1200" b="0" i="0" kern="1200" dirty="0">
-                <a:solidFill>
-                  <a:schemeClr val="tx1"/>
-                </a:solidFill>
-                <a:effectLst/>
-                <a:latin typeface="+mn-lt"/>
-                <a:ea typeface="+mn-ea"/>
-                <a:cs typeface="+mn-cs"/>
-              </a:rPr>
-              <a:t>z-scores</a:t>
-            </a:r>
-            <a:r>
-              <a:rPr lang="he-IL" sz="1200" b="0" i="0" kern="1200" dirty="0">
-                <a:solidFill>
-                  <a:schemeClr val="tx1"/>
-                </a:solidFill>
-                <a:effectLst/>
-                <a:latin typeface="+mn-lt"/>
-                <a:ea typeface="+mn-ea"/>
-                <a:cs typeface="+mn-cs"/>
-              </a:rPr>
-              <a:t> כך שכל אלל קיבל ציון יחסי לכל אחד משלושת התנאים</a:t>
+              <a:t> ביחס לנקודת הזמן הבסיסית, ז״א האם האלל התעשר או הידלל תחת הלחץ.</a:t>
             </a:r>
             <a:endParaRPr lang="en-US" sz="1200" b="0" i="0" kern="1200" dirty="0">
               <a:solidFill>
@@ -7072,23 +7119,23 @@
             </a:pPr>
             <a:r>
               <a:rPr lang="he-IL" dirty="0"/>
-              <a:t>בשלב השלישי הם חיברו את כל ה-</a:t>
+              <a:t>בשלב השלישי הם נתנו ציון לכל אחד </a:t>
+            </a:r>
+            <a:r>
+              <a:rPr lang="he-IL" dirty="0" err="1"/>
+              <a:t>מהוריאנטים</a:t>
+            </a:r>
+            <a:r>
+              <a:rPr lang="he-IL" dirty="0"/>
+              <a:t>, אם וריאנט מתנהג כמו </a:t>
             </a:r>
             <a:r>
               <a:rPr lang="en-US" dirty="0"/>
-              <a:t>z-scores</a:t>
+              <a:t>p53</a:t>
             </a:r>
             <a:r>
               <a:rPr lang="he-IL" dirty="0"/>
-              <a:t> כדי </a:t>
-            </a:r>
-            <a:r>
-              <a:rPr lang="he-IL" dirty="0" err="1"/>
-              <a:t>לכבר</a:t>
-            </a:r>
-            <a:r>
-              <a:rPr lang="he-IL" dirty="0"/>
-              <a:t> מספר יחיד לכל אלל, שזהו ה-</a:t>
+              <a:t>, או כאילו הוא לא נמצא, או משהו באמצע. מהשילוב של שלושת המדידות האלה קיבלנו מספר יחיד, שזה ה-</a:t>
             </a:r>
             <a:r>
               <a:rPr lang="en-US" dirty="0"/>
@@ -7096,7 +7143,7 @@
             </a:r>
             <a:r>
               <a:rPr lang="he-IL" dirty="0"/>
-              <a:t> שהשתמשתי בו. ציון נמוך משמע אובדן תפקוד, ציון גבוה = התנהגות דומה ל-</a:t>
+              <a:t> שהשתמשתי בו, שאומר לנו כמה וריאנט של </a:t>
             </a:r>
             <a:r>
               <a:rPr lang="en-US" dirty="0"/>
@@ -7104,7 +7151,39 @@
             </a:r>
             <a:r>
               <a:rPr lang="he-IL" dirty="0"/>
-              <a:t> תקין.</a:t>
+              <a:t> הוא פעיל. ציון נמוך משמע אובדן תפקוד, ציון גבוה = התנהגות דומה ל-</a:t>
+            </a:r>
+            <a:r>
+              <a:rPr lang="en-US" dirty="0"/>
+              <a:t>p53</a:t>
+            </a:r>
+            <a:r>
+              <a:rPr lang="he-IL" dirty="0"/>
+              <a:t> תקין. הערכים הם </a:t>
+            </a:r>
+            <a:r>
+              <a:rPr lang="en-US" dirty="0"/>
+              <a:t>z-score</a:t>
+            </a:r>
+            <a:r>
+              <a:rPr lang="he-IL" dirty="0"/>
+              <a:t>, אז הם יכולים להיות שליליים או חיוביים. אם הערך שלילי מאוד, המוטציה שוברת את </a:t>
+            </a:r>
+            <a:r>
+              <a:rPr lang="en-US" dirty="0"/>
+              <a:t>p53</a:t>
+            </a:r>
+            <a:r>
+              <a:rPr lang="he-IL" dirty="0"/>
+              <a:t>, אם הוא קרוב ל-0, המוטציה משפיעה הרבה ואם הציון הוא חיובי, הוא דומה ל-</a:t>
+            </a:r>
+            <a:r>
+              <a:rPr lang="en-US" dirty="0"/>
+              <a:t>WT</a:t>
+            </a:r>
+            <a:r>
+              <a:rPr lang="he-IL" dirty="0"/>
+              <a:t>.</a:t>
             </a:r>
             <a:endParaRPr lang="en-US" sz="1200" b="0" i="0" kern="1200" dirty="0">
               <a:solidFill>
@@ -7283,76 +7362,8 @@
             </a:r>
             <a:r>
               <a:rPr lang="he-IL" b="0" dirty="0"/>
-              <a:t>), שזה בעצם המדד שאני משתמשת בו כדי להעריך מה ה-</a:t>
-            </a:r>
-            <a:r>
-              <a:rPr lang="en-US" b="0" dirty="0"/>
-              <a:t>CNA</a:t>
-            </a:r>
-            <a:r>
-              <a:rPr lang="he-IL" b="0" dirty="0"/>
-              <a:t> בתא.</a:t>
-            </a:r>
-          </a:p>
-          <a:p>
-            <a:pPr marL="0" marR="0" lvl="0" indent="0" algn="r" defTabSz="914400" rtl="1" eaLnBrk="1" fontAlgn="auto" latinLnBrk="0" hangingPunct="1">
-              <a:lnSpc>
-                <a:spcPct val="100000"/>
-              </a:lnSpc>
-              <a:spcBef>
-                <a:spcPts val="0"/>
-              </a:spcBef>
-              <a:spcAft>
-                <a:spcPts val="0"/>
-              </a:spcAft>
-              <a:buClrTx/>
-              <a:buSzTx/>
-              <a:buFontTx/>
-              <a:buNone/>
-              <a:tabLst/>
-              <a:defRPr/>
-            </a:pPr>
-            <a:endParaRPr lang="he-IL" b="0" dirty="0"/>
-          </a:p>
-          <a:p>
-            <a:pPr marL="0" marR="0" lvl="0" indent="0" algn="r" defTabSz="914400" rtl="1" eaLnBrk="1" fontAlgn="auto" latinLnBrk="0" hangingPunct="1">
-              <a:lnSpc>
-                <a:spcPct val="100000"/>
-              </a:lnSpc>
-              <a:spcBef>
-                <a:spcPts val="0"/>
-              </a:spcBef>
-              <a:spcAft>
-                <a:spcPts val="0"/>
-              </a:spcAft>
-              <a:buClrTx/>
-              <a:buSzTx/>
-              <a:buFontTx/>
-              <a:buNone/>
-              <a:tabLst/>
-              <a:defRPr/>
-            </a:pPr>
-            <a:endParaRPr lang="he-IL" b="0" dirty="0"/>
-          </a:p>
-          <a:p>
-            <a:pPr marL="0" marR="0" lvl="0" indent="0" algn="r" defTabSz="914400" rtl="1" eaLnBrk="1" fontAlgn="auto" latinLnBrk="0" hangingPunct="1">
-              <a:lnSpc>
-                <a:spcPct val="100000"/>
-              </a:lnSpc>
-              <a:spcBef>
-                <a:spcPts val="0"/>
-              </a:spcBef>
-              <a:spcAft>
-                <a:spcPts val="0"/>
-              </a:spcAft>
-              <a:buClrTx/>
-              <a:buSzTx/>
-              <a:buFontTx/>
-              <a:buNone/>
-              <a:tabLst/>
-              <a:defRPr/>
-            </a:pPr>
-            <a:endParaRPr lang="he-IL" b="0" dirty="0"/>
+              <a:t>).</a:t>
+            </a:r>
           </a:p>
           <a:p>
             <a:pPr lvl="1"/>
@@ -7593,7 +7604,31 @@
                 <a:ea typeface="+mn-ea"/>
                 <a:cs typeface="+mn-cs"/>
               </a:rPr>
-              <a:t> שגורמים ליותר חוסר יציבות?</a:t>
+              <a:t> שגורמים ליותר כאוס </a:t>
+            </a:r>
+            <a:r>
+              <a:rPr lang="he-IL" sz="1200" b="0" i="0" kern="1200" dirty="0" err="1">
+                <a:solidFill>
+                  <a:schemeClr val="tx1"/>
+                </a:solidFill>
+                <a:effectLst/>
+                <a:latin typeface="+mn-lt"/>
+                <a:ea typeface="+mn-ea"/>
+                <a:cs typeface="+mn-cs"/>
+              </a:rPr>
+              <a:t>גנומי</a:t>
+            </a:r>
+            <a:r>
+              <a:rPr lang="he-IL" sz="1200" b="0" i="0" kern="1200" dirty="0">
+                <a:solidFill>
+                  <a:schemeClr val="tx1"/>
+                </a:solidFill>
+                <a:effectLst/>
+                <a:latin typeface="+mn-lt"/>
+                <a:ea typeface="+mn-ea"/>
+                <a:cs typeface="+mn-cs"/>
+              </a:rPr>
+              <a:t>?</a:t>
             </a:r>
           </a:p>
           <a:p>
@@ -7729,7 +7764,7 @@
             </a:r>
             <a:r>
               <a:rPr lang="he-IL" dirty="0"/>
-              <a:t> מתוך 271 אלף </a:t>
+              <a:t> יש מתוך 271 אלף </a:t>
             </a:r>
             <a:r>
               <a:rPr lang="he-IL" dirty="0" err="1"/>
@@ -7757,30 +7792,6 @@
             </a:r>
           </a:p>
           <a:p>
-            <a:pPr algn="r"/>
-            <a:r>
-              <a:rPr lang="en-US" sz="1200" b="1" i="0" kern="1200" dirty="0">
-                <a:solidFill>
-                  <a:schemeClr val="tx1"/>
-                </a:solidFill>
-                <a:effectLst/>
-                <a:latin typeface="+mn-lt"/>
-                <a:ea typeface="+mn-ea"/>
-                <a:cs typeface="+mn-cs"/>
-              </a:rPr>
-              <a:t>FGA = (number of base pairs with copy number gain or loss) / (total base pairs profiled)</a:t>
-            </a:r>
-            <a:endParaRPr lang="en-US" sz="1200" b="0" i="0" kern="1200" dirty="0">
-              <a:solidFill>
-                <a:schemeClr val="tx1"/>
-              </a:solidFill>
-              <a:effectLst/>
-              <a:latin typeface="+mn-lt"/>
-              <a:ea typeface="+mn-ea"/>
-              <a:cs typeface="+mn-cs"/>
-            </a:endParaRPr>
-          </a:p>
-          <a:p>
             <a:pPr algn="r" rtl="1"/>
             <a:r>
               <a:rPr lang="he-IL" dirty="0"/>
@@ -7823,7 +7834,7 @@
             </a:r>
             <a:r>
               <a:rPr lang="he-IL" dirty="0" err="1"/>
-              <a:t>סקאלר</a:t>
+              <a:t>סקאלאר</a:t>
             </a:r>
             <a:r>
               <a:rPr lang="he-IL" dirty="0"/>
@@ -7837,10 +7848,6 @@
               <a:rPr lang="he-IL" dirty="0"/>
               <a:t> של כל האירועים האלו.</a:t>
             </a:r>
-          </a:p>
-          <a:p>
-            <a:pPr algn="r"/>
-            <a:endParaRPr lang="he-IL" dirty="0"/>
           </a:p>
         </p:txBody>
       </p:sp>
@@ -8140,7 +8147,7 @@
             <a:fld id="{A37D6D71-8B28-4ED6-B932-04B197003D23}" type="datetimeFigureOut">
               <a:rPr lang="en-US" smtClean="0"/>
               <a:pPr algn="r"/>
-              <a:t>3/12/26</a:t>
+              <a:t>3/18/26</a:t>
             </a:fld>
             <a:endParaRPr lang="en-US" dirty="0"/>
           </a:p>
@@ -8410,7 +8417,7 @@
             <a:fld id="{A37D6D71-8B28-4ED6-B932-04B197003D23}" type="datetimeFigureOut">
               <a:rPr lang="en-US" smtClean="0"/>
               <a:pPr algn="r"/>
-              <a:t>3/12/26</a:t>
+              <a:t>3/18/26</a:t>
             </a:fld>
             <a:endParaRPr lang="en-US" dirty="0"/>
           </a:p>
@@ -8653,7 +8660,7 @@
             <a:fld id="{A37D6D71-8B28-4ED6-B932-04B197003D23}" type="datetimeFigureOut">
               <a:rPr lang="en-US" smtClean="0"/>
               <a:pPr algn="r"/>
-              <a:t>3/12/26</a:t>
+              <a:t>3/18/26</a:t>
             </a:fld>
             <a:endParaRPr lang="en-US" dirty="0"/>
           </a:p>
@@ -8908,7 +8915,7 @@
             <a:fld id="{A37D6D71-8B28-4ED6-B932-04B197003D23}" type="datetimeFigureOut">
               <a:rPr lang="en-US" smtClean="0"/>
               <a:pPr algn="r"/>
-              <a:t>3/15/26</a:t>
+              <a:t>3/18/26</a:t>
             </a:fld>
             <a:endParaRPr lang="en-US" dirty="0"/>
           </a:p>
@@ -9223,7 +9230,7 @@
             <a:fld id="{A37D6D71-8B28-4ED6-B932-04B197003D23}" type="datetimeFigureOut">
               <a:rPr lang="en-US" smtClean="0"/>
               <a:pPr algn="r"/>
-              <a:t>3/12/26</a:t>
+              <a:t>3/18/26</a:t>
             </a:fld>
             <a:endParaRPr lang="en-US" dirty="0"/>
           </a:p>
@@ -9533,7 +9540,7 @@
             <a:fld id="{A37D6D71-8B28-4ED6-B932-04B197003D23}" type="datetimeFigureOut">
               <a:rPr lang="en-US" smtClean="0"/>
               <a:pPr algn="r"/>
-              <a:t>3/12/26</a:t>
+              <a:t>3/18/26</a:t>
             </a:fld>
             <a:endParaRPr lang="en-US" dirty="0"/>
           </a:p>
@@ -9963,7 +9970,7 @@
             <a:fld id="{A37D6D71-8B28-4ED6-B932-04B197003D23}" type="datetimeFigureOut">
               <a:rPr lang="en-US" smtClean="0"/>
               <a:pPr algn="r"/>
-              <a:t>3/12/26</a:t>
+              <a:t>3/18/26</a:t>
             </a:fld>
             <a:endParaRPr lang="en-US" spc="50" dirty="0"/>
           </a:p>
@@ -10129,7 +10136,7 @@
             <a:fld id="{A37D6D71-8B28-4ED6-B932-04B197003D23}" type="datetimeFigureOut">
               <a:rPr lang="en-US" smtClean="0"/>
               <a:pPr algn="r"/>
-              <a:t>3/12/26</a:t>
+              <a:t>3/18/26</a:t>
             </a:fld>
             <a:endParaRPr lang="en-US" dirty="0"/>
           </a:p>
@@ -10232,7 +10239,7 @@
             <a:fld id="{A37D6D71-8B28-4ED6-B932-04B197003D23}" type="datetimeFigureOut">
               <a:rPr lang="en-US" smtClean="0"/>
               <a:pPr algn="r"/>
-              <a:t>3/12/26</a:t>
+              <a:t>3/18/26</a:t>
             </a:fld>
             <a:endParaRPr lang="en-US" dirty="0"/>
           </a:p>
@@ -10618,7 +10625,7 @@
             <a:fld id="{A37D6D71-8B28-4ED6-B932-04B197003D23}" type="datetimeFigureOut">
               <a:rPr lang="en-US" smtClean="0"/>
               <a:pPr algn="r"/>
-              <a:t>3/12/26</a:t>
+              <a:t>3/18/26</a:t>
             </a:fld>
             <a:endParaRPr lang="en-US" dirty="0"/>
           </a:p>
@@ -10915,7 +10922,7 @@
             <a:fld id="{A37D6D71-8B28-4ED6-B932-04B197003D23}" type="datetimeFigureOut">
               <a:rPr lang="en-US" smtClean="0"/>
               <a:pPr algn="r"/>
-              <a:t>3/12/26</a:t>
+              <a:t>3/18/26</a:t>
             </a:fld>
             <a:endParaRPr lang="en-US" spc="50" dirty="0"/>
           </a:p>
@@ -11130,7 +11137,7 @@
             <a:fld id="{A37D6D71-8B28-4ED6-B932-04B197003D23}" type="datetimeFigureOut">
               <a:rPr lang="en-US" smtClean="0"/>
               <a:pPr algn="r"/>
-              <a:t>3/12/26</a:t>
+              <a:t>3/18/26</a:t>
             </a:fld>
             <a:endParaRPr lang="en-US" spc="50" dirty="0"/>
           </a:p>
@@ -11823,8 +11830,8 @@
         </p:nvSpPr>
         <p:spPr>
           <a:xfrm>
-            <a:off x="5051483" y="4034124"/>
-            <a:ext cx="2089033" cy="830997"/>
+            <a:off x="3321651" y="4002227"/>
+            <a:ext cx="5548698" cy="1384995"/>
           </a:xfrm>
           <a:prstGeom prst="rect">
             <a:avLst/>
@@ -11837,8 +11844,20 @@
           </a:bodyPr>
           <a:lstStyle/>
           <a:p>
-            <a:r>
-              <a:rPr lang="en-IL" sz="2400" dirty="0">
+            <a:pPr algn="ctr"/>
+            <a:r>
+              <a:rPr lang="en-IL" sz="2800" dirty="0">
+                <a:solidFill>
+                  <a:schemeClr val="bg1"/>
+                </a:solidFill>
+              </a:rPr>
+              <a:t>Cancer Bioinformatics - Final Project</a:t>
+            </a:r>
+          </a:p>
+          <a:p>
+            <a:pPr algn="ctr"/>
+            <a:r>
+              <a:rPr lang="en-IL" sz="2800" dirty="0">
                 <a:solidFill>
                   <a:schemeClr val="bg1"/>
                 </a:solidFill>
@@ -11847,8 +11866,9 @@
             </a:r>
           </a:p>
           <a:p>
-            <a:r>
-              <a:rPr lang="en-IL" sz="2400" dirty="0">
+            <a:pPr algn="ctr"/>
+            <a:r>
+              <a:rPr lang="en-IL" sz="2800" dirty="0">
                 <a:solidFill>
                   <a:schemeClr val="bg1"/>
                 </a:solidFill>
@@ -11872,7 +11892,7 @@
 </file>
 
 <file path=ppt/slides/slide10.xml><?xml version="1.0" encoding="utf-8"?>
-<p:sld xmlns:a="http://schemas.openxmlformats.org/drawingml/2006/main" xmlns:r="http://schemas.openxmlformats.org/officeDocument/2006/relationships" xmlns:p="http://schemas.openxmlformats.org/presentationml/2006/main">
+<p:sld xmlns:a="http://schemas.openxmlformats.org/drawingml/2006/main" xmlns:r="http://schemas.openxmlformats.org/officeDocument/2006/relationships" xmlns:p="http://schemas.openxmlformats.org/presentationml/2006/main" show="0">
   <p:cSld>
     <p:spTree>
       <p:nvGrpSpPr>
@@ -12624,7 +12644,7 @@
 </file>
 
 <file path=ppt/slides/slide12.xml><?xml version="1.0" encoding="utf-8"?>
-<p:sld xmlns:a="http://schemas.openxmlformats.org/drawingml/2006/main" xmlns:r="http://schemas.openxmlformats.org/officeDocument/2006/relationships" xmlns:p="http://schemas.openxmlformats.org/presentationml/2006/main" show="0">
+<p:sld xmlns:a="http://schemas.openxmlformats.org/drawingml/2006/main" xmlns:r="http://schemas.openxmlformats.org/officeDocument/2006/relationships" xmlns:p="http://schemas.openxmlformats.org/presentationml/2006/main">
   <p:cSld>
     <p:spTree>
       <p:nvGrpSpPr>
@@ -12820,7 +12840,7 @@
         </p:nvSpPr>
         <p:spPr>
           <a:xfrm>
-            <a:off x="1905183" y="6076144"/>
+            <a:off x="1896807" y="6074821"/>
             <a:ext cx="8393708" cy="369332"/>
           </a:xfrm>
           <a:prstGeom prst="rect">
@@ -13683,7 +13703,7 @@
 </file>
 
 <file path=ppt/slides/slide16.xml><?xml version="1.0" encoding="utf-8"?>
-<p:sld xmlns:a="http://schemas.openxmlformats.org/drawingml/2006/main" xmlns:r="http://schemas.openxmlformats.org/officeDocument/2006/relationships" xmlns:p="http://schemas.openxmlformats.org/presentationml/2006/main">
+<p:sld xmlns:a="http://schemas.openxmlformats.org/drawingml/2006/main" xmlns:r="http://schemas.openxmlformats.org/officeDocument/2006/relationships" xmlns:p="http://schemas.openxmlformats.org/presentationml/2006/main" show="0">
   <p:cSld>
     <p:spTree>
       <p:nvGrpSpPr>
@@ -13783,7 +13803,7 @@
         </p:spPr>
         <p:txBody>
           <a:bodyPr vert="horz" lIns="91440" tIns="45720" rIns="91440" bIns="45720" rtlCol="0" anchor="b">
-            <a:normAutofit/>
+            <a:normAutofit fontScale="77500" lnSpcReduction="20000"/>
           </a:bodyPr>
           <a:lstStyle>
             <a:lvl1pPr algn="l" defTabSz="457200" rtl="0" eaLnBrk="1" latinLnBrk="0" hangingPunct="1">
@@ -13860,15 +13880,7 @@
           <a:p>
             <a:r>
               <a:rPr lang="en-US" dirty="0"/>
-              <a:t>WHICH specific </a:t>
-            </a:r>
-            <a:r>
-              <a:rPr lang="en-US" dirty="0" err="1"/>
-              <a:t>cna</a:t>
-            </a:r>
-            <a:r>
-              <a:rPr lang="en-US" dirty="0"/>
-              <a:t> OCCUR WHEN tp53 is mutated?</a:t>
+              <a:t>which known cancer genes co-occur with TP53 loss and high FGA?</a:t>
             </a:r>
           </a:p>
         </p:txBody>
@@ -13960,7 +13972,7 @@
 </file>
 
 <file path=ppt/slides/slide17.xml><?xml version="1.0" encoding="utf-8"?>
-<p:sld xmlns:a="http://schemas.openxmlformats.org/drawingml/2006/main" xmlns:r="http://schemas.openxmlformats.org/officeDocument/2006/relationships" xmlns:p="http://schemas.openxmlformats.org/presentationml/2006/main">
+<p:sld xmlns:a="http://schemas.openxmlformats.org/drawingml/2006/main" xmlns:r="http://schemas.openxmlformats.org/officeDocument/2006/relationships" xmlns:p="http://schemas.openxmlformats.org/presentationml/2006/main" show="0">
   <p:cSld>
     <p:spTree>
       <p:nvGrpSpPr>
@@ -14407,7 +14419,7 @@
           <a:p>
             <a:r>
               <a:rPr lang="en-US" dirty="0"/>
-              <a:t>Binary effect VS. CONTINUOUS EFFECT</a:t>
+              <a:t>Conclusions</a:t>
             </a:r>
           </a:p>
         </p:txBody>
@@ -14751,7 +14763,7 @@
           <a:p>
             <a:r>
               <a:rPr lang="en-US" dirty="0"/>
-              <a:t>The hotspot paradox</a:t>
+              <a:t>Conclusions</a:t>
             </a:r>
           </a:p>
         </p:txBody>
@@ -15624,10 +15636,9 @@
           </a:lstStyle>
           <a:p>
             <a:r>
-              <a:rPr lang="en-US" dirty="0" err="1"/>
-              <a:t>lIMITATIONS</a:t>
-            </a:r>
-            <a:endParaRPr lang="en-US" dirty="0"/>
+              <a:rPr lang="en-US" dirty="0"/>
+              <a:t>Conclusions</a:t>
+            </a:r>
           </a:p>
         </p:txBody>
       </p:sp>
@@ -15927,8 +15938,8 @@
         </p:nvSpPr>
         <p:spPr>
           <a:xfrm>
-            <a:off x="1020801" y="2333767"/>
-            <a:ext cx="9931527" cy="1815882"/>
+            <a:off x="1130236" y="2929190"/>
+            <a:ext cx="9931527" cy="1384995"/>
           </a:xfrm>
           <a:prstGeom prst="rect">
             <a:avLst/>
@@ -15941,21 +15952,10 @@
           </a:bodyPr>
           <a:lstStyle/>
           <a:p>
-            <a:pPr marL="285750" indent="-285750">
-              <a:buFont typeface="Wingdings" pitchFamily="2" charset="2"/>
-              <a:buChar char="Ø"/>
-            </a:pPr>
+            <a:pPr algn="ctr"/>
             <a:r>
               <a:rPr lang="en-US" sz="2800" dirty="0"/>
-              <a:t>TP53 loss </a:t>
-            </a:r>
-            <a:r>
-              <a:rPr lang="en-US" sz="2800" dirty="0" err="1"/>
-              <a:t>drived</a:t>
-            </a:r>
-            <a:r>
-              <a:rPr lang="en-US" sz="2800" dirty="0"/>
-              <a:t> genomic instability as a class effect, which in turn selectively amplifies oncogenic growth pathways, which explains why TP53 mutation is such a universal and aggressive cancer event.</a:t>
+              <a:t>TP53 loss drives genomic instability as a class effect, which in turn selectively amplifies oncogenic growth pathways, which explains why TP53 mutation is such a universal and aggressive cancer event.</a:t>
             </a:r>
           </a:p>
         </p:txBody>
@@ -16144,7 +16144,7 @@
         </p:nvSpPr>
         <p:spPr>
           <a:xfrm>
-            <a:off x="679571" y="2232833"/>
+            <a:off x="679569" y="2054792"/>
             <a:ext cx="5706109" cy="3560733"/>
           </a:xfrm>
         </p:spPr>
@@ -16162,15 +16162,55 @@
           <a:p>
             <a:pPr lvl="1"/>
             <a:r>
+              <a:rPr lang="he-IL" sz="2000" dirty="0"/>
+              <a:t>   </a:t>
+            </a:r>
+            <a:r>
               <a:rPr lang="en-US" sz="2000" dirty="0"/>
-              <a:t>More copies → more RNA → more protein</a:t>
+              <a:t>copies → </a:t>
+            </a:r>
+            <a:r>
+              <a:rPr lang="he-IL" sz="2000" dirty="0"/>
+              <a:t>   </a:t>
+            </a:r>
+            <a:r>
+              <a:rPr lang="en-US" sz="2000" dirty="0"/>
+              <a:t>RNA → </a:t>
+            </a:r>
+            <a:r>
+              <a:rPr lang="he-IL" sz="2000" dirty="0"/>
+              <a:t>   </a:t>
+            </a:r>
+            <a:r>
+              <a:rPr lang="en-US" sz="2000" dirty="0"/>
+              <a:t>protein</a:t>
             </a:r>
           </a:p>
           <a:p>
             <a:pPr lvl="1"/>
             <a:r>
+              <a:rPr lang="he-IL" sz="2000" dirty="0"/>
+              <a:t>   </a:t>
+            </a:r>
+            <a:r>
               <a:rPr lang="en-US" sz="2000" dirty="0"/>
-              <a:t>Fewer copies → less protein</a:t>
+              <a:t>copies → </a:t>
+            </a:r>
+            <a:r>
+              <a:rPr lang="he-IL" sz="2000" dirty="0"/>
+              <a:t> </a:t>
+            </a:r>
+            <a:r>
+              <a:rPr lang="en-US" sz="2000" dirty="0"/>
+              <a:t> </a:t>
+            </a:r>
+            <a:r>
+              <a:rPr lang="he-IL" sz="2000" dirty="0"/>
+              <a:t> </a:t>
+            </a:r>
+            <a:r>
+              <a:rPr lang="en-US" sz="2000" dirty="0"/>
+              <a:t>protein</a:t>
             </a:r>
           </a:p>
           <a:p>
@@ -16281,6 +16321,434 @@
           </a:p>
         </p:txBody>
       </p:sp>
+      <p:sp>
+        <p:nvSpPr>
+          <p:cNvPr id="10" name="TextBox 9">
+            <a:extLst>
+              <a:ext uri="{FF2B5EF4-FFF2-40B4-BE49-F238E27FC236}">
+                <a16:creationId xmlns:a16="http://schemas.microsoft.com/office/drawing/2014/main" id="{3951447A-2D47-8269-33CF-EF6CBA2182A3}"/>
+              </a:ext>
+            </a:extLst>
+          </p:cNvPr>
+          <p:cNvSpPr txBox="1"/>
+          <p:nvPr/>
+        </p:nvSpPr>
+        <p:spPr>
+          <a:xfrm>
+            <a:off x="1982916" y="5446207"/>
+            <a:ext cx="4537570" cy="861774"/>
+          </a:xfrm>
+          <a:prstGeom prst="rect">
+            <a:avLst/>
+          </a:prstGeom>
+          <a:noFill/>
+        </p:spPr>
+        <p:txBody>
+          <a:bodyPr wrap="square" rtlCol="0">
+            <a:spAutoFit/>
+          </a:bodyPr>
+          <a:lstStyle/>
+          <a:p>
+            <a:pPr algn="ctr"/>
+            <a:r>
+              <a:rPr lang="en-US" b="1" dirty="0"/>
+              <a:t>(number of base pairs with</a:t>
+            </a:r>
+            <a:endParaRPr lang="he-IL" b="1" dirty="0"/>
+          </a:p>
+          <a:p>
+            <a:pPr algn="ctr"/>
+            <a:r>
+              <a:rPr lang="en-US" b="1" dirty="0"/>
+              <a:t>copy number gain or loss)</a:t>
+            </a:r>
+            <a:endParaRPr lang="en-US" dirty="0"/>
+          </a:p>
+          <a:p>
+            <a:pPr algn="ctr"/>
+            <a:r>
+              <a:rPr lang="he-IL" sz="1200" dirty="0"/>
+              <a:t>__________________________________________</a:t>
+            </a:r>
+            <a:endParaRPr lang="en-IL" sz="1200" dirty="0"/>
+          </a:p>
+        </p:txBody>
+      </p:sp>
+      <p:sp>
+        <p:nvSpPr>
+          <p:cNvPr id="15" name="TextBox 14">
+            <a:extLst>
+              <a:ext uri="{FF2B5EF4-FFF2-40B4-BE49-F238E27FC236}">
+                <a16:creationId xmlns:a16="http://schemas.microsoft.com/office/drawing/2014/main" id="{A02A50E2-0749-D037-202D-B1C97392B1B0}"/>
+              </a:ext>
+            </a:extLst>
+          </p:cNvPr>
+          <p:cNvSpPr txBox="1"/>
+          <p:nvPr/>
+        </p:nvSpPr>
+        <p:spPr>
+          <a:xfrm>
+            <a:off x="538717" y="5479150"/>
+            <a:ext cx="1280293" cy="1200329"/>
+          </a:xfrm>
+          <a:prstGeom prst="rect">
+            <a:avLst/>
+          </a:prstGeom>
+          <a:noFill/>
+        </p:spPr>
+        <p:txBody>
+          <a:bodyPr wrap="square" rtlCol="0">
+            <a:spAutoFit/>
+          </a:bodyPr>
+          <a:lstStyle/>
+          <a:p>
+            <a:pPr rtl="1"/>
+            <a:r>
+              <a:rPr lang="en-US" b="1" dirty="0">
+                <a:solidFill>
+                  <a:srgbClr val="FF0000"/>
+                </a:solidFill>
+              </a:rPr>
+              <a:t>Fraction Genome Altered (FGA)</a:t>
+            </a:r>
+            <a:endParaRPr lang="en-IL" dirty="0"/>
+          </a:p>
+        </p:txBody>
+      </p:sp>
+      <p:sp>
+        <p:nvSpPr>
+          <p:cNvPr id="16" name="TextBox 15">
+            <a:extLst>
+              <a:ext uri="{FF2B5EF4-FFF2-40B4-BE49-F238E27FC236}">
+                <a16:creationId xmlns:a16="http://schemas.microsoft.com/office/drawing/2014/main" id="{E9E03FD2-8AFA-095B-15B1-E939AF3DF244}"/>
+              </a:ext>
+            </a:extLst>
+          </p:cNvPr>
+          <p:cNvSpPr txBox="1"/>
+          <p:nvPr/>
+        </p:nvSpPr>
+        <p:spPr>
+          <a:xfrm>
+            <a:off x="1816180" y="5894648"/>
+            <a:ext cx="364202" cy="461665"/>
+          </a:xfrm>
+          <a:prstGeom prst="rect">
+            <a:avLst/>
+          </a:prstGeom>
+          <a:noFill/>
+        </p:spPr>
+        <p:txBody>
+          <a:bodyPr wrap="none" rtlCol="0">
+            <a:spAutoFit/>
+          </a:bodyPr>
+          <a:lstStyle/>
+          <a:p>
+            <a:pPr marL="0" algn="r" defTabSz="457200" rtl="1" eaLnBrk="1" latinLnBrk="0" hangingPunct="1"/>
+            <a:r>
+              <a:rPr lang="he-IL" sz="2400" dirty="0"/>
+              <a:t>=</a:t>
+            </a:r>
+            <a:endParaRPr lang="en-IL" sz="2400" dirty="0"/>
+          </a:p>
+        </p:txBody>
+      </p:sp>
+      <p:sp>
+        <p:nvSpPr>
+          <p:cNvPr id="17" name="TextBox 16">
+            <a:extLst>
+              <a:ext uri="{FF2B5EF4-FFF2-40B4-BE49-F238E27FC236}">
+                <a16:creationId xmlns:a16="http://schemas.microsoft.com/office/drawing/2014/main" id="{7664A01E-F97B-1E8C-7323-7A19C70DF8C7}"/>
+              </a:ext>
+            </a:extLst>
+          </p:cNvPr>
+          <p:cNvSpPr txBox="1"/>
+          <p:nvPr/>
+        </p:nvSpPr>
+        <p:spPr>
+          <a:xfrm>
+            <a:off x="2806914" y="6312380"/>
+            <a:ext cx="2889574" cy="369332"/>
+          </a:xfrm>
+          <a:prstGeom prst="rect">
+            <a:avLst/>
+          </a:prstGeom>
+          <a:noFill/>
+        </p:spPr>
+        <p:txBody>
+          <a:bodyPr wrap="none" rtlCol="0">
+            <a:spAutoFit/>
+          </a:bodyPr>
+          <a:lstStyle/>
+          <a:p>
+            <a:pPr algn="r" rtl="1"/>
+            <a:r>
+              <a:rPr lang="en-US" b="1" dirty="0"/>
+              <a:t>(total base pairs profiled)</a:t>
+            </a:r>
+            <a:endParaRPr lang="en-IL" dirty="0"/>
+          </a:p>
+        </p:txBody>
+      </p:sp>
+      <p:sp>
+        <p:nvSpPr>
+          <p:cNvPr id="19" name="Down Arrow 18">
+            <a:extLst>
+              <a:ext uri="{FF2B5EF4-FFF2-40B4-BE49-F238E27FC236}">
+                <a16:creationId xmlns:a16="http://schemas.microsoft.com/office/drawing/2014/main" id="{1615CDF4-29E7-1281-FF3C-8851781293A4}"/>
+              </a:ext>
+            </a:extLst>
+          </p:cNvPr>
+          <p:cNvSpPr/>
+          <p:nvPr/>
+        </p:nvSpPr>
+        <p:spPr>
+          <a:xfrm>
+            <a:off x="1346792" y="4165688"/>
+            <a:ext cx="205561" cy="320392"/>
+          </a:xfrm>
+          <a:prstGeom prst="downArrow">
+            <a:avLst/>
+          </a:prstGeom>
+          <a:solidFill>
+            <a:srgbClr val="FF0000"/>
+          </a:solidFill>
+          <a:ln>
+            <a:noFill/>
+          </a:ln>
+        </p:spPr>
+        <p:style>
+          <a:lnRef idx="2">
+            <a:schemeClr val="accent2">
+              <a:shade val="15000"/>
+            </a:schemeClr>
+          </a:lnRef>
+          <a:fillRef idx="1">
+            <a:schemeClr val="accent2"/>
+          </a:fillRef>
+          <a:effectRef idx="0">
+            <a:schemeClr val="accent2"/>
+          </a:effectRef>
+          <a:fontRef idx="minor">
+            <a:schemeClr val="lt1"/>
+          </a:fontRef>
+        </p:style>
+        <p:txBody>
+          <a:bodyPr rtlCol="0" anchor="ctr"/>
+          <a:lstStyle/>
+          <a:p>
+            <a:pPr marL="0" algn="ctr" defTabSz="457200" rtl="1" eaLnBrk="1" latinLnBrk="0" hangingPunct="1"/>
+            <a:endParaRPr lang="en-IL"/>
+          </a:p>
+        </p:txBody>
+      </p:sp>
+      <p:sp>
+        <p:nvSpPr>
+          <p:cNvPr id="20" name="Down Arrow 19">
+            <a:extLst>
+              <a:ext uri="{FF2B5EF4-FFF2-40B4-BE49-F238E27FC236}">
+                <a16:creationId xmlns:a16="http://schemas.microsoft.com/office/drawing/2014/main" id="{B652A589-60E1-219C-4767-B1457DE37F46}"/>
+              </a:ext>
+            </a:extLst>
+          </p:cNvPr>
+          <p:cNvSpPr/>
+          <p:nvPr/>
+        </p:nvSpPr>
+        <p:spPr>
+          <a:xfrm>
+            <a:off x="2601353" y="4177036"/>
+            <a:ext cx="205561" cy="320392"/>
+          </a:xfrm>
+          <a:prstGeom prst="downArrow">
+            <a:avLst/>
+          </a:prstGeom>
+          <a:solidFill>
+            <a:srgbClr val="FF0000"/>
+          </a:solidFill>
+          <a:ln>
+            <a:noFill/>
+          </a:ln>
+        </p:spPr>
+        <p:style>
+          <a:lnRef idx="2">
+            <a:schemeClr val="accent2">
+              <a:shade val="15000"/>
+            </a:schemeClr>
+          </a:lnRef>
+          <a:fillRef idx="1">
+            <a:schemeClr val="accent2"/>
+          </a:fillRef>
+          <a:effectRef idx="0">
+            <a:schemeClr val="accent2"/>
+          </a:effectRef>
+          <a:fontRef idx="minor">
+            <a:schemeClr val="lt1"/>
+          </a:fontRef>
+        </p:style>
+        <p:txBody>
+          <a:bodyPr rtlCol="0" anchor="ctr"/>
+          <a:lstStyle/>
+          <a:p>
+            <a:pPr marL="0" algn="ctr" defTabSz="457200" rtl="1" eaLnBrk="1" latinLnBrk="0" hangingPunct="1"/>
+            <a:endParaRPr lang="en-IL"/>
+          </a:p>
+        </p:txBody>
+      </p:sp>
+      <p:sp>
+        <p:nvSpPr>
+          <p:cNvPr id="21" name="Down Arrow 20">
+            <a:extLst>
+              <a:ext uri="{FF2B5EF4-FFF2-40B4-BE49-F238E27FC236}">
+                <a16:creationId xmlns:a16="http://schemas.microsoft.com/office/drawing/2014/main" id="{B837372D-F0E1-DD72-35FE-69007F005E83}"/>
+              </a:ext>
+            </a:extLst>
+          </p:cNvPr>
+          <p:cNvSpPr/>
+          <p:nvPr/>
+        </p:nvSpPr>
+        <p:spPr>
+          <a:xfrm rot="10800000">
+            <a:off x="1346791" y="3716619"/>
+            <a:ext cx="205561" cy="320392"/>
+          </a:xfrm>
+          <a:prstGeom prst="downArrow">
+            <a:avLst/>
+          </a:prstGeom>
+          <a:solidFill>
+            <a:srgbClr val="00B050"/>
+          </a:solidFill>
+          <a:ln>
+            <a:noFill/>
+          </a:ln>
+        </p:spPr>
+        <p:style>
+          <a:lnRef idx="2">
+            <a:schemeClr val="accent2">
+              <a:shade val="15000"/>
+            </a:schemeClr>
+          </a:lnRef>
+          <a:fillRef idx="1">
+            <a:schemeClr val="accent2"/>
+          </a:fillRef>
+          <a:effectRef idx="0">
+            <a:schemeClr val="accent2"/>
+          </a:effectRef>
+          <a:fontRef idx="minor">
+            <a:schemeClr val="lt1"/>
+          </a:fontRef>
+        </p:style>
+        <p:txBody>
+          <a:bodyPr rtlCol="0" anchor="ctr"/>
+          <a:lstStyle/>
+          <a:p>
+            <a:pPr marL="0" algn="ctr" defTabSz="457200" rtl="1" eaLnBrk="1" latinLnBrk="0" hangingPunct="1"/>
+            <a:endParaRPr lang="en-IL"/>
+          </a:p>
+        </p:txBody>
+      </p:sp>
+      <p:sp>
+        <p:nvSpPr>
+          <p:cNvPr id="22" name="Down Arrow 21">
+            <a:extLst>
+              <a:ext uri="{FF2B5EF4-FFF2-40B4-BE49-F238E27FC236}">
+                <a16:creationId xmlns:a16="http://schemas.microsoft.com/office/drawing/2014/main" id="{EBBC11A4-FD48-A96F-CA7C-93D4B47CF5A8}"/>
+              </a:ext>
+            </a:extLst>
+          </p:cNvPr>
+          <p:cNvSpPr/>
+          <p:nvPr/>
+        </p:nvSpPr>
+        <p:spPr>
+          <a:xfrm rot="10800000">
+            <a:off x="2601353" y="3694249"/>
+            <a:ext cx="205561" cy="320392"/>
+          </a:xfrm>
+          <a:prstGeom prst="downArrow">
+            <a:avLst/>
+          </a:prstGeom>
+          <a:solidFill>
+            <a:srgbClr val="00B050"/>
+          </a:solidFill>
+          <a:ln>
+            <a:noFill/>
+          </a:ln>
+        </p:spPr>
+        <p:style>
+          <a:lnRef idx="2">
+            <a:schemeClr val="accent2">
+              <a:shade val="15000"/>
+            </a:schemeClr>
+          </a:lnRef>
+          <a:fillRef idx="1">
+            <a:schemeClr val="accent2"/>
+          </a:fillRef>
+          <a:effectRef idx="0">
+            <a:schemeClr val="accent2"/>
+          </a:effectRef>
+          <a:fontRef idx="minor">
+            <a:schemeClr val="lt1"/>
+          </a:fontRef>
+        </p:style>
+        <p:txBody>
+          <a:bodyPr rtlCol="0" anchor="ctr"/>
+          <a:lstStyle/>
+          <a:p>
+            <a:pPr marL="0" algn="ctr" defTabSz="457200" rtl="1" eaLnBrk="1" latinLnBrk="0" hangingPunct="1"/>
+            <a:endParaRPr lang="en-IL"/>
+          </a:p>
+        </p:txBody>
+      </p:sp>
+      <p:sp>
+        <p:nvSpPr>
+          <p:cNvPr id="23" name="Down Arrow 22">
+            <a:extLst>
+              <a:ext uri="{FF2B5EF4-FFF2-40B4-BE49-F238E27FC236}">
+                <a16:creationId xmlns:a16="http://schemas.microsoft.com/office/drawing/2014/main" id="{0A19F019-0476-9785-84CC-F0FF1420E352}"/>
+              </a:ext>
+            </a:extLst>
+          </p:cNvPr>
+          <p:cNvSpPr/>
+          <p:nvPr/>
+        </p:nvSpPr>
+        <p:spPr>
+          <a:xfrm rot="10800000">
+            <a:off x="3753133" y="3716619"/>
+            <a:ext cx="205561" cy="320392"/>
+          </a:xfrm>
+          <a:prstGeom prst="downArrow">
+            <a:avLst/>
+          </a:prstGeom>
+          <a:solidFill>
+            <a:srgbClr val="00B050"/>
+          </a:solidFill>
+          <a:ln>
+            <a:noFill/>
+          </a:ln>
+        </p:spPr>
+        <p:style>
+          <a:lnRef idx="2">
+            <a:schemeClr val="accent2">
+              <a:shade val="15000"/>
+            </a:schemeClr>
+          </a:lnRef>
+          <a:fillRef idx="1">
+            <a:schemeClr val="accent2"/>
+          </a:fillRef>
+          <a:effectRef idx="0">
+            <a:schemeClr val="accent2"/>
+          </a:effectRef>
+          <a:fontRef idx="minor">
+            <a:schemeClr val="lt1"/>
+          </a:fontRef>
+        </p:style>
+        <p:txBody>
+          <a:bodyPr rtlCol="0" anchor="ctr"/>
+          <a:lstStyle/>
+          <a:p>
+            <a:pPr marL="0" algn="ctr" defTabSz="457200" rtl="1" eaLnBrk="1" latinLnBrk="0" hangingPunct="1"/>
+            <a:endParaRPr lang="en-IL"/>
+          </a:p>
+        </p:txBody>
+      </p:sp>
     </p:spTree>
     <p:extLst>
       <p:ext uri="{BB962C8B-B14F-4D97-AF65-F5344CB8AC3E}">
@@ -16291,232 +16759,6 @@
   <p:clrMapOvr>
     <a:masterClrMapping/>
   </p:clrMapOvr>
-  <p:timing>
-    <p:tnLst>
-      <p:par>
-        <p:cTn id="1" dur="indefinite" restart="never" nodeType="tmRoot">
-          <p:childTnLst>
-            <p:seq concurrent="1" nextAc="seek">
-              <p:cTn id="2" dur="indefinite" nodeType="mainSeq">
-                <p:childTnLst>
-                  <p:par>
-                    <p:cTn id="3" fill="hold">
-                      <p:stCondLst>
-                        <p:cond delay="indefinite"/>
-                      </p:stCondLst>
-                      <p:childTnLst>
-                        <p:par>
-                          <p:cTn id="4" fill="hold">
-                            <p:stCondLst>
-                              <p:cond delay="0"/>
-                            </p:stCondLst>
-                            <p:childTnLst>
-                              <p:par>
-                                <p:cTn id="5" presetID="1" presetClass="entr" presetSubtype="0" fill="hold" nodeType="clickEffect">
-                                  <p:stCondLst>
-                                    <p:cond delay="0"/>
-                                  </p:stCondLst>
-                                  <p:childTnLst>
-                                    <p:set>
-                                      <p:cBhvr>
-                                        <p:cTn id="6" dur="1" fill="hold">
-                                          <p:stCondLst>
-                                            <p:cond delay="0"/>
-                                          </p:stCondLst>
-                                        </p:cTn>
-                                        <p:tgtEl>
-                                          <p:spTgt spid="5">
-                                            <p:txEl>
-                                              <p:pRg st="0" end="0"/>
-                                            </p:txEl>
-                                          </p:spTgt>
-                                        </p:tgtEl>
-                                        <p:attrNameLst>
-                                          <p:attrName>style.visibility</p:attrName>
-                                        </p:attrNameLst>
-                                      </p:cBhvr>
-                                      <p:to>
-                                        <p:strVal val="visible"/>
-                                      </p:to>
-                                    </p:set>
-                                  </p:childTnLst>
-                                </p:cTn>
-                              </p:par>
-                            </p:childTnLst>
-                          </p:cTn>
-                        </p:par>
-                      </p:childTnLst>
-                    </p:cTn>
-                  </p:par>
-                  <p:par>
-                    <p:cTn id="7" fill="hold">
-                      <p:stCondLst>
-                        <p:cond delay="indefinite"/>
-                      </p:stCondLst>
-                      <p:childTnLst>
-                        <p:par>
-                          <p:cTn id="8" fill="hold">
-                            <p:stCondLst>
-                              <p:cond delay="0"/>
-                            </p:stCondLst>
-                            <p:childTnLst>
-                              <p:par>
-                                <p:cTn id="9" presetID="1" presetClass="entr" presetSubtype="0" fill="hold" nodeType="clickEffect">
-                                  <p:stCondLst>
-                                    <p:cond delay="0"/>
-                                  </p:stCondLst>
-                                  <p:childTnLst>
-                                    <p:set>
-                                      <p:cBhvr>
-                                        <p:cTn id="10" dur="1" fill="hold">
-                                          <p:stCondLst>
-                                            <p:cond delay="0"/>
-                                          </p:stCondLst>
-                                        </p:cTn>
-                                        <p:tgtEl>
-                                          <p:spTgt spid="5">
-                                            <p:txEl>
-                                              <p:pRg st="1" end="1"/>
-                                            </p:txEl>
-                                          </p:spTgt>
-                                        </p:tgtEl>
-                                        <p:attrNameLst>
-                                          <p:attrName>style.visibility</p:attrName>
-                                        </p:attrNameLst>
-                                      </p:cBhvr>
-                                      <p:to>
-                                        <p:strVal val="visible"/>
-                                      </p:to>
-                                    </p:set>
-                                  </p:childTnLst>
-                                </p:cTn>
-                              </p:par>
-                            </p:childTnLst>
-                          </p:cTn>
-                        </p:par>
-                      </p:childTnLst>
-                    </p:cTn>
-                  </p:par>
-                  <p:par>
-                    <p:cTn id="11" fill="hold">
-                      <p:stCondLst>
-                        <p:cond delay="indefinite"/>
-                      </p:stCondLst>
-                      <p:childTnLst>
-                        <p:par>
-                          <p:cTn id="12" fill="hold">
-                            <p:stCondLst>
-                              <p:cond delay="0"/>
-                            </p:stCondLst>
-                            <p:childTnLst>
-                              <p:par>
-                                <p:cTn id="13" presetID="1" presetClass="entr" presetSubtype="0" fill="hold" nodeType="clickEffect">
-                                  <p:stCondLst>
-                                    <p:cond delay="0"/>
-                                  </p:stCondLst>
-                                  <p:childTnLst>
-                                    <p:set>
-                                      <p:cBhvr>
-                                        <p:cTn id="14" dur="1" fill="hold">
-                                          <p:stCondLst>
-                                            <p:cond delay="0"/>
-                                          </p:stCondLst>
-                                        </p:cTn>
-                                        <p:tgtEl>
-                                          <p:spTgt spid="5">
-                                            <p:txEl>
-                                              <p:pRg st="2" end="2"/>
-                                            </p:txEl>
-                                          </p:spTgt>
-                                        </p:tgtEl>
-                                        <p:attrNameLst>
-                                          <p:attrName>style.visibility</p:attrName>
-                                        </p:attrNameLst>
-                                      </p:cBhvr>
-                                      <p:to>
-                                        <p:strVal val="visible"/>
-                                      </p:to>
-                                    </p:set>
-                                  </p:childTnLst>
-                                </p:cTn>
-                              </p:par>
-                            </p:childTnLst>
-                          </p:cTn>
-                        </p:par>
-                      </p:childTnLst>
-                    </p:cTn>
-                  </p:par>
-                  <p:par>
-                    <p:cTn id="15" fill="hold">
-                      <p:stCondLst>
-                        <p:cond delay="indefinite"/>
-                      </p:stCondLst>
-                      <p:childTnLst>
-                        <p:par>
-                          <p:cTn id="16" fill="hold">
-                            <p:stCondLst>
-                              <p:cond delay="0"/>
-                            </p:stCondLst>
-                            <p:childTnLst>
-                              <p:par>
-                                <p:cTn id="17" presetID="1" presetClass="entr" presetSubtype="0" fill="hold" nodeType="clickEffect">
-                                  <p:stCondLst>
-                                    <p:cond delay="0"/>
-                                  </p:stCondLst>
-                                  <p:childTnLst>
-                                    <p:set>
-                                      <p:cBhvr>
-                                        <p:cTn id="18" dur="1" fill="hold">
-                                          <p:stCondLst>
-                                            <p:cond delay="0"/>
-                                          </p:stCondLst>
-                                        </p:cTn>
-                                        <p:tgtEl>
-                                          <p:spTgt spid="5">
-                                            <p:txEl>
-                                              <p:pRg st="3" end="3"/>
-                                            </p:txEl>
-                                          </p:spTgt>
-                                        </p:tgtEl>
-                                        <p:attrNameLst>
-                                          <p:attrName>style.visibility</p:attrName>
-                                        </p:attrNameLst>
-                                      </p:cBhvr>
-                                      <p:to>
-                                        <p:strVal val="visible"/>
-                                      </p:to>
-                                    </p:set>
-                                  </p:childTnLst>
-                                </p:cTn>
-                              </p:par>
-                            </p:childTnLst>
-                          </p:cTn>
-                        </p:par>
-                      </p:childTnLst>
-                    </p:cTn>
-                  </p:par>
-                </p:childTnLst>
-              </p:cTn>
-              <p:prevCondLst>
-                <p:cond evt="onPrev" delay="0">
-                  <p:tgtEl>
-                    <p:sldTgt/>
-                  </p:tgtEl>
-                </p:cond>
-              </p:prevCondLst>
-              <p:nextCondLst>
-                <p:cond evt="onNext" delay="0">
-                  <p:tgtEl>
-                    <p:sldTgt/>
-                  </p:tgtEl>
-                </p:cond>
-              </p:nextCondLst>
-            </p:seq>
-          </p:childTnLst>
-        </p:cTn>
-      </p:par>
-    </p:tnLst>
-  </p:timing>
 </p:sld>
 </file>
 
@@ -17935,309 +18177,119 @@
           </a:p>
         </p:txBody>
       </p:sp>
-      <p:grpSp>
-        <p:nvGrpSpPr>
-          <p:cNvPr id="24" name="Group 23">
+      <p:sp>
+        <p:nvSpPr>
+          <p:cNvPr id="25" name="TextBox 24">
             <a:extLst>
               <a:ext uri="{FF2B5EF4-FFF2-40B4-BE49-F238E27FC236}">
-                <a16:creationId xmlns:a16="http://schemas.microsoft.com/office/drawing/2014/main" id="{B29E89F7-7DB0-B237-9C99-9CC61285E8E9}"/>
+                <a16:creationId xmlns:a16="http://schemas.microsoft.com/office/drawing/2014/main" id="{DCC035F0-2526-D268-0E3B-75AB79A12D8E}"/>
               </a:ext>
             </a:extLst>
           </p:cNvPr>
-          <p:cNvGrpSpPr/>
+          <p:cNvSpPr txBox="1"/>
           <p:nvPr/>
-        </p:nvGrpSpPr>
-        <p:grpSpPr>
+        </p:nvSpPr>
+        <p:spPr>
           <a:xfrm>
-            <a:off x="8712017" y="4732140"/>
-            <a:ext cx="3276783" cy="1106115"/>
-            <a:chOff x="8921977" y="4001571"/>
-            <a:chExt cx="2926080" cy="1474819"/>
+            <a:off x="8712017" y="5472237"/>
+            <a:ext cx="3276783" cy="400110"/>
           </a:xfrm>
-        </p:grpSpPr>
-        <p:sp>
-          <p:nvSpPr>
-            <p:cNvPr id="25" name="TextBox 24">
-              <a:extLst>
-                <a:ext uri="{FF2B5EF4-FFF2-40B4-BE49-F238E27FC236}">
-                  <a16:creationId xmlns:a16="http://schemas.microsoft.com/office/drawing/2014/main" id="{DCC035F0-2526-D268-0E3B-75AB79A12D8E}"/>
-                </a:ext>
-              </a:extLst>
-            </p:cNvPr>
-            <p:cNvSpPr txBox="1"/>
-            <p:nvPr/>
-          </p:nvSpPr>
-          <p:spPr>
-            <a:xfrm>
-              <a:off x="8921977" y="4001571"/>
-              <a:ext cx="2926080" cy="533480"/>
-            </a:xfrm>
-            <a:prstGeom prst="rect">
-              <a:avLst/>
-            </a:prstGeom>
-            <a:noFill/>
-          </p:spPr>
-          <p:txBody>
-            <a:bodyPr wrap="square" lIns="0" rIns="0" rtlCol="0" anchor="b">
-              <a:spAutoFit/>
-            </a:bodyPr>
-            <a:lstStyle/>
-            <a:p>
-              <a:r>
-                <a:rPr lang="en-US" sz="2000" b="1" noProof="1"/>
-                <a:t>Calculate Functional Score</a:t>
-              </a:r>
-            </a:p>
-          </p:txBody>
-        </p:sp>
-        <p:sp>
-          <p:nvSpPr>
-            <p:cNvPr id="26" name="TextBox 25">
-              <a:extLst>
-                <a:ext uri="{FF2B5EF4-FFF2-40B4-BE49-F238E27FC236}">
-                  <a16:creationId xmlns:a16="http://schemas.microsoft.com/office/drawing/2014/main" id="{668FC290-2159-6BA0-2442-116AB524B9D3}"/>
-                </a:ext>
-              </a:extLst>
-            </p:cNvPr>
-            <p:cNvSpPr txBox="1"/>
-            <p:nvPr/>
-          </p:nvSpPr>
-          <p:spPr>
-            <a:xfrm>
-              <a:off x="8921977" y="4532543"/>
-              <a:ext cx="2926080" cy="943847"/>
-            </a:xfrm>
-            <a:prstGeom prst="rect">
-              <a:avLst/>
-            </a:prstGeom>
-            <a:noFill/>
-          </p:spPr>
-          <p:txBody>
-            <a:bodyPr wrap="square" lIns="0" rIns="0" rtlCol="0" anchor="t">
-              <a:spAutoFit/>
-            </a:bodyPr>
-            <a:lstStyle/>
-            <a:p>
-              <a:r>
-                <a:rPr lang="en-US" sz="1000" noProof="1">
-                  <a:solidFill>
-                    <a:schemeClr val="tx1">
-                      <a:lumMod val="65000"/>
-                      <a:lumOff val="35000"/>
-                    </a:schemeClr>
-                  </a:solidFill>
-                </a:rPr>
-                <a:t>Integrate the three Z-scores using the Combined Phenotype Score formula. This single value per allele - the EFS - reflects the degree to which each TP53 variant retains or loses normal p53 function.</a:t>
-              </a:r>
-            </a:p>
-          </p:txBody>
-        </p:sp>
-      </p:grpSp>
-      <p:grpSp>
-        <p:nvGrpSpPr>
-          <p:cNvPr id="27" name="Group 26">
+          <a:prstGeom prst="rect">
+            <a:avLst/>
+          </a:prstGeom>
+          <a:noFill/>
+        </p:spPr>
+        <p:txBody>
+          <a:bodyPr wrap="square" lIns="0" rIns="0" rtlCol="0" anchor="b">
+            <a:spAutoFit/>
+          </a:bodyPr>
+          <a:lstStyle/>
+          <a:p>
+            <a:r>
+              <a:rPr lang="en-US" sz="2000" b="1" noProof="1"/>
+              <a:t>Calculate Functional Score</a:t>
+            </a:r>
+          </a:p>
+        </p:txBody>
+      </p:sp>
+      <p:sp>
+        <p:nvSpPr>
+          <p:cNvPr id="28" name="TextBox 27">
             <a:extLst>
               <a:ext uri="{FF2B5EF4-FFF2-40B4-BE49-F238E27FC236}">
-                <a16:creationId xmlns:a16="http://schemas.microsoft.com/office/drawing/2014/main" id="{DB6880FB-82C4-842A-3DAF-F2B7882B9BFA}"/>
+                <a16:creationId xmlns:a16="http://schemas.microsoft.com/office/drawing/2014/main" id="{71428924-C3F8-AD23-A029-7B41748237E3}"/>
               </a:ext>
             </a:extLst>
           </p:cNvPr>
-          <p:cNvGrpSpPr/>
+          <p:cNvSpPr txBox="1"/>
           <p:nvPr/>
-        </p:nvGrpSpPr>
-        <p:grpSpPr>
+        </p:nvSpPr>
+        <p:spPr>
           <a:xfrm>
             <a:off x="267478" y="4631438"/>
-            <a:ext cx="3331985" cy="921449"/>
-            <a:chOff x="332936" y="4621561"/>
-            <a:chExt cx="2926080" cy="1228599"/>
+            <a:ext cx="3331985" cy="369331"/>
           </a:xfrm>
-        </p:grpSpPr>
-        <p:sp>
-          <p:nvSpPr>
-            <p:cNvPr id="28" name="TextBox 27">
-              <a:extLst>
-                <a:ext uri="{FF2B5EF4-FFF2-40B4-BE49-F238E27FC236}">
-                  <a16:creationId xmlns:a16="http://schemas.microsoft.com/office/drawing/2014/main" id="{71428924-C3F8-AD23-A029-7B41748237E3}"/>
-                </a:ext>
-              </a:extLst>
-            </p:cNvPr>
-            <p:cNvSpPr txBox="1"/>
-            <p:nvPr/>
-          </p:nvSpPr>
-          <p:spPr>
-            <a:xfrm>
-              <a:off x="332936" y="4621561"/>
-              <a:ext cx="2926080" cy="492442"/>
-            </a:xfrm>
-            <a:prstGeom prst="rect">
-              <a:avLst/>
-            </a:prstGeom>
-            <a:noFill/>
-          </p:spPr>
-          <p:txBody>
-            <a:bodyPr wrap="square" lIns="0" rIns="0" rtlCol="0" anchor="b">
-              <a:spAutoFit/>
-            </a:bodyPr>
-            <a:lstStyle/>
-            <a:p>
-              <a:pPr algn="r"/>
-              <a:r>
-                <a:rPr lang="en-US" b="1" dirty="0"/>
-                <a:t>Quantify Allele Enrichment</a:t>
-              </a:r>
-              <a:endParaRPr lang="en-US" sz="2000" b="1" noProof="1"/>
-            </a:p>
-          </p:txBody>
-        </p:sp>
-        <p:sp>
-          <p:nvSpPr>
-            <p:cNvPr id="29" name="TextBox 28">
-              <a:extLst>
-                <a:ext uri="{FF2B5EF4-FFF2-40B4-BE49-F238E27FC236}">
-                  <a16:creationId xmlns:a16="http://schemas.microsoft.com/office/drawing/2014/main" id="{3A0310DC-5DC9-5D1F-1D32-AD439F276849}"/>
-                </a:ext>
-              </a:extLst>
-            </p:cNvPr>
-            <p:cNvSpPr txBox="1"/>
-            <p:nvPr/>
-          </p:nvSpPr>
-          <p:spPr>
-            <a:xfrm>
-              <a:off x="332936" y="5111496"/>
-              <a:ext cx="2926080" cy="738664"/>
-            </a:xfrm>
-            <a:prstGeom prst="rect">
-              <a:avLst/>
-            </a:prstGeom>
-            <a:noFill/>
-          </p:spPr>
-          <p:txBody>
-            <a:bodyPr wrap="square" lIns="0" rIns="0" rtlCol="0" anchor="t">
-              <a:spAutoFit/>
-            </a:bodyPr>
-            <a:lstStyle/>
-            <a:p>
-              <a:pPr algn="r"/>
-              <a:r>
-                <a:rPr lang="en-US" sz="1000" noProof="1">
-                  <a:solidFill>
-                    <a:schemeClr val="tx1">
-                      <a:lumMod val="65000"/>
-                      <a:lumOff val="35000"/>
-                    </a:schemeClr>
-                  </a:solidFill>
-                </a:rPr>
-                <a:t>Compute log₂ fold-change for each allele relative to the early timepoint. Standardize across alleles to produce a Z-score for each of the three conditions.</a:t>
-              </a:r>
-            </a:p>
-          </p:txBody>
-        </p:sp>
-      </p:grpSp>
-      <p:grpSp>
-        <p:nvGrpSpPr>
-          <p:cNvPr id="30" name="Group 29">
+          <a:prstGeom prst="rect">
+            <a:avLst/>
+          </a:prstGeom>
+          <a:noFill/>
+        </p:spPr>
+        <p:txBody>
+          <a:bodyPr wrap="square" lIns="0" rIns="0" rtlCol="0" anchor="b">
+            <a:spAutoFit/>
+          </a:bodyPr>
+          <a:lstStyle/>
+          <a:p>
+            <a:pPr algn="r"/>
+            <a:r>
+              <a:rPr lang="en-US" b="1" dirty="0"/>
+              <a:t>Quantify Allele Enrichment</a:t>
+            </a:r>
+            <a:endParaRPr lang="en-US" sz="2000" b="1" noProof="1"/>
+          </a:p>
+        </p:txBody>
+      </p:sp>
+      <p:sp>
+        <p:nvSpPr>
+          <p:cNvPr id="31" name="TextBox 30">
             <a:extLst>
               <a:ext uri="{FF2B5EF4-FFF2-40B4-BE49-F238E27FC236}">
-                <a16:creationId xmlns:a16="http://schemas.microsoft.com/office/drawing/2014/main" id="{1202CC10-FB01-DB77-E5DD-9C862A01D79D}"/>
+                <a16:creationId xmlns:a16="http://schemas.microsoft.com/office/drawing/2014/main" id="{7FB8F06D-FC26-5F60-BF33-6284F4203DE4}"/>
               </a:ext>
             </a:extLst>
           </p:cNvPr>
-          <p:cNvGrpSpPr/>
+          <p:cNvSpPr txBox="1"/>
           <p:nvPr/>
-        </p:nvGrpSpPr>
-        <p:grpSpPr>
+        </p:nvSpPr>
+        <p:spPr>
           <a:xfrm>
             <a:off x="1286933" y="2249613"/>
-            <a:ext cx="3854634" cy="967371"/>
-            <a:chOff x="8921977" y="984542"/>
-            <a:chExt cx="2926080" cy="2202911"/>
+            <a:ext cx="3614699" cy="414475"/>
           </a:xfrm>
-        </p:grpSpPr>
-        <p:sp>
-          <p:nvSpPr>
-            <p:cNvPr id="31" name="TextBox 30">
-              <a:extLst>
-                <a:ext uri="{FF2B5EF4-FFF2-40B4-BE49-F238E27FC236}">
-                  <a16:creationId xmlns:a16="http://schemas.microsoft.com/office/drawing/2014/main" id="{7FB8F06D-FC26-5F60-BF33-6284F4203DE4}"/>
-                </a:ext>
-              </a:extLst>
-            </p:cNvPr>
-            <p:cNvSpPr txBox="1"/>
-            <p:nvPr/>
-          </p:nvSpPr>
-          <p:spPr>
-            <a:xfrm>
-              <a:off x="8921977" y="984542"/>
-              <a:ext cx="2743944" cy="943848"/>
-            </a:xfrm>
-            <a:prstGeom prst="rect">
-              <a:avLst/>
-            </a:prstGeom>
-            <a:noFill/>
-          </p:spPr>
-          <p:txBody>
-            <a:bodyPr wrap="square" lIns="0" rIns="0" rtlCol="0" anchor="b">
-              <a:spAutoFit/>
-            </a:bodyPr>
-            <a:lstStyle/>
-            <a:p>
-              <a:r>
-                <a:rPr lang="en-US" sz="2000" b="1" noProof="1">
-                  <a:solidFill>
-                    <a:schemeClr val="accent3">
-                      <a:lumMod val="75000"/>
-                    </a:schemeClr>
-                  </a:solidFill>
-                </a:rPr>
-                <a:t>Screen 8,258 TP53 Variants</a:t>
-              </a:r>
-            </a:p>
-          </p:txBody>
-        </p:sp>
-        <p:sp>
-          <p:nvSpPr>
-            <p:cNvPr id="32" name="TextBox 31">
-              <a:extLst>
-                <a:ext uri="{FF2B5EF4-FFF2-40B4-BE49-F238E27FC236}">
-                  <a16:creationId xmlns:a16="http://schemas.microsoft.com/office/drawing/2014/main" id="{D76451E6-7528-1075-F5FA-4FF144465383}"/>
-                </a:ext>
-              </a:extLst>
-            </p:cNvPr>
-            <p:cNvSpPr txBox="1"/>
-            <p:nvPr/>
-          </p:nvSpPr>
-          <p:spPr>
-            <a:xfrm>
-              <a:off x="8921977" y="1925881"/>
-              <a:ext cx="2926080" cy="1261572"/>
-            </a:xfrm>
-            <a:prstGeom prst="rect">
-              <a:avLst/>
-            </a:prstGeom>
-            <a:noFill/>
-          </p:spPr>
-          <p:txBody>
-            <a:bodyPr wrap="square" lIns="0" rIns="0" rtlCol="0" anchor="t">
-              <a:spAutoFit/>
-            </a:bodyPr>
-            <a:lstStyle/>
-            <a:p>
-              <a:r>
-                <a:rPr lang="en-US" sz="1000" noProof="1">
-                  <a:solidFill>
-                    <a:schemeClr val="tx1">
-                      <a:lumMod val="65000"/>
-                      <a:lumOff val="35000"/>
-                    </a:schemeClr>
-                  </a:solidFill>
-                </a:rPr>
-                <a:t>Run 3 competitive growth screens in isogenic p53WT and p53NULL cells treated with nutlin-3 or etoposide. Collect read counts to quantify allele representation.</a:t>
-              </a:r>
-            </a:p>
-          </p:txBody>
-        </p:sp>
-      </p:grpSp>
+          <a:prstGeom prst="rect">
+            <a:avLst/>
+          </a:prstGeom>
+          <a:noFill/>
+        </p:spPr>
+        <p:txBody>
+          <a:bodyPr wrap="square" lIns="0" rIns="0" rtlCol="0" anchor="b">
+            <a:spAutoFit/>
+          </a:bodyPr>
+          <a:lstStyle/>
+          <a:p>
+            <a:r>
+              <a:rPr lang="en-US" sz="2000" b="1" noProof="1">
+                <a:solidFill>
+                  <a:schemeClr val="accent3">
+                    <a:lumMod val="75000"/>
+                  </a:schemeClr>
+                </a:solidFill>
+              </a:rPr>
+              <a:t>Screen 8,258 TP53 Variants</a:t>
+            </a:r>
+          </a:p>
+        </p:txBody>
+      </p:sp>
       <p:sp>
         <p:nvSpPr>
           <p:cNvPr id="36" name="TextBox 35">
@@ -18316,8 +18368,8 @@
         </p:nvSpPr>
         <p:spPr>
           <a:xfrm>
-            <a:off x="8712017" y="4224828"/>
-            <a:ext cx="3092506" cy="523220"/>
+            <a:off x="9121803" y="4301847"/>
+            <a:ext cx="3092506" cy="1123384"/>
           </a:xfrm>
           <a:prstGeom prst="rect">
             <a:avLst/>
@@ -18333,7 +18385,7 @@
             <a:pPr algn="ctr"/>
             <a:r>
               <a:rPr lang="en-US" sz="1400" dirty="0"/>
-              <a:t>EFS = [Z(</a:t>
+              <a:t>[Z(</a:t>
             </a:r>
             <a:r>
               <a:rPr lang="en-US" sz="1400" dirty="0" err="1"/>
@@ -18349,7 +18401,7 @@
             </a:r>
             <a:r>
               <a:rPr lang="en-US" sz="1400" dirty="0"/>
-              <a:t>) − Z(</a:t>
+              <a:t>) - Z(</a:t>
             </a:r>
             <a:r>
               <a:rPr lang="en-US" sz="1400" dirty="0" err="1"/>
@@ -18357,7 +18409,25 @@
             </a:r>
             <a:r>
               <a:rPr lang="en-US" sz="1400" dirty="0"/>
-              <a:t>)] / 3</a:t>
+              <a:t>)]</a:t>
+            </a:r>
+          </a:p>
+          <a:p>
+            <a:pPr algn="ctr"/>
+            <a:r>
+              <a:rPr lang="en-US" sz="1400" dirty="0"/>
+              <a:t>____________________________</a:t>
+            </a:r>
+          </a:p>
+          <a:p>
+            <a:pPr algn="ctr"/>
+            <a:endParaRPr lang="en-US" sz="1100" dirty="0"/>
+          </a:p>
+          <a:p>
+            <a:pPr algn="ctr"/>
+            <a:r>
+              <a:rPr lang="en-US" sz="1400" dirty="0"/>
+              <a:t>3</a:t>
             </a:r>
           </a:p>
         </p:txBody>
@@ -18411,6 +18481,128 @@
                 <a:cs typeface="Corsiva Hebrew" pitchFamily="2" charset="-79"/>
               </a:rPr>
               <a:t>Background</a:t>
+            </a:r>
+          </a:p>
+        </p:txBody>
+      </p:sp>
+      <p:pic>
+        <p:nvPicPr>
+          <p:cNvPr id="1028" name="Picture 4" descr="Fig. 2: Comprehensive mutational scanning of TP53.">
+            <a:extLst>
+              <a:ext uri="{FF2B5EF4-FFF2-40B4-BE49-F238E27FC236}">
+                <a16:creationId xmlns:a16="http://schemas.microsoft.com/office/drawing/2014/main" id="{B34741D3-1514-3CD8-E18E-B25A3C46E466}"/>
+              </a:ext>
+            </a:extLst>
+          </p:cNvPr>
+          <p:cNvPicPr>
+            <a:picLocks noChangeAspect="1" noChangeArrowheads="1"/>
+          </p:cNvPicPr>
+          <p:nvPr/>
+        </p:nvPicPr>
+        <p:blipFill rotWithShape="1">
+          <a:blip r:embed="rId4">
+            <a:extLst>
+              <a:ext uri="{28A0092B-C50C-407E-A947-70E740481C1C}">
+                <a14:useLocalDpi xmlns:a14="http://schemas.microsoft.com/office/drawing/2010/main" val="0"/>
+              </a:ext>
+            </a:extLst>
+          </a:blip>
+          <a:srcRect l="2784" t="3317" r="71211" b="77069"/>
+          <a:stretch>
+            <a:fillRect/>
+          </a:stretch>
+        </p:blipFill>
+        <p:spPr bwMode="auto">
+          <a:xfrm>
+            <a:off x="8619550" y="2030181"/>
+            <a:ext cx="3112039" cy="1814294"/>
+          </a:xfrm>
+          <a:prstGeom prst="rect">
+            <a:avLst/>
+          </a:prstGeom>
+          <a:noFill/>
+          <a:ln w="12700">
+            <a:solidFill>
+              <a:schemeClr val="accent1"/>
+            </a:solidFill>
+          </a:ln>
+          <a:extLst>
+            <a:ext uri="{909E8E84-426E-40DD-AFC4-6F175D3DCCD1}">
+              <a14:hiddenFill xmlns:a14="http://schemas.microsoft.com/office/drawing/2010/main">
+                <a:solidFill>
+                  <a:srgbClr val="FFFFFF"/>
+                </a:solidFill>
+              </a14:hiddenFill>
+            </a:ext>
+          </a:extLst>
+        </p:spPr>
+      </p:pic>
+      <p:sp>
+        <p:nvSpPr>
+          <p:cNvPr id="3" name="TextBox 2">
+            <a:extLst>
+              <a:ext uri="{FF2B5EF4-FFF2-40B4-BE49-F238E27FC236}">
+                <a16:creationId xmlns:a16="http://schemas.microsoft.com/office/drawing/2014/main" id="{1CDA35C3-4077-C672-BA3D-0AA38FDDB1B7}"/>
+              </a:ext>
+            </a:extLst>
+          </p:cNvPr>
+          <p:cNvSpPr txBox="1"/>
+          <p:nvPr/>
+        </p:nvSpPr>
+        <p:spPr>
+          <a:xfrm>
+            <a:off x="8454706" y="4795246"/>
+            <a:ext cx="514885" cy="369332"/>
+          </a:xfrm>
+          <a:prstGeom prst="rect">
+            <a:avLst/>
+          </a:prstGeom>
+          <a:noFill/>
+        </p:spPr>
+        <p:txBody>
+          <a:bodyPr wrap="none" rtlCol="0">
+            <a:spAutoFit/>
+          </a:bodyPr>
+          <a:lstStyle/>
+          <a:p>
+            <a:r>
+              <a:rPr lang="en-IL" dirty="0"/>
+              <a:t>EFS</a:t>
+            </a:r>
+          </a:p>
+        </p:txBody>
+      </p:sp>
+      <p:sp>
+        <p:nvSpPr>
+          <p:cNvPr id="4" name="TextBox 3">
+            <a:extLst>
+              <a:ext uri="{FF2B5EF4-FFF2-40B4-BE49-F238E27FC236}">
+                <a16:creationId xmlns:a16="http://schemas.microsoft.com/office/drawing/2014/main" id="{59C311CA-F832-98C7-E784-880E33075162}"/>
+              </a:ext>
+            </a:extLst>
+          </p:cNvPr>
+          <p:cNvSpPr txBox="1"/>
+          <p:nvPr/>
+        </p:nvSpPr>
+        <p:spPr>
+          <a:xfrm>
+            <a:off x="8962144" y="4795246"/>
+            <a:ext cx="319318" cy="369332"/>
+          </a:xfrm>
+          <a:prstGeom prst="rect">
+            <a:avLst/>
+          </a:prstGeom>
+          <a:noFill/>
+        </p:spPr>
+        <p:txBody>
+          <a:bodyPr wrap="none" rtlCol="0">
+            <a:spAutoFit/>
+          </a:bodyPr>
+          <a:lstStyle/>
+          <a:p>
+            <a:r>
+              <a:rPr lang="en-IL" dirty="0"/>
+              <a:t>=</a:t>
             </a:r>
           </a:p>
         </p:txBody>
@@ -19372,315 +19564,90 @@
           </a:p>
         </p:txBody>
       </p:sp>
-      <p:grpSp>
-        <p:nvGrpSpPr>
-          <p:cNvPr id="24" name="Group 23">
+      <p:sp>
+        <p:nvSpPr>
+          <p:cNvPr id="28" name="TextBox 27">
             <a:extLst>
               <a:ext uri="{FF2B5EF4-FFF2-40B4-BE49-F238E27FC236}">
-                <a16:creationId xmlns:a16="http://schemas.microsoft.com/office/drawing/2014/main" id="{E29CBCBB-4C1B-2DF0-8EC2-F57BECA89F29}"/>
+                <a16:creationId xmlns:a16="http://schemas.microsoft.com/office/drawing/2014/main" id="{8942A983-A5F6-ABFD-0224-23DB26EE91EE}"/>
               </a:ext>
             </a:extLst>
           </p:cNvPr>
-          <p:cNvGrpSpPr/>
+          <p:cNvSpPr txBox="1"/>
           <p:nvPr/>
-        </p:nvGrpSpPr>
-        <p:grpSpPr>
+        </p:nvSpPr>
+        <p:spPr>
           <a:xfrm>
-            <a:off x="8712017" y="4732140"/>
-            <a:ext cx="3276783" cy="1106115"/>
-            <a:chOff x="8921977" y="4001571"/>
-            <a:chExt cx="2926080" cy="1474819"/>
+            <a:off x="267478" y="4631438"/>
+            <a:ext cx="3331985" cy="369331"/>
           </a:xfrm>
-        </p:grpSpPr>
-        <p:sp>
-          <p:nvSpPr>
-            <p:cNvPr id="25" name="TextBox 24">
-              <a:extLst>
-                <a:ext uri="{FF2B5EF4-FFF2-40B4-BE49-F238E27FC236}">
-                  <a16:creationId xmlns:a16="http://schemas.microsoft.com/office/drawing/2014/main" id="{7C206EAE-24D6-0255-9D94-60DBD39D8975}"/>
-                </a:ext>
-              </a:extLst>
-            </p:cNvPr>
-            <p:cNvSpPr txBox="1"/>
-            <p:nvPr/>
-          </p:nvSpPr>
-          <p:spPr>
-            <a:xfrm>
-              <a:off x="8921977" y="4001571"/>
-              <a:ext cx="2926080" cy="533480"/>
-            </a:xfrm>
-            <a:prstGeom prst="rect">
-              <a:avLst/>
-            </a:prstGeom>
-            <a:noFill/>
-          </p:spPr>
-          <p:txBody>
-            <a:bodyPr wrap="square" lIns="0" rIns="0" rtlCol="0" anchor="b">
-              <a:spAutoFit/>
-            </a:bodyPr>
-            <a:lstStyle/>
-            <a:p>
-              <a:r>
-                <a:rPr lang="en-US" sz="2000" b="1" noProof="1"/>
-                <a:t>Calculate Functional Score</a:t>
-              </a:r>
-            </a:p>
-          </p:txBody>
-        </p:sp>
-        <p:sp>
-          <p:nvSpPr>
-            <p:cNvPr id="26" name="TextBox 25">
-              <a:extLst>
-                <a:ext uri="{FF2B5EF4-FFF2-40B4-BE49-F238E27FC236}">
-                  <a16:creationId xmlns:a16="http://schemas.microsoft.com/office/drawing/2014/main" id="{029CD787-36A6-E36D-D38D-0ADF0E036377}"/>
-                </a:ext>
-              </a:extLst>
-            </p:cNvPr>
-            <p:cNvSpPr txBox="1"/>
-            <p:nvPr/>
-          </p:nvSpPr>
-          <p:spPr>
-            <a:xfrm>
-              <a:off x="8921977" y="4532543"/>
-              <a:ext cx="2926080" cy="943847"/>
-            </a:xfrm>
-            <a:prstGeom prst="rect">
-              <a:avLst/>
-            </a:prstGeom>
-            <a:noFill/>
-          </p:spPr>
-          <p:txBody>
-            <a:bodyPr wrap="square" lIns="0" rIns="0" rtlCol="0" anchor="t">
-              <a:spAutoFit/>
-            </a:bodyPr>
-            <a:lstStyle/>
-            <a:p>
-              <a:r>
-                <a:rPr lang="en-US" sz="1000" noProof="1">
-                  <a:solidFill>
-                    <a:schemeClr val="tx1">
-                      <a:lumMod val="65000"/>
-                      <a:lumOff val="35000"/>
-                    </a:schemeClr>
-                  </a:solidFill>
-                </a:rPr>
-                <a:t>Integrate the three Z-scores using the Combined Phenotype Score formula. This single value per allele - the EFS - reflects the degree to which each TP53 variant retains or loses normal p53 function.</a:t>
-              </a:r>
-            </a:p>
-          </p:txBody>
-        </p:sp>
-      </p:grpSp>
-      <p:grpSp>
-        <p:nvGrpSpPr>
-          <p:cNvPr id="27" name="Group 26">
+          <a:prstGeom prst="rect">
+            <a:avLst/>
+          </a:prstGeom>
+          <a:noFill/>
+        </p:spPr>
+        <p:txBody>
+          <a:bodyPr wrap="square" lIns="0" rIns="0" rtlCol="0" anchor="b">
+            <a:spAutoFit/>
+          </a:bodyPr>
+          <a:lstStyle/>
+          <a:p>
+            <a:pPr algn="r"/>
+            <a:r>
+              <a:rPr lang="en-US" b="1" dirty="0">
+                <a:solidFill>
+                  <a:schemeClr val="accent3">
+                    <a:lumMod val="75000"/>
+                  </a:schemeClr>
+                </a:solidFill>
+              </a:rPr>
+              <a:t>Quantify Allele Enrichment</a:t>
+            </a:r>
+            <a:endParaRPr lang="en-US" sz="2000" b="1" noProof="1">
+              <a:solidFill>
+                <a:schemeClr val="accent3">
+                  <a:lumMod val="75000"/>
+                </a:schemeClr>
+              </a:solidFill>
+            </a:endParaRPr>
+          </a:p>
+        </p:txBody>
+      </p:sp>
+      <p:sp>
+        <p:nvSpPr>
+          <p:cNvPr id="31" name="TextBox 30">
             <a:extLst>
               <a:ext uri="{FF2B5EF4-FFF2-40B4-BE49-F238E27FC236}">
-                <a16:creationId xmlns:a16="http://schemas.microsoft.com/office/drawing/2014/main" id="{21A58634-09AD-7191-8CB1-415349F3F72D}"/>
+                <a16:creationId xmlns:a16="http://schemas.microsoft.com/office/drawing/2014/main" id="{3D260321-9767-EB34-9D32-B3E6B7A5E920}"/>
               </a:ext>
             </a:extLst>
           </p:cNvPr>
-          <p:cNvGrpSpPr/>
+          <p:cNvSpPr txBox="1"/>
           <p:nvPr/>
-        </p:nvGrpSpPr>
-        <p:grpSpPr>
-          <a:xfrm>
-            <a:off x="267478" y="4631438"/>
-            <a:ext cx="3331985" cy="921449"/>
-            <a:chOff x="332936" y="4621561"/>
-            <a:chExt cx="2926080" cy="1228599"/>
-          </a:xfrm>
-        </p:grpSpPr>
-        <p:sp>
-          <p:nvSpPr>
-            <p:cNvPr id="28" name="TextBox 27">
-              <a:extLst>
-                <a:ext uri="{FF2B5EF4-FFF2-40B4-BE49-F238E27FC236}">
-                  <a16:creationId xmlns:a16="http://schemas.microsoft.com/office/drawing/2014/main" id="{8942A983-A5F6-ABFD-0224-23DB26EE91EE}"/>
-                </a:ext>
-              </a:extLst>
-            </p:cNvPr>
-            <p:cNvSpPr txBox="1"/>
-            <p:nvPr/>
-          </p:nvSpPr>
-          <p:spPr>
-            <a:xfrm>
-              <a:off x="332936" y="4621561"/>
-              <a:ext cx="2926080" cy="492442"/>
-            </a:xfrm>
-            <a:prstGeom prst="rect">
-              <a:avLst/>
-            </a:prstGeom>
-            <a:noFill/>
-          </p:spPr>
-          <p:txBody>
-            <a:bodyPr wrap="square" lIns="0" rIns="0" rtlCol="0" anchor="b">
-              <a:spAutoFit/>
-            </a:bodyPr>
-            <a:lstStyle/>
-            <a:p>
-              <a:pPr algn="r"/>
-              <a:r>
-                <a:rPr lang="en-US" b="1" dirty="0">
-                  <a:solidFill>
-                    <a:schemeClr val="accent3">
-                      <a:lumMod val="75000"/>
-                    </a:schemeClr>
-                  </a:solidFill>
-                </a:rPr>
-                <a:t>Quantify Allele Enrichment</a:t>
-              </a:r>
-              <a:endParaRPr lang="en-US" sz="2000" b="1" noProof="1">
-                <a:solidFill>
-                  <a:schemeClr val="accent3">
-                    <a:lumMod val="75000"/>
-                  </a:schemeClr>
-                </a:solidFill>
-              </a:endParaRPr>
-            </a:p>
-          </p:txBody>
-        </p:sp>
-        <p:sp>
-          <p:nvSpPr>
-            <p:cNvPr id="29" name="TextBox 28">
-              <a:extLst>
-                <a:ext uri="{FF2B5EF4-FFF2-40B4-BE49-F238E27FC236}">
-                  <a16:creationId xmlns:a16="http://schemas.microsoft.com/office/drawing/2014/main" id="{8EDD7600-FAC4-457E-B601-644F9AEB4047}"/>
-                </a:ext>
-              </a:extLst>
-            </p:cNvPr>
-            <p:cNvSpPr txBox="1"/>
-            <p:nvPr/>
-          </p:nvSpPr>
-          <p:spPr>
-            <a:xfrm>
-              <a:off x="332936" y="5111496"/>
-              <a:ext cx="2926080" cy="738664"/>
-            </a:xfrm>
-            <a:prstGeom prst="rect">
-              <a:avLst/>
-            </a:prstGeom>
-            <a:noFill/>
-          </p:spPr>
-          <p:txBody>
-            <a:bodyPr wrap="square" lIns="0" rIns="0" rtlCol="0" anchor="t">
-              <a:spAutoFit/>
-            </a:bodyPr>
-            <a:lstStyle/>
-            <a:p>
-              <a:pPr algn="r"/>
-              <a:r>
-                <a:rPr lang="en-US" sz="1000" noProof="1">
-                  <a:solidFill>
-                    <a:schemeClr val="tx1">
-                      <a:lumMod val="65000"/>
-                      <a:lumOff val="35000"/>
-                    </a:schemeClr>
-                  </a:solidFill>
-                </a:rPr>
-                <a:t>Compute log₂ fold-change for each allele relative to the early timepoint. Standardize across alleles to produce a Z-score for each of the three conditions.</a:t>
-              </a:r>
-            </a:p>
-          </p:txBody>
-        </p:sp>
-      </p:grpSp>
-      <p:grpSp>
-        <p:nvGrpSpPr>
-          <p:cNvPr id="30" name="Group 29">
-            <a:extLst>
-              <a:ext uri="{FF2B5EF4-FFF2-40B4-BE49-F238E27FC236}">
-                <a16:creationId xmlns:a16="http://schemas.microsoft.com/office/drawing/2014/main" id="{E171EA8F-DD72-BF8C-191B-170C89212965}"/>
-              </a:ext>
-            </a:extLst>
-          </p:cNvPr>
-          <p:cNvGrpSpPr/>
-          <p:nvPr/>
-        </p:nvGrpSpPr>
-        <p:grpSpPr>
+        </p:nvSpPr>
+        <p:spPr>
           <a:xfrm>
             <a:off x="1286933" y="2249613"/>
-            <a:ext cx="3854634" cy="967371"/>
-            <a:chOff x="8921977" y="984542"/>
-            <a:chExt cx="2926080" cy="2202911"/>
+            <a:ext cx="3614699" cy="414475"/>
           </a:xfrm>
-        </p:grpSpPr>
-        <p:sp>
-          <p:nvSpPr>
-            <p:cNvPr id="31" name="TextBox 30">
-              <a:extLst>
-                <a:ext uri="{FF2B5EF4-FFF2-40B4-BE49-F238E27FC236}">
-                  <a16:creationId xmlns:a16="http://schemas.microsoft.com/office/drawing/2014/main" id="{3D260321-9767-EB34-9D32-B3E6B7A5E920}"/>
-                </a:ext>
-              </a:extLst>
-            </p:cNvPr>
-            <p:cNvSpPr txBox="1"/>
-            <p:nvPr/>
-          </p:nvSpPr>
-          <p:spPr>
-            <a:xfrm>
-              <a:off x="8921977" y="984542"/>
-              <a:ext cx="2743944" cy="943848"/>
-            </a:xfrm>
-            <a:prstGeom prst="rect">
-              <a:avLst/>
-            </a:prstGeom>
-            <a:noFill/>
-          </p:spPr>
-          <p:txBody>
-            <a:bodyPr wrap="square" lIns="0" rIns="0" rtlCol="0" anchor="b">
-              <a:spAutoFit/>
-            </a:bodyPr>
-            <a:lstStyle/>
-            <a:p>
-              <a:r>
-                <a:rPr lang="en-US" sz="2000" b="1" noProof="1"/>
-                <a:t>Screen 8,258 TP53 Variants</a:t>
-              </a:r>
-            </a:p>
-          </p:txBody>
-        </p:sp>
-        <p:sp>
-          <p:nvSpPr>
-            <p:cNvPr id="32" name="TextBox 31">
-              <a:extLst>
-                <a:ext uri="{FF2B5EF4-FFF2-40B4-BE49-F238E27FC236}">
-                  <a16:creationId xmlns:a16="http://schemas.microsoft.com/office/drawing/2014/main" id="{98BB05E3-9081-458B-E9A2-F494333320AC}"/>
-                </a:ext>
-              </a:extLst>
-            </p:cNvPr>
-            <p:cNvSpPr txBox="1"/>
-            <p:nvPr/>
-          </p:nvSpPr>
-          <p:spPr>
-            <a:xfrm>
-              <a:off x="8921977" y="1925881"/>
-              <a:ext cx="2926080" cy="1261572"/>
-            </a:xfrm>
-            <a:prstGeom prst="rect">
-              <a:avLst/>
-            </a:prstGeom>
-            <a:noFill/>
-          </p:spPr>
-          <p:txBody>
-            <a:bodyPr wrap="square" lIns="0" rIns="0" rtlCol="0" anchor="t">
-              <a:spAutoFit/>
-            </a:bodyPr>
-            <a:lstStyle/>
-            <a:p>
-              <a:r>
-                <a:rPr lang="en-US" sz="1000" noProof="1">
-                  <a:solidFill>
-                    <a:schemeClr val="tx1">
-                      <a:lumMod val="65000"/>
-                      <a:lumOff val="35000"/>
-                    </a:schemeClr>
-                  </a:solidFill>
-                </a:rPr>
-                <a:t>Run 3 competitive growth screens in isogenic p53WT and p53NULL cells treated with nutlin-3 or etoposide. Collect read counts to quantify allele representation.</a:t>
-              </a:r>
-            </a:p>
-          </p:txBody>
-        </p:sp>
-      </p:grpSp>
+          <a:prstGeom prst="rect">
+            <a:avLst/>
+          </a:prstGeom>
+          <a:noFill/>
+        </p:spPr>
+        <p:txBody>
+          <a:bodyPr wrap="square" lIns="0" rIns="0" rtlCol="0" anchor="b">
+            <a:spAutoFit/>
+          </a:bodyPr>
+          <a:lstStyle/>
+          <a:p>
+            <a:r>
+              <a:rPr lang="en-US" sz="2000" b="1" noProof="1"/>
+              <a:t>Screen 8,258 TP53 Variants</a:t>
+            </a:r>
+          </a:p>
+        </p:txBody>
+      </p:sp>
       <p:sp>
         <p:nvSpPr>
           <p:cNvPr id="36" name="TextBox 35">
@@ -19742,66 +19709,6 @@
           </a:p>
           <a:p>
             <a:endParaRPr lang="en-IL" dirty="0"/>
-          </a:p>
-        </p:txBody>
-      </p:sp>
-      <p:sp>
-        <p:nvSpPr>
-          <p:cNvPr id="43" name="TextBox 42">
-            <a:extLst>
-              <a:ext uri="{FF2B5EF4-FFF2-40B4-BE49-F238E27FC236}">
-                <a16:creationId xmlns:a16="http://schemas.microsoft.com/office/drawing/2014/main" id="{338E2388-7BE2-2CA4-E9D7-BA57778CFDE0}"/>
-              </a:ext>
-            </a:extLst>
-          </p:cNvPr>
-          <p:cNvSpPr txBox="1"/>
-          <p:nvPr/>
-        </p:nvSpPr>
-        <p:spPr>
-          <a:xfrm>
-            <a:off x="8712017" y="4224828"/>
-            <a:ext cx="3092506" cy="523220"/>
-          </a:xfrm>
-          <a:prstGeom prst="rect">
-            <a:avLst/>
-          </a:prstGeom>
-          <a:noFill/>
-        </p:spPr>
-        <p:txBody>
-          <a:bodyPr wrap="square" rtlCol="0">
-            <a:spAutoFit/>
-          </a:bodyPr>
-          <a:lstStyle/>
-          <a:p>
-            <a:pPr algn="ctr"/>
-            <a:r>
-              <a:rPr lang="en-US" sz="1400" dirty="0"/>
-              <a:t>EFS = [Z(</a:t>
-            </a:r>
-            <a:r>
-              <a:rPr lang="en-US" sz="1400" dirty="0" err="1"/>
-              <a:t>WT+nutlin</a:t>
-            </a:r>
-            <a:r>
-              <a:rPr lang="en-US" sz="1400" dirty="0"/>
-              <a:t>) + Z(</a:t>
-            </a:r>
-            <a:r>
-              <a:rPr lang="en-US" sz="1400" dirty="0" err="1"/>
-              <a:t>NULL+nutlin</a:t>
-            </a:r>
-            <a:r>
-              <a:rPr lang="en-US" sz="1400" dirty="0"/>
-              <a:t>) − Z(</a:t>
-            </a:r>
-            <a:r>
-              <a:rPr lang="en-US" sz="1400" dirty="0" err="1"/>
-              <a:t>NULL+etop</a:t>
-            </a:r>
-            <a:r>
-              <a:rPr lang="en-US" sz="1400" dirty="0"/>
-              <a:t>)] / 3</a:t>
-            </a:r>
           </a:p>
         </p:txBody>
       </p:sp>
@@ -20147,6 +20054,241 @@
                 <a:cs typeface="Corsiva Hebrew" pitchFamily="2" charset="-79"/>
               </a:rPr>
               <a:t>Background</a:t>
+            </a:r>
+          </a:p>
+        </p:txBody>
+      </p:sp>
+      <p:pic>
+        <p:nvPicPr>
+          <p:cNvPr id="2050" name="Picture 2" descr="Fig. 2: Comprehensive mutational scanning of TP53.">
+            <a:extLst>
+              <a:ext uri="{FF2B5EF4-FFF2-40B4-BE49-F238E27FC236}">
+                <a16:creationId xmlns:a16="http://schemas.microsoft.com/office/drawing/2014/main" id="{CF0DE577-6944-CDF6-5AC2-08D75F2FD64E}"/>
+              </a:ext>
+            </a:extLst>
+          </p:cNvPr>
+          <p:cNvPicPr>
+            <a:picLocks noChangeAspect="1" noChangeArrowheads="1"/>
+          </p:cNvPicPr>
+          <p:nvPr/>
+        </p:nvPicPr>
+        <p:blipFill rotWithShape="1">
+          <a:blip r:embed="rId4">
+            <a:extLst>
+              <a:ext uri="{28A0092B-C50C-407E-A947-70E740481C1C}">
+                <a14:useLocalDpi xmlns:a14="http://schemas.microsoft.com/office/drawing/2010/main" val="0"/>
+              </a:ext>
+            </a:extLst>
+          </a:blip>
+          <a:srcRect l="-377" t="28507" r="68816" b="51724"/>
+          <a:stretch>
+            <a:fillRect/>
+          </a:stretch>
+        </p:blipFill>
+        <p:spPr bwMode="auto">
+          <a:xfrm>
+            <a:off x="7990286" y="1978178"/>
+            <a:ext cx="3771741" cy="1826083"/>
+          </a:xfrm>
+          <a:prstGeom prst="rect">
+            <a:avLst/>
+          </a:prstGeom>
+          <a:noFill/>
+          <a:ln w="12700">
+            <a:solidFill>
+              <a:schemeClr val="accent1"/>
+            </a:solidFill>
+          </a:ln>
+          <a:extLst>
+            <a:ext uri="{909E8E84-426E-40DD-AFC4-6F175D3DCCD1}">
+              <a14:hiddenFill xmlns:a14="http://schemas.microsoft.com/office/drawing/2010/main">
+                <a:solidFill>
+                  <a:srgbClr val="FFFFFF"/>
+                </a:solidFill>
+              </a14:hiddenFill>
+            </a:ext>
+          </a:extLst>
+        </p:spPr>
+      </p:pic>
+      <p:sp>
+        <p:nvSpPr>
+          <p:cNvPr id="11" name="TextBox 10">
+            <a:extLst>
+              <a:ext uri="{FF2B5EF4-FFF2-40B4-BE49-F238E27FC236}">
+                <a16:creationId xmlns:a16="http://schemas.microsoft.com/office/drawing/2014/main" id="{0A5BB6FA-4B71-EADA-848F-85CE375EC46F}"/>
+              </a:ext>
+            </a:extLst>
+          </p:cNvPr>
+          <p:cNvSpPr txBox="1"/>
+          <p:nvPr/>
+        </p:nvSpPr>
+        <p:spPr>
+          <a:xfrm>
+            <a:off x="8712017" y="5472237"/>
+            <a:ext cx="3276783" cy="400110"/>
+          </a:xfrm>
+          <a:prstGeom prst="rect">
+            <a:avLst/>
+          </a:prstGeom>
+          <a:noFill/>
+        </p:spPr>
+        <p:txBody>
+          <a:bodyPr wrap="square" lIns="0" rIns="0" rtlCol="0" anchor="b">
+            <a:spAutoFit/>
+          </a:bodyPr>
+          <a:lstStyle/>
+          <a:p>
+            <a:r>
+              <a:rPr lang="en-US" sz="2000" b="1" noProof="1"/>
+              <a:t>Calculate Functional Score</a:t>
+            </a:r>
+          </a:p>
+        </p:txBody>
+      </p:sp>
+      <p:sp>
+        <p:nvSpPr>
+          <p:cNvPr id="12" name="TextBox 11">
+            <a:extLst>
+              <a:ext uri="{FF2B5EF4-FFF2-40B4-BE49-F238E27FC236}">
+                <a16:creationId xmlns:a16="http://schemas.microsoft.com/office/drawing/2014/main" id="{B495DDAB-13AE-21BC-8873-636E480C1934}"/>
+              </a:ext>
+            </a:extLst>
+          </p:cNvPr>
+          <p:cNvSpPr txBox="1"/>
+          <p:nvPr/>
+        </p:nvSpPr>
+        <p:spPr>
+          <a:xfrm>
+            <a:off x="9121803" y="4301847"/>
+            <a:ext cx="3092506" cy="1123384"/>
+          </a:xfrm>
+          <a:prstGeom prst="rect">
+            <a:avLst/>
+          </a:prstGeom>
+          <a:noFill/>
+        </p:spPr>
+        <p:txBody>
+          <a:bodyPr wrap="square" rtlCol="0">
+            <a:spAutoFit/>
+          </a:bodyPr>
+          <a:lstStyle/>
+          <a:p>
+            <a:pPr algn="ctr"/>
+            <a:r>
+              <a:rPr lang="en-US" sz="1400" dirty="0"/>
+              <a:t>[Z(</a:t>
+            </a:r>
+            <a:r>
+              <a:rPr lang="en-US" sz="1400" dirty="0" err="1"/>
+              <a:t>WT+nutlin</a:t>
+            </a:r>
+            <a:r>
+              <a:rPr lang="en-US" sz="1400" dirty="0"/>
+              <a:t>) + Z(</a:t>
+            </a:r>
+            <a:r>
+              <a:rPr lang="en-US" sz="1400" dirty="0" err="1"/>
+              <a:t>NULL+nutlin</a:t>
+            </a:r>
+            <a:r>
+              <a:rPr lang="en-US" sz="1400" dirty="0"/>
+              <a:t>) - Z(</a:t>
+            </a:r>
+            <a:r>
+              <a:rPr lang="en-US" sz="1400" dirty="0" err="1"/>
+              <a:t>NULL+etop</a:t>
+            </a:r>
+            <a:r>
+              <a:rPr lang="en-US" sz="1400" dirty="0"/>
+              <a:t>)]</a:t>
+            </a:r>
+          </a:p>
+          <a:p>
+            <a:pPr algn="ctr"/>
+            <a:r>
+              <a:rPr lang="en-US" sz="1400" dirty="0"/>
+              <a:t>____________________________</a:t>
+            </a:r>
+          </a:p>
+          <a:p>
+            <a:pPr algn="ctr"/>
+            <a:endParaRPr lang="en-US" sz="1100" dirty="0"/>
+          </a:p>
+          <a:p>
+            <a:pPr algn="ctr"/>
+            <a:r>
+              <a:rPr lang="en-US" sz="1400" dirty="0"/>
+              <a:t>3</a:t>
+            </a:r>
+          </a:p>
+        </p:txBody>
+      </p:sp>
+      <p:sp>
+        <p:nvSpPr>
+          <p:cNvPr id="13" name="TextBox 12">
+            <a:extLst>
+              <a:ext uri="{FF2B5EF4-FFF2-40B4-BE49-F238E27FC236}">
+                <a16:creationId xmlns:a16="http://schemas.microsoft.com/office/drawing/2014/main" id="{C3C2DBD0-19DA-6708-B5EE-2462DB06F568}"/>
+              </a:ext>
+            </a:extLst>
+          </p:cNvPr>
+          <p:cNvSpPr txBox="1"/>
+          <p:nvPr/>
+        </p:nvSpPr>
+        <p:spPr>
+          <a:xfrm>
+            <a:off x="8454706" y="4795246"/>
+            <a:ext cx="514885" cy="369332"/>
+          </a:xfrm>
+          <a:prstGeom prst="rect">
+            <a:avLst/>
+          </a:prstGeom>
+          <a:noFill/>
+        </p:spPr>
+        <p:txBody>
+          <a:bodyPr wrap="none" rtlCol="0">
+            <a:spAutoFit/>
+          </a:bodyPr>
+          <a:lstStyle/>
+          <a:p>
+            <a:r>
+              <a:rPr lang="en-IL" dirty="0"/>
+              <a:t>EFS</a:t>
+            </a:r>
+          </a:p>
+        </p:txBody>
+      </p:sp>
+      <p:sp>
+        <p:nvSpPr>
+          <p:cNvPr id="21" name="TextBox 20">
+            <a:extLst>
+              <a:ext uri="{FF2B5EF4-FFF2-40B4-BE49-F238E27FC236}">
+                <a16:creationId xmlns:a16="http://schemas.microsoft.com/office/drawing/2014/main" id="{9A1E7E06-600D-22AB-A470-C6EF9A97C940}"/>
+              </a:ext>
+            </a:extLst>
+          </p:cNvPr>
+          <p:cNvSpPr txBox="1"/>
+          <p:nvPr/>
+        </p:nvSpPr>
+        <p:spPr>
+          <a:xfrm>
+            <a:off x="8962144" y="4795246"/>
+            <a:ext cx="319318" cy="369332"/>
+          </a:xfrm>
+          <a:prstGeom prst="rect">
+            <a:avLst/>
+          </a:prstGeom>
+          <a:noFill/>
+        </p:spPr>
+        <p:txBody>
+          <a:bodyPr wrap="none" rtlCol="0">
+            <a:spAutoFit/>
+          </a:bodyPr>
+          <a:lstStyle/>
+          <a:p>
+            <a:r>
+              <a:rPr lang="en-IL" dirty="0"/>
+              <a:t>=</a:t>
             </a:r>
           </a:p>
         </p:txBody>
@@ -21108,309 +21250,78 @@
           </a:p>
         </p:txBody>
       </p:sp>
-      <p:grpSp>
-        <p:nvGrpSpPr>
-          <p:cNvPr id="24" name="Group 23">
+      <p:sp>
+        <p:nvSpPr>
+          <p:cNvPr id="28" name="TextBox 27">
             <a:extLst>
               <a:ext uri="{FF2B5EF4-FFF2-40B4-BE49-F238E27FC236}">
-                <a16:creationId xmlns:a16="http://schemas.microsoft.com/office/drawing/2014/main" id="{1365890A-AFD2-8795-7757-690D2F59FB90}"/>
+                <a16:creationId xmlns:a16="http://schemas.microsoft.com/office/drawing/2014/main" id="{C068C0E7-73EB-621D-7356-C23796AAF798}"/>
               </a:ext>
             </a:extLst>
           </p:cNvPr>
-          <p:cNvGrpSpPr/>
+          <p:cNvSpPr txBox="1"/>
           <p:nvPr/>
-        </p:nvGrpSpPr>
-        <p:grpSpPr>
+        </p:nvSpPr>
+        <p:spPr>
           <a:xfrm>
-            <a:off x="8712017" y="4732140"/>
-            <a:ext cx="3276783" cy="1106115"/>
-            <a:chOff x="8921977" y="4001571"/>
-            <a:chExt cx="2926080" cy="1474819"/>
+            <a:off x="267478" y="4631438"/>
+            <a:ext cx="3331985" cy="369331"/>
           </a:xfrm>
-        </p:grpSpPr>
-        <p:sp>
-          <p:nvSpPr>
-            <p:cNvPr id="25" name="TextBox 24">
-              <a:extLst>
-                <a:ext uri="{FF2B5EF4-FFF2-40B4-BE49-F238E27FC236}">
-                  <a16:creationId xmlns:a16="http://schemas.microsoft.com/office/drawing/2014/main" id="{3EC68F3A-B7C4-4F8F-BD77-324C6DCFED45}"/>
-                </a:ext>
-              </a:extLst>
-            </p:cNvPr>
-            <p:cNvSpPr txBox="1"/>
-            <p:nvPr/>
-          </p:nvSpPr>
-          <p:spPr>
-            <a:xfrm>
-              <a:off x="8921977" y="4001571"/>
-              <a:ext cx="2926080" cy="533480"/>
-            </a:xfrm>
-            <a:prstGeom prst="rect">
-              <a:avLst/>
-            </a:prstGeom>
-            <a:noFill/>
-          </p:spPr>
-          <p:txBody>
-            <a:bodyPr wrap="square" lIns="0" rIns="0" rtlCol="0" anchor="b">
-              <a:spAutoFit/>
-            </a:bodyPr>
-            <a:lstStyle/>
-            <a:p>
-              <a:r>
-                <a:rPr lang="en-US" sz="2000" b="1" noProof="1">
-                  <a:solidFill>
-                    <a:schemeClr val="accent3">
-                      <a:lumMod val="75000"/>
-                    </a:schemeClr>
-                  </a:solidFill>
-                </a:rPr>
-                <a:t>Calculate Functional Score</a:t>
-              </a:r>
-            </a:p>
-          </p:txBody>
-        </p:sp>
-        <p:sp>
-          <p:nvSpPr>
-            <p:cNvPr id="26" name="TextBox 25">
-              <a:extLst>
-                <a:ext uri="{FF2B5EF4-FFF2-40B4-BE49-F238E27FC236}">
-                  <a16:creationId xmlns:a16="http://schemas.microsoft.com/office/drawing/2014/main" id="{DF53E615-9CE2-D1A4-465B-3280FD9BE951}"/>
-                </a:ext>
-              </a:extLst>
-            </p:cNvPr>
-            <p:cNvSpPr txBox="1"/>
-            <p:nvPr/>
-          </p:nvSpPr>
-          <p:spPr>
-            <a:xfrm>
-              <a:off x="8921977" y="4532543"/>
-              <a:ext cx="2926080" cy="943847"/>
-            </a:xfrm>
-            <a:prstGeom prst="rect">
-              <a:avLst/>
-            </a:prstGeom>
-            <a:noFill/>
-          </p:spPr>
-          <p:txBody>
-            <a:bodyPr wrap="square" lIns="0" rIns="0" rtlCol="0" anchor="t">
-              <a:spAutoFit/>
-            </a:bodyPr>
-            <a:lstStyle/>
-            <a:p>
-              <a:r>
-                <a:rPr lang="en-US" sz="1000" noProof="1">
-                  <a:solidFill>
-                    <a:schemeClr val="tx1">
-                      <a:lumMod val="65000"/>
-                      <a:lumOff val="35000"/>
-                    </a:schemeClr>
-                  </a:solidFill>
-                </a:rPr>
-                <a:t>Integrate the three Z-scores using the Combined Phenotype Score formula. This single value per allele - the EFS - reflects the degree to which each TP53 variant retains or loses normal p53 function.</a:t>
-              </a:r>
-            </a:p>
-          </p:txBody>
-        </p:sp>
-      </p:grpSp>
-      <p:grpSp>
-        <p:nvGrpSpPr>
-          <p:cNvPr id="27" name="Group 26">
+          <a:prstGeom prst="rect">
+            <a:avLst/>
+          </a:prstGeom>
+          <a:noFill/>
+        </p:spPr>
+        <p:txBody>
+          <a:bodyPr wrap="square" lIns="0" rIns="0" rtlCol="0" anchor="b">
+            <a:spAutoFit/>
+          </a:bodyPr>
+          <a:lstStyle/>
+          <a:p>
+            <a:pPr algn="r"/>
+            <a:r>
+              <a:rPr lang="en-US" b="1" dirty="0"/>
+              <a:t>Quantify Allele Enrichment</a:t>
+            </a:r>
+            <a:endParaRPr lang="en-US" sz="2000" b="1" noProof="1"/>
+          </a:p>
+        </p:txBody>
+      </p:sp>
+      <p:sp>
+        <p:nvSpPr>
+          <p:cNvPr id="31" name="TextBox 30">
             <a:extLst>
               <a:ext uri="{FF2B5EF4-FFF2-40B4-BE49-F238E27FC236}">
-                <a16:creationId xmlns:a16="http://schemas.microsoft.com/office/drawing/2014/main" id="{7652938D-04DB-9D68-9651-31AFDB763A1A}"/>
+                <a16:creationId xmlns:a16="http://schemas.microsoft.com/office/drawing/2014/main" id="{C179F1FA-36D8-4879-074A-1A5D6C93F38A}"/>
               </a:ext>
             </a:extLst>
           </p:cNvPr>
-          <p:cNvGrpSpPr/>
+          <p:cNvSpPr txBox="1"/>
           <p:nvPr/>
-        </p:nvGrpSpPr>
-        <p:grpSpPr>
-          <a:xfrm>
-            <a:off x="267478" y="4631438"/>
-            <a:ext cx="3331985" cy="921449"/>
-            <a:chOff x="332936" y="4621561"/>
-            <a:chExt cx="2926080" cy="1228599"/>
-          </a:xfrm>
-        </p:grpSpPr>
-        <p:sp>
-          <p:nvSpPr>
-            <p:cNvPr id="28" name="TextBox 27">
-              <a:extLst>
-                <a:ext uri="{FF2B5EF4-FFF2-40B4-BE49-F238E27FC236}">
-                  <a16:creationId xmlns:a16="http://schemas.microsoft.com/office/drawing/2014/main" id="{C068C0E7-73EB-621D-7356-C23796AAF798}"/>
-                </a:ext>
-              </a:extLst>
-            </p:cNvPr>
-            <p:cNvSpPr txBox="1"/>
-            <p:nvPr/>
-          </p:nvSpPr>
-          <p:spPr>
-            <a:xfrm>
-              <a:off x="332936" y="4621561"/>
-              <a:ext cx="2926080" cy="492442"/>
-            </a:xfrm>
-            <a:prstGeom prst="rect">
-              <a:avLst/>
-            </a:prstGeom>
-            <a:noFill/>
-          </p:spPr>
-          <p:txBody>
-            <a:bodyPr wrap="square" lIns="0" rIns="0" rtlCol="0" anchor="b">
-              <a:spAutoFit/>
-            </a:bodyPr>
-            <a:lstStyle/>
-            <a:p>
-              <a:pPr algn="r"/>
-              <a:r>
-                <a:rPr lang="en-US" b="1" dirty="0"/>
-                <a:t>Quantify Allele Enrichment</a:t>
-              </a:r>
-              <a:endParaRPr lang="en-US" sz="2000" b="1" noProof="1"/>
-            </a:p>
-          </p:txBody>
-        </p:sp>
-        <p:sp>
-          <p:nvSpPr>
-            <p:cNvPr id="29" name="TextBox 28">
-              <a:extLst>
-                <a:ext uri="{FF2B5EF4-FFF2-40B4-BE49-F238E27FC236}">
-                  <a16:creationId xmlns:a16="http://schemas.microsoft.com/office/drawing/2014/main" id="{149841CA-ED50-F40B-3A01-C40EF7A27B1D}"/>
-                </a:ext>
-              </a:extLst>
-            </p:cNvPr>
-            <p:cNvSpPr txBox="1"/>
-            <p:nvPr/>
-          </p:nvSpPr>
-          <p:spPr>
-            <a:xfrm>
-              <a:off x="332936" y="5111496"/>
-              <a:ext cx="2926080" cy="738664"/>
-            </a:xfrm>
-            <a:prstGeom prst="rect">
-              <a:avLst/>
-            </a:prstGeom>
-            <a:noFill/>
-          </p:spPr>
-          <p:txBody>
-            <a:bodyPr wrap="square" lIns="0" rIns="0" rtlCol="0" anchor="t">
-              <a:spAutoFit/>
-            </a:bodyPr>
-            <a:lstStyle/>
-            <a:p>
-              <a:pPr algn="r"/>
-              <a:r>
-                <a:rPr lang="en-US" sz="1000" noProof="1">
-                  <a:solidFill>
-                    <a:schemeClr val="tx1">
-                      <a:lumMod val="65000"/>
-                      <a:lumOff val="35000"/>
-                    </a:schemeClr>
-                  </a:solidFill>
-                </a:rPr>
-                <a:t>Compute log₂ fold-change for each allele relative to the early timepoint. Standardize across alleles to produce a Z-score for each of the three conditions.</a:t>
-              </a:r>
-            </a:p>
-          </p:txBody>
-        </p:sp>
-      </p:grpSp>
-      <p:grpSp>
-        <p:nvGrpSpPr>
-          <p:cNvPr id="30" name="Group 29">
-            <a:extLst>
-              <a:ext uri="{FF2B5EF4-FFF2-40B4-BE49-F238E27FC236}">
-                <a16:creationId xmlns:a16="http://schemas.microsoft.com/office/drawing/2014/main" id="{61E9F560-73EE-83EC-6317-B793527177EE}"/>
-              </a:ext>
-            </a:extLst>
-          </p:cNvPr>
-          <p:cNvGrpSpPr/>
-          <p:nvPr/>
-        </p:nvGrpSpPr>
-        <p:grpSpPr>
+        </p:nvSpPr>
+        <p:spPr>
           <a:xfrm>
             <a:off x="1286933" y="2249613"/>
-            <a:ext cx="3854634" cy="967371"/>
-            <a:chOff x="8921977" y="984542"/>
-            <a:chExt cx="2926080" cy="2202911"/>
+            <a:ext cx="3614699" cy="414475"/>
           </a:xfrm>
-        </p:grpSpPr>
-        <p:sp>
-          <p:nvSpPr>
-            <p:cNvPr id="31" name="TextBox 30">
-              <a:extLst>
-                <a:ext uri="{FF2B5EF4-FFF2-40B4-BE49-F238E27FC236}">
-                  <a16:creationId xmlns:a16="http://schemas.microsoft.com/office/drawing/2014/main" id="{C179F1FA-36D8-4879-074A-1A5D6C93F38A}"/>
-                </a:ext>
-              </a:extLst>
-            </p:cNvPr>
-            <p:cNvSpPr txBox="1"/>
-            <p:nvPr/>
-          </p:nvSpPr>
-          <p:spPr>
-            <a:xfrm>
-              <a:off x="8921977" y="984542"/>
-              <a:ext cx="2743944" cy="943848"/>
-            </a:xfrm>
-            <a:prstGeom prst="rect">
-              <a:avLst/>
-            </a:prstGeom>
-            <a:noFill/>
-          </p:spPr>
-          <p:txBody>
-            <a:bodyPr wrap="square" lIns="0" rIns="0" rtlCol="0" anchor="b">
-              <a:spAutoFit/>
-            </a:bodyPr>
-            <a:lstStyle/>
-            <a:p>
-              <a:r>
-                <a:rPr lang="en-US" sz="2000" b="1" noProof="1"/>
-                <a:t>Screen 8,258 TP53 Variants</a:t>
-              </a:r>
-            </a:p>
-          </p:txBody>
-        </p:sp>
-        <p:sp>
-          <p:nvSpPr>
-            <p:cNvPr id="32" name="TextBox 31">
-              <a:extLst>
-                <a:ext uri="{FF2B5EF4-FFF2-40B4-BE49-F238E27FC236}">
-                  <a16:creationId xmlns:a16="http://schemas.microsoft.com/office/drawing/2014/main" id="{75A1239B-ECEC-42AF-0483-364AF93282AD}"/>
-                </a:ext>
-              </a:extLst>
-            </p:cNvPr>
-            <p:cNvSpPr txBox="1"/>
-            <p:nvPr/>
-          </p:nvSpPr>
-          <p:spPr>
-            <a:xfrm>
-              <a:off x="8921977" y="1925881"/>
-              <a:ext cx="2926080" cy="1261572"/>
-            </a:xfrm>
-            <a:prstGeom prst="rect">
-              <a:avLst/>
-            </a:prstGeom>
-            <a:noFill/>
-          </p:spPr>
-          <p:txBody>
-            <a:bodyPr wrap="square" lIns="0" rIns="0" rtlCol="0" anchor="t">
-              <a:spAutoFit/>
-            </a:bodyPr>
-            <a:lstStyle/>
-            <a:p>
-              <a:r>
-                <a:rPr lang="en-US" sz="1000" noProof="1">
-                  <a:solidFill>
-                    <a:schemeClr val="tx1">
-                      <a:lumMod val="65000"/>
-                      <a:lumOff val="35000"/>
-                    </a:schemeClr>
-                  </a:solidFill>
-                </a:rPr>
-                <a:t>Run 3 competitive growth screens in isogenic p53WT and p53NULL cells treated with nutlin-3 or etoposide. Collect read counts to quantify allele representation.</a:t>
-              </a:r>
-            </a:p>
-          </p:txBody>
-        </p:sp>
-      </p:grpSp>
+          <a:prstGeom prst="rect">
+            <a:avLst/>
+          </a:prstGeom>
+          <a:noFill/>
+        </p:spPr>
+        <p:txBody>
+          <a:bodyPr wrap="square" lIns="0" rIns="0" rtlCol="0" anchor="b">
+            <a:spAutoFit/>
+          </a:bodyPr>
+          <a:lstStyle/>
+          <a:p>
+            <a:r>
+              <a:rPr lang="en-US" sz="2000" b="1" noProof="1"/>
+              <a:t>Screen 8,258 TP53 Variants</a:t>
+            </a:r>
+          </a:p>
+        </p:txBody>
+      </p:sp>
       <p:sp>
         <p:nvSpPr>
           <p:cNvPr id="36" name="TextBox 35">
@@ -21472,66 +21383,6 @@
           </a:p>
           <a:p>
             <a:endParaRPr lang="en-IL" dirty="0"/>
-          </a:p>
-        </p:txBody>
-      </p:sp>
-      <p:sp>
-        <p:nvSpPr>
-          <p:cNvPr id="43" name="TextBox 42">
-            <a:extLst>
-              <a:ext uri="{FF2B5EF4-FFF2-40B4-BE49-F238E27FC236}">
-                <a16:creationId xmlns:a16="http://schemas.microsoft.com/office/drawing/2014/main" id="{C6BC8DFC-F7CE-F022-5C20-BE6977408000}"/>
-              </a:ext>
-            </a:extLst>
-          </p:cNvPr>
-          <p:cNvSpPr txBox="1"/>
-          <p:nvPr/>
-        </p:nvSpPr>
-        <p:spPr>
-          <a:xfrm>
-            <a:off x="8712017" y="4224828"/>
-            <a:ext cx="3092506" cy="523220"/>
-          </a:xfrm>
-          <a:prstGeom prst="rect">
-            <a:avLst/>
-          </a:prstGeom>
-          <a:noFill/>
-        </p:spPr>
-        <p:txBody>
-          <a:bodyPr wrap="square" rtlCol="0">
-            <a:spAutoFit/>
-          </a:bodyPr>
-          <a:lstStyle/>
-          <a:p>
-            <a:pPr algn="ctr"/>
-            <a:r>
-              <a:rPr lang="en-US" sz="1400" dirty="0"/>
-              <a:t>EFS = [Z(</a:t>
-            </a:r>
-            <a:r>
-              <a:rPr lang="en-US" sz="1400" dirty="0" err="1"/>
-              <a:t>WT+nutlin</a:t>
-            </a:r>
-            <a:r>
-              <a:rPr lang="en-US" sz="1400" dirty="0"/>
-              <a:t>) + Z(</a:t>
-            </a:r>
-            <a:r>
-              <a:rPr lang="en-US" sz="1400" dirty="0" err="1"/>
-              <a:t>NULL+nutlin</a:t>
-            </a:r>
-            <a:r>
-              <a:rPr lang="en-US" sz="1400" dirty="0"/>
-              <a:t>) − Z(</a:t>
-            </a:r>
-            <a:r>
-              <a:rPr lang="en-US" sz="1400" dirty="0" err="1"/>
-              <a:t>NULL+etop</a:t>
-            </a:r>
-            <a:r>
-              <a:rPr lang="en-US" sz="1400" dirty="0"/>
-              <a:t>)] / 3</a:t>
-            </a:r>
           </a:p>
         </p:txBody>
       </p:sp>
@@ -21881,6 +21732,245 @@
           </a:p>
         </p:txBody>
       </p:sp>
+      <p:pic>
+        <p:nvPicPr>
+          <p:cNvPr id="3074" name="Picture 2" descr="Fig. 2: Comprehensive mutational scanning of TP53.">
+            <a:extLst>
+              <a:ext uri="{FF2B5EF4-FFF2-40B4-BE49-F238E27FC236}">
+                <a16:creationId xmlns:a16="http://schemas.microsoft.com/office/drawing/2014/main" id="{4A796C30-8577-A525-450C-DAEC0E23AD6E}"/>
+              </a:ext>
+            </a:extLst>
+          </p:cNvPr>
+          <p:cNvPicPr>
+            <a:picLocks noChangeAspect="1" noChangeArrowheads="1"/>
+          </p:cNvPicPr>
+          <p:nvPr/>
+        </p:nvPicPr>
+        <p:blipFill rotWithShape="1">
+          <a:blip r:embed="rId4">
+            <a:extLst>
+              <a:ext uri="{28A0092B-C50C-407E-A947-70E740481C1C}">
+                <a14:useLocalDpi xmlns:a14="http://schemas.microsoft.com/office/drawing/2010/main" val="0"/>
+              </a:ext>
+            </a:extLst>
+          </a:blip>
+          <a:srcRect l="31186" t="83484" r="-628" b="-1789"/>
+          <a:stretch>
+            <a:fillRect/>
+          </a:stretch>
+        </p:blipFill>
+        <p:spPr bwMode="auto">
+          <a:xfrm>
+            <a:off x="7532593" y="2169116"/>
+            <a:ext cx="4229434" cy="861774"/>
+          </a:xfrm>
+          <a:prstGeom prst="rect">
+            <a:avLst/>
+          </a:prstGeom>
+          <a:noFill/>
+          <a:ln w="12700">
+            <a:solidFill>
+              <a:schemeClr val="tx1"/>
+            </a:solidFill>
+          </a:ln>
+          <a:extLst>
+            <a:ext uri="{909E8E84-426E-40DD-AFC4-6F175D3DCCD1}">
+              <a14:hiddenFill xmlns:a14="http://schemas.microsoft.com/office/drawing/2010/main">
+                <a:solidFill>
+                  <a:srgbClr val="FFFFFF"/>
+                </a:solidFill>
+              </a14:hiddenFill>
+            </a:ext>
+          </a:extLst>
+        </p:spPr>
+      </p:pic>
+      <p:sp>
+        <p:nvSpPr>
+          <p:cNvPr id="11" name="TextBox 10">
+            <a:extLst>
+              <a:ext uri="{FF2B5EF4-FFF2-40B4-BE49-F238E27FC236}">
+                <a16:creationId xmlns:a16="http://schemas.microsoft.com/office/drawing/2014/main" id="{52F7814D-2864-116E-71FD-D49FD17CE8AB}"/>
+              </a:ext>
+            </a:extLst>
+          </p:cNvPr>
+          <p:cNvSpPr txBox="1"/>
+          <p:nvPr/>
+        </p:nvSpPr>
+        <p:spPr>
+          <a:xfrm>
+            <a:off x="8712017" y="5472237"/>
+            <a:ext cx="3276783" cy="400110"/>
+          </a:xfrm>
+          <a:prstGeom prst="rect">
+            <a:avLst/>
+          </a:prstGeom>
+          <a:noFill/>
+        </p:spPr>
+        <p:txBody>
+          <a:bodyPr wrap="square" lIns="0" rIns="0" rtlCol="0" anchor="b">
+            <a:spAutoFit/>
+          </a:bodyPr>
+          <a:lstStyle/>
+          <a:p>
+            <a:r>
+              <a:rPr lang="en-US" sz="2000" b="1" noProof="1">
+                <a:solidFill>
+                  <a:srgbClr val="903063"/>
+                </a:solidFill>
+              </a:rPr>
+              <a:t>Calculate Functional Score</a:t>
+            </a:r>
+          </a:p>
+        </p:txBody>
+      </p:sp>
+      <p:sp>
+        <p:nvSpPr>
+          <p:cNvPr id="12" name="TextBox 11">
+            <a:extLst>
+              <a:ext uri="{FF2B5EF4-FFF2-40B4-BE49-F238E27FC236}">
+                <a16:creationId xmlns:a16="http://schemas.microsoft.com/office/drawing/2014/main" id="{C3937F33-FAFC-5F41-1DB1-44F6F9FB5B3D}"/>
+              </a:ext>
+            </a:extLst>
+          </p:cNvPr>
+          <p:cNvSpPr txBox="1"/>
+          <p:nvPr/>
+        </p:nvSpPr>
+        <p:spPr>
+          <a:xfrm>
+            <a:off x="9121803" y="4301847"/>
+            <a:ext cx="3092506" cy="1123384"/>
+          </a:xfrm>
+          <a:prstGeom prst="rect">
+            <a:avLst/>
+          </a:prstGeom>
+          <a:noFill/>
+        </p:spPr>
+        <p:txBody>
+          <a:bodyPr wrap="square" rtlCol="0">
+            <a:spAutoFit/>
+          </a:bodyPr>
+          <a:lstStyle/>
+          <a:p>
+            <a:pPr algn="ctr"/>
+            <a:r>
+              <a:rPr lang="en-US" sz="1400" dirty="0"/>
+              <a:t>[Z(</a:t>
+            </a:r>
+            <a:r>
+              <a:rPr lang="en-US" sz="1400" dirty="0" err="1"/>
+              <a:t>WT+nutlin</a:t>
+            </a:r>
+            <a:r>
+              <a:rPr lang="en-US" sz="1400" dirty="0"/>
+              <a:t>) + Z(</a:t>
+            </a:r>
+            <a:r>
+              <a:rPr lang="en-US" sz="1400" dirty="0" err="1"/>
+              <a:t>NULL+nutlin</a:t>
+            </a:r>
+            <a:r>
+              <a:rPr lang="en-US" sz="1400" dirty="0"/>
+              <a:t>) - Z(</a:t>
+            </a:r>
+            <a:r>
+              <a:rPr lang="en-US" sz="1400" dirty="0" err="1"/>
+              <a:t>NULL+etop</a:t>
+            </a:r>
+            <a:r>
+              <a:rPr lang="en-US" sz="1400" dirty="0"/>
+              <a:t>)]</a:t>
+            </a:r>
+          </a:p>
+          <a:p>
+            <a:pPr algn="ctr"/>
+            <a:r>
+              <a:rPr lang="en-US" sz="1400" dirty="0"/>
+              <a:t>____________________________</a:t>
+            </a:r>
+          </a:p>
+          <a:p>
+            <a:pPr algn="ctr"/>
+            <a:endParaRPr lang="en-US" sz="1100" dirty="0"/>
+          </a:p>
+          <a:p>
+            <a:pPr algn="ctr"/>
+            <a:r>
+              <a:rPr lang="en-US" sz="1400" dirty="0"/>
+              <a:t>3</a:t>
+            </a:r>
+          </a:p>
+        </p:txBody>
+      </p:sp>
+      <p:sp>
+        <p:nvSpPr>
+          <p:cNvPr id="13" name="TextBox 12">
+            <a:extLst>
+              <a:ext uri="{FF2B5EF4-FFF2-40B4-BE49-F238E27FC236}">
+                <a16:creationId xmlns:a16="http://schemas.microsoft.com/office/drawing/2014/main" id="{75673C05-49DD-3F2C-6DF9-6F2930A59569}"/>
+              </a:ext>
+            </a:extLst>
+          </p:cNvPr>
+          <p:cNvSpPr txBox="1"/>
+          <p:nvPr/>
+        </p:nvSpPr>
+        <p:spPr>
+          <a:xfrm>
+            <a:off x="8454706" y="4795246"/>
+            <a:ext cx="514885" cy="369332"/>
+          </a:xfrm>
+          <a:prstGeom prst="rect">
+            <a:avLst/>
+          </a:prstGeom>
+          <a:noFill/>
+        </p:spPr>
+        <p:txBody>
+          <a:bodyPr wrap="none" rtlCol="0">
+            <a:spAutoFit/>
+          </a:bodyPr>
+          <a:lstStyle/>
+          <a:p>
+            <a:r>
+              <a:rPr lang="en-IL" dirty="0"/>
+              <a:t>EFS</a:t>
+            </a:r>
+          </a:p>
+        </p:txBody>
+      </p:sp>
+      <p:sp>
+        <p:nvSpPr>
+          <p:cNvPr id="21" name="TextBox 20">
+            <a:extLst>
+              <a:ext uri="{FF2B5EF4-FFF2-40B4-BE49-F238E27FC236}">
+                <a16:creationId xmlns:a16="http://schemas.microsoft.com/office/drawing/2014/main" id="{B80031CB-6D8D-D75F-F5C7-B4AB49F1FB13}"/>
+              </a:ext>
+            </a:extLst>
+          </p:cNvPr>
+          <p:cNvSpPr txBox="1"/>
+          <p:nvPr/>
+        </p:nvSpPr>
+        <p:spPr>
+          <a:xfrm>
+            <a:off x="8962144" y="4795246"/>
+            <a:ext cx="319318" cy="369332"/>
+          </a:xfrm>
+          <a:prstGeom prst="rect">
+            <a:avLst/>
+          </a:prstGeom>
+          <a:noFill/>
+        </p:spPr>
+        <p:txBody>
+          <a:bodyPr wrap="none" rtlCol="0">
+            <a:spAutoFit/>
+          </a:bodyPr>
+          <a:lstStyle/>
+          <a:p>
+            <a:r>
+              <a:rPr lang="en-IL" dirty="0"/>
+              <a:t>=</a:t>
+            </a:r>
+          </a:p>
+        </p:txBody>
+      </p:sp>
     </p:spTree>
     <p:extLst>
       <p:ext uri="{BB962C8B-B14F-4D97-AF65-F5344CB8AC3E}">
@@ -21972,8 +22062,8 @@
         </p:nvSpPr>
         <p:spPr>
           <a:xfrm>
-            <a:off x="1333373" y="2396326"/>
-            <a:ext cx="9525253" cy="3572037"/>
+            <a:off x="616688" y="2475595"/>
+            <a:ext cx="10958623" cy="3572037"/>
           </a:xfrm>
         </p:spPr>
         <p:txBody>
@@ -21986,10 +22076,42 @@
               <a:buNone/>
             </a:pPr>
             <a:r>
-              <a:rPr lang="en-US" sz="2400" dirty="0"/>
-              <a:t>Patients with TP53 mutations that have the lowest experimental function scores (EFS) will show the highest Fraction Genome Altered (FGA)</a:t>
-            </a:r>
-            <a:endParaRPr lang="en-IL" sz="2400" dirty="0"/>
+              <a:rPr lang="en-US" sz="4000" dirty="0"/>
+              <a:t>Patients with TP53 mutations that have</a:t>
+            </a:r>
+            <a:r>
+              <a:rPr lang="he-IL" sz="4000" dirty="0"/>
+              <a:t> </a:t>
+            </a:r>
+            <a:r>
+              <a:rPr lang="en-US" sz="4000" dirty="0"/>
+              <a:t>the lowest </a:t>
+            </a:r>
+            <a:r>
+              <a:rPr lang="en-US" sz="4000" dirty="0">
+                <a:solidFill>
+                  <a:srgbClr val="00B050"/>
+                </a:solidFill>
+              </a:rPr>
+              <a:t>experimental function scores (EFS) </a:t>
+            </a:r>
+            <a:r>
+              <a:rPr lang="en-US" sz="4000" dirty="0"/>
+              <a:t>will show the highest </a:t>
+            </a:r>
+            <a:r>
+              <a:rPr lang="en-US" sz="4000" dirty="0">
+                <a:solidFill>
+                  <a:srgbClr val="FF0000"/>
+                </a:solidFill>
+              </a:rPr>
+              <a:t>Fraction Genome Altered (FGA)</a:t>
+            </a:r>
+            <a:endParaRPr lang="en-IL" sz="4000" dirty="0">
+              <a:solidFill>
+                <a:srgbClr val="FF0000"/>
+              </a:solidFill>
+            </a:endParaRPr>
           </a:p>
         </p:txBody>
       </p:sp>
@@ -22094,8 +22216,12 @@
           </a:lstStyle>
           <a:p>
             <a:r>
+              <a:rPr lang="en-US" dirty="0" err="1"/>
+              <a:t>iNITIAL</a:t>
+            </a:r>
+            <a:r>
               <a:rPr lang="en-US" dirty="0"/>
-              <a:t>Hypothesis</a:t>
+              <a:t> Hypothesis</a:t>
             </a:r>
             <a:endParaRPr lang="en-IL" dirty="0"/>
           </a:p>
@@ -22458,7 +22584,7 @@
         </p:nvSpPr>
         <p:spPr>
           <a:xfrm>
-            <a:off x="2141709" y="2676259"/>
+            <a:off x="2303060" y="2491881"/>
             <a:ext cx="3821288" cy="3880773"/>
           </a:xfrm>
           <a:prstGeom prst="rect">
@@ -22728,41 +22854,6 @@
             <a:r>
               <a:rPr lang="en-US" dirty="0"/>
               <a:t>65,061 TP53-WT</a:t>
-            </a:r>
-          </a:p>
-        </p:txBody>
-      </p:sp>
-      <p:sp>
-        <p:nvSpPr>
-          <p:cNvPr id="5" name="TextBox 4">
-            <a:extLst>
-              <a:ext uri="{FF2B5EF4-FFF2-40B4-BE49-F238E27FC236}">
-                <a16:creationId xmlns:a16="http://schemas.microsoft.com/office/drawing/2014/main" id="{D6DF2B16-6F47-3D24-4C4D-F99346EBABA1}"/>
-              </a:ext>
-            </a:extLst>
-          </p:cNvPr>
-          <p:cNvSpPr txBox="1"/>
-          <p:nvPr/>
-        </p:nvSpPr>
-        <p:spPr>
-          <a:xfrm>
-            <a:off x="2141709" y="2125487"/>
-            <a:ext cx="1954446" cy="369332"/>
-          </a:xfrm>
-          <a:prstGeom prst="rect">
-            <a:avLst/>
-          </a:prstGeom>
-          <a:noFill/>
-        </p:spPr>
-        <p:txBody>
-          <a:bodyPr wrap="none" rtlCol="0">
-            <a:spAutoFit/>
-          </a:bodyPr>
-          <a:lstStyle/>
-          <a:p>
-            <a:r>
-              <a:rPr lang="en-IL" b="1" dirty="0"/>
-              <a:t>Primary Analysis</a:t>
             </a:r>
           </a:p>
         </p:txBody>

--- a/project/project_background/Final Project Presentation - Ornit - Cancer Bioinfo March 2026.pptx
+++ b/project/project_background/Final Project Presentation - Ornit - Cancer Bioinfo March 2026.pptx
@@ -5,7 +5,7 @@
     <p:sldMasterId id="2147484297" r:id="rId1"/>
   </p:sldMasterIdLst>
   <p:notesMasterIdLst>
-    <p:notesMasterId r:id="rId24"/>
+    <p:notesMasterId r:id="rId20"/>
   </p:notesMasterIdLst>
   <p:sldIdLst>
     <p:sldId id="256" r:id="rId2"/>
@@ -17,19 +17,15 @@
     <p:sldId id="265" r:id="rId8"/>
     <p:sldId id="259" r:id="rId9"/>
     <p:sldId id="272" r:id="rId10"/>
-    <p:sldId id="273" r:id="rId11"/>
-    <p:sldId id="271" r:id="rId12"/>
-    <p:sldId id="366" r:id="rId13"/>
-    <p:sldId id="367" r:id="rId14"/>
-    <p:sldId id="375" r:id="rId15"/>
-    <p:sldId id="368" r:id="rId16"/>
-    <p:sldId id="374" r:id="rId17"/>
-    <p:sldId id="369" r:id="rId18"/>
-    <p:sldId id="365" r:id="rId19"/>
-    <p:sldId id="370" r:id="rId20"/>
-    <p:sldId id="371" r:id="rId21"/>
-    <p:sldId id="372" r:id="rId22"/>
-    <p:sldId id="373" r:id="rId23"/>
+    <p:sldId id="271" r:id="rId11"/>
+    <p:sldId id="366" r:id="rId12"/>
+    <p:sldId id="367" r:id="rId13"/>
+    <p:sldId id="375" r:id="rId14"/>
+    <p:sldId id="368" r:id="rId15"/>
+    <p:sldId id="365" r:id="rId16"/>
+    <p:sldId id="370" r:id="rId17"/>
+    <p:sldId id="371" r:id="rId18"/>
+    <p:sldId id="373" r:id="rId19"/>
   </p:sldIdLst>
   <p:sldSz cx="12192000" cy="6858000"/>
   <p:notesSz cx="6858000" cy="9144000"/>
@@ -3667,174 +3663,6 @@
   <p:cSld>
     <p:spTree>
       <p:nvGrpSpPr>
-        <p:cNvPr id="1" name="">
-          <a:extLst>
-            <a:ext uri="{FF2B5EF4-FFF2-40B4-BE49-F238E27FC236}">
-              <a16:creationId xmlns:a16="http://schemas.microsoft.com/office/drawing/2014/main" id="{DF812DA0-78C3-E2BC-A5F2-ABF8DD1F18CE}"/>
-            </a:ext>
-          </a:extLst>
-        </p:cNvPr>
-        <p:cNvGrpSpPr/>
-        <p:nvPr/>
-      </p:nvGrpSpPr>
-      <p:grpSpPr>
-        <a:xfrm>
-          <a:off x="0" y="0"/>
-          <a:ext cx="0" cy="0"/>
-          <a:chOff x="0" y="0"/>
-          <a:chExt cx="0" cy="0"/>
-        </a:xfrm>
-      </p:grpSpPr>
-      <p:sp>
-        <p:nvSpPr>
-          <p:cNvPr id="2" name="Slide Image Placeholder 1">
-            <a:extLst>
-              <a:ext uri="{FF2B5EF4-FFF2-40B4-BE49-F238E27FC236}">
-                <a16:creationId xmlns:a16="http://schemas.microsoft.com/office/drawing/2014/main" id="{BB9D7FC3-56A0-EBA3-9609-B9DDF9436317}"/>
-              </a:ext>
-            </a:extLst>
-          </p:cNvPr>
-          <p:cNvSpPr>
-            <a:spLocks noGrp="1" noRot="1" noChangeAspect="1"/>
-          </p:cNvSpPr>
-          <p:nvPr>
-            <p:ph type="sldImg"/>
-          </p:nvPr>
-        </p:nvSpPr>
-        <p:spPr/>
-      </p:sp>
-      <p:sp>
-        <p:nvSpPr>
-          <p:cNvPr id="3" name="Notes Placeholder 2">
-            <a:extLst>
-              <a:ext uri="{FF2B5EF4-FFF2-40B4-BE49-F238E27FC236}">
-                <a16:creationId xmlns:a16="http://schemas.microsoft.com/office/drawing/2014/main" id="{BFD3940C-BA75-367B-2854-DC459C6E4FC8}"/>
-              </a:ext>
-            </a:extLst>
-          </p:cNvPr>
-          <p:cNvSpPr>
-            <a:spLocks noGrp="1"/>
-          </p:cNvSpPr>
-          <p:nvPr>
-            <p:ph type="body" idx="1"/>
-          </p:nvPr>
-        </p:nvSpPr>
-        <p:spPr/>
-        <p:txBody>
-          <a:bodyPr/>
-          <a:lstStyle/>
-          <a:p>
-            <a:pPr marL="0" algn="r" defTabSz="914400" rtl="1" eaLnBrk="1" latinLnBrk="0" hangingPunct="1"/>
-            <a:r>
-              <a:rPr lang="he-IL" dirty="0"/>
-              <a:t>ל-</a:t>
-            </a:r>
-            <a:r>
-              <a:rPr lang="en-US" dirty="0"/>
-              <a:t>GENIE</a:t>
-            </a:r>
-            <a:r>
-              <a:rPr lang="he-IL" dirty="0"/>
-              <a:t> היה רק </a:t>
-            </a:r>
-            <a:r>
-              <a:rPr lang="en-US" dirty="0"/>
-              <a:t>TP53-specific CNA</a:t>
-            </a:r>
-            <a:r>
-              <a:rPr lang="he-IL" dirty="0"/>
-              <a:t> ורציתי לראות את ההשפעה על הגנום, </a:t>
-            </a:r>
-            <a:r>
-              <a:rPr lang="en-US" dirty="0"/>
-              <a:t> </a:t>
-            </a:r>
-            <a:r>
-              <a:rPr lang="he-IL" dirty="0"/>
-              <a:t>ובאופן ספציפי, גנים של סרטן, אילו גנים מוגברים, אילו גנים מושתקים או נמחקים בכל הגנום, לא רק </a:t>
-            </a:r>
-            <a:r>
-              <a:rPr lang="en-US" dirty="0"/>
-              <a:t>TP53</a:t>
-            </a:r>
-            <a:r>
-              <a:rPr lang="he-IL" dirty="0"/>
-              <a:t>.</a:t>
-            </a:r>
-          </a:p>
-          <a:p>
-            <a:pPr marL="0" algn="r" defTabSz="914400" rtl="1" eaLnBrk="1" latinLnBrk="0" hangingPunct="1"/>
-            <a:r>
-              <a:rPr lang="he-IL" dirty="0"/>
-              <a:t>בגדול </a:t>
-            </a:r>
-            <a:r>
-              <a:rPr lang="en-US" dirty="0"/>
-              <a:t>GENIE</a:t>
-            </a:r>
-            <a:r>
-              <a:rPr lang="he-IL" dirty="0"/>
-              <a:t> אמר לי הגנום נשבר, </a:t>
-            </a:r>
-            <a:r>
-              <a:rPr lang="en-US" dirty="0"/>
-              <a:t>MSK-IMPACT</a:t>
-            </a:r>
-            <a:r>
-              <a:rPr lang="he-IL" dirty="0"/>
-              <a:t> אמר לי מה נשבר.</a:t>
-            </a:r>
-            <a:endParaRPr lang="en-US" dirty="0"/>
-          </a:p>
-        </p:txBody>
-      </p:sp>
-      <p:sp>
-        <p:nvSpPr>
-          <p:cNvPr id="4" name="Slide Number Placeholder 3">
-            <a:extLst>
-              <a:ext uri="{FF2B5EF4-FFF2-40B4-BE49-F238E27FC236}">
-                <a16:creationId xmlns:a16="http://schemas.microsoft.com/office/drawing/2014/main" id="{B5DDC7C4-DD9D-503D-7A0E-8FF1827D9E7A}"/>
-              </a:ext>
-            </a:extLst>
-          </p:cNvPr>
-          <p:cNvSpPr>
-            <a:spLocks noGrp="1"/>
-          </p:cNvSpPr>
-          <p:nvPr>
-            <p:ph type="sldNum" sz="quarter" idx="5"/>
-          </p:nvPr>
-        </p:nvSpPr>
-        <p:spPr/>
-        <p:txBody>
-          <a:bodyPr/>
-          <a:lstStyle/>
-          <a:p>
-            <a:fld id="{7242DB82-1DC1-9846-88D7-11B539157949}" type="slidenum">
-              <a:rPr lang="en-IL" smtClean="0"/>
-              <a:t>10</a:t>
-            </a:fld>
-            <a:endParaRPr lang="en-IL"/>
-          </a:p>
-        </p:txBody>
-      </p:sp>
-    </p:spTree>
-    <p:extLst>
-      <p:ext uri="{BB962C8B-B14F-4D97-AF65-F5344CB8AC3E}">
-        <p14:creationId xmlns:p14="http://schemas.microsoft.com/office/powerpoint/2010/main" val="191436885"/>
-      </p:ext>
-    </p:extLst>
-  </p:cSld>
-  <p:clrMapOvr>
-    <a:masterClrMapping/>
-  </p:clrMapOvr>
-</p:notes>
-</file>
-
-<file path=ppt/notesSlides/notesSlide11.xml><?xml version="1.0" encoding="utf-8"?>
-<p:notes xmlns:a="http://schemas.openxmlformats.org/drawingml/2006/main" xmlns:r="http://schemas.openxmlformats.org/officeDocument/2006/relationships" xmlns:p="http://schemas.openxmlformats.org/presentationml/2006/main">
-  <p:cSld>
-    <p:spTree>
-      <p:nvGrpSpPr>
         <p:cNvPr id="1" name=""/>
         <p:cNvGrpSpPr/>
         <p:nvPr/>
@@ -3877,7 +3705,7 @@
             <a:pPr marL="0" algn="r" defTabSz="914400" rtl="1" eaLnBrk="1" latinLnBrk="0" hangingPunct="1"/>
             <a:r>
               <a:rPr lang="he-IL" dirty="0"/>
-              <a:t>כאן לקחתי את </a:t>
+              <a:t>אז לקחתי את </a:t>
             </a:r>
             <a:r>
               <a:rPr lang="he-IL" dirty="0" err="1"/>
@@ -3901,7 +3729,7 @@
             </a:r>
             <a:r>
               <a:rPr lang="he-IL" dirty="0"/>
-              <a:t> (מוטנט או לא).</a:t>
+              <a:t> והפכתי אותם לבינאריים (מוטנט או לא) כדי לענות על השאלה הראשונה שלי.</a:t>
             </a:r>
           </a:p>
           <a:p>
@@ -3911,16 +3739,28 @@
           <a:p>
             <a:pPr marL="0" algn="r" defTabSz="914400" rtl="1" eaLnBrk="1" latinLnBrk="0" hangingPunct="1"/>
             <a:r>
+              <a:rPr lang="he-IL" dirty="0" err="1"/>
+              <a:t>בדטא</a:t>
+            </a:r>
+            <a:r>
               <a:rPr lang="he-IL" dirty="0"/>
-              <a:t>ב-</a:t>
-            </a:r>
-            <a:r>
-              <a:rPr lang="en-US" dirty="0"/>
-              <a:t>TP53 CNA values</a:t>
+              <a:t> של </a:t>
+            </a:r>
+            <a:r>
+              <a:rPr lang="he-IL" dirty="0" err="1"/>
+              <a:t>ג׳יני</a:t>
             </a:r>
             <a:r>
               <a:rPr lang="he-IL" dirty="0"/>
-              <a:t>: 0 אומר </a:t>
+              <a:t> (</a:t>
+            </a:r>
+            <a:r>
+              <a:rPr lang="en-US" dirty="0" err="1"/>
+              <a:t>cna.txt</a:t>
+            </a:r>
+            <a:r>
+              <a:rPr lang="he-IL" dirty="0"/>
+              <a:t>): 0 אומר </a:t>
             </a:r>
             <a:r>
               <a:rPr lang="en-US" dirty="0"/>
@@ -4097,6 +3937,74 @@
             <a:r>
               <a:rPr lang="he-IL" dirty="0"/>
               <a:t>, אז לא החשבתי את זה כמוטציה.</a:t>
+            </a:r>
+            <a:endParaRPr lang="en-US" dirty="0"/>
+          </a:p>
+          <a:p>
+            <a:pPr marL="0" algn="r" defTabSz="914400" rtl="1" eaLnBrk="1" latinLnBrk="0" hangingPunct="1"/>
+            <a:endParaRPr lang="en-US" dirty="0"/>
+          </a:p>
+          <a:p>
+            <a:pPr marL="0" algn="r" defTabSz="914400" rtl="1" eaLnBrk="1" latinLnBrk="0" hangingPunct="1"/>
+            <a:r>
+              <a:rPr lang="he-IL" dirty="0"/>
+              <a:t>את זה השוויתי לפרמטר </a:t>
+            </a:r>
+            <a:r>
+              <a:rPr lang="en-US" dirty="0"/>
+              <a:t>Fraction Genome Altered</a:t>
+            </a:r>
+            <a:r>
+              <a:rPr lang="he-IL" dirty="0"/>
+              <a:t>. התוצאות מראות בבירור שיש יותר כאוס </a:t>
+            </a:r>
+            <a:r>
+              <a:rPr lang="he-IL" dirty="0" err="1"/>
+              <a:t>גנומי</a:t>
+            </a:r>
+            <a:r>
+              <a:rPr lang="he-IL" dirty="0"/>
+              <a:t> במוטציות לעומת </a:t>
+            </a:r>
+            <a:r>
+              <a:rPr lang="en-US" dirty="0"/>
+              <a:t>WT</a:t>
+            </a:r>
+            <a:r>
+              <a:rPr lang="he-IL" dirty="0"/>
+              <a:t>, אבל זה מראה לנו את זה באופן מאוד שטחי וכאמור בינארי, אז רציתי להכניס לכאן עוד פרמטר, את </a:t>
+            </a:r>
+            <a:r>
+              <a:rPr lang="en-US" dirty="0"/>
+              <a:t>EFS</a:t>
+            </a:r>
+            <a:r>
+              <a:rPr lang="he-IL" dirty="0"/>
+              <a:t> </a:t>
+            </a:r>
+            <a:r>
+              <a:rPr lang="he-IL" dirty="0" err="1"/>
+              <a:t>מהדטא</a:t>
+            </a:r>
+            <a:r>
+              <a:rPr lang="he-IL" dirty="0"/>
+              <a:t> של </a:t>
+            </a:r>
+            <a:r>
+              <a:rPr lang="he-IL" dirty="0" err="1"/>
+              <a:t>ג׳יאנקומלי</a:t>
+            </a:r>
+            <a:r>
+              <a:rPr lang="he-IL" dirty="0"/>
+              <a:t> ולבדוק האם יש קשר בין הפרמטר שבדקתי כאן, לבין </a:t>
+            </a:r>
+            <a:r>
+              <a:rPr lang="en-US" dirty="0"/>
+              <a:t>FGA</a:t>
+            </a:r>
+            <a:r>
+              <a:rPr lang="he-IL" dirty="0"/>
+              <a:t>.</a:t>
             </a:r>
           </a:p>
         </p:txBody>
@@ -4118,7 +4026,7 @@
           <a:p>
             <a:fld id="{7242DB82-1DC1-9846-88D7-11B539157949}" type="slidenum">
               <a:rPr lang="en-IL" smtClean="0"/>
-              <a:t>11</a:t>
+              <a:t>10</a:t>
             </a:fld>
             <a:endParaRPr lang="en-IL"/>
           </a:p>
@@ -4137,7 +4045,7 @@
 </p:notes>
 </file>
 
-<file path=ppt/notesSlides/notesSlide12.xml><?xml version="1.0" encoding="utf-8"?>
+<file path=ppt/notesSlides/notesSlide11.xml><?xml version="1.0" encoding="utf-8"?>
 <p:notes xmlns:a="http://schemas.openxmlformats.org/drawingml/2006/main" xmlns:r="http://schemas.openxmlformats.org/officeDocument/2006/relationships" xmlns:p="http://schemas.openxmlformats.org/presentationml/2006/main">
   <p:cSld>
     <p:spTree>
@@ -4239,26 +4147,7 @@
           </a:p>
           <a:p>
             <a:pPr marL="0" algn="r" defTabSz="914400" rtl="1" eaLnBrk="1" latinLnBrk="0" hangingPunct="1"/>
-            <a:r>
-              <a:rPr lang="he-IL" dirty="0"/>
-              <a:t>את ה-</a:t>
-            </a:r>
-            <a:r>
-              <a:rPr lang="en-US" dirty="0"/>
-              <a:t>EFS</a:t>
-            </a:r>
-            <a:r>
-              <a:rPr lang="he-IL" dirty="0"/>
-              <a:t> הוצאתי מ-</a:t>
-            </a:r>
-            <a:r>
-              <a:rPr lang="en-US" dirty="0" err="1"/>
-              <a:t>Giancomelli</a:t>
-            </a:r>
-            <a:r>
-              <a:rPr lang="he-IL" dirty="0"/>
-              <a:t>.</a:t>
-            </a:r>
+            <a:endParaRPr lang="he-IL" dirty="0"/>
           </a:p>
           <a:p>
             <a:pPr marL="0" algn="r" defTabSz="914400" rtl="1" eaLnBrk="1" latinLnBrk="0" hangingPunct="1"/>
@@ -4371,7 +4260,7 @@
           <a:p>
             <a:fld id="{7242DB82-1DC1-9846-88D7-11B539157949}" type="slidenum">
               <a:rPr lang="en-IL" smtClean="0"/>
-              <a:t>12</a:t>
+              <a:t>11</a:t>
             </a:fld>
             <a:endParaRPr lang="en-IL"/>
           </a:p>
@@ -4390,7 +4279,7 @@
 </p:notes>
 </file>
 
-<file path=ppt/notesSlides/notesSlide13.xml><?xml version="1.0" encoding="utf-8"?>
+<file path=ppt/notesSlides/notesSlide12.xml><?xml version="1.0" encoding="utf-8"?>
 <p:notes xmlns:a="http://schemas.openxmlformats.org/drawingml/2006/main" xmlns:r="http://schemas.openxmlformats.org/officeDocument/2006/relationships" xmlns:p="http://schemas.openxmlformats.org/presentationml/2006/main">
   <p:cSld>
     <p:spTree>
@@ -4571,7 +4460,7 @@
           <a:p>
             <a:fld id="{7242DB82-1DC1-9846-88D7-11B539157949}" type="slidenum">
               <a:rPr lang="en-IL" smtClean="0"/>
-              <a:t>13</a:t>
+              <a:t>12</a:t>
             </a:fld>
             <a:endParaRPr lang="en-IL"/>
           </a:p>
@@ -4590,7 +4479,7 @@
 </p:notes>
 </file>
 
-<file path=ppt/notesSlides/notesSlide14.xml><?xml version="1.0" encoding="utf-8"?>
+<file path=ppt/notesSlides/notesSlide13.xml><?xml version="1.0" encoding="utf-8"?>
 <p:notes xmlns:a="http://schemas.openxmlformats.org/drawingml/2006/main" xmlns:r="http://schemas.openxmlformats.org/officeDocument/2006/relationships" xmlns:p="http://schemas.openxmlformats.org/presentationml/2006/main">
   <p:cSld>
     <p:spTree>
@@ -4655,7 +4544,7 @@
             <a:pPr marL="0" algn="r" defTabSz="914400" rtl="1" eaLnBrk="1" latinLnBrk="0" hangingPunct="1"/>
             <a:r>
               <a:rPr lang="he-IL" dirty="0"/>
-              <a:t>פה רציתי לעשות אנליזה עפ״י מיקום החומצות האמיניות. רציתי לראות האם יש אזורים מסוימים בגנום עם יותר מוטציות או לא.</a:t>
+              <a:t>פה רציתי לענות על השאלה השנייה, ולעשות אנליזה עפ״י מיקום החומצות האמיניות. רציתי לראות האם יש אזורים מסוימים בגנום עם יותר מוטציות או לא.</a:t>
             </a:r>
           </a:p>
           <a:p>
@@ -4778,7 +4667,7 @@
           <a:p>
             <a:fld id="{7242DB82-1DC1-9846-88D7-11B539157949}" type="slidenum">
               <a:rPr lang="en-IL" smtClean="0"/>
-              <a:t>14</a:t>
+              <a:t>13</a:t>
             </a:fld>
             <a:endParaRPr lang="en-IL"/>
           </a:p>
@@ -4797,7 +4686,7 @@
 </p:notes>
 </file>
 
-<file path=ppt/notesSlides/notesSlide15.xml><?xml version="1.0" encoding="utf-8"?>
+<file path=ppt/notesSlides/notesSlide14.xml><?xml version="1.0" encoding="utf-8"?>
 <p:notes xmlns:a="http://schemas.openxmlformats.org/drawingml/2006/main" xmlns:r="http://schemas.openxmlformats.org/officeDocument/2006/relationships" xmlns:p="http://schemas.openxmlformats.org/presentationml/2006/main">
   <p:cSld>
     <p:spTree>
@@ -4870,15 +4759,7 @@
             </a:r>
             <a:r>
               <a:rPr lang="he-IL" dirty="0"/>
-              <a:t>? בצד שמאל בדקתי </a:t>
-            </a:r>
-            <a:r>
-              <a:rPr lang="he-IL" dirty="0" err="1"/>
-              <a:t>מהה</a:t>
-            </a:r>
-            <a:r>
-              <a:rPr lang="he-IL" dirty="0"/>
-              <a:t>-</a:t>
+              <a:t>? בצד שמאל בדקתי מה ה-</a:t>
             </a:r>
             <a:r>
               <a:rPr lang="en-US" dirty="0"/>
@@ -5062,7 +4943,7 @@
           <a:p>
             <a:fld id="{7242DB82-1DC1-9846-88D7-11B539157949}" type="slidenum">
               <a:rPr lang="en-IL" smtClean="0"/>
-              <a:t>15</a:t>
+              <a:t>14</a:t>
             </a:fld>
             <a:endParaRPr lang="en-IL"/>
           </a:p>
@@ -5081,460 +4962,7 @@
 </p:notes>
 </file>
 
-<file path=ppt/notesSlides/notesSlide16.xml><?xml version="1.0" encoding="utf-8"?>
-<p:notes xmlns:a="http://schemas.openxmlformats.org/drawingml/2006/main" xmlns:r="http://schemas.openxmlformats.org/officeDocument/2006/relationships" xmlns:p="http://schemas.openxmlformats.org/presentationml/2006/main">
-  <p:cSld>
-    <p:spTree>
-      <p:nvGrpSpPr>
-        <p:cNvPr id="1" name="">
-          <a:extLst>
-            <a:ext uri="{FF2B5EF4-FFF2-40B4-BE49-F238E27FC236}">
-              <a16:creationId xmlns:a16="http://schemas.microsoft.com/office/drawing/2014/main" id="{FA7CF7D1-D124-53BB-A836-93876410A1DF}"/>
-            </a:ext>
-          </a:extLst>
-        </p:cNvPr>
-        <p:cNvGrpSpPr/>
-        <p:nvPr/>
-      </p:nvGrpSpPr>
-      <p:grpSpPr>
-        <a:xfrm>
-          <a:off x="0" y="0"/>
-          <a:ext cx="0" cy="0"/>
-          <a:chOff x="0" y="0"/>
-          <a:chExt cx="0" cy="0"/>
-        </a:xfrm>
-      </p:grpSpPr>
-      <p:sp>
-        <p:nvSpPr>
-          <p:cNvPr id="2" name="Slide Image Placeholder 1">
-            <a:extLst>
-              <a:ext uri="{FF2B5EF4-FFF2-40B4-BE49-F238E27FC236}">
-                <a16:creationId xmlns:a16="http://schemas.microsoft.com/office/drawing/2014/main" id="{976F4C45-FA5A-F555-1F40-14DD12967C1F}"/>
-              </a:ext>
-            </a:extLst>
-          </p:cNvPr>
-          <p:cNvSpPr>
-            <a:spLocks noGrp="1" noRot="1" noChangeAspect="1"/>
-          </p:cNvSpPr>
-          <p:nvPr>
-            <p:ph type="sldImg"/>
-          </p:nvPr>
-        </p:nvSpPr>
-        <p:spPr/>
-      </p:sp>
-      <p:sp>
-        <p:nvSpPr>
-          <p:cNvPr id="3" name="Notes Placeholder 2">
-            <a:extLst>
-              <a:ext uri="{FF2B5EF4-FFF2-40B4-BE49-F238E27FC236}">
-                <a16:creationId xmlns:a16="http://schemas.microsoft.com/office/drawing/2014/main" id="{D689B0D2-2A59-6DB8-1B64-11E5BF2C8194}"/>
-              </a:ext>
-            </a:extLst>
-          </p:cNvPr>
-          <p:cNvSpPr>
-            <a:spLocks noGrp="1"/>
-          </p:cNvSpPr>
-          <p:nvPr>
-            <p:ph type="body" idx="1"/>
-          </p:nvPr>
-        </p:nvSpPr>
-        <p:spPr/>
-        <p:txBody>
-          <a:bodyPr/>
-          <a:lstStyle/>
-          <a:p>
-            <a:pPr marL="0" algn="r" defTabSz="914400" rtl="1" eaLnBrk="1" latinLnBrk="0" hangingPunct="1"/>
-            <a:r>
-              <a:rPr lang="he-IL" dirty="0"/>
-              <a:t>פה עברנו כבר לאנליזה המשנית, רציתי לבדוק באופן ספציפי אילו גנים נמחקים הכי הרבה ואילו גנים מוגברים הכי הרבה.</a:t>
-            </a:r>
-            <a:endParaRPr lang="en-US" dirty="0"/>
-          </a:p>
-          <a:p>
-            <a:pPr marL="0" algn="r" defTabSz="914400" rtl="1" eaLnBrk="1" latinLnBrk="0" hangingPunct="1"/>
-            <a:r>
-              <a:rPr lang="he-IL" dirty="0"/>
-              <a:t>לקחתי את </a:t>
-            </a:r>
-            <a:r>
-              <a:rPr lang="he-IL" dirty="0" err="1"/>
-              <a:t>הסאמפלים</a:t>
-            </a:r>
-            <a:r>
-              <a:rPr lang="he-IL" dirty="0"/>
-              <a:t> המוטנטים עם ה-</a:t>
-            </a:r>
-            <a:r>
-              <a:rPr lang="en-US" dirty="0"/>
-              <a:t>FGA</a:t>
-            </a:r>
-            <a:r>
-              <a:rPr lang="he-IL" dirty="0"/>
-              <a:t> הכי גבוה </a:t>
-            </a:r>
-            <a:r>
-              <a:rPr lang="he-IL" dirty="0" err="1"/>
-              <a:t>וסאמפלים</a:t>
-            </a:r>
-            <a:r>
-              <a:rPr lang="he-IL" dirty="0"/>
-              <a:t> </a:t>
-            </a:r>
-            <a:r>
-              <a:rPr lang="en-US" dirty="0"/>
-              <a:t>WT</a:t>
-            </a:r>
-            <a:r>
-              <a:rPr lang="he-IL" dirty="0"/>
-              <a:t> עם </a:t>
-            </a:r>
-            <a:r>
-              <a:rPr lang="en-US" dirty="0"/>
-              <a:t>FGA</a:t>
-            </a:r>
-            <a:r>
-              <a:rPr lang="he-IL" dirty="0"/>
-              <a:t> נמוך, ובדקתי מה האחוז של </a:t>
-            </a:r>
-            <a:r>
-              <a:rPr lang="he-IL" dirty="0" err="1"/>
-              <a:t>הסאמפלים</a:t>
-            </a:r>
-            <a:r>
-              <a:rPr lang="he-IL" dirty="0"/>
-              <a:t> עם המוטציות ב-</a:t>
-            </a:r>
-            <a:r>
-              <a:rPr lang="en-US" dirty="0"/>
-              <a:t>TP53</a:t>
-            </a:r>
-            <a:r>
-              <a:rPr lang="he-IL" dirty="0"/>
-              <a:t> עם </a:t>
-            </a:r>
-            <a:r>
-              <a:rPr lang="en-US" dirty="0"/>
-              <a:t>FGA</a:t>
-            </a:r>
-            <a:r>
-              <a:rPr lang="he-IL" dirty="0"/>
-              <a:t> גבוה יש להם גן מסוים שהוא מוגבר או נמחק, פחות האחוז של הגידולים עם </a:t>
-            </a:r>
-            <a:r>
-              <a:rPr lang="en-US" dirty="0"/>
-              <a:t>TP53</a:t>
-            </a:r>
-            <a:r>
-              <a:rPr lang="he-IL" dirty="0"/>
-              <a:t> שהוא </a:t>
-            </a:r>
-            <a:r>
-              <a:rPr lang="en-US" dirty="0"/>
-              <a:t>WT</a:t>
-            </a:r>
-            <a:r>
-              <a:rPr lang="he-IL" dirty="0"/>
-              <a:t> עם </a:t>
-            </a:r>
-            <a:r>
-              <a:rPr lang="en-US" dirty="0"/>
-              <a:t>FGA</a:t>
-            </a:r>
-            <a:r>
-              <a:rPr lang="he-IL" dirty="0"/>
-              <a:t> נמוך (</a:t>
-            </a:r>
-            <a:r>
-              <a:rPr lang="en-US" sz="1200" b="0" i="0" kern="1200" dirty="0" err="1">
-                <a:solidFill>
-                  <a:schemeClr val="tx1"/>
-                </a:solidFill>
-                <a:effectLst/>
-                <a:latin typeface="+mn-lt"/>
-                <a:ea typeface="+mn-ea"/>
-                <a:cs typeface="+mn-cs"/>
-              </a:rPr>
-              <a:t>fisher_exact</a:t>
-            </a:r>
-            <a:r>
-              <a:rPr lang="en-US" sz="1200" b="0" i="0" kern="1200" dirty="0">
-                <a:solidFill>
-                  <a:schemeClr val="tx1"/>
-                </a:solidFill>
-                <a:effectLst/>
-                <a:latin typeface="+mn-lt"/>
-                <a:ea typeface="+mn-ea"/>
-                <a:cs typeface="+mn-cs"/>
-              </a:rPr>
-              <a:t> method</a:t>
-            </a:r>
-            <a:r>
-              <a:rPr lang="he-IL" sz="1200" b="0" i="0" kern="1200" dirty="0">
-                <a:solidFill>
-                  <a:schemeClr val="tx1"/>
-                </a:solidFill>
-                <a:effectLst/>
-                <a:latin typeface="+mn-lt"/>
-                <a:ea typeface="+mn-ea"/>
-                <a:cs typeface="+mn-cs"/>
-              </a:rPr>
-              <a:t>)</a:t>
-            </a:r>
-            <a:endParaRPr lang="en-US" dirty="0"/>
-          </a:p>
-          <a:p>
-            <a:pPr marL="0" algn="r" defTabSz="914400" rtl="1" eaLnBrk="1" latinLnBrk="0" hangingPunct="1"/>
-            <a:r>
-              <a:rPr lang="he-IL" dirty="0"/>
-              <a:t>רואים פה בבירור שיש כאן </a:t>
-            </a:r>
-            <a:r>
-              <a:rPr lang="he-IL" dirty="0" err="1"/>
-              <a:t>אונקוגנים</a:t>
-            </a:r>
-            <a:r>
-              <a:rPr lang="he-IL" dirty="0"/>
-              <a:t> קלאסיים כמו </a:t>
-            </a:r>
-            <a:r>
-              <a:rPr lang="en-US" dirty="0"/>
-              <a:t>MYC</a:t>
-            </a:r>
-            <a:r>
-              <a:rPr lang="he-IL" dirty="0"/>
-              <a:t> לצד </a:t>
-            </a:r>
-            <a:r>
-              <a:rPr lang="he-IL" dirty="0" err="1"/>
-              <a:t>טומר</a:t>
-            </a:r>
-            <a:r>
-              <a:rPr lang="he-IL" dirty="0"/>
-              <a:t> </a:t>
-            </a:r>
-            <a:r>
-              <a:rPr lang="he-IL" dirty="0" err="1"/>
-              <a:t>סופרסורים</a:t>
-            </a:r>
-            <a:r>
-              <a:rPr lang="he-IL" dirty="0"/>
-              <a:t> שנמחקים כמו </a:t>
-            </a:r>
-            <a:r>
-              <a:rPr lang="en-US" dirty="0"/>
-              <a:t>CDKN2A</a:t>
-            </a:r>
-            <a:r>
-              <a:rPr lang="he-IL" dirty="0"/>
-              <a:t> ו-</a:t>
-            </a:r>
-            <a:r>
-              <a:rPr lang="en-US" dirty="0"/>
-              <a:t>PTEN</a:t>
-            </a:r>
-            <a:r>
-              <a:rPr lang="he-IL" dirty="0"/>
-              <a:t> או גנים שמבקרים </a:t>
-            </a:r>
-            <a:r>
-              <a:rPr lang="en-US" dirty="0"/>
-              <a:t>cell cycle</a:t>
-            </a:r>
-            <a:r>
-              <a:rPr lang="he-IL" dirty="0"/>
-              <a:t> כמו </a:t>
-            </a:r>
-            <a:r>
-              <a:rPr lang="en-US" dirty="0"/>
-              <a:t>RB1</a:t>
-            </a:r>
-            <a:r>
-              <a:rPr lang="he-IL" dirty="0"/>
-              <a:t> ו-</a:t>
-            </a:r>
-            <a:r>
-              <a:rPr lang="en-US" dirty="0"/>
-              <a:t>CDKN2B</a:t>
-            </a:r>
-            <a:r>
-              <a:rPr lang="he-IL" dirty="0"/>
-              <a:t>.</a:t>
-            </a:r>
-          </a:p>
-        </p:txBody>
-      </p:sp>
-      <p:sp>
-        <p:nvSpPr>
-          <p:cNvPr id="4" name="Slide Number Placeholder 3">
-            <a:extLst>
-              <a:ext uri="{FF2B5EF4-FFF2-40B4-BE49-F238E27FC236}">
-                <a16:creationId xmlns:a16="http://schemas.microsoft.com/office/drawing/2014/main" id="{96C1921B-77A7-152E-B244-6B2E6BCB634E}"/>
-              </a:ext>
-            </a:extLst>
-          </p:cNvPr>
-          <p:cNvSpPr>
-            <a:spLocks noGrp="1"/>
-          </p:cNvSpPr>
-          <p:nvPr>
-            <p:ph type="sldNum" sz="quarter" idx="5"/>
-          </p:nvPr>
-        </p:nvSpPr>
-        <p:spPr/>
-        <p:txBody>
-          <a:bodyPr/>
-          <a:lstStyle/>
-          <a:p>
-            <a:fld id="{7242DB82-1DC1-9846-88D7-11B539157949}" type="slidenum">
-              <a:rPr lang="en-IL" smtClean="0"/>
-              <a:t>16</a:t>
-            </a:fld>
-            <a:endParaRPr lang="en-IL"/>
-          </a:p>
-        </p:txBody>
-      </p:sp>
-    </p:spTree>
-    <p:extLst>
-      <p:ext uri="{BB962C8B-B14F-4D97-AF65-F5344CB8AC3E}">
-        <p14:creationId xmlns:p14="http://schemas.microsoft.com/office/powerpoint/2010/main" val="1591463100"/>
-      </p:ext>
-    </p:extLst>
-  </p:cSld>
-  <p:clrMapOvr>
-    <a:masterClrMapping/>
-  </p:clrMapOvr>
-</p:notes>
-</file>
-
-<file path=ppt/notesSlides/notesSlide17.xml><?xml version="1.0" encoding="utf-8"?>
-<p:notes xmlns:a="http://schemas.openxmlformats.org/drawingml/2006/main" xmlns:r="http://schemas.openxmlformats.org/officeDocument/2006/relationships" xmlns:p="http://schemas.openxmlformats.org/presentationml/2006/main">
-  <p:cSld>
-    <p:spTree>
-      <p:nvGrpSpPr>
-        <p:cNvPr id="1" name="">
-          <a:extLst>
-            <a:ext uri="{FF2B5EF4-FFF2-40B4-BE49-F238E27FC236}">
-              <a16:creationId xmlns:a16="http://schemas.microsoft.com/office/drawing/2014/main" id="{8370C2FE-6C67-3C13-FFE5-BC922B1F3332}"/>
-            </a:ext>
-          </a:extLst>
-        </p:cNvPr>
-        <p:cNvGrpSpPr/>
-        <p:nvPr/>
-      </p:nvGrpSpPr>
-      <p:grpSpPr>
-        <a:xfrm>
-          <a:off x="0" y="0"/>
-          <a:ext cx="0" cy="0"/>
-          <a:chOff x="0" y="0"/>
-          <a:chExt cx="0" cy="0"/>
-        </a:xfrm>
-      </p:grpSpPr>
-      <p:sp>
-        <p:nvSpPr>
-          <p:cNvPr id="2" name="Slide Image Placeholder 1">
-            <a:extLst>
-              <a:ext uri="{FF2B5EF4-FFF2-40B4-BE49-F238E27FC236}">
-                <a16:creationId xmlns:a16="http://schemas.microsoft.com/office/drawing/2014/main" id="{347F933F-C19D-FEBC-DFA0-E37AAAABB256}"/>
-              </a:ext>
-            </a:extLst>
-          </p:cNvPr>
-          <p:cNvSpPr>
-            <a:spLocks noGrp="1" noRot="1" noChangeAspect="1"/>
-          </p:cNvSpPr>
-          <p:nvPr>
-            <p:ph type="sldImg"/>
-          </p:nvPr>
-        </p:nvSpPr>
-        <p:spPr/>
-      </p:sp>
-      <p:sp>
-        <p:nvSpPr>
-          <p:cNvPr id="3" name="Notes Placeholder 2">
-            <a:extLst>
-              <a:ext uri="{FF2B5EF4-FFF2-40B4-BE49-F238E27FC236}">
-                <a16:creationId xmlns:a16="http://schemas.microsoft.com/office/drawing/2014/main" id="{3D0E0DF6-259D-DB4A-26CD-16F98DD8D4F9}"/>
-              </a:ext>
-            </a:extLst>
-          </p:cNvPr>
-          <p:cNvSpPr>
-            <a:spLocks noGrp="1"/>
-          </p:cNvSpPr>
-          <p:nvPr>
-            <p:ph type="body" idx="1"/>
-          </p:nvPr>
-        </p:nvSpPr>
-        <p:spPr/>
-        <p:txBody>
-          <a:bodyPr/>
-          <a:lstStyle/>
-          <a:p>
-            <a:pPr marL="0" algn="r" defTabSz="914400" rtl="1" eaLnBrk="1" latinLnBrk="0" hangingPunct="1"/>
-            <a:r>
-              <a:rPr lang="he-IL" dirty="0"/>
-              <a:t>כאן בעזרת </a:t>
-            </a:r>
-            <a:r>
-              <a:rPr lang="en-US" dirty="0" err="1"/>
-              <a:t>gseapy</a:t>
-            </a:r>
-            <a:r>
-              <a:rPr lang="he-IL" dirty="0"/>
-              <a:t> בדקתי אילו מסלולים מוגברים כתוצאה מכאוס </a:t>
-            </a:r>
-            <a:r>
-              <a:rPr lang="he-IL" dirty="0" err="1"/>
-              <a:t>גנומי</a:t>
-            </a:r>
-            <a:r>
-              <a:rPr lang="he-IL" dirty="0"/>
-              <a:t>. ובהתאמה למה שראינו בשקופית הקודמת, אנחנו רואים </a:t>
-            </a:r>
-            <a:endParaRPr lang="en-IL" dirty="0"/>
-          </a:p>
-        </p:txBody>
-      </p:sp>
-      <p:sp>
-        <p:nvSpPr>
-          <p:cNvPr id="4" name="Slide Number Placeholder 3">
-            <a:extLst>
-              <a:ext uri="{FF2B5EF4-FFF2-40B4-BE49-F238E27FC236}">
-                <a16:creationId xmlns:a16="http://schemas.microsoft.com/office/drawing/2014/main" id="{D8C7538C-0906-F16E-839B-1E04AAEC9990}"/>
-              </a:ext>
-            </a:extLst>
-          </p:cNvPr>
-          <p:cNvSpPr>
-            <a:spLocks noGrp="1"/>
-          </p:cNvSpPr>
-          <p:nvPr>
-            <p:ph type="sldNum" sz="quarter" idx="5"/>
-          </p:nvPr>
-        </p:nvSpPr>
-        <p:spPr/>
-        <p:txBody>
-          <a:bodyPr/>
-          <a:lstStyle/>
-          <a:p>
-            <a:fld id="{7242DB82-1DC1-9846-88D7-11B539157949}" type="slidenum">
-              <a:rPr lang="en-IL" smtClean="0"/>
-              <a:t>17</a:t>
-            </a:fld>
-            <a:endParaRPr lang="en-IL"/>
-          </a:p>
-        </p:txBody>
-      </p:sp>
-    </p:spTree>
-    <p:extLst>
-      <p:ext uri="{BB962C8B-B14F-4D97-AF65-F5344CB8AC3E}">
-        <p14:creationId xmlns:p14="http://schemas.microsoft.com/office/powerpoint/2010/main" val="2456906902"/>
-      </p:ext>
-    </p:extLst>
-  </p:cSld>
-  <p:clrMapOvr>
-    <a:masterClrMapping/>
-  </p:clrMapOvr>
-</p:notes>
-</file>
-
-<file path=ppt/notesSlides/notesSlide18.xml><?xml version="1.0" encoding="utf-8"?>
+<file path=ppt/notesSlides/notesSlide15.xml><?xml version="1.0" encoding="utf-8"?>
 <p:notes xmlns:a="http://schemas.openxmlformats.org/drawingml/2006/main" xmlns:r="http://schemas.openxmlformats.org/officeDocument/2006/relationships" xmlns:p="http://schemas.openxmlformats.org/presentationml/2006/main">
   <p:cSld>
     <p:spTree>
@@ -5597,7 +5025,200 @@
           <a:lstStyle/>
           <a:p>
             <a:pPr marL="0" algn="r" defTabSz="914400" rtl="1" eaLnBrk="1" latinLnBrk="0" hangingPunct="1"/>
-            <a:endParaRPr lang="en-IL" dirty="0"/>
+            <a:r>
+              <a:rPr lang="he-IL" dirty="0"/>
+              <a:t>מהאנליזה שעשיתי אפשר להסיק מספר דברים:</a:t>
+            </a:r>
+          </a:p>
+          <a:p>
+            <a:pPr marL="0" algn="r" defTabSz="914400" rtl="1" eaLnBrk="1" latinLnBrk="0" hangingPunct="1"/>
+            <a:r>
+              <a:rPr lang="he-IL" dirty="0"/>
+              <a:t>דבר ראשון זה שהאפקט הבינארי, מוטנט מול </a:t>
+            </a:r>
+            <a:r>
+              <a:rPr lang="en-US" dirty="0"/>
+              <a:t>WT</a:t>
+            </a:r>
+            <a:r>
+              <a:rPr lang="he-IL" dirty="0"/>
+              <a:t> הוא חזק הרבה יותר מהאפקט </a:t>
+            </a:r>
+            <a:r>
+              <a:rPr lang="he-IL" dirty="0" err="1"/>
+              <a:t>הסקאלרי</a:t>
+            </a:r>
+            <a:r>
+              <a:rPr lang="he-IL" dirty="0"/>
+              <a:t> של </a:t>
+            </a:r>
+            <a:r>
+              <a:rPr lang="en-US" dirty="0"/>
+              <a:t>EFS vs FGA</a:t>
+            </a:r>
+            <a:r>
+              <a:rPr lang="he-IL" dirty="0"/>
+              <a:t>. אפשר להגיד שיש לנו כאן איזשהו מודל של </a:t>
+            </a:r>
+            <a:r>
+              <a:rPr lang="en-US" dirty="0"/>
+              <a:t>Threshold</a:t>
+            </a:r>
+            <a:r>
+              <a:rPr lang="he-IL" dirty="0"/>
+              <a:t>, ברגע ש-</a:t>
+            </a:r>
+            <a:r>
+              <a:rPr lang="en-US" dirty="0"/>
+              <a:t>TP53</a:t>
+            </a:r>
+            <a:r>
+              <a:rPr lang="he-IL" dirty="0"/>
+              <a:t> משתנה איכשהו, מגיע הכאוס. ההשערה שלי היא שכשיש </a:t>
+            </a:r>
+            <a:r>
+              <a:rPr lang="en-US" dirty="0"/>
+              <a:t>GOF</a:t>
+            </a:r>
+            <a:r>
+              <a:rPr lang="he-IL" dirty="0"/>
+              <a:t> הוא כנראה מעודד חלוקה תאית ופרוליפרציה וכשיש </a:t>
+            </a:r>
+            <a:r>
+              <a:rPr lang="en-US" dirty="0"/>
+              <a:t>LOF</a:t>
+            </a:r>
+            <a:r>
+              <a:rPr lang="he-IL" dirty="0"/>
+              <a:t> אין בקרה תקינה על </a:t>
+            </a:r>
+            <a:r>
+              <a:rPr lang="he-IL" dirty="0" err="1"/>
+              <a:t>אפופטוזיס</a:t>
+            </a:r>
+            <a:r>
+              <a:rPr lang="he-IL" dirty="0"/>
+              <a:t>.</a:t>
+            </a:r>
+          </a:p>
+          <a:p>
+            <a:pPr marL="0" algn="r" defTabSz="914400" rtl="1" eaLnBrk="1" latinLnBrk="0" hangingPunct="1"/>
+            <a:r>
+              <a:rPr lang="he-IL" dirty="0"/>
+              <a:t>חוץ מזה, נראה שמדובר בהבדלים בין </a:t>
+            </a:r>
+            <a:r>
+              <a:rPr lang="he-IL" dirty="0" err="1"/>
+              <a:t>סוליד</a:t>
+            </a:r>
+            <a:r>
+              <a:rPr lang="he-IL" dirty="0"/>
+              <a:t> </a:t>
+            </a:r>
+            <a:r>
+              <a:rPr lang="he-IL" dirty="0" err="1"/>
+              <a:t>טומר</a:t>
+            </a:r>
+            <a:r>
+              <a:rPr lang="he-IL" dirty="0"/>
+              <a:t> </a:t>
+            </a:r>
+            <a:r>
+              <a:rPr lang="he-IL" dirty="0" err="1"/>
+              <a:t>לליקוויד</a:t>
+            </a:r>
+            <a:r>
+              <a:rPr lang="he-IL" dirty="0"/>
+              <a:t> </a:t>
+            </a:r>
+            <a:r>
+              <a:rPr lang="he-IL" dirty="0" err="1"/>
+              <a:t>טומורס</a:t>
+            </a:r>
+            <a:r>
+              <a:rPr lang="he-IL" dirty="0"/>
+              <a:t>. ראינו שהאפקט הכי חזק נראה </a:t>
+            </a:r>
+            <a:r>
+              <a:rPr lang="he-IL" dirty="0" err="1"/>
+              <a:t>בסוליד</a:t>
+            </a:r>
+            <a:r>
+              <a:rPr lang="he-IL" dirty="0"/>
+              <a:t> </a:t>
+            </a:r>
+            <a:r>
+              <a:rPr lang="he-IL" dirty="0" err="1"/>
+              <a:t>טומורס</a:t>
+            </a:r>
+            <a:r>
+              <a:rPr lang="he-IL" dirty="0"/>
+              <a:t>, ייתכן בגלל </a:t>
+            </a:r>
+            <a:r>
+              <a:rPr lang="he-IL" dirty="0" err="1"/>
+              <a:t>היפוקסיה</a:t>
+            </a:r>
+            <a:r>
+              <a:rPr lang="he-IL" dirty="0"/>
+              <a:t> מאחר </a:t>
+            </a:r>
+            <a:r>
+              <a:rPr lang="he-IL" dirty="0" err="1"/>
+              <a:t>וסוליד</a:t>
+            </a:r>
+            <a:r>
+              <a:rPr lang="he-IL" dirty="0"/>
+              <a:t> </a:t>
+            </a:r>
+            <a:r>
+              <a:rPr lang="he-IL" dirty="0" err="1"/>
+              <a:t>טומורס</a:t>
+            </a:r>
+            <a:r>
+              <a:rPr lang="he-IL" dirty="0"/>
+              <a:t> מוגבלים מבחינת מקום והתאים מתחלקים ביותר סטרס, משמע יותר טעויות חלוקה וכתוצאה מכך כאוס </a:t>
+            </a:r>
+            <a:r>
+              <a:rPr lang="he-IL" dirty="0" err="1"/>
+              <a:t>גנומי</a:t>
+            </a:r>
+            <a:r>
+              <a:rPr lang="he-IL" dirty="0"/>
+              <a:t>. חוץ מזה הסטרס </a:t>
+            </a:r>
+            <a:r>
+              <a:rPr lang="he-IL" dirty="0" err="1"/>
+              <a:t>בסוליד</a:t>
+            </a:r>
+            <a:r>
+              <a:rPr lang="he-IL" dirty="0"/>
+              <a:t> </a:t>
+            </a:r>
+            <a:r>
+              <a:rPr lang="he-IL" dirty="0" err="1"/>
+              <a:t>טומורס</a:t>
+            </a:r>
+            <a:r>
+              <a:rPr lang="he-IL" dirty="0"/>
+              <a:t> אולי גורם </a:t>
+            </a:r>
+            <a:r>
+              <a:rPr lang="he-IL" dirty="0" err="1"/>
+              <a:t>לסלקשן</a:t>
+            </a:r>
+            <a:r>
+              <a:rPr lang="he-IL" dirty="0"/>
+              <a:t> </a:t>
+            </a:r>
+            <a:r>
+              <a:rPr lang="he-IL" dirty="0" err="1"/>
+              <a:t>פרשר</a:t>
+            </a:r>
+            <a:r>
+              <a:rPr lang="he-IL" dirty="0"/>
+              <a:t> יותר חזק למוטציות הרסניות שמצליחות לשרוד טוב יותר ולהתרבות.</a:t>
+            </a:r>
           </a:p>
         </p:txBody>
       </p:sp>
@@ -5624,7 +5245,7 @@
           <a:p>
             <a:fld id="{7242DB82-1DC1-9846-88D7-11B539157949}" type="slidenum">
               <a:rPr lang="en-IL" smtClean="0"/>
-              <a:t>18</a:t>
+              <a:t>15</a:t>
             </a:fld>
             <a:endParaRPr lang="en-IL"/>
           </a:p>
@@ -5643,7 +5264,7 @@
 </p:notes>
 </file>
 
-<file path=ppt/notesSlides/notesSlide19.xml><?xml version="1.0" encoding="utf-8"?>
+<file path=ppt/notesSlides/notesSlide16.xml><?xml version="1.0" encoding="utf-8"?>
 <p:notes xmlns:a="http://schemas.openxmlformats.org/drawingml/2006/main" xmlns:r="http://schemas.openxmlformats.org/officeDocument/2006/relationships" xmlns:p="http://schemas.openxmlformats.org/presentationml/2006/main">
   <p:cSld>
     <p:spTree>
@@ -5705,6 +5326,27 @@
           <a:bodyPr/>
           <a:lstStyle/>
           <a:p>
+            <a:pPr marL="0" algn="r" defTabSz="914400" rtl="1" eaLnBrk="1" latinLnBrk="0" hangingPunct="1"/>
+            <a:r>
+              <a:rPr lang="he-IL" dirty="0"/>
+              <a:t>חוץ מזה ראינו </a:t>
+            </a:r>
+            <a:r>
+              <a:rPr lang="he-IL" dirty="0" err="1"/>
+              <a:t>שהוטספוטס</a:t>
+            </a:r>
+            <a:r>
+              <a:rPr lang="he-IL" dirty="0"/>
+              <a:t> לא בהכרח יותר הרסניות, אלא האזור שלהן בגנום הוא יותר </a:t>
+            </a:r>
+            <a:r>
+              <a:rPr lang="he-IL" dirty="0" err="1"/>
+              <a:t>מוטבילי</a:t>
+            </a:r>
+            <a:r>
+              <a:rPr lang="he-IL" dirty="0"/>
+              <a:t>. </a:t>
+            </a:r>
             <a:endParaRPr lang="en-IL" dirty="0"/>
           </a:p>
         </p:txBody>
@@ -5732,7 +5374,7 @@
           <a:p>
             <a:fld id="{7242DB82-1DC1-9846-88D7-11B539157949}" type="slidenum">
               <a:rPr lang="en-IL" smtClean="0"/>
-              <a:t>19</a:t>
+              <a:t>16</a:t>
             </a:fld>
             <a:endParaRPr lang="en-IL"/>
           </a:p>
@@ -5742,6 +5384,505 @@
     <p:extLst>
       <p:ext uri="{BB962C8B-B14F-4D97-AF65-F5344CB8AC3E}">
         <p14:creationId xmlns:p14="http://schemas.microsoft.com/office/powerpoint/2010/main" val="1775813623"/>
+      </p:ext>
+    </p:extLst>
+  </p:cSld>
+  <p:clrMapOvr>
+    <a:masterClrMapping/>
+  </p:clrMapOvr>
+</p:notes>
+</file>
+
+<file path=ppt/notesSlides/notesSlide17.xml><?xml version="1.0" encoding="utf-8"?>
+<p:notes xmlns:a="http://schemas.openxmlformats.org/drawingml/2006/main" xmlns:r="http://schemas.openxmlformats.org/officeDocument/2006/relationships" xmlns:p="http://schemas.openxmlformats.org/presentationml/2006/main">
+  <p:cSld>
+    <p:spTree>
+      <p:nvGrpSpPr>
+        <p:cNvPr id="1" name="">
+          <a:extLst>
+            <a:ext uri="{FF2B5EF4-FFF2-40B4-BE49-F238E27FC236}">
+              <a16:creationId xmlns:a16="http://schemas.microsoft.com/office/drawing/2014/main" id="{236BD74F-AEBA-8953-5957-21DA5B5E5A7D}"/>
+            </a:ext>
+          </a:extLst>
+        </p:cNvPr>
+        <p:cNvGrpSpPr/>
+        <p:nvPr/>
+      </p:nvGrpSpPr>
+      <p:grpSpPr>
+        <a:xfrm>
+          <a:off x="0" y="0"/>
+          <a:ext cx="0" cy="0"/>
+          <a:chOff x="0" y="0"/>
+          <a:chExt cx="0" cy="0"/>
+        </a:xfrm>
+      </p:grpSpPr>
+      <p:sp>
+        <p:nvSpPr>
+          <p:cNvPr id="2" name="Slide Image Placeholder 1">
+            <a:extLst>
+              <a:ext uri="{FF2B5EF4-FFF2-40B4-BE49-F238E27FC236}">
+                <a16:creationId xmlns:a16="http://schemas.microsoft.com/office/drawing/2014/main" id="{F181FBE0-C4F8-56CC-49FE-4D80F75B166C}"/>
+              </a:ext>
+            </a:extLst>
+          </p:cNvPr>
+          <p:cNvSpPr>
+            <a:spLocks noGrp="1" noRot="1" noChangeAspect="1"/>
+          </p:cNvSpPr>
+          <p:nvPr>
+            <p:ph type="sldImg"/>
+          </p:nvPr>
+        </p:nvSpPr>
+        <p:spPr/>
+      </p:sp>
+      <p:sp>
+        <p:nvSpPr>
+          <p:cNvPr id="3" name="Notes Placeholder 2">
+            <a:extLst>
+              <a:ext uri="{FF2B5EF4-FFF2-40B4-BE49-F238E27FC236}">
+                <a16:creationId xmlns:a16="http://schemas.microsoft.com/office/drawing/2014/main" id="{DBD1C479-4B61-32ED-2058-C6E2381053B8}"/>
+              </a:ext>
+            </a:extLst>
+          </p:cNvPr>
+          <p:cNvSpPr>
+            <a:spLocks noGrp="1"/>
+          </p:cNvSpPr>
+          <p:nvPr>
+            <p:ph type="body" idx="1"/>
+          </p:nvPr>
+        </p:nvSpPr>
+        <p:spPr/>
+        <p:txBody>
+          <a:bodyPr/>
+          <a:lstStyle/>
+          <a:p>
+            <a:pPr marL="0" algn="r" defTabSz="914400" rtl="1" eaLnBrk="1" latinLnBrk="0" hangingPunct="1"/>
+            <a:r>
+              <a:rPr lang="he-IL" dirty="0"/>
+              <a:t>אז בסה״כ הצלחתי לענות על שלוש השאלות, אבל הייתי שמחה לראות את סוגי המוטציות במספרים דומים תחת ניסוי אחד, או לבדוק את ה-</a:t>
+            </a:r>
+            <a:r>
+              <a:rPr lang="en-US" dirty="0"/>
+              <a:t>EFS</a:t>
+            </a:r>
+            <a:r>
+              <a:rPr lang="he-IL" dirty="0"/>
+              <a:t> לא רק בסוג סרטן אחד (סרטן ריאה) כמו </a:t>
+            </a:r>
+            <a:r>
+              <a:rPr lang="he-IL" dirty="0" err="1"/>
+              <a:t>שג׳יאנקומלי</a:t>
+            </a:r>
+            <a:r>
+              <a:rPr lang="he-IL" dirty="0"/>
+              <a:t> עשו, אלא בעוד סרטנים ולכל סרטן לבצע את האנליזה שלו, מאחר ו-</a:t>
+            </a:r>
+            <a:r>
+              <a:rPr lang="en-US" dirty="0"/>
+              <a:t>p53</a:t>
+            </a:r>
+            <a:r>
+              <a:rPr lang="he-IL" dirty="0"/>
+              <a:t> יכול לקבל </a:t>
+            </a:r>
+            <a:r>
+              <a:rPr lang="en-US" dirty="0"/>
+              <a:t>EFS</a:t>
+            </a:r>
+            <a:r>
+              <a:rPr lang="he-IL" dirty="0"/>
+              <a:t> שונים ככל הנראה בין סוגי סרטן, כמו שראינו את ההבדלים בין </a:t>
+            </a:r>
+            <a:r>
+              <a:rPr lang="en-US" dirty="0"/>
+              <a:t>Solid</a:t>
+            </a:r>
+            <a:r>
+              <a:rPr lang="he-IL" dirty="0"/>
+              <a:t> ל-</a:t>
+            </a:r>
+            <a:r>
+              <a:rPr lang="en-US" dirty="0"/>
+              <a:t>Liquid</a:t>
+            </a:r>
+            <a:r>
+              <a:rPr lang="he-IL" dirty="0"/>
+              <a:t> </a:t>
+            </a:r>
+            <a:r>
+              <a:rPr lang="he-IL" dirty="0" err="1"/>
+              <a:t>טומורס</a:t>
+            </a:r>
+            <a:r>
+              <a:rPr lang="he-IL" dirty="0"/>
+              <a:t>.</a:t>
+            </a:r>
+          </a:p>
+          <a:p>
+            <a:pPr marL="0" algn="r" defTabSz="914400" rtl="1" eaLnBrk="1" latinLnBrk="0" hangingPunct="1"/>
+            <a:r>
+              <a:rPr lang="he-IL" dirty="0"/>
+              <a:t>עוד דבר שהיה נחמד לעשות, זה לבדוק </a:t>
+            </a:r>
+            <a:r>
+              <a:rPr lang="en-US" dirty="0"/>
+              <a:t>region breaks</a:t>
+            </a:r>
+            <a:r>
+              <a:rPr lang="he-IL" dirty="0"/>
+              <a:t> ספציפיים ולהיכנס יותר לעומק שלהם מאשר להשתמש בפרמטר </a:t>
+            </a:r>
+            <a:r>
+              <a:rPr lang="en-US" dirty="0"/>
+              <a:t>bulky</a:t>
+            </a:r>
+            <a:r>
+              <a:rPr lang="he-IL" dirty="0"/>
+              <a:t> אחד (</a:t>
+            </a:r>
+            <a:r>
+              <a:rPr lang="en-US" dirty="0"/>
+              <a:t>FGA</a:t>
+            </a:r>
+            <a:r>
+              <a:rPr lang="he-IL" dirty="0"/>
+              <a:t>) כדי לבדוק טרנדים ספציפיים יותר מאשר התנהגויות גלובליות שלא רגישות לכל המקרים.</a:t>
+            </a:r>
+            <a:endParaRPr lang="en-IL" dirty="0"/>
+          </a:p>
+        </p:txBody>
+      </p:sp>
+      <p:sp>
+        <p:nvSpPr>
+          <p:cNvPr id="4" name="Slide Number Placeholder 3">
+            <a:extLst>
+              <a:ext uri="{FF2B5EF4-FFF2-40B4-BE49-F238E27FC236}">
+                <a16:creationId xmlns:a16="http://schemas.microsoft.com/office/drawing/2014/main" id="{C540340E-3F34-C6D4-E1EC-5C655231E989}"/>
+              </a:ext>
+            </a:extLst>
+          </p:cNvPr>
+          <p:cNvSpPr>
+            <a:spLocks noGrp="1"/>
+          </p:cNvSpPr>
+          <p:nvPr>
+            <p:ph type="sldNum" sz="quarter" idx="5"/>
+          </p:nvPr>
+        </p:nvSpPr>
+        <p:spPr/>
+        <p:txBody>
+          <a:bodyPr/>
+          <a:lstStyle/>
+          <a:p>
+            <a:fld id="{7242DB82-1DC1-9846-88D7-11B539157949}" type="slidenum">
+              <a:rPr lang="en-IL" smtClean="0"/>
+              <a:t>17</a:t>
+            </a:fld>
+            <a:endParaRPr lang="en-IL"/>
+          </a:p>
+        </p:txBody>
+      </p:sp>
+    </p:spTree>
+    <p:extLst>
+      <p:ext uri="{BB962C8B-B14F-4D97-AF65-F5344CB8AC3E}">
+        <p14:creationId xmlns:p14="http://schemas.microsoft.com/office/powerpoint/2010/main" val="553818819"/>
+      </p:ext>
+    </p:extLst>
+  </p:cSld>
+  <p:clrMapOvr>
+    <a:masterClrMapping/>
+  </p:clrMapOvr>
+</p:notes>
+</file>
+
+<file path=ppt/notesSlides/notesSlide18.xml><?xml version="1.0" encoding="utf-8"?>
+<p:notes xmlns:a="http://schemas.openxmlformats.org/drawingml/2006/main" xmlns:r="http://schemas.openxmlformats.org/officeDocument/2006/relationships" xmlns:p="http://schemas.openxmlformats.org/presentationml/2006/main">
+  <p:cSld>
+    <p:spTree>
+      <p:nvGrpSpPr>
+        <p:cNvPr id="1" name="">
+          <a:extLst>
+            <a:ext uri="{FF2B5EF4-FFF2-40B4-BE49-F238E27FC236}">
+              <a16:creationId xmlns:a16="http://schemas.microsoft.com/office/drawing/2014/main" id="{E4ACCE8D-9330-B3DB-5B69-D303099550DD}"/>
+            </a:ext>
+          </a:extLst>
+        </p:cNvPr>
+        <p:cNvGrpSpPr/>
+        <p:nvPr/>
+      </p:nvGrpSpPr>
+      <p:grpSpPr>
+        <a:xfrm>
+          <a:off x="0" y="0"/>
+          <a:ext cx="0" cy="0"/>
+          <a:chOff x="0" y="0"/>
+          <a:chExt cx="0" cy="0"/>
+        </a:xfrm>
+      </p:grpSpPr>
+      <p:sp>
+        <p:nvSpPr>
+          <p:cNvPr id="2" name="Slide Image Placeholder 1">
+            <a:extLst>
+              <a:ext uri="{FF2B5EF4-FFF2-40B4-BE49-F238E27FC236}">
+                <a16:creationId xmlns:a16="http://schemas.microsoft.com/office/drawing/2014/main" id="{EC3B9118-304F-2BE6-8422-0DD687862C2D}"/>
+              </a:ext>
+            </a:extLst>
+          </p:cNvPr>
+          <p:cNvSpPr>
+            <a:spLocks noGrp="1" noRot="1" noChangeAspect="1"/>
+          </p:cNvSpPr>
+          <p:nvPr>
+            <p:ph type="sldImg"/>
+          </p:nvPr>
+        </p:nvSpPr>
+        <p:spPr/>
+      </p:sp>
+      <p:sp>
+        <p:nvSpPr>
+          <p:cNvPr id="3" name="Notes Placeholder 2">
+            <a:extLst>
+              <a:ext uri="{FF2B5EF4-FFF2-40B4-BE49-F238E27FC236}">
+                <a16:creationId xmlns:a16="http://schemas.microsoft.com/office/drawing/2014/main" id="{3797C7D5-11A5-3A69-7067-279DCBDAB834}"/>
+              </a:ext>
+            </a:extLst>
+          </p:cNvPr>
+          <p:cNvSpPr>
+            <a:spLocks noGrp="1"/>
+          </p:cNvSpPr>
+          <p:nvPr>
+            <p:ph type="body" idx="1"/>
+          </p:nvPr>
+        </p:nvSpPr>
+        <p:spPr/>
+        <p:txBody>
+          <a:bodyPr/>
+          <a:lstStyle/>
+          <a:p>
+            <a:r>
+              <a:rPr lang="en-US" sz="1200" b="0" i="0" kern="1200" dirty="0">
+                <a:solidFill>
+                  <a:schemeClr val="tx1"/>
+                </a:solidFill>
+                <a:effectLst/>
+                <a:latin typeface="+mn-lt"/>
+                <a:ea typeface="+mn-ea"/>
+                <a:cs typeface="+mn-cs"/>
+              </a:rPr>
+              <a:t>pandas, </a:t>
+            </a:r>
+            <a:r>
+              <a:rPr lang="en-US" sz="1200" b="0" i="0" kern="1200" dirty="0" err="1">
+                <a:solidFill>
+                  <a:schemeClr val="tx1"/>
+                </a:solidFill>
+                <a:effectLst/>
+                <a:latin typeface="+mn-lt"/>
+                <a:ea typeface="+mn-ea"/>
+                <a:cs typeface="+mn-cs"/>
+              </a:rPr>
+              <a:t>numpy</a:t>
+            </a:r>
+            <a:r>
+              <a:rPr lang="he-IL" sz="1200" b="0" i="0" kern="1200" dirty="0">
+                <a:solidFill>
+                  <a:schemeClr val="tx1"/>
+                </a:solidFill>
+                <a:effectLst/>
+                <a:latin typeface="+mn-lt"/>
+                <a:ea typeface="+mn-ea"/>
+                <a:cs typeface="+mn-cs"/>
+              </a:rPr>
+              <a:t>:</a:t>
+            </a:r>
+            <a:r>
+              <a:rPr lang="en-US" sz="1200" b="0" i="0" kern="1200" dirty="0">
+                <a:solidFill>
+                  <a:schemeClr val="tx1"/>
+                </a:solidFill>
+                <a:effectLst/>
+                <a:latin typeface="+mn-lt"/>
+                <a:ea typeface="+mn-ea"/>
+                <a:cs typeface="+mn-cs"/>
+              </a:rPr>
+              <a:t> data wrangling</a:t>
+            </a:r>
+          </a:p>
+          <a:p>
+            <a:r>
+              <a:rPr lang="en-US" sz="1200" b="0" i="0" kern="1200" dirty="0" err="1">
+                <a:solidFill>
+                  <a:schemeClr val="tx1"/>
+                </a:solidFill>
+                <a:effectLst/>
+                <a:latin typeface="+mn-lt"/>
+                <a:ea typeface="+mn-ea"/>
+                <a:cs typeface="+mn-cs"/>
+              </a:rPr>
+              <a:t>scipy.stats</a:t>
+            </a:r>
+            <a:r>
+              <a:rPr lang="he-IL" sz="1200" b="0" i="0" kern="1200" dirty="0">
+                <a:solidFill>
+                  <a:schemeClr val="tx1"/>
+                </a:solidFill>
+                <a:effectLst/>
+                <a:latin typeface="+mn-lt"/>
+                <a:ea typeface="+mn-ea"/>
+                <a:cs typeface="+mn-cs"/>
+              </a:rPr>
+              <a:t>:</a:t>
+            </a:r>
+            <a:r>
+              <a:rPr lang="en-US" sz="1200" b="0" i="0" kern="1200" dirty="0">
+                <a:solidFill>
+                  <a:schemeClr val="tx1"/>
+                </a:solidFill>
+                <a:effectLst/>
+                <a:latin typeface="+mn-lt"/>
+                <a:ea typeface="+mn-ea"/>
+                <a:cs typeface="+mn-cs"/>
+              </a:rPr>
+              <a:t> statistical tests</a:t>
+            </a:r>
+          </a:p>
+          <a:p>
+            <a:r>
+              <a:rPr lang="en-US" sz="1200" b="0" i="0" kern="1200" dirty="0" err="1">
+                <a:solidFill>
+                  <a:schemeClr val="tx1"/>
+                </a:solidFill>
+                <a:effectLst/>
+                <a:latin typeface="+mn-lt"/>
+                <a:ea typeface="+mn-ea"/>
+                <a:cs typeface="+mn-cs"/>
+              </a:rPr>
+              <a:t>Statsmodels</a:t>
+            </a:r>
+            <a:r>
+              <a:rPr lang="he-IL" sz="1200" b="0" i="0" kern="1200" dirty="0">
+                <a:solidFill>
+                  <a:schemeClr val="tx1"/>
+                </a:solidFill>
+                <a:effectLst/>
+                <a:latin typeface="+mn-lt"/>
+                <a:ea typeface="+mn-ea"/>
+                <a:cs typeface="+mn-cs"/>
+              </a:rPr>
+              <a:t>:</a:t>
+            </a:r>
+            <a:r>
+              <a:rPr lang="en-US" sz="1200" b="0" i="0" kern="1200" dirty="0">
+                <a:solidFill>
+                  <a:schemeClr val="tx1"/>
+                </a:solidFill>
+                <a:effectLst/>
+                <a:latin typeface="+mn-lt"/>
+                <a:ea typeface="+mn-ea"/>
+                <a:cs typeface="+mn-cs"/>
+              </a:rPr>
+              <a:t> BH FDR correction (</a:t>
+            </a:r>
+            <a:r>
+              <a:rPr lang="en-US" sz="1200" b="0" i="0" kern="1200" dirty="0" err="1">
+                <a:solidFill>
+                  <a:schemeClr val="tx1"/>
+                </a:solidFill>
+                <a:effectLst/>
+                <a:latin typeface="+mn-lt"/>
+                <a:ea typeface="+mn-ea"/>
+                <a:cs typeface="+mn-cs"/>
+              </a:rPr>
+              <a:t>multipletests</a:t>
+            </a:r>
+            <a:r>
+              <a:rPr lang="en-US" sz="1200" b="0" i="0" kern="1200" dirty="0">
+                <a:solidFill>
+                  <a:schemeClr val="tx1"/>
+                </a:solidFill>
+                <a:effectLst/>
+                <a:latin typeface="+mn-lt"/>
+                <a:ea typeface="+mn-ea"/>
+                <a:cs typeface="+mn-cs"/>
+              </a:rPr>
+              <a:t>)</a:t>
+            </a:r>
+          </a:p>
+          <a:p>
+            <a:r>
+              <a:rPr lang="en-US" sz="1200" b="0" i="0" kern="1200" dirty="0">
+                <a:solidFill>
+                  <a:schemeClr val="tx1"/>
+                </a:solidFill>
+                <a:effectLst/>
+                <a:latin typeface="+mn-lt"/>
+                <a:ea typeface="+mn-ea"/>
+                <a:cs typeface="+mn-cs"/>
+              </a:rPr>
+              <a:t>matplotlib, seaborn</a:t>
+            </a:r>
+            <a:r>
+              <a:rPr lang="he-IL" sz="1200" b="0" i="0" kern="1200" dirty="0">
+                <a:solidFill>
+                  <a:schemeClr val="tx1"/>
+                </a:solidFill>
+                <a:effectLst/>
+                <a:latin typeface="+mn-lt"/>
+                <a:ea typeface="+mn-ea"/>
+                <a:cs typeface="+mn-cs"/>
+              </a:rPr>
+              <a:t>:</a:t>
+            </a:r>
+            <a:r>
+              <a:rPr lang="en-US" sz="1200" b="0" i="0" kern="1200" dirty="0">
+                <a:solidFill>
+                  <a:schemeClr val="tx1"/>
+                </a:solidFill>
+                <a:effectLst/>
+                <a:latin typeface="+mn-lt"/>
+                <a:ea typeface="+mn-ea"/>
+                <a:cs typeface="+mn-cs"/>
+              </a:rPr>
+              <a:t> visualization</a:t>
+            </a:r>
+          </a:p>
+          <a:p>
+            <a:br>
+              <a:rPr lang="en-US" dirty="0"/>
+            </a:br>
+            <a:endParaRPr lang="he-IL" dirty="0"/>
+          </a:p>
+        </p:txBody>
+      </p:sp>
+      <p:sp>
+        <p:nvSpPr>
+          <p:cNvPr id="4" name="Slide Number Placeholder 3">
+            <a:extLst>
+              <a:ext uri="{FF2B5EF4-FFF2-40B4-BE49-F238E27FC236}">
+                <a16:creationId xmlns:a16="http://schemas.microsoft.com/office/drawing/2014/main" id="{D056188F-620B-449A-B931-04C627F70D9A}"/>
+              </a:ext>
+            </a:extLst>
+          </p:cNvPr>
+          <p:cNvSpPr>
+            <a:spLocks noGrp="1"/>
+          </p:cNvSpPr>
+          <p:nvPr>
+            <p:ph type="sldNum" sz="quarter" idx="5"/>
+          </p:nvPr>
+        </p:nvSpPr>
+        <p:spPr/>
+        <p:txBody>
+          <a:bodyPr/>
+          <a:lstStyle/>
+          <a:p>
+            <a:fld id="{7242DB82-1DC1-9846-88D7-11B539157949}" type="slidenum">
+              <a:rPr lang="en-IL" smtClean="0"/>
+              <a:t>18</a:t>
+            </a:fld>
+            <a:endParaRPr lang="en-IL"/>
+          </a:p>
+        </p:txBody>
+      </p:sp>
+    </p:spTree>
+    <p:extLst>
+      <p:ext uri="{BB962C8B-B14F-4D97-AF65-F5344CB8AC3E}">
+        <p14:creationId xmlns:p14="http://schemas.microsoft.com/office/powerpoint/2010/main" val="1189219837"/>
       </p:ext>
     </p:extLst>
   </p:cSld>
@@ -5997,331 +6138,6 @@
     <p:extLst>
       <p:ext uri="{BB962C8B-B14F-4D97-AF65-F5344CB8AC3E}">
         <p14:creationId xmlns:p14="http://schemas.microsoft.com/office/powerpoint/2010/main" val="230172384"/>
-      </p:ext>
-    </p:extLst>
-  </p:cSld>
-  <p:clrMapOvr>
-    <a:masterClrMapping/>
-  </p:clrMapOvr>
-</p:notes>
-</file>
-
-<file path=ppt/notesSlides/notesSlide20.xml><?xml version="1.0" encoding="utf-8"?>
-<p:notes xmlns:a="http://schemas.openxmlformats.org/drawingml/2006/main" xmlns:r="http://schemas.openxmlformats.org/officeDocument/2006/relationships" xmlns:p="http://schemas.openxmlformats.org/presentationml/2006/main">
-  <p:cSld>
-    <p:spTree>
-      <p:nvGrpSpPr>
-        <p:cNvPr id="1" name="">
-          <a:extLst>
-            <a:ext uri="{FF2B5EF4-FFF2-40B4-BE49-F238E27FC236}">
-              <a16:creationId xmlns:a16="http://schemas.microsoft.com/office/drawing/2014/main" id="{236BD74F-AEBA-8953-5957-21DA5B5E5A7D}"/>
-            </a:ext>
-          </a:extLst>
-        </p:cNvPr>
-        <p:cNvGrpSpPr/>
-        <p:nvPr/>
-      </p:nvGrpSpPr>
-      <p:grpSpPr>
-        <a:xfrm>
-          <a:off x="0" y="0"/>
-          <a:ext cx="0" cy="0"/>
-          <a:chOff x="0" y="0"/>
-          <a:chExt cx="0" cy="0"/>
-        </a:xfrm>
-      </p:grpSpPr>
-      <p:sp>
-        <p:nvSpPr>
-          <p:cNvPr id="2" name="Slide Image Placeholder 1">
-            <a:extLst>
-              <a:ext uri="{FF2B5EF4-FFF2-40B4-BE49-F238E27FC236}">
-                <a16:creationId xmlns:a16="http://schemas.microsoft.com/office/drawing/2014/main" id="{F181FBE0-C4F8-56CC-49FE-4D80F75B166C}"/>
-              </a:ext>
-            </a:extLst>
-          </p:cNvPr>
-          <p:cNvSpPr>
-            <a:spLocks noGrp="1" noRot="1" noChangeAspect="1"/>
-          </p:cNvSpPr>
-          <p:nvPr>
-            <p:ph type="sldImg"/>
-          </p:nvPr>
-        </p:nvSpPr>
-        <p:spPr/>
-      </p:sp>
-      <p:sp>
-        <p:nvSpPr>
-          <p:cNvPr id="3" name="Notes Placeholder 2">
-            <a:extLst>
-              <a:ext uri="{FF2B5EF4-FFF2-40B4-BE49-F238E27FC236}">
-                <a16:creationId xmlns:a16="http://schemas.microsoft.com/office/drawing/2014/main" id="{DBD1C479-4B61-32ED-2058-C6E2381053B8}"/>
-              </a:ext>
-            </a:extLst>
-          </p:cNvPr>
-          <p:cNvSpPr>
-            <a:spLocks noGrp="1"/>
-          </p:cNvSpPr>
-          <p:nvPr>
-            <p:ph type="body" idx="1"/>
-          </p:nvPr>
-        </p:nvSpPr>
-        <p:spPr/>
-        <p:txBody>
-          <a:bodyPr/>
-          <a:lstStyle/>
-          <a:p>
-            <a:endParaRPr lang="en-IL" dirty="0"/>
-          </a:p>
-        </p:txBody>
-      </p:sp>
-      <p:sp>
-        <p:nvSpPr>
-          <p:cNvPr id="4" name="Slide Number Placeholder 3">
-            <a:extLst>
-              <a:ext uri="{FF2B5EF4-FFF2-40B4-BE49-F238E27FC236}">
-                <a16:creationId xmlns:a16="http://schemas.microsoft.com/office/drawing/2014/main" id="{C540340E-3F34-C6D4-E1EC-5C655231E989}"/>
-              </a:ext>
-            </a:extLst>
-          </p:cNvPr>
-          <p:cNvSpPr>
-            <a:spLocks noGrp="1"/>
-          </p:cNvSpPr>
-          <p:nvPr>
-            <p:ph type="sldNum" sz="quarter" idx="5"/>
-          </p:nvPr>
-        </p:nvSpPr>
-        <p:spPr/>
-        <p:txBody>
-          <a:bodyPr/>
-          <a:lstStyle/>
-          <a:p>
-            <a:fld id="{7242DB82-1DC1-9846-88D7-11B539157949}" type="slidenum">
-              <a:rPr lang="en-IL" smtClean="0"/>
-              <a:t>20</a:t>
-            </a:fld>
-            <a:endParaRPr lang="en-IL"/>
-          </a:p>
-        </p:txBody>
-      </p:sp>
-    </p:spTree>
-    <p:extLst>
-      <p:ext uri="{BB962C8B-B14F-4D97-AF65-F5344CB8AC3E}">
-        <p14:creationId xmlns:p14="http://schemas.microsoft.com/office/powerpoint/2010/main" val="553818819"/>
-      </p:ext>
-    </p:extLst>
-  </p:cSld>
-  <p:clrMapOvr>
-    <a:masterClrMapping/>
-  </p:clrMapOvr>
-</p:notes>
-</file>
-
-<file path=ppt/notesSlides/notesSlide21.xml><?xml version="1.0" encoding="utf-8"?>
-<p:notes xmlns:a="http://schemas.openxmlformats.org/drawingml/2006/main" xmlns:r="http://schemas.openxmlformats.org/officeDocument/2006/relationships" xmlns:p="http://schemas.openxmlformats.org/presentationml/2006/main">
-  <p:cSld>
-    <p:spTree>
-      <p:nvGrpSpPr>
-        <p:cNvPr id="1" name="">
-          <a:extLst>
-            <a:ext uri="{FF2B5EF4-FFF2-40B4-BE49-F238E27FC236}">
-              <a16:creationId xmlns:a16="http://schemas.microsoft.com/office/drawing/2014/main" id="{C893C9C7-0A84-19E0-282D-872CF81B60D7}"/>
-            </a:ext>
-          </a:extLst>
-        </p:cNvPr>
-        <p:cNvGrpSpPr/>
-        <p:nvPr/>
-      </p:nvGrpSpPr>
-      <p:grpSpPr>
-        <a:xfrm>
-          <a:off x="0" y="0"/>
-          <a:ext cx="0" cy="0"/>
-          <a:chOff x="0" y="0"/>
-          <a:chExt cx="0" cy="0"/>
-        </a:xfrm>
-      </p:grpSpPr>
-      <p:sp>
-        <p:nvSpPr>
-          <p:cNvPr id="2" name="Slide Image Placeholder 1">
-            <a:extLst>
-              <a:ext uri="{FF2B5EF4-FFF2-40B4-BE49-F238E27FC236}">
-                <a16:creationId xmlns:a16="http://schemas.microsoft.com/office/drawing/2014/main" id="{8A07D94A-7328-5289-D8F9-F0AD4D9AD1B6}"/>
-              </a:ext>
-            </a:extLst>
-          </p:cNvPr>
-          <p:cNvSpPr>
-            <a:spLocks noGrp="1" noRot="1" noChangeAspect="1"/>
-          </p:cNvSpPr>
-          <p:nvPr>
-            <p:ph type="sldImg"/>
-          </p:nvPr>
-        </p:nvSpPr>
-        <p:spPr/>
-      </p:sp>
-      <p:sp>
-        <p:nvSpPr>
-          <p:cNvPr id="3" name="Notes Placeholder 2">
-            <a:extLst>
-              <a:ext uri="{FF2B5EF4-FFF2-40B4-BE49-F238E27FC236}">
-                <a16:creationId xmlns:a16="http://schemas.microsoft.com/office/drawing/2014/main" id="{83E45201-1E61-EE11-C528-A54632CD2F0B}"/>
-              </a:ext>
-            </a:extLst>
-          </p:cNvPr>
-          <p:cNvSpPr>
-            <a:spLocks noGrp="1"/>
-          </p:cNvSpPr>
-          <p:nvPr>
-            <p:ph type="body" idx="1"/>
-          </p:nvPr>
-        </p:nvSpPr>
-        <p:spPr/>
-        <p:txBody>
-          <a:bodyPr/>
-          <a:lstStyle/>
-          <a:p>
-            <a:endParaRPr lang="en-IL" dirty="0"/>
-          </a:p>
-        </p:txBody>
-      </p:sp>
-      <p:sp>
-        <p:nvSpPr>
-          <p:cNvPr id="4" name="Slide Number Placeholder 3">
-            <a:extLst>
-              <a:ext uri="{FF2B5EF4-FFF2-40B4-BE49-F238E27FC236}">
-                <a16:creationId xmlns:a16="http://schemas.microsoft.com/office/drawing/2014/main" id="{2EB256CB-51C4-A26F-AE16-ABE7BD5E5E3B}"/>
-              </a:ext>
-            </a:extLst>
-          </p:cNvPr>
-          <p:cNvSpPr>
-            <a:spLocks noGrp="1"/>
-          </p:cNvSpPr>
-          <p:nvPr>
-            <p:ph type="sldNum" sz="quarter" idx="5"/>
-          </p:nvPr>
-        </p:nvSpPr>
-        <p:spPr/>
-        <p:txBody>
-          <a:bodyPr/>
-          <a:lstStyle/>
-          <a:p>
-            <a:fld id="{7242DB82-1DC1-9846-88D7-11B539157949}" type="slidenum">
-              <a:rPr lang="en-IL" smtClean="0"/>
-              <a:t>21</a:t>
-            </a:fld>
-            <a:endParaRPr lang="en-IL"/>
-          </a:p>
-        </p:txBody>
-      </p:sp>
-    </p:spTree>
-    <p:extLst>
-      <p:ext uri="{BB962C8B-B14F-4D97-AF65-F5344CB8AC3E}">
-        <p14:creationId xmlns:p14="http://schemas.microsoft.com/office/powerpoint/2010/main" val="941794388"/>
-      </p:ext>
-    </p:extLst>
-  </p:cSld>
-  <p:clrMapOvr>
-    <a:masterClrMapping/>
-  </p:clrMapOvr>
-</p:notes>
-</file>
-
-<file path=ppt/notesSlides/notesSlide22.xml><?xml version="1.0" encoding="utf-8"?>
-<p:notes xmlns:a="http://schemas.openxmlformats.org/drawingml/2006/main" xmlns:r="http://schemas.openxmlformats.org/officeDocument/2006/relationships" xmlns:p="http://schemas.openxmlformats.org/presentationml/2006/main">
-  <p:cSld>
-    <p:spTree>
-      <p:nvGrpSpPr>
-        <p:cNvPr id="1" name="">
-          <a:extLst>
-            <a:ext uri="{FF2B5EF4-FFF2-40B4-BE49-F238E27FC236}">
-              <a16:creationId xmlns:a16="http://schemas.microsoft.com/office/drawing/2014/main" id="{E4ACCE8D-9330-B3DB-5B69-D303099550DD}"/>
-            </a:ext>
-          </a:extLst>
-        </p:cNvPr>
-        <p:cNvGrpSpPr/>
-        <p:nvPr/>
-      </p:nvGrpSpPr>
-      <p:grpSpPr>
-        <a:xfrm>
-          <a:off x="0" y="0"/>
-          <a:ext cx="0" cy="0"/>
-          <a:chOff x="0" y="0"/>
-          <a:chExt cx="0" cy="0"/>
-        </a:xfrm>
-      </p:grpSpPr>
-      <p:sp>
-        <p:nvSpPr>
-          <p:cNvPr id="2" name="Slide Image Placeholder 1">
-            <a:extLst>
-              <a:ext uri="{FF2B5EF4-FFF2-40B4-BE49-F238E27FC236}">
-                <a16:creationId xmlns:a16="http://schemas.microsoft.com/office/drawing/2014/main" id="{EC3B9118-304F-2BE6-8422-0DD687862C2D}"/>
-              </a:ext>
-            </a:extLst>
-          </p:cNvPr>
-          <p:cNvSpPr>
-            <a:spLocks noGrp="1" noRot="1" noChangeAspect="1"/>
-          </p:cNvSpPr>
-          <p:nvPr>
-            <p:ph type="sldImg"/>
-          </p:nvPr>
-        </p:nvSpPr>
-        <p:spPr/>
-      </p:sp>
-      <p:sp>
-        <p:nvSpPr>
-          <p:cNvPr id="3" name="Notes Placeholder 2">
-            <a:extLst>
-              <a:ext uri="{FF2B5EF4-FFF2-40B4-BE49-F238E27FC236}">
-                <a16:creationId xmlns:a16="http://schemas.microsoft.com/office/drawing/2014/main" id="{3797C7D5-11A5-3A69-7067-279DCBDAB834}"/>
-              </a:ext>
-            </a:extLst>
-          </p:cNvPr>
-          <p:cNvSpPr>
-            <a:spLocks noGrp="1"/>
-          </p:cNvSpPr>
-          <p:nvPr>
-            <p:ph type="body" idx="1"/>
-          </p:nvPr>
-        </p:nvSpPr>
-        <p:spPr/>
-        <p:txBody>
-          <a:bodyPr/>
-          <a:lstStyle/>
-          <a:p>
-            <a:pPr marL="0" algn="r" defTabSz="914400" rtl="1" eaLnBrk="1" latinLnBrk="0" hangingPunct="1"/>
-            <a:endParaRPr lang="he-IL" dirty="0"/>
-          </a:p>
-        </p:txBody>
-      </p:sp>
-      <p:sp>
-        <p:nvSpPr>
-          <p:cNvPr id="4" name="Slide Number Placeholder 3">
-            <a:extLst>
-              <a:ext uri="{FF2B5EF4-FFF2-40B4-BE49-F238E27FC236}">
-                <a16:creationId xmlns:a16="http://schemas.microsoft.com/office/drawing/2014/main" id="{D056188F-620B-449A-B931-04C627F70D9A}"/>
-              </a:ext>
-            </a:extLst>
-          </p:cNvPr>
-          <p:cNvSpPr>
-            <a:spLocks noGrp="1"/>
-          </p:cNvSpPr>
-          <p:nvPr>
-            <p:ph type="sldNum" sz="quarter" idx="5"/>
-          </p:nvPr>
-        </p:nvSpPr>
-        <p:spPr/>
-        <p:txBody>
-          <a:bodyPr/>
-          <a:lstStyle/>
-          <a:p>
-            <a:fld id="{7242DB82-1DC1-9846-88D7-11B539157949}" type="slidenum">
-              <a:rPr lang="en-IL" smtClean="0"/>
-              <a:t>22</a:t>
-            </a:fld>
-            <a:endParaRPr lang="en-IL"/>
-          </a:p>
-        </p:txBody>
-      </p:sp>
-    </p:spTree>
-    <p:extLst>
-      <p:ext uri="{BB962C8B-B14F-4D97-AF65-F5344CB8AC3E}">
-        <p14:creationId xmlns:p14="http://schemas.microsoft.com/office/powerpoint/2010/main" val="1189219837"/>
       </p:ext>
     </p:extLst>
   </p:cSld>
@@ -6738,92 +6554,9 @@
             </a:r>
             <a:r>
               <a:rPr lang="he-IL" dirty="0"/>
-              <a:t> וריאנטים. כל מוטציה הוכנסה לתאים אנושיים וסומנה בברקוד כדי לעקוב אחרי בריצוף ובדקו מה ההשפעה על התא מבחינת קצב הגידול של תאים סרטניים.</a:t>
+              <a:t> וריאנטים. כל מוטציה הוכנסה לתאי סרטן ריאה אנושיים וסומנה בברקוד כדי לעקוב אחרי בריצוף ובדקו מה ההשפעה על התא מבחינת קצב הגידול של תאים סרטניים.</a:t>
             </a:r>
             <a:endParaRPr lang="en-US" dirty="0"/>
-          </a:p>
-          <a:p>
-            <a:pPr marL="0" algn="r" defTabSz="914400" rtl="1" eaLnBrk="1" latinLnBrk="0" hangingPunct="1"/>
-            <a:endParaRPr lang="he-IL" sz="1200" b="0" i="0" kern="1200" dirty="0">
-              <a:solidFill>
-                <a:schemeClr val="tx1"/>
-              </a:solidFill>
-              <a:effectLst/>
-              <a:latin typeface="+mn-lt"/>
-              <a:ea typeface="+mn-ea"/>
-              <a:cs typeface="+mn-cs"/>
-            </a:endParaRPr>
-          </a:p>
-          <a:p>
-            <a:pPr marL="0" algn="r" defTabSz="914400" rtl="1" eaLnBrk="1" latinLnBrk="0" hangingPunct="1"/>
-            <a:r>
-              <a:rPr lang="he-IL" dirty="0"/>
-              <a:t>כדי למדוד כמה כל מוטציה ב-</a:t>
-            </a:r>
-            <a:r>
-              <a:rPr lang="en-US" dirty="0"/>
-              <a:t>TP53 </a:t>
-            </a:r>
-            <a:r>
-              <a:rPr lang="he-IL" dirty="0"/>
-              <a:t>באמת פוגעת בתפקוד החלבון, השתמשתי בנתונים שלהם מניסוי </a:t>
-            </a:r>
-            <a:r>
-              <a:rPr lang="he-IL" dirty="0" err="1"/>
-              <a:t>קריספר</a:t>
-            </a:r>
-            <a:r>
-              <a:rPr lang="he-IL" dirty="0"/>
-              <a:t> שהם עשו, שבדק ניסויית למעלה מ-8,000 וריאנטים שונים של </a:t>
-            </a:r>
-            <a:r>
-              <a:rPr lang="en-US" dirty="0"/>
-              <a:t>TP53.</a:t>
-            </a:r>
-            <a:br>
-              <a:rPr lang="en-US" dirty="0"/>
-            </a:br>
-            <a:r>
-              <a:rPr lang="he-IL" dirty="0"/>
-              <a:t>הרעיון פשוט: הכניסו כל וריאנט לתאי סרטן ריאה, חלק עם </a:t>
-            </a:r>
-            <a:r>
-              <a:rPr lang="en-US" dirty="0"/>
-              <a:t>p53 </a:t>
-            </a:r>
-            <a:r>
-              <a:rPr lang="he-IL" dirty="0"/>
-              <a:t> תקין, וחלק ללא</a:t>
-            </a:r>
-            <a:r>
-              <a:rPr lang="en-US" dirty="0"/>
-              <a:t> p53 </a:t>
-            </a:r>
-            <a:r>
-              <a:rPr lang="he-IL" dirty="0"/>
-              <a:t>בכלל, ואז חשפו אותם לתרופות שמפעילות את הביטוי של </a:t>
-            </a:r>
-            <a:r>
-              <a:rPr lang="he-IL" dirty="0" err="1"/>
-              <a:t>p</a:t>
-            </a:r>
-            <a:r>
-              <a:rPr lang="en-US" dirty="0"/>
-              <a:t>53</a:t>
-            </a:r>
-            <a:r>
-              <a:rPr lang="he-IL" dirty="0"/>
-              <a:t>.</a:t>
-            </a:r>
-            <a:endParaRPr lang="en-US" sz="1200" b="0" i="0" kern="1200" dirty="0">
-              <a:solidFill>
-                <a:schemeClr val="tx1"/>
-              </a:solidFill>
-              <a:effectLst/>
-              <a:latin typeface="+mn-lt"/>
-              <a:ea typeface="+mn-ea"/>
-              <a:cs typeface="+mn-cs"/>
-            </a:endParaRPr>
           </a:p>
         </p:txBody>
       </p:sp>
@@ -7127,7 +6860,7 @@
             </a:r>
             <a:r>
               <a:rPr lang="he-IL" dirty="0"/>
-              <a:t>, אם וריאנט מתנהג כמו </a:t>
+              <a:t>: 1) אם וריאנט מתנהג כמו </a:t>
             </a:r>
             <a:r>
               <a:rPr lang="en-US" dirty="0"/>
@@ -7135,7 +6868,7 @@
             </a:r>
             <a:r>
               <a:rPr lang="he-IL" dirty="0"/>
-              <a:t>, או כאילו הוא לא נמצא, או משהו באמצע. מהשילוב של שלושת המדידות האלה קיבלנו מספר יחיד, שזה ה-</a:t>
+              <a:t>, 2) כאילו הוא לא נמצא, 3) או משהו באמצע. מהשילוב של שלושת המדידות האלה קיבלנו מספר יחיד, שזה ה-</a:t>
             </a:r>
             <a:r>
               <a:rPr lang="en-US" dirty="0"/>
@@ -7159,7 +6892,50 @@
             </a:r>
             <a:r>
               <a:rPr lang="he-IL" dirty="0"/>
-              <a:t> תקין. הערכים הם </a:t>
+              <a:t> תקין.</a:t>
+            </a:r>
+          </a:p>
+          <a:p>
+            <a:pPr marL="0" marR="0" lvl="0" indent="0" algn="r" defTabSz="914400" rtl="1" eaLnBrk="1" fontAlgn="auto" latinLnBrk="0" hangingPunct="1">
+              <a:lnSpc>
+                <a:spcPct val="100000"/>
+              </a:lnSpc>
+              <a:spcBef>
+                <a:spcPts val="0"/>
+              </a:spcBef>
+              <a:spcAft>
+                <a:spcPts val="0"/>
+              </a:spcAft>
+              <a:buClrTx/>
+              <a:buSzTx/>
+              <a:buFontTx/>
+              <a:buNone/>
+              <a:tabLst/>
+              <a:defRPr/>
+            </a:pPr>
+            <a:endParaRPr lang="he-IL" dirty="0"/>
+          </a:p>
+          <a:p>
+            <a:pPr marL="0" marR="0" lvl="0" indent="0" algn="r" defTabSz="914400" rtl="1" eaLnBrk="1" fontAlgn="auto" latinLnBrk="0" hangingPunct="1">
+              <a:lnSpc>
+                <a:spcPct val="100000"/>
+              </a:lnSpc>
+              <a:spcBef>
+                <a:spcPts val="0"/>
+              </a:spcBef>
+              <a:spcAft>
+                <a:spcPts val="0"/>
+              </a:spcAft>
+              <a:buClrTx/>
+              <a:buSzTx/>
+              <a:buFontTx/>
+              <a:buNone/>
+              <a:tabLst/>
+              <a:defRPr/>
+            </a:pPr>
+            <a:r>
+              <a:rPr lang="he-IL" dirty="0"/>
+              <a:t>הערכים הם </a:t>
             </a:r>
             <a:r>
               <a:rPr lang="en-US" dirty="0"/>
@@ -7491,7 +7267,7 @@
                 <a:ea typeface="+mn-ea"/>
                 <a:cs typeface="+mn-cs"/>
               </a:rPr>
-              <a:t>האם יש קורלציה בין ה-</a:t>
+              <a:t>קודם כל לבדוק את ההיפותזה שלי: האם יש קורלציה בין ה-</a:t>
             </a:r>
             <a:r>
               <a:rPr lang="en-US" sz="1200" b="0" i="0" kern="1200" dirty="0">
@@ -7580,7 +7356,7 @@
                 <a:ea typeface="+mn-ea"/>
                 <a:cs typeface="+mn-cs"/>
               </a:rPr>
-              <a:t>האם יש מוטציות באזורים שהם </a:t>
+              <a:t>אחרי זה להרחיב את האנליזה עוד קצת: האם יש מוטציות באזורים שהם </a:t>
             </a:r>
             <a:r>
               <a:rPr lang="he-IL" sz="1200" b="0" i="0" kern="1200" dirty="0" err="1">
@@ -11892,486 +11668,6 @@
 </file>
 
 <file path=ppt/slides/slide10.xml><?xml version="1.0" encoding="utf-8"?>
-<p:sld xmlns:a="http://schemas.openxmlformats.org/drawingml/2006/main" xmlns:r="http://schemas.openxmlformats.org/officeDocument/2006/relationships" xmlns:p="http://schemas.openxmlformats.org/presentationml/2006/main" show="0">
-  <p:cSld>
-    <p:spTree>
-      <p:nvGrpSpPr>
-        <p:cNvPr id="1" name="">
-          <a:extLst>
-            <a:ext uri="{FF2B5EF4-FFF2-40B4-BE49-F238E27FC236}">
-              <a16:creationId xmlns:a16="http://schemas.microsoft.com/office/drawing/2014/main" id="{1FF058A4-57BA-A749-DF2C-A825D38E444F}"/>
-            </a:ext>
-          </a:extLst>
-        </p:cNvPr>
-        <p:cNvGrpSpPr/>
-        <p:nvPr/>
-      </p:nvGrpSpPr>
-      <p:grpSpPr>
-        <a:xfrm>
-          <a:off x="0" y="0"/>
-          <a:ext cx="0" cy="0"/>
-          <a:chOff x="0" y="0"/>
-          <a:chExt cx="0" cy="0"/>
-        </a:xfrm>
-      </p:grpSpPr>
-      <p:sp>
-        <p:nvSpPr>
-          <p:cNvPr id="2" name="Title 1">
-            <a:extLst>
-              <a:ext uri="{FF2B5EF4-FFF2-40B4-BE49-F238E27FC236}">
-                <a16:creationId xmlns:a16="http://schemas.microsoft.com/office/drawing/2014/main" id="{7E5DE122-7CBA-DB38-60AE-8DC39D99F120}"/>
-              </a:ext>
-            </a:extLst>
-          </p:cNvPr>
-          <p:cNvSpPr>
-            <a:spLocks noGrp="1"/>
-          </p:cNvSpPr>
-          <p:nvPr>
-            <p:ph type="title"/>
-          </p:nvPr>
-        </p:nvSpPr>
-        <p:spPr>
-          <a:xfrm>
-            <a:off x="1079942" y="350293"/>
-            <a:ext cx="10464799" cy="1320800"/>
-          </a:xfrm>
-        </p:spPr>
-        <p:txBody>
-          <a:bodyPr>
-            <a:normAutofit/>
-          </a:bodyPr>
-          <a:lstStyle/>
-          <a:p>
-            <a:r>
-              <a:rPr lang="en-US" dirty="0"/>
-              <a:t>Data Sources:</a:t>
-            </a:r>
-            <a:br>
-              <a:rPr lang="en-US" dirty="0"/>
-            </a:br>
-            <a:r>
-              <a:rPr lang="en-US" dirty="0"/>
-              <a:t>Integrating Phenotype &amp; Genotype</a:t>
-            </a:r>
-            <a:endParaRPr lang="en-IL" dirty="0"/>
-          </a:p>
-        </p:txBody>
-      </p:sp>
-      <p:sp>
-        <p:nvSpPr>
-          <p:cNvPr id="4" name="Content Placeholder 2">
-            <a:extLst>
-              <a:ext uri="{FF2B5EF4-FFF2-40B4-BE49-F238E27FC236}">
-                <a16:creationId xmlns:a16="http://schemas.microsoft.com/office/drawing/2014/main" id="{9C276440-F483-71DF-A071-F88FD52C4130}"/>
-              </a:ext>
-            </a:extLst>
-          </p:cNvPr>
-          <p:cNvSpPr txBox="1">
-            <a:spLocks/>
-          </p:cNvSpPr>
-          <p:nvPr/>
-        </p:nvSpPr>
-        <p:spPr>
-          <a:xfrm>
-            <a:off x="2294591" y="2689908"/>
-            <a:ext cx="8583045" cy="2025766"/>
-          </a:xfrm>
-          <a:prstGeom prst="rect">
-            <a:avLst/>
-          </a:prstGeom>
-        </p:spPr>
-        <p:txBody>
-          <a:bodyPr vert="horz" lIns="91440" tIns="45720" rIns="91440" bIns="45720" rtlCol="0">
-            <a:normAutofit/>
-          </a:bodyPr>
-          <a:lstStyle>
-            <a:lvl1pPr marL="342900" indent="-342900" algn="l" defTabSz="457200" rtl="0" eaLnBrk="1" latinLnBrk="0" hangingPunct="1">
-              <a:spcBef>
-                <a:spcPts val="1000"/>
-              </a:spcBef>
-              <a:spcAft>
-                <a:spcPts val="0"/>
-              </a:spcAft>
-              <a:buClr>
-                <a:schemeClr val="accent1"/>
-              </a:buClr>
-              <a:buSzPct val="80000"/>
-              <a:buFont typeface="Wingdings 3" charset="2"/>
-              <a:buChar char=""/>
-              <a:defRPr sz="1800" kern="1200">
-                <a:solidFill>
-                  <a:schemeClr val="tx1">
-                    <a:lumMod val="75000"/>
-                    <a:lumOff val="25000"/>
-                  </a:schemeClr>
-                </a:solidFill>
-                <a:latin typeface="+mn-lt"/>
-                <a:ea typeface="+mn-ea"/>
-                <a:cs typeface="+mn-cs"/>
-              </a:defRPr>
-            </a:lvl1pPr>
-            <a:lvl2pPr marL="742950" indent="-285750" algn="l" defTabSz="457200" rtl="0" eaLnBrk="1" latinLnBrk="0" hangingPunct="1">
-              <a:spcBef>
-                <a:spcPts val="1000"/>
-              </a:spcBef>
-              <a:spcAft>
-                <a:spcPts val="0"/>
-              </a:spcAft>
-              <a:buClr>
-                <a:schemeClr val="accent1"/>
-              </a:buClr>
-              <a:buSzPct val="80000"/>
-              <a:buFont typeface="Wingdings 3" charset="2"/>
-              <a:buChar char=""/>
-              <a:defRPr sz="1600" kern="1200">
-                <a:solidFill>
-                  <a:schemeClr val="tx1">
-                    <a:lumMod val="75000"/>
-                    <a:lumOff val="25000"/>
-                  </a:schemeClr>
-                </a:solidFill>
-                <a:latin typeface="+mn-lt"/>
-                <a:ea typeface="+mn-ea"/>
-                <a:cs typeface="+mn-cs"/>
-              </a:defRPr>
-            </a:lvl2pPr>
-            <a:lvl3pPr marL="1143000" indent="-228600" algn="l" defTabSz="457200" rtl="0" eaLnBrk="1" latinLnBrk="0" hangingPunct="1">
-              <a:spcBef>
-                <a:spcPts val="1000"/>
-              </a:spcBef>
-              <a:spcAft>
-                <a:spcPts val="0"/>
-              </a:spcAft>
-              <a:buClr>
-                <a:schemeClr val="accent1"/>
-              </a:buClr>
-              <a:buSzPct val="80000"/>
-              <a:buFont typeface="Wingdings 3" charset="2"/>
-              <a:buChar char=""/>
-              <a:defRPr sz="1400" kern="1200">
-                <a:solidFill>
-                  <a:schemeClr val="tx1">
-                    <a:lumMod val="75000"/>
-                    <a:lumOff val="25000"/>
-                  </a:schemeClr>
-                </a:solidFill>
-                <a:latin typeface="+mn-lt"/>
-                <a:ea typeface="+mn-ea"/>
-                <a:cs typeface="+mn-cs"/>
-              </a:defRPr>
-            </a:lvl3pPr>
-            <a:lvl4pPr marL="1600200" indent="-228600" algn="l" defTabSz="457200" rtl="0" eaLnBrk="1" latinLnBrk="0" hangingPunct="1">
-              <a:spcBef>
-                <a:spcPts val="1000"/>
-              </a:spcBef>
-              <a:spcAft>
-                <a:spcPts val="0"/>
-              </a:spcAft>
-              <a:buClr>
-                <a:schemeClr val="accent1"/>
-              </a:buClr>
-              <a:buSzPct val="80000"/>
-              <a:buFont typeface="Wingdings 3" charset="2"/>
-              <a:buChar char=""/>
-              <a:defRPr sz="1200" kern="1200">
-                <a:solidFill>
-                  <a:schemeClr val="tx1">
-                    <a:lumMod val="75000"/>
-                    <a:lumOff val="25000"/>
-                  </a:schemeClr>
-                </a:solidFill>
-                <a:latin typeface="+mn-lt"/>
-                <a:ea typeface="+mn-ea"/>
-                <a:cs typeface="+mn-cs"/>
-              </a:defRPr>
-            </a:lvl4pPr>
-            <a:lvl5pPr marL="2057400" indent="-228600" algn="l" defTabSz="457200" rtl="0" eaLnBrk="1" latinLnBrk="0" hangingPunct="1">
-              <a:spcBef>
-                <a:spcPts val="1000"/>
-              </a:spcBef>
-              <a:spcAft>
-                <a:spcPts val="0"/>
-              </a:spcAft>
-              <a:buClr>
-                <a:schemeClr val="accent1"/>
-              </a:buClr>
-              <a:buSzPct val="80000"/>
-              <a:buFont typeface="Wingdings 3" charset="2"/>
-              <a:buChar char=""/>
-              <a:defRPr sz="1200" kern="1200">
-                <a:solidFill>
-                  <a:schemeClr val="tx1">
-                    <a:lumMod val="75000"/>
-                    <a:lumOff val="25000"/>
-                  </a:schemeClr>
-                </a:solidFill>
-                <a:latin typeface="+mn-lt"/>
-                <a:ea typeface="+mn-ea"/>
-                <a:cs typeface="+mn-cs"/>
-              </a:defRPr>
-            </a:lvl5pPr>
-            <a:lvl6pPr marL="2514600" indent="-228600" algn="l" defTabSz="457200" rtl="0" eaLnBrk="1" latinLnBrk="0" hangingPunct="1">
-              <a:spcBef>
-                <a:spcPts val="1000"/>
-              </a:spcBef>
-              <a:spcAft>
-                <a:spcPts val="0"/>
-              </a:spcAft>
-              <a:buClr>
-                <a:schemeClr val="accent1"/>
-              </a:buClr>
-              <a:buSzPct val="80000"/>
-              <a:buFont typeface="Wingdings 3" charset="2"/>
-              <a:buChar char=""/>
-              <a:defRPr sz="1200" kern="1200">
-                <a:solidFill>
-                  <a:schemeClr val="tx1">
-                    <a:lumMod val="75000"/>
-                    <a:lumOff val="25000"/>
-                  </a:schemeClr>
-                </a:solidFill>
-                <a:latin typeface="+mn-lt"/>
-                <a:ea typeface="+mn-ea"/>
-                <a:cs typeface="+mn-cs"/>
-              </a:defRPr>
-            </a:lvl6pPr>
-            <a:lvl7pPr marL="2971800" indent="-228600" algn="l" defTabSz="457200" rtl="0" eaLnBrk="1" latinLnBrk="0" hangingPunct="1">
-              <a:spcBef>
-                <a:spcPts val="1000"/>
-              </a:spcBef>
-              <a:spcAft>
-                <a:spcPts val="0"/>
-              </a:spcAft>
-              <a:buClr>
-                <a:schemeClr val="accent1"/>
-              </a:buClr>
-              <a:buSzPct val="80000"/>
-              <a:buFont typeface="Wingdings 3" charset="2"/>
-              <a:buChar char=""/>
-              <a:defRPr sz="1200" kern="1200">
-                <a:solidFill>
-                  <a:schemeClr val="tx1">
-                    <a:lumMod val="75000"/>
-                    <a:lumOff val="25000"/>
-                  </a:schemeClr>
-                </a:solidFill>
-                <a:latin typeface="+mn-lt"/>
-                <a:ea typeface="+mn-ea"/>
-                <a:cs typeface="+mn-cs"/>
-              </a:defRPr>
-            </a:lvl7pPr>
-            <a:lvl8pPr marL="3429000" indent="-228600" algn="l" defTabSz="457200" rtl="0" eaLnBrk="1" latinLnBrk="0" hangingPunct="1">
-              <a:spcBef>
-                <a:spcPts val="1000"/>
-              </a:spcBef>
-              <a:spcAft>
-                <a:spcPts val="0"/>
-              </a:spcAft>
-              <a:buClr>
-                <a:schemeClr val="accent1"/>
-              </a:buClr>
-              <a:buSzPct val="80000"/>
-              <a:buFont typeface="Wingdings 3" charset="2"/>
-              <a:buChar char=""/>
-              <a:defRPr sz="1200" kern="1200">
-                <a:solidFill>
-                  <a:schemeClr val="tx1">
-                    <a:lumMod val="75000"/>
-                    <a:lumOff val="25000"/>
-                  </a:schemeClr>
-                </a:solidFill>
-                <a:latin typeface="+mn-lt"/>
-                <a:ea typeface="+mn-ea"/>
-                <a:cs typeface="+mn-cs"/>
-              </a:defRPr>
-            </a:lvl8pPr>
-            <a:lvl9pPr marL="3886200" indent="-228600" algn="l" defTabSz="457200" rtl="0" eaLnBrk="1" latinLnBrk="0" hangingPunct="1">
-              <a:spcBef>
-                <a:spcPts val="1000"/>
-              </a:spcBef>
-              <a:spcAft>
-                <a:spcPts val="0"/>
-              </a:spcAft>
-              <a:buClr>
-                <a:schemeClr val="accent1"/>
-              </a:buClr>
-              <a:buSzPct val="80000"/>
-              <a:buFont typeface="Wingdings 3" charset="2"/>
-              <a:buChar char=""/>
-              <a:defRPr sz="1200" kern="1200">
-                <a:solidFill>
-                  <a:schemeClr val="tx1">
-                    <a:lumMod val="75000"/>
-                    <a:lumOff val="25000"/>
-                  </a:schemeClr>
-                </a:solidFill>
-                <a:latin typeface="+mn-lt"/>
-                <a:ea typeface="+mn-ea"/>
-                <a:cs typeface="+mn-cs"/>
-              </a:defRPr>
-            </a:lvl9pPr>
-          </a:lstStyle>
-          <a:p>
-            <a:r>
-              <a:rPr lang="en-US" dirty="0"/>
-              <a:t>MSK-IMPACT (53,292 samples, 505 cancer genes).</a:t>
-            </a:r>
-          </a:p>
-          <a:p>
-            <a:r>
-              <a:rPr lang="en-US" dirty="0"/>
-              <a:t>Role: Genome-wide CNA data to identify which pathways are altered when TP53 breaks</a:t>
-            </a:r>
-          </a:p>
-          <a:p>
-            <a:r>
-              <a:rPr lang="en-US" dirty="0"/>
-              <a:t>Compared 800 high-FGA TP53-mutant vs 800 low-FGA TP53-WT</a:t>
-            </a:r>
-          </a:p>
-        </p:txBody>
-      </p:sp>
-      <p:sp>
-        <p:nvSpPr>
-          <p:cNvPr id="5" name="TextBox 4">
-            <a:extLst>
-              <a:ext uri="{FF2B5EF4-FFF2-40B4-BE49-F238E27FC236}">
-                <a16:creationId xmlns:a16="http://schemas.microsoft.com/office/drawing/2014/main" id="{78444B93-A15C-1CB2-2E6C-9C3050449F23}"/>
-              </a:ext>
-            </a:extLst>
-          </p:cNvPr>
-          <p:cNvSpPr txBox="1"/>
-          <p:nvPr/>
-        </p:nvSpPr>
-        <p:spPr>
-          <a:xfrm>
-            <a:off x="2294592" y="2139135"/>
-            <a:ext cx="2222147" cy="369332"/>
-          </a:xfrm>
-          <a:prstGeom prst="rect">
-            <a:avLst/>
-          </a:prstGeom>
-          <a:noFill/>
-        </p:spPr>
-        <p:txBody>
-          <a:bodyPr wrap="none" rtlCol="0">
-            <a:spAutoFit/>
-          </a:bodyPr>
-          <a:lstStyle/>
-          <a:p>
-            <a:r>
-              <a:rPr lang="en-IL" b="1" dirty="0"/>
-              <a:t>Secondary Analysis</a:t>
-            </a:r>
-          </a:p>
-        </p:txBody>
-      </p:sp>
-      <p:sp>
-        <p:nvSpPr>
-          <p:cNvPr id="3" name="TextBox 2">
-            <a:extLst>
-              <a:ext uri="{FF2B5EF4-FFF2-40B4-BE49-F238E27FC236}">
-                <a16:creationId xmlns:a16="http://schemas.microsoft.com/office/drawing/2014/main" id="{D3A7E258-78D3-3BAE-3E76-B1374DE35592}"/>
-              </a:ext>
-            </a:extLst>
-          </p:cNvPr>
-          <p:cNvSpPr txBox="1"/>
-          <p:nvPr/>
-        </p:nvSpPr>
-        <p:spPr>
-          <a:xfrm>
-            <a:off x="2692664" y="6216715"/>
-            <a:ext cx="6806672" cy="369332"/>
-          </a:xfrm>
-          <a:prstGeom prst="rect">
-            <a:avLst/>
-          </a:prstGeom>
-          <a:noFill/>
-        </p:spPr>
-        <p:txBody>
-          <a:bodyPr wrap="none" rtlCol="0">
-            <a:spAutoFit/>
-          </a:bodyPr>
-          <a:lstStyle/>
-          <a:p>
-            <a:r>
-              <a:rPr lang="en-US" b="1" dirty="0">
-                <a:solidFill>
-                  <a:srgbClr val="C00000"/>
-                </a:solidFill>
-              </a:rPr>
-              <a:t>Goal: to conclude what are the major pathways are triggered</a:t>
-            </a:r>
-          </a:p>
-        </p:txBody>
-      </p:sp>
-      <p:sp>
-        <p:nvSpPr>
-          <p:cNvPr id="9" name="TextBox 8">
-            <a:extLst>
-              <a:ext uri="{FF2B5EF4-FFF2-40B4-BE49-F238E27FC236}">
-                <a16:creationId xmlns:a16="http://schemas.microsoft.com/office/drawing/2014/main" id="{81385257-0E5C-B594-BC2A-4AAAC6E6631F}"/>
-              </a:ext>
-            </a:extLst>
-          </p:cNvPr>
-          <p:cNvSpPr txBox="1"/>
-          <p:nvPr/>
-        </p:nvSpPr>
-        <p:spPr>
-          <a:xfrm>
-            <a:off x="446568" y="-1"/>
-            <a:ext cx="3712984" cy="468000"/>
-          </a:xfrm>
-          <a:prstGeom prst="rect">
-            <a:avLst/>
-          </a:prstGeom>
-          <a:solidFill>
-            <a:srgbClr val="4D1434"/>
-          </a:solidFill>
-        </p:spPr>
-        <p:txBody>
-          <a:bodyPr wrap="square" rtlCol="0">
-            <a:spAutoFit/>
-          </a:bodyPr>
-          <a:lstStyle/>
-          <a:p>
-            <a:pPr algn="ctr"/>
-            <a:endParaRPr lang="en-IL" sz="700" dirty="0">
-              <a:solidFill>
-                <a:schemeClr val="bg1"/>
-              </a:solidFill>
-            </a:endParaRPr>
-          </a:p>
-          <a:p>
-            <a:pPr algn="ctr"/>
-            <a:r>
-              <a:rPr lang="en-IL" sz="1400" i="1" dirty="0">
-                <a:solidFill>
-                  <a:schemeClr val="bg1"/>
-                </a:solidFill>
-                <a:latin typeface="Abadi MT Condensed Light" panose="020B0306030101010103" pitchFamily="34" charset="77"/>
-                <a:ea typeface="Batang" panose="02030600000101010101" pitchFamily="18" charset="-127"/>
-                <a:cs typeface="Corsiva Hebrew" pitchFamily="2" charset="-79"/>
-              </a:rPr>
-              <a:t>Background</a:t>
-            </a:r>
-          </a:p>
-        </p:txBody>
-      </p:sp>
-    </p:spTree>
-    <p:extLst>
-      <p:ext uri="{BB962C8B-B14F-4D97-AF65-F5344CB8AC3E}">
-        <p14:creationId xmlns:p14="http://schemas.microsoft.com/office/powerpoint/2010/main" val="738907949"/>
-      </p:ext>
-    </p:extLst>
-  </p:cSld>
-  <p:clrMapOvr>
-    <a:masterClrMapping/>
-  </p:clrMapOvr>
-</p:sld>
-</file>
-
-<file path=ppt/slides/slide11.xml><?xml version="1.0" encoding="utf-8"?>
 <p:sld xmlns:a="http://schemas.openxmlformats.org/drawingml/2006/main" xmlns:r="http://schemas.openxmlformats.org/officeDocument/2006/relationships" xmlns:p="http://schemas.openxmlformats.org/presentationml/2006/main">
   <p:cSld>
     <p:bg>
@@ -12640,10 +11936,143 @@
   <p:clrMapOvr>
     <a:masterClrMapping/>
   </p:clrMapOvr>
+  <p:timing>
+    <p:tnLst>
+      <p:par>
+        <p:cTn id="1" dur="indefinite" restart="never" nodeType="tmRoot">
+          <p:childTnLst>
+            <p:seq concurrent="1" nextAc="seek">
+              <p:cTn id="2" dur="indefinite" nodeType="mainSeq">
+                <p:childTnLst>
+                  <p:par>
+                    <p:cTn id="3" fill="hold">
+                      <p:stCondLst>
+                        <p:cond delay="indefinite"/>
+                      </p:stCondLst>
+                      <p:childTnLst>
+                        <p:par>
+                          <p:cTn id="4" fill="hold">
+                            <p:stCondLst>
+                              <p:cond delay="0"/>
+                            </p:stCondLst>
+                            <p:childTnLst>
+                              <p:par>
+                                <p:cTn id="5" presetID="1" presetClass="entr" presetSubtype="0" fill="hold" grpId="0" nodeType="clickEffect">
+                                  <p:stCondLst>
+                                    <p:cond delay="0"/>
+                                  </p:stCondLst>
+                                  <p:childTnLst>
+                                    <p:set>
+                                      <p:cBhvr>
+                                        <p:cTn id="6" dur="1" fill="hold">
+                                          <p:stCondLst>
+                                            <p:cond delay="0"/>
+                                          </p:stCondLst>
+                                        </p:cTn>
+                                        <p:tgtEl>
+                                          <p:spTgt spid="7"/>
+                                        </p:tgtEl>
+                                        <p:attrNameLst>
+                                          <p:attrName>style.visibility</p:attrName>
+                                        </p:attrNameLst>
+                                      </p:cBhvr>
+                                      <p:to>
+                                        <p:strVal val="visible"/>
+                                      </p:to>
+                                    </p:set>
+                                  </p:childTnLst>
+                                </p:cTn>
+                              </p:par>
+                              <p:par>
+                                <p:cTn id="7" presetID="1" presetClass="entr" presetSubtype="0" fill="hold" nodeType="withEffect">
+                                  <p:stCondLst>
+                                    <p:cond delay="0"/>
+                                  </p:stCondLst>
+                                  <p:childTnLst>
+                                    <p:set>
+                                      <p:cBhvr>
+                                        <p:cTn id="8" dur="1" fill="hold">
+                                          <p:stCondLst>
+                                            <p:cond delay="0"/>
+                                          </p:stCondLst>
+                                        </p:cTn>
+                                        <p:tgtEl>
+                                          <p:spTgt spid="14"/>
+                                        </p:tgtEl>
+                                        <p:attrNameLst>
+                                          <p:attrName>style.visibility</p:attrName>
+                                        </p:attrNameLst>
+                                      </p:cBhvr>
+                                      <p:to>
+                                        <p:strVal val="visible"/>
+                                      </p:to>
+                                    </p:set>
+                                  </p:childTnLst>
+                                </p:cTn>
+                              </p:par>
+                              <p:par>
+                                <p:cTn id="9" presetID="1" presetClass="entr" presetSubtype="0" fill="hold" grpId="0" nodeType="withEffect">
+                                  <p:stCondLst>
+                                    <p:cond delay="0"/>
+                                  </p:stCondLst>
+                                  <p:childTnLst>
+                                    <p:set>
+                                      <p:cBhvr>
+                                        <p:cTn id="10" dur="1" fill="hold">
+                                          <p:stCondLst>
+                                            <p:cond delay="0"/>
+                                          </p:stCondLst>
+                                        </p:cTn>
+                                        <p:tgtEl>
+                                          <p:spTgt spid="13"/>
+                                        </p:tgtEl>
+                                        <p:attrNameLst>
+                                          <p:attrName>style.visibility</p:attrName>
+                                        </p:attrNameLst>
+                                      </p:cBhvr>
+                                      <p:to>
+                                        <p:strVal val="visible"/>
+                                      </p:to>
+                                    </p:set>
+                                  </p:childTnLst>
+                                </p:cTn>
+                              </p:par>
+                            </p:childTnLst>
+                          </p:cTn>
+                        </p:par>
+                      </p:childTnLst>
+                    </p:cTn>
+                  </p:par>
+                </p:childTnLst>
+              </p:cTn>
+              <p:prevCondLst>
+                <p:cond evt="onPrev" delay="0">
+                  <p:tgtEl>
+                    <p:sldTgt/>
+                  </p:tgtEl>
+                </p:cond>
+              </p:prevCondLst>
+              <p:nextCondLst>
+                <p:cond evt="onNext" delay="0">
+                  <p:tgtEl>
+                    <p:sldTgt/>
+                  </p:tgtEl>
+                </p:cond>
+              </p:nextCondLst>
+            </p:seq>
+          </p:childTnLst>
+        </p:cTn>
+      </p:par>
+    </p:tnLst>
+    <p:bldLst>
+      <p:bldP spid="7" grpId="0"/>
+      <p:bldP spid="13" grpId="0"/>
+    </p:bldLst>
+  </p:timing>
 </p:sld>
 </file>
 
-<file path=ppt/slides/slide12.xml><?xml version="1.0" encoding="utf-8"?>
+<file path=ppt/slides/slide11.xml><?xml version="1.0" encoding="utf-8"?>
 <p:sld xmlns:a="http://schemas.openxmlformats.org/drawingml/2006/main" xmlns:r="http://schemas.openxmlformats.org/officeDocument/2006/relationships" xmlns:p="http://schemas.openxmlformats.org/presentationml/2006/main">
   <p:cSld>
     <p:spTree>
@@ -12863,10 +12292,10 @@
       </p:sp>
       <p:pic>
         <p:nvPicPr>
-          <p:cNvPr id="5" name="Picture 4">
+          <p:cNvPr id="3" name="Picture 2">
             <a:extLst>
               <a:ext uri="{FF2B5EF4-FFF2-40B4-BE49-F238E27FC236}">
-                <a16:creationId xmlns:a16="http://schemas.microsoft.com/office/drawing/2014/main" id="{4BDB3D5D-6379-7396-68F4-896AC6A7FB60}"/>
+                <a16:creationId xmlns:a16="http://schemas.microsoft.com/office/drawing/2014/main" id="{27C1CB25-1DF6-0CAF-F6B5-069EF6524031}"/>
               </a:ext>
             </a:extLst>
           </p:cNvPr>
@@ -12877,14 +12306,15 @@
         </p:nvPicPr>
         <p:blipFill>
           <a:blip r:embed="rId3"/>
+          <a:srcRect r="50000"/>
           <a:stretch>
             <a:fillRect/>
           </a:stretch>
         </p:blipFill>
         <p:spPr>
           <a:xfrm>
-            <a:off x="1977685" y="2195771"/>
-            <a:ext cx="8236629" cy="3492647"/>
+            <a:off x="3817096" y="2093428"/>
+            <a:ext cx="4553129" cy="3948596"/>
           </a:xfrm>
           <a:prstGeom prst="rect">
             <a:avLst/>
@@ -12904,7 +12334,7 @@
 </p:sld>
 </file>
 
-<file path=ppt/slides/slide13.xml><?xml version="1.0" encoding="utf-8"?>
+<file path=ppt/slides/slide12.xml><?xml version="1.0" encoding="utf-8"?>
 <p:sld xmlns:a="http://schemas.openxmlformats.org/drawingml/2006/main" xmlns:r="http://schemas.openxmlformats.org/officeDocument/2006/relationships" xmlns:p="http://schemas.openxmlformats.org/presentationml/2006/main">
   <p:cSld>
     <p:spTree>
@@ -13168,7 +12598,7 @@
 </p:sld>
 </file>
 
-<file path=ppt/slides/slide14.xml><?xml version="1.0" encoding="utf-8"?>
+<file path=ppt/slides/slide13.xml><?xml version="1.0" encoding="utf-8"?>
 <p:sld xmlns:a="http://schemas.openxmlformats.org/drawingml/2006/main" xmlns:r="http://schemas.openxmlformats.org/officeDocument/2006/relationships" xmlns:p="http://schemas.openxmlformats.org/presentationml/2006/main">
   <p:cSld>
     <p:spTree>
@@ -13433,7 +12863,7 @@
 </p:sld>
 </file>
 
-<file path=ppt/slides/slide15.xml><?xml version="1.0" encoding="utf-8"?>
+<file path=ppt/slides/slide14.xml><?xml version="1.0" encoding="utf-8"?>
 <p:sld xmlns:a="http://schemas.openxmlformats.org/drawingml/2006/main" xmlns:r="http://schemas.openxmlformats.org/officeDocument/2006/relationships" xmlns:p="http://schemas.openxmlformats.org/presentationml/2006/main">
   <p:cSld>
     <p:spTree>
@@ -13702,538 +13132,7 @@
 </p:sld>
 </file>
 
-<file path=ppt/slides/slide16.xml><?xml version="1.0" encoding="utf-8"?>
-<p:sld xmlns:a="http://schemas.openxmlformats.org/drawingml/2006/main" xmlns:r="http://schemas.openxmlformats.org/officeDocument/2006/relationships" xmlns:p="http://schemas.openxmlformats.org/presentationml/2006/main" show="0">
-  <p:cSld>
-    <p:spTree>
-      <p:nvGrpSpPr>
-        <p:cNvPr id="1" name="">
-          <a:extLst>
-            <a:ext uri="{FF2B5EF4-FFF2-40B4-BE49-F238E27FC236}">
-              <a16:creationId xmlns:a16="http://schemas.microsoft.com/office/drawing/2014/main" id="{B71F9D83-37A7-8B2B-13EA-9778AA5CEE89}"/>
-            </a:ext>
-          </a:extLst>
-        </p:cNvPr>
-        <p:cNvGrpSpPr/>
-        <p:nvPr/>
-      </p:nvGrpSpPr>
-      <p:grpSpPr>
-        <a:xfrm>
-          <a:off x="0" y="0"/>
-          <a:ext cx="0" cy="0"/>
-          <a:chOff x="0" y="0"/>
-          <a:chExt cx="0" cy="0"/>
-        </a:xfrm>
-      </p:grpSpPr>
-      <p:sp>
-        <p:nvSpPr>
-          <p:cNvPr id="4" name="TextBox 3">
-            <a:extLst>
-              <a:ext uri="{FF2B5EF4-FFF2-40B4-BE49-F238E27FC236}">
-                <a16:creationId xmlns:a16="http://schemas.microsoft.com/office/drawing/2014/main" id="{29B4E23B-D913-7F67-0C59-89B31B5CA576}"/>
-              </a:ext>
-            </a:extLst>
-          </p:cNvPr>
-          <p:cNvSpPr txBox="1"/>
-          <p:nvPr/>
-        </p:nvSpPr>
-        <p:spPr>
-          <a:xfrm>
-            <a:off x="4244454" y="6210"/>
-            <a:ext cx="3698414" cy="468000"/>
-          </a:xfrm>
-          <a:prstGeom prst="rect">
-            <a:avLst/>
-          </a:prstGeom>
-          <a:solidFill>
-            <a:srgbClr val="903063"/>
-          </a:solidFill>
-        </p:spPr>
-        <p:txBody>
-          <a:bodyPr wrap="square" rtlCol="0">
-            <a:spAutoFit/>
-          </a:bodyPr>
-          <a:lstStyle/>
-          <a:p>
-            <a:pPr algn="ctr"/>
-            <a:endParaRPr lang="en-IL" sz="700" dirty="0">
-              <a:solidFill>
-                <a:schemeClr val="bg1"/>
-              </a:solidFill>
-            </a:endParaRPr>
-          </a:p>
-          <a:p>
-            <a:pPr algn="ctr"/>
-            <a:r>
-              <a:rPr lang="en-IL" sz="1400" i="1" dirty="0">
-                <a:solidFill>
-                  <a:schemeClr val="bg1"/>
-                </a:solidFill>
-                <a:latin typeface="Abadi MT Condensed Light" panose="020B0306030101010103" pitchFamily="34" charset="77"/>
-                <a:ea typeface="Batang" panose="02030600000101010101" pitchFamily="18" charset="-127"/>
-                <a:cs typeface="Corsiva Hebrew" pitchFamily="2" charset="-79"/>
-              </a:rPr>
-              <a:t>Results</a:t>
-            </a:r>
-          </a:p>
-        </p:txBody>
-      </p:sp>
-      <p:sp>
-        <p:nvSpPr>
-          <p:cNvPr id="7" name="Title 1">
-            <a:extLst>
-              <a:ext uri="{FF2B5EF4-FFF2-40B4-BE49-F238E27FC236}">
-                <a16:creationId xmlns:a16="http://schemas.microsoft.com/office/drawing/2014/main" id="{A044A0AF-B79F-783D-A827-DC56678B4433}"/>
-              </a:ext>
-            </a:extLst>
-          </p:cNvPr>
-          <p:cNvSpPr txBox="1">
-            <a:spLocks/>
-          </p:cNvSpPr>
-          <p:nvPr/>
-        </p:nvSpPr>
-        <p:spPr>
-          <a:xfrm>
-            <a:off x="1020801" y="822800"/>
-            <a:ext cx="10395551" cy="624060"/>
-          </a:xfrm>
-          <a:prstGeom prst="rect">
-            <a:avLst/>
-          </a:prstGeom>
-        </p:spPr>
-        <p:txBody>
-          <a:bodyPr vert="horz" lIns="91440" tIns="45720" rIns="91440" bIns="45720" rtlCol="0" anchor="b">
-            <a:normAutofit fontScale="77500" lnSpcReduction="20000"/>
-          </a:bodyPr>
-          <a:lstStyle>
-            <a:lvl1pPr algn="l" defTabSz="457200" rtl="0" eaLnBrk="1" latinLnBrk="0" hangingPunct="1">
-              <a:spcBef>
-                <a:spcPct val="0"/>
-              </a:spcBef>
-              <a:buNone/>
-              <a:defRPr sz="2800" b="0" kern="1200" cap="all">
-                <a:solidFill>
-                  <a:schemeClr val="bg1"/>
-                </a:solidFill>
-                <a:latin typeface="+mj-lt"/>
-                <a:ea typeface="+mj-ea"/>
-                <a:cs typeface="+mj-cs"/>
-              </a:defRPr>
-            </a:lvl1pPr>
-            <a:lvl2pPr eaLnBrk="1" hangingPunct="1">
-              <a:defRPr>
-                <a:solidFill>
-                  <a:schemeClr val="tx2"/>
-                </a:solidFill>
-              </a:defRPr>
-            </a:lvl2pPr>
-            <a:lvl3pPr eaLnBrk="1" hangingPunct="1">
-              <a:defRPr>
-                <a:solidFill>
-                  <a:schemeClr val="tx2"/>
-                </a:solidFill>
-              </a:defRPr>
-            </a:lvl3pPr>
-            <a:lvl4pPr eaLnBrk="1" hangingPunct="1">
-              <a:defRPr>
-                <a:solidFill>
-                  <a:schemeClr val="tx2"/>
-                </a:solidFill>
-              </a:defRPr>
-            </a:lvl4pPr>
-            <a:lvl5pPr eaLnBrk="1" hangingPunct="1">
-              <a:defRPr>
-                <a:solidFill>
-                  <a:schemeClr val="tx2"/>
-                </a:solidFill>
-              </a:defRPr>
-            </a:lvl5pPr>
-            <a:lvl6pPr eaLnBrk="1" hangingPunct="1">
-              <a:defRPr>
-                <a:solidFill>
-                  <a:schemeClr val="tx2"/>
-                </a:solidFill>
-              </a:defRPr>
-            </a:lvl6pPr>
-            <a:lvl7pPr eaLnBrk="1" hangingPunct="1">
-              <a:defRPr>
-                <a:solidFill>
-                  <a:schemeClr val="tx2"/>
-                </a:solidFill>
-              </a:defRPr>
-            </a:lvl7pPr>
-            <a:lvl8pPr eaLnBrk="1" hangingPunct="1">
-              <a:defRPr>
-                <a:solidFill>
-                  <a:schemeClr val="tx2"/>
-                </a:solidFill>
-              </a:defRPr>
-            </a:lvl8pPr>
-            <a:lvl9pPr eaLnBrk="1" hangingPunct="1">
-              <a:defRPr>
-                <a:solidFill>
-                  <a:schemeClr val="tx2"/>
-                </a:solidFill>
-              </a:defRPr>
-            </a:lvl9pPr>
-          </a:lstStyle>
-          <a:p>
-            <a:r>
-              <a:rPr lang="en-US" dirty="0"/>
-              <a:t>which known cancer genes co-occur with TP53 loss and high FGA?</a:t>
-            </a:r>
-          </a:p>
-        </p:txBody>
-      </p:sp>
-      <p:sp>
-        <p:nvSpPr>
-          <p:cNvPr id="13" name="TextBox 12">
-            <a:extLst>
-              <a:ext uri="{FF2B5EF4-FFF2-40B4-BE49-F238E27FC236}">
-                <a16:creationId xmlns:a16="http://schemas.microsoft.com/office/drawing/2014/main" id="{85491A5D-BF4D-4D90-0CCC-5AF81947488E}"/>
-              </a:ext>
-            </a:extLst>
-          </p:cNvPr>
-          <p:cNvSpPr txBox="1"/>
-          <p:nvPr/>
-        </p:nvSpPr>
-        <p:spPr>
-          <a:xfrm>
-            <a:off x="3082043" y="6035200"/>
-            <a:ext cx="6273064" cy="646331"/>
-          </a:xfrm>
-          <a:prstGeom prst="rect">
-            <a:avLst/>
-          </a:prstGeom>
-          <a:noFill/>
-        </p:spPr>
-        <p:txBody>
-          <a:bodyPr wrap="none" rtlCol="0">
-            <a:spAutoFit/>
-          </a:bodyPr>
-          <a:lstStyle/>
-          <a:p>
-            <a:pPr algn="ctr"/>
-            <a:r>
-              <a:rPr lang="en-US" dirty="0"/>
-              <a:t>Amplified genes (left panel): oncogenes being turned ON</a:t>
-            </a:r>
-          </a:p>
-          <a:p>
-            <a:pPr algn="ctr"/>
-            <a:r>
-              <a:rPr lang="en-US" dirty="0"/>
-              <a:t>Deleted genes (right panel): tumor suppressors being turned OFF</a:t>
-            </a:r>
-          </a:p>
-        </p:txBody>
-      </p:sp>
-      <p:pic>
-        <p:nvPicPr>
-          <p:cNvPr id="2" name="Picture 1">
-            <a:extLst>
-              <a:ext uri="{FF2B5EF4-FFF2-40B4-BE49-F238E27FC236}">
-                <a16:creationId xmlns:a16="http://schemas.microsoft.com/office/drawing/2014/main" id="{E27A9F89-4795-F6D5-36DF-485D3CEDCFFA}"/>
-              </a:ext>
-            </a:extLst>
-          </p:cNvPr>
-          <p:cNvPicPr>
-            <a:picLocks noChangeAspect="1"/>
-          </p:cNvPicPr>
-          <p:nvPr/>
-        </p:nvPicPr>
-        <p:blipFill>
-          <a:blip r:embed="rId3"/>
-          <a:stretch>
-            <a:fillRect/>
-          </a:stretch>
-        </p:blipFill>
-        <p:spPr>
-          <a:xfrm>
-            <a:off x="2301135" y="1947450"/>
-            <a:ext cx="7589729" cy="3914062"/>
-          </a:xfrm>
-          <a:prstGeom prst="rect">
-            <a:avLst/>
-          </a:prstGeom>
-        </p:spPr>
-      </p:pic>
-    </p:spTree>
-    <p:extLst>
-      <p:ext uri="{BB962C8B-B14F-4D97-AF65-F5344CB8AC3E}">
-        <p14:creationId xmlns:p14="http://schemas.microsoft.com/office/powerpoint/2010/main" val="1861490624"/>
-      </p:ext>
-    </p:extLst>
-  </p:cSld>
-  <p:clrMapOvr>
-    <a:masterClrMapping/>
-  </p:clrMapOvr>
-</p:sld>
-</file>
-
-<file path=ppt/slides/slide17.xml><?xml version="1.0" encoding="utf-8"?>
-<p:sld xmlns:a="http://schemas.openxmlformats.org/drawingml/2006/main" xmlns:r="http://schemas.openxmlformats.org/officeDocument/2006/relationships" xmlns:p="http://schemas.openxmlformats.org/presentationml/2006/main" show="0">
-  <p:cSld>
-    <p:spTree>
-      <p:nvGrpSpPr>
-        <p:cNvPr id="1" name="">
-          <a:extLst>
-            <a:ext uri="{FF2B5EF4-FFF2-40B4-BE49-F238E27FC236}">
-              <a16:creationId xmlns:a16="http://schemas.microsoft.com/office/drawing/2014/main" id="{1E1A3BEB-D12B-CB91-CABF-F7664DD59EE9}"/>
-            </a:ext>
-          </a:extLst>
-        </p:cNvPr>
-        <p:cNvGrpSpPr/>
-        <p:nvPr/>
-      </p:nvGrpSpPr>
-      <p:grpSpPr>
-        <a:xfrm>
-          <a:off x="0" y="0"/>
-          <a:ext cx="0" cy="0"/>
-          <a:chOff x="0" y="0"/>
-          <a:chExt cx="0" cy="0"/>
-        </a:xfrm>
-      </p:grpSpPr>
-      <p:sp>
-        <p:nvSpPr>
-          <p:cNvPr id="4" name="TextBox 3">
-            <a:extLst>
-              <a:ext uri="{FF2B5EF4-FFF2-40B4-BE49-F238E27FC236}">
-                <a16:creationId xmlns:a16="http://schemas.microsoft.com/office/drawing/2014/main" id="{A193E180-EB01-9ECE-1243-D31F5973EB3E}"/>
-              </a:ext>
-            </a:extLst>
-          </p:cNvPr>
-          <p:cNvSpPr txBox="1"/>
-          <p:nvPr/>
-        </p:nvSpPr>
-        <p:spPr>
-          <a:xfrm>
-            <a:off x="4244454" y="6210"/>
-            <a:ext cx="3698414" cy="468000"/>
-          </a:xfrm>
-          <a:prstGeom prst="rect">
-            <a:avLst/>
-          </a:prstGeom>
-          <a:solidFill>
-            <a:srgbClr val="903063"/>
-          </a:solidFill>
-        </p:spPr>
-        <p:txBody>
-          <a:bodyPr wrap="square" rtlCol="0">
-            <a:spAutoFit/>
-          </a:bodyPr>
-          <a:lstStyle/>
-          <a:p>
-            <a:pPr algn="ctr"/>
-            <a:endParaRPr lang="en-IL" sz="700" dirty="0">
-              <a:solidFill>
-                <a:schemeClr val="bg1"/>
-              </a:solidFill>
-            </a:endParaRPr>
-          </a:p>
-          <a:p>
-            <a:pPr algn="ctr"/>
-            <a:r>
-              <a:rPr lang="en-IL" sz="1400" i="1" dirty="0">
-                <a:solidFill>
-                  <a:schemeClr val="bg1"/>
-                </a:solidFill>
-                <a:latin typeface="Abadi MT Condensed Light" panose="020B0306030101010103" pitchFamily="34" charset="77"/>
-                <a:ea typeface="Batang" panose="02030600000101010101" pitchFamily="18" charset="-127"/>
-                <a:cs typeface="Corsiva Hebrew" pitchFamily="2" charset="-79"/>
-              </a:rPr>
-              <a:t>Results</a:t>
-            </a:r>
-          </a:p>
-        </p:txBody>
-      </p:sp>
-      <p:sp>
-        <p:nvSpPr>
-          <p:cNvPr id="7" name="Title 1">
-            <a:extLst>
-              <a:ext uri="{FF2B5EF4-FFF2-40B4-BE49-F238E27FC236}">
-                <a16:creationId xmlns:a16="http://schemas.microsoft.com/office/drawing/2014/main" id="{536CA0E1-8570-4D19-76A9-3451F87062A2}"/>
-              </a:ext>
-            </a:extLst>
-          </p:cNvPr>
-          <p:cNvSpPr txBox="1">
-            <a:spLocks/>
-          </p:cNvSpPr>
-          <p:nvPr/>
-        </p:nvSpPr>
-        <p:spPr>
-          <a:xfrm>
-            <a:off x="1020801" y="822800"/>
-            <a:ext cx="10395551" cy="624060"/>
-          </a:xfrm>
-          <a:prstGeom prst="rect">
-            <a:avLst/>
-          </a:prstGeom>
-        </p:spPr>
-        <p:txBody>
-          <a:bodyPr vert="horz" lIns="91440" tIns="45720" rIns="91440" bIns="45720" rtlCol="0" anchor="b">
-            <a:normAutofit/>
-          </a:bodyPr>
-          <a:lstStyle>
-            <a:lvl1pPr algn="l" defTabSz="457200" rtl="0" eaLnBrk="1" latinLnBrk="0" hangingPunct="1">
-              <a:spcBef>
-                <a:spcPct val="0"/>
-              </a:spcBef>
-              <a:buNone/>
-              <a:defRPr sz="2800" b="0" kern="1200" cap="all">
-                <a:solidFill>
-                  <a:schemeClr val="bg1"/>
-                </a:solidFill>
-                <a:latin typeface="+mj-lt"/>
-                <a:ea typeface="+mj-ea"/>
-                <a:cs typeface="+mj-cs"/>
-              </a:defRPr>
-            </a:lvl1pPr>
-            <a:lvl2pPr eaLnBrk="1" hangingPunct="1">
-              <a:defRPr>
-                <a:solidFill>
-                  <a:schemeClr val="tx2"/>
-                </a:solidFill>
-              </a:defRPr>
-            </a:lvl2pPr>
-            <a:lvl3pPr eaLnBrk="1" hangingPunct="1">
-              <a:defRPr>
-                <a:solidFill>
-                  <a:schemeClr val="tx2"/>
-                </a:solidFill>
-              </a:defRPr>
-            </a:lvl3pPr>
-            <a:lvl4pPr eaLnBrk="1" hangingPunct="1">
-              <a:defRPr>
-                <a:solidFill>
-                  <a:schemeClr val="tx2"/>
-                </a:solidFill>
-              </a:defRPr>
-            </a:lvl4pPr>
-            <a:lvl5pPr eaLnBrk="1" hangingPunct="1">
-              <a:defRPr>
-                <a:solidFill>
-                  <a:schemeClr val="tx2"/>
-                </a:solidFill>
-              </a:defRPr>
-            </a:lvl5pPr>
-            <a:lvl6pPr eaLnBrk="1" hangingPunct="1">
-              <a:defRPr>
-                <a:solidFill>
-                  <a:schemeClr val="tx2"/>
-                </a:solidFill>
-              </a:defRPr>
-            </a:lvl6pPr>
-            <a:lvl7pPr eaLnBrk="1" hangingPunct="1">
-              <a:defRPr>
-                <a:solidFill>
-                  <a:schemeClr val="tx2"/>
-                </a:solidFill>
-              </a:defRPr>
-            </a:lvl7pPr>
-            <a:lvl8pPr eaLnBrk="1" hangingPunct="1">
-              <a:defRPr>
-                <a:solidFill>
-                  <a:schemeClr val="tx2"/>
-                </a:solidFill>
-              </a:defRPr>
-            </a:lvl8pPr>
-            <a:lvl9pPr eaLnBrk="1" hangingPunct="1">
-              <a:defRPr>
-                <a:solidFill>
-                  <a:schemeClr val="tx2"/>
-                </a:solidFill>
-              </a:defRPr>
-            </a:lvl9pPr>
-          </a:lstStyle>
-          <a:p>
-            <a:r>
-              <a:rPr lang="en-US" dirty="0"/>
-              <a:t>which pathways are triggered?</a:t>
-            </a:r>
-          </a:p>
-        </p:txBody>
-      </p:sp>
-      <p:sp>
-        <p:nvSpPr>
-          <p:cNvPr id="13" name="TextBox 12">
-            <a:extLst>
-              <a:ext uri="{FF2B5EF4-FFF2-40B4-BE49-F238E27FC236}">
-                <a16:creationId xmlns:a16="http://schemas.microsoft.com/office/drawing/2014/main" id="{DE2D1785-4F39-48A7-21A4-CC375FCE1ADD}"/>
-              </a:ext>
-            </a:extLst>
-          </p:cNvPr>
-          <p:cNvSpPr txBox="1"/>
-          <p:nvPr/>
-        </p:nvSpPr>
-        <p:spPr>
-          <a:xfrm>
-            <a:off x="1826190" y="6035200"/>
-            <a:ext cx="9079595" cy="646331"/>
-          </a:xfrm>
-          <a:prstGeom prst="rect">
-            <a:avLst/>
-          </a:prstGeom>
-          <a:noFill/>
-        </p:spPr>
-        <p:txBody>
-          <a:bodyPr wrap="square" rtlCol="0">
-            <a:spAutoFit/>
-          </a:bodyPr>
-          <a:lstStyle/>
-          <a:p>
-            <a:pPr algn="ctr"/>
-            <a:r>
-              <a:rPr lang="en-US" dirty="0"/>
-              <a:t>When TP53 breaks and FGA is high, cell cycle control (E2F, G2-M) and growth signaling (PI3K/AKT/mTOR) pathways are the main downstream consequences</a:t>
-            </a:r>
-          </a:p>
-        </p:txBody>
-      </p:sp>
-      <p:pic>
-        <p:nvPicPr>
-          <p:cNvPr id="2" name="Picture 1">
-            <a:extLst>
-              <a:ext uri="{FF2B5EF4-FFF2-40B4-BE49-F238E27FC236}">
-                <a16:creationId xmlns:a16="http://schemas.microsoft.com/office/drawing/2014/main" id="{0B860F4F-D332-2A94-21C1-B599432884A2}"/>
-              </a:ext>
-            </a:extLst>
-          </p:cNvPr>
-          <p:cNvPicPr>
-            <a:picLocks noChangeAspect="1"/>
-          </p:cNvPicPr>
-          <p:nvPr/>
-        </p:nvPicPr>
-        <p:blipFill>
-          <a:blip r:embed="rId3"/>
-          <a:stretch>
-            <a:fillRect/>
-          </a:stretch>
-        </p:blipFill>
-        <p:spPr>
-          <a:xfrm>
-            <a:off x="1286215" y="2020945"/>
-            <a:ext cx="9619570" cy="3772530"/>
-          </a:xfrm>
-          <a:prstGeom prst="rect">
-            <a:avLst/>
-          </a:prstGeom>
-        </p:spPr>
-      </p:pic>
-    </p:spTree>
-    <p:extLst>
-      <p:ext uri="{BB962C8B-B14F-4D97-AF65-F5344CB8AC3E}">
-        <p14:creationId xmlns:p14="http://schemas.microsoft.com/office/powerpoint/2010/main" val="2378245227"/>
-      </p:ext>
-    </p:extLst>
-  </p:cSld>
-  <p:clrMapOvr>
-    <a:masterClrMapping/>
-  </p:clrMapOvr>
-</p:sld>
-</file>
-
-<file path=ppt/slides/slide18.xml><?xml version="1.0" encoding="utf-8"?>
+<file path=ppt/slides/slide15.xml><?xml version="1.0" encoding="utf-8"?>
 <p:sld xmlns:a="http://schemas.openxmlformats.org/drawingml/2006/main" xmlns:r="http://schemas.openxmlformats.org/officeDocument/2006/relationships" xmlns:p="http://schemas.openxmlformats.org/presentationml/2006/main">
   <p:cSld>
     <p:bg>
@@ -14506,7 +13405,7 @@
             </a:r>
             <a:r>
               <a:rPr lang="en-US" sz="2800" dirty="0"/>
-              <a:t>: once TP53 loses function, genomic chaos follows, but the </a:t>
+              <a:t>: once TP53 changes its function, genomic chaos follows, but the </a:t>
             </a:r>
             <a:r>
               <a:rPr lang="en-US" sz="2800" u="sng" dirty="0"/>
@@ -14574,10 +13473,180 @@
   <p:clrMapOvr>
     <a:masterClrMapping/>
   </p:clrMapOvr>
+  <p:timing>
+    <p:tnLst>
+      <p:par>
+        <p:cTn id="1" dur="indefinite" restart="never" nodeType="tmRoot">
+          <p:childTnLst>
+            <p:seq concurrent="1" nextAc="seek">
+              <p:cTn id="2" dur="indefinite" nodeType="mainSeq">
+                <p:childTnLst>
+                  <p:par>
+                    <p:cTn id="3" fill="hold">
+                      <p:stCondLst>
+                        <p:cond delay="indefinite"/>
+                      </p:stCondLst>
+                      <p:childTnLst>
+                        <p:par>
+                          <p:cTn id="4" fill="hold">
+                            <p:stCondLst>
+                              <p:cond delay="0"/>
+                            </p:stCondLst>
+                            <p:childTnLst>
+                              <p:par>
+                                <p:cTn id="5" presetID="1" presetClass="entr" presetSubtype="0" fill="hold" grpId="0" nodeType="clickEffect">
+                                  <p:stCondLst>
+                                    <p:cond delay="0"/>
+                                  </p:stCondLst>
+                                  <p:childTnLst>
+                                    <p:set>
+                                      <p:cBhvr>
+                                        <p:cTn id="6" dur="1" fill="hold">
+                                          <p:stCondLst>
+                                            <p:cond delay="0"/>
+                                          </p:stCondLst>
+                                        </p:cTn>
+                                        <p:tgtEl>
+                                          <p:spTgt spid="7"/>
+                                        </p:tgtEl>
+                                        <p:attrNameLst>
+                                          <p:attrName>style.visibility</p:attrName>
+                                        </p:attrNameLst>
+                                      </p:cBhvr>
+                                      <p:to>
+                                        <p:strVal val="visible"/>
+                                      </p:to>
+                                    </p:set>
+                                  </p:childTnLst>
+                                </p:cTn>
+                              </p:par>
+                            </p:childTnLst>
+                          </p:cTn>
+                        </p:par>
+                      </p:childTnLst>
+                    </p:cTn>
+                  </p:par>
+                  <p:par>
+                    <p:cTn id="7" fill="hold">
+                      <p:stCondLst>
+                        <p:cond delay="indefinite"/>
+                      </p:stCondLst>
+                      <p:childTnLst>
+                        <p:par>
+                          <p:cTn id="8" fill="hold">
+                            <p:stCondLst>
+                              <p:cond delay="0"/>
+                            </p:stCondLst>
+                            <p:childTnLst>
+                              <p:par>
+                                <p:cTn id="9" presetID="1" presetClass="entr" presetSubtype="0" fill="hold" grpId="0" nodeType="clickEffect">
+                                  <p:stCondLst>
+                                    <p:cond delay="0"/>
+                                  </p:stCondLst>
+                                  <p:childTnLst>
+                                    <p:set>
+                                      <p:cBhvr>
+                                        <p:cTn id="10" dur="1" fill="hold">
+                                          <p:stCondLst>
+                                            <p:cond delay="0"/>
+                                          </p:stCondLst>
+                                        </p:cTn>
+                                        <p:tgtEl>
+                                          <p:spTgt spid="8"/>
+                                        </p:tgtEl>
+                                        <p:attrNameLst>
+                                          <p:attrName>style.visibility</p:attrName>
+                                        </p:attrNameLst>
+                                      </p:cBhvr>
+                                      <p:to>
+                                        <p:strVal val="visible"/>
+                                      </p:to>
+                                    </p:set>
+                                  </p:childTnLst>
+                                </p:cTn>
+                              </p:par>
+                            </p:childTnLst>
+                          </p:cTn>
+                        </p:par>
+                      </p:childTnLst>
+                    </p:cTn>
+                  </p:par>
+                  <p:par>
+                    <p:cTn id="11" fill="hold">
+                      <p:stCondLst>
+                        <p:cond delay="indefinite"/>
+                      </p:stCondLst>
+                      <p:childTnLst>
+                        <p:par>
+                          <p:cTn id="12" fill="hold">
+                            <p:stCondLst>
+                              <p:cond delay="0"/>
+                            </p:stCondLst>
+                            <p:childTnLst>
+                              <p:par>
+                                <p:cTn id="13" presetID="1" presetClass="entr" presetSubtype="0" fill="hold" grpId="0" nodeType="clickEffect">
+                                  <p:stCondLst>
+                                    <p:cond delay="0"/>
+                                  </p:stCondLst>
+                                  <p:childTnLst>
+                                    <p:set>
+                                      <p:cBhvr>
+                                        <p:cTn id="14" dur="1" fill="hold">
+                                          <p:stCondLst>
+                                            <p:cond delay="0"/>
+                                          </p:stCondLst>
+                                        </p:cTn>
+                                        <p:tgtEl>
+                                          <p:spTgt spid="9"/>
+                                        </p:tgtEl>
+                                        <p:attrNameLst>
+                                          <p:attrName>style.visibility</p:attrName>
+                                        </p:attrNameLst>
+                                      </p:cBhvr>
+                                      <p:to>
+                                        <p:strVal val="visible"/>
+                                      </p:to>
+                                    </p:set>
+                                  </p:childTnLst>
+                                </p:cTn>
+                              </p:par>
+                            </p:childTnLst>
+                          </p:cTn>
+                        </p:par>
+                      </p:childTnLst>
+                    </p:cTn>
+                  </p:par>
+                </p:childTnLst>
+              </p:cTn>
+              <p:prevCondLst>
+                <p:cond evt="onPrev" delay="0">
+                  <p:tgtEl>
+                    <p:sldTgt/>
+                  </p:tgtEl>
+                </p:cond>
+              </p:prevCondLst>
+              <p:nextCondLst>
+                <p:cond evt="onNext" delay="0">
+                  <p:tgtEl>
+                    <p:sldTgt/>
+                  </p:tgtEl>
+                </p:cond>
+              </p:nextCondLst>
+            </p:seq>
+          </p:childTnLst>
+        </p:cTn>
+      </p:par>
+    </p:tnLst>
+    <p:bldLst>
+      <p:bldP spid="7" grpId="0"/>
+      <p:bldP spid="8" grpId="0"/>
+      <p:bldP spid="9" grpId="0"/>
+    </p:bldLst>
+  </p:timing>
 </p:sld>
 </file>
 
-<file path=ppt/slides/slide19.xml><?xml version="1.0" encoding="utf-8"?>
+<file path=ppt/slides/slide16.xml><?xml version="1.0" encoding="utf-8"?>
 <p:sld xmlns:a="http://schemas.openxmlformats.org/drawingml/2006/main" xmlns:r="http://schemas.openxmlformats.org/officeDocument/2006/relationships" xmlns:p="http://schemas.openxmlformats.org/presentationml/2006/main">
   <p:cSld>
     <p:bg>
@@ -14811,6 +13880,498 @@
     <p:extLst>
       <p:ext uri="{BB962C8B-B14F-4D97-AF65-F5344CB8AC3E}">
         <p14:creationId xmlns:p14="http://schemas.microsoft.com/office/powerpoint/2010/main" val="16790379"/>
+      </p:ext>
+    </p:extLst>
+  </p:cSld>
+  <p:clrMapOvr>
+    <a:masterClrMapping/>
+  </p:clrMapOvr>
+</p:sld>
+</file>
+
+<file path=ppt/slides/slide17.xml><?xml version="1.0" encoding="utf-8"?>
+<p:sld xmlns:a="http://schemas.openxmlformats.org/drawingml/2006/main" xmlns:r="http://schemas.openxmlformats.org/officeDocument/2006/relationships" xmlns:p="http://schemas.openxmlformats.org/presentationml/2006/main">
+  <p:cSld>
+    <p:bg>
+      <p:bgPr>
+        <a:solidFill>
+          <a:schemeClr val="bg1"/>
+        </a:solidFill>
+        <a:effectLst/>
+      </p:bgPr>
+    </p:bg>
+    <p:spTree>
+      <p:nvGrpSpPr>
+        <p:cNvPr id="1" name="">
+          <a:extLst>
+            <a:ext uri="{FF2B5EF4-FFF2-40B4-BE49-F238E27FC236}">
+              <a16:creationId xmlns:a16="http://schemas.microsoft.com/office/drawing/2014/main" id="{804B59AA-C2FC-5D5B-688C-2CB4457CBB3D}"/>
+            </a:ext>
+          </a:extLst>
+        </p:cNvPr>
+        <p:cNvGrpSpPr/>
+        <p:nvPr/>
+      </p:nvGrpSpPr>
+      <p:grpSpPr>
+        <a:xfrm>
+          <a:off x="0" y="0"/>
+          <a:ext cx="0" cy="0"/>
+          <a:chOff x="0" y="0"/>
+          <a:chExt cx="0" cy="0"/>
+        </a:xfrm>
+      </p:grpSpPr>
+      <p:sp>
+        <p:nvSpPr>
+          <p:cNvPr id="5" name="TextBox 4">
+            <a:extLst>
+              <a:ext uri="{FF2B5EF4-FFF2-40B4-BE49-F238E27FC236}">
+                <a16:creationId xmlns:a16="http://schemas.microsoft.com/office/drawing/2014/main" id="{C51EFF4C-6D0D-B1A7-7ACD-A1722EFC2D36}"/>
+              </a:ext>
+            </a:extLst>
+          </p:cNvPr>
+          <p:cNvSpPr txBox="1"/>
+          <p:nvPr/>
+        </p:nvSpPr>
+        <p:spPr>
+          <a:xfrm>
+            <a:off x="8043084" y="0"/>
+            <a:ext cx="3700815" cy="468000"/>
+          </a:xfrm>
+          <a:prstGeom prst="rect">
+            <a:avLst/>
+          </a:prstGeom>
+          <a:solidFill>
+            <a:srgbClr val="96A0A7"/>
+          </a:solidFill>
+        </p:spPr>
+        <p:txBody>
+          <a:bodyPr wrap="square" rtlCol="0">
+            <a:spAutoFit/>
+          </a:bodyPr>
+          <a:lstStyle/>
+          <a:p>
+            <a:pPr algn="ctr"/>
+            <a:endParaRPr lang="en-IL" sz="700" dirty="0">
+              <a:solidFill>
+                <a:schemeClr val="bg1"/>
+              </a:solidFill>
+            </a:endParaRPr>
+          </a:p>
+          <a:p>
+            <a:pPr algn="ctr"/>
+            <a:r>
+              <a:rPr lang="en-IL" sz="1400" i="1" dirty="0">
+                <a:solidFill>
+                  <a:schemeClr val="bg1"/>
+                </a:solidFill>
+                <a:latin typeface="Abadi MT Condensed Light" panose="020B0306030101010103" pitchFamily="34" charset="77"/>
+                <a:ea typeface="Batang" panose="02030600000101010101" pitchFamily="18" charset="-127"/>
+                <a:cs typeface="Corsiva Hebrew" pitchFamily="2" charset="-79"/>
+              </a:rPr>
+              <a:t>Discussion</a:t>
+            </a:r>
+          </a:p>
+        </p:txBody>
+      </p:sp>
+      <p:sp>
+        <p:nvSpPr>
+          <p:cNvPr id="3" name="Title 1">
+            <a:extLst>
+              <a:ext uri="{FF2B5EF4-FFF2-40B4-BE49-F238E27FC236}">
+                <a16:creationId xmlns:a16="http://schemas.microsoft.com/office/drawing/2014/main" id="{763DACFC-91D9-69A5-56DC-A764E8036EC8}"/>
+              </a:ext>
+            </a:extLst>
+          </p:cNvPr>
+          <p:cNvSpPr txBox="1">
+            <a:spLocks/>
+          </p:cNvSpPr>
+          <p:nvPr/>
+        </p:nvSpPr>
+        <p:spPr>
+          <a:xfrm>
+            <a:off x="1020801" y="822800"/>
+            <a:ext cx="10395551" cy="624060"/>
+          </a:xfrm>
+          <a:prstGeom prst="rect">
+            <a:avLst/>
+          </a:prstGeom>
+        </p:spPr>
+        <p:txBody>
+          <a:bodyPr vert="horz" lIns="91440" tIns="45720" rIns="91440" bIns="45720" rtlCol="0" anchor="b">
+            <a:normAutofit/>
+          </a:bodyPr>
+          <a:lstStyle>
+            <a:lvl1pPr algn="l" defTabSz="457200" rtl="0" eaLnBrk="1" latinLnBrk="0" hangingPunct="1">
+              <a:spcBef>
+                <a:spcPct val="0"/>
+              </a:spcBef>
+              <a:buNone/>
+              <a:defRPr sz="2800" b="0" kern="1200" cap="all">
+                <a:solidFill>
+                  <a:schemeClr val="bg1"/>
+                </a:solidFill>
+                <a:latin typeface="+mj-lt"/>
+                <a:ea typeface="+mj-ea"/>
+                <a:cs typeface="+mj-cs"/>
+              </a:defRPr>
+            </a:lvl1pPr>
+            <a:lvl2pPr eaLnBrk="1" hangingPunct="1">
+              <a:defRPr>
+                <a:solidFill>
+                  <a:schemeClr val="tx2"/>
+                </a:solidFill>
+              </a:defRPr>
+            </a:lvl2pPr>
+            <a:lvl3pPr eaLnBrk="1" hangingPunct="1">
+              <a:defRPr>
+                <a:solidFill>
+                  <a:schemeClr val="tx2"/>
+                </a:solidFill>
+              </a:defRPr>
+            </a:lvl3pPr>
+            <a:lvl4pPr eaLnBrk="1" hangingPunct="1">
+              <a:defRPr>
+                <a:solidFill>
+                  <a:schemeClr val="tx2"/>
+                </a:solidFill>
+              </a:defRPr>
+            </a:lvl4pPr>
+            <a:lvl5pPr eaLnBrk="1" hangingPunct="1">
+              <a:defRPr>
+                <a:solidFill>
+                  <a:schemeClr val="tx2"/>
+                </a:solidFill>
+              </a:defRPr>
+            </a:lvl5pPr>
+            <a:lvl6pPr eaLnBrk="1" hangingPunct="1">
+              <a:defRPr>
+                <a:solidFill>
+                  <a:schemeClr val="tx2"/>
+                </a:solidFill>
+              </a:defRPr>
+            </a:lvl6pPr>
+            <a:lvl7pPr eaLnBrk="1" hangingPunct="1">
+              <a:defRPr>
+                <a:solidFill>
+                  <a:schemeClr val="tx2"/>
+                </a:solidFill>
+              </a:defRPr>
+            </a:lvl7pPr>
+            <a:lvl8pPr eaLnBrk="1" hangingPunct="1">
+              <a:defRPr>
+                <a:solidFill>
+                  <a:schemeClr val="tx2"/>
+                </a:solidFill>
+              </a:defRPr>
+            </a:lvl8pPr>
+            <a:lvl9pPr eaLnBrk="1" hangingPunct="1">
+              <a:defRPr>
+                <a:solidFill>
+                  <a:schemeClr val="tx2"/>
+                </a:solidFill>
+              </a:defRPr>
+            </a:lvl9pPr>
+          </a:lstStyle>
+          <a:p>
+            <a:r>
+              <a:rPr lang="en-US" dirty="0"/>
+              <a:t>Constrains and future directions</a:t>
+            </a:r>
+          </a:p>
+        </p:txBody>
+      </p:sp>
+      <p:sp>
+        <p:nvSpPr>
+          <p:cNvPr id="7" name="TextBox 6">
+            <a:extLst>
+              <a:ext uri="{FF2B5EF4-FFF2-40B4-BE49-F238E27FC236}">
+                <a16:creationId xmlns:a16="http://schemas.microsoft.com/office/drawing/2014/main" id="{B5508A9F-418E-84DC-5FE9-AABEE2687AFA}"/>
+              </a:ext>
+            </a:extLst>
+          </p:cNvPr>
+          <p:cNvSpPr txBox="1"/>
+          <p:nvPr/>
+        </p:nvSpPr>
+        <p:spPr>
+          <a:xfrm>
+            <a:off x="1020801" y="2333767"/>
+            <a:ext cx="9931527" cy="954107"/>
+          </a:xfrm>
+          <a:prstGeom prst="rect">
+            <a:avLst/>
+          </a:prstGeom>
+          <a:noFill/>
+        </p:spPr>
+        <p:txBody>
+          <a:bodyPr wrap="square" rtlCol="0">
+            <a:spAutoFit/>
+          </a:bodyPr>
+          <a:lstStyle/>
+          <a:p>
+            <a:pPr marL="285750" indent="-285750">
+              <a:buFont typeface="Wingdings" pitchFamily="2" charset="2"/>
+              <a:buChar char="Ø"/>
+            </a:pPr>
+            <a:r>
+              <a:rPr lang="en-US" sz="2800" dirty="0"/>
+              <a:t>EFS derived from one lung cell line. That may not generalize across tissues</a:t>
+            </a:r>
+          </a:p>
+        </p:txBody>
+      </p:sp>
+      <p:sp>
+        <p:nvSpPr>
+          <p:cNvPr id="2" name="TextBox 1">
+            <a:extLst>
+              <a:ext uri="{FF2B5EF4-FFF2-40B4-BE49-F238E27FC236}">
+                <a16:creationId xmlns:a16="http://schemas.microsoft.com/office/drawing/2014/main" id="{5B443CA9-DD0B-9E6C-F746-8A4B863685D0}"/>
+              </a:ext>
+            </a:extLst>
+          </p:cNvPr>
+          <p:cNvSpPr txBox="1"/>
+          <p:nvPr/>
+        </p:nvSpPr>
+        <p:spPr>
+          <a:xfrm>
+            <a:off x="1020801" y="3570127"/>
+            <a:ext cx="9931527" cy="954107"/>
+          </a:xfrm>
+          <a:prstGeom prst="rect">
+            <a:avLst/>
+          </a:prstGeom>
+          <a:noFill/>
+        </p:spPr>
+        <p:txBody>
+          <a:bodyPr wrap="square" rtlCol="0">
+            <a:spAutoFit/>
+          </a:bodyPr>
+          <a:lstStyle/>
+          <a:p>
+            <a:pPr marL="285750" indent="-285750">
+              <a:buFont typeface="Wingdings" pitchFamily="2" charset="2"/>
+              <a:buChar char="Ø"/>
+            </a:pPr>
+            <a:r>
+              <a:rPr lang="en-US" sz="2800" dirty="0"/>
+              <a:t>FGA is a bulk measure, and it doesn’t capture which specific chromosomal regions break</a:t>
+            </a:r>
+          </a:p>
+        </p:txBody>
+      </p:sp>
+    </p:spTree>
+    <p:extLst>
+      <p:ext uri="{BB962C8B-B14F-4D97-AF65-F5344CB8AC3E}">
+        <p14:creationId xmlns:p14="http://schemas.microsoft.com/office/powerpoint/2010/main" val="1871680158"/>
+      </p:ext>
+    </p:extLst>
+  </p:cSld>
+  <p:clrMapOvr>
+    <a:masterClrMapping/>
+  </p:clrMapOvr>
+  <p:timing>
+    <p:tnLst>
+      <p:par>
+        <p:cTn id="1" dur="indefinite" restart="never" nodeType="tmRoot">
+          <p:childTnLst>
+            <p:seq concurrent="1" nextAc="seek">
+              <p:cTn id="2" dur="indefinite" nodeType="mainSeq">
+                <p:childTnLst>
+                  <p:par>
+                    <p:cTn id="3" fill="hold">
+                      <p:stCondLst>
+                        <p:cond delay="indefinite"/>
+                      </p:stCondLst>
+                      <p:childTnLst>
+                        <p:par>
+                          <p:cTn id="4" fill="hold">
+                            <p:stCondLst>
+                              <p:cond delay="0"/>
+                            </p:stCondLst>
+                            <p:childTnLst>
+                              <p:par>
+                                <p:cTn id="5" presetID="1" presetClass="entr" presetSubtype="0" fill="hold" grpId="0" nodeType="clickEffect">
+                                  <p:stCondLst>
+                                    <p:cond delay="0"/>
+                                  </p:stCondLst>
+                                  <p:childTnLst>
+                                    <p:set>
+                                      <p:cBhvr>
+                                        <p:cTn id="6" dur="1" fill="hold">
+                                          <p:stCondLst>
+                                            <p:cond delay="0"/>
+                                          </p:stCondLst>
+                                        </p:cTn>
+                                        <p:tgtEl>
+                                          <p:spTgt spid="7"/>
+                                        </p:tgtEl>
+                                        <p:attrNameLst>
+                                          <p:attrName>style.visibility</p:attrName>
+                                        </p:attrNameLst>
+                                      </p:cBhvr>
+                                      <p:to>
+                                        <p:strVal val="visible"/>
+                                      </p:to>
+                                    </p:set>
+                                  </p:childTnLst>
+                                </p:cTn>
+                              </p:par>
+                            </p:childTnLst>
+                          </p:cTn>
+                        </p:par>
+                      </p:childTnLst>
+                    </p:cTn>
+                  </p:par>
+                  <p:par>
+                    <p:cTn id="7" fill="hold">
+                      <p:stCondLst>
+                        <p:cond delay="indefinite"/>
+                      </p:stCondLst>
+                      <p:childTnLst>
+                        <p:par>
+                          <p:cTn id="8" fill="hold">
+                            <p:stCondLst>
+                              <p:cond delay="0"/>
+                            </p:stCondLst>
+                            <p:childTnLst>
+                              <p:par>
+                                <p:cTn id="9" presetID="1" presetClass="entr" presetSubtype="0" fill="hold" grpId="0" nodeType="clickEffect">
+                                  <p:stCondLst>
+                                    <p:cond delay="0"/>
+                                  </p:stCondLst>
+                                  <p:childTnLst>
+                                    <p:set>
+                                      <p:cBhvr>
+                                        <p:cTn id="10" dur="1" fill="hold">
+                                          <p:stCondLst>
+                                            <p:cond delay="0"/>
+                                          </p:stCondLst>
+                                        </p:cTn>
+                                        <p:tgtEl>
+                                          <p:spTgt spid="2"/>
+                                        </p:tgtEl>
+                                        <p:attrNameLst>
+                                          <p:attrName>style.visibility</p:attrName>
+                                        </p:attrNameLst>
+                                      </p:cBhvr>
+                                      <p:to>
+                                        <p:strVal val="visible"/>
+                                      </p:to>
+                                    </p:set>
+                                  </p:childTnLst>
+                                </p:cTn>
+                              </p:par>
+                            </p:childTnLst>
+                          </p:cTn>
+                        </p:par>
+                      </p:childTnLst>
+                    </p:cTn>
+                  </p:par>
+                </p:childTnLst>
+              </p:cTn>
+              <p:prevCondLst>
+                <p:cond evt="onPrev" delay="0">
+                  <p:tgtEl>
+                    <p:sldTgt/>
+                  </p:tgtEl>
+                </p:cond>
+              </p:prevCondLst>
+              <p:nextCondLst>
+                <p:cond evt="onNext" delay="0">
+                  <p:tgtEl>
+                    <p:sldTgt/>
+                  </p:tgtEl>
+                </p:cond>
+              </p:nextCondLst>
+            </p:seq>
+          </p:childTnLst>
+        </p:cTn>
+      </p:par>
+    </p:tnLst>
+    <p:bldLst>
+      <p:bldP spid="7" grpId="0"/>
+      <p:bldP spid="2" grpId="0"/>
+    </p:bldLst>
+  </p:timing>
+</p:sld>
+</file>
+
+<file path=ppt/slides/slide18.xml><?xml version="1.0" encoding="utf-8"?>
+<p:sld xmlns:a="http://schemas.openxmlformats.org/drawingml/2006/main" xmlns:r="http://schemas.openxmlformats.org/officeDocument/2006/relationships" xmlns:p="http://schemas.openxmlformats.org/presentationml/2006/main">
+  <p:cSld>
+    <p:bg>
+      <p:bgPr>
+        <a:solidFill>
+          <a:schemeClr val="bg1"/>
+        </a:solidFill>
+        <a:effectLst/>
+      </p:bgPr>
+    </p:bg>
+    <p:spTree>
+      <p:nvGrpSpPr>
+        <p:cNvPr id="1" name="">
+          <a:extLst>
+            <a:ext uri="{FF2B5EF4-FFF2-40B4-BE49-F238E27FC236}">
+              <a16:creationId xmlns:a16="http://schemas.microsoft.com/office/drawing/2014/main" id="{0C7B6FD1-38A4-D753-E777-86AD4369D57A}"/>
+            </a:ext>
+          </a:extLst>
+        </p:cNvPr>
+        <p:cNvGrpSpPr/>
+        <p:nvPr/>
+      </p:nvGrpSpPr>
+      <p:grpSpPr>
+        <a:xfrm>
+          <a:off x="0" y="0"/>
+          <a:ext cx="0" cy="0"/>
+          <a:chOff x="0" y="0"/>
+          <a:chExt cx="0" cy="0"/>
+        </a:xfrm>
+      </p:grpSpPr>
+      <p:sp>
+        <p:nvSpPr>
+          <p:cNvPr id="2" name="Title 1">
+            <a:extLst>
+              <a:ext uri="{FF2B5EF4-FFF2-40B4-BE49-F238E27FC236}">
+                <a16:creationId xmlns:a16="http://schemas.microsoft.com/office/drawing/2014/main" id="{42BE7E1C-DBED-BE8A-25C1-FF54E557790A}"/>
+              </a:ext>
+            </a:extLst>
+          </p:cNvPr>
+          <p:cNvSpPr>
+            <a:spLocks noGrp="1"/>
+          </p:cNvSpPr>
+          <p:nvPr>
+            <p:ph type="ctrTitle"/>
+          </p:nvPr>
+        </p:nvSpPr>
+        <p:spPr>
+          <a:xfrm>
+            <a:off x="1852977" y="378485"/>
+            <a:ext cx="8486046" cy="2876471"/>
+          </a:xfrm>
+        </p:spPr>
+        <p:txBody>
+          <a:bodyPr anchor="ctr">
+            <a:normAutofit/>
+          </a:bodyPr>
+          <a:lstStyle/>
+          <a:p>
+            <a:pPr algn="ctr"/>
+            <a:r>
+              <a:rPr lang="en-US" dirty="0">
+                <a:solidFill>
+                  <a:schemeClr val="accent1">
+                    <a:lumMod val="50000"/>
+                  </a:schemeClr>
+                </a:solidFill>
+              </a:rPr>
+              <a:t>Thank you!</a:t>
+            </a:r>
+          </a:p>
+        </p:txBody>
+      </p:sp>
+    </p:spTree>
+    <p:extLst>
+      <p:ext uri="{BB962C8B-B14F-4D97-AF65-F5344CB8AC3E}">
+        <p14:creationId xmlns:p14="http://schemas.microsoft.com/office/powerpoint/2010/main" val="3900602769"/>
       </p:ext>
     </p:extLst>
   </p:cSld>
@@ -15451,614 +15012,6 @@
 </p:sld>
 </file>
 
-<file path=ppt/slides/slide20.xml><?xml version="1.0" encoding="utf-8"?>
-<p:sld xmlns:a="http://schemas.openxmlformats.org/drawingml/2006/main" xmlns:r="http://schemas.openxmlformats.org/officeDocument/2006/relationships" xmlns:p="http://schemas.openxmlformats.org/presentationml/2006/main">
-  <p:cSld>
-    <p:bg>
-      <p:bgPr>
-        <a:solidFill>
-          <a:schemeClr val="bg1"/>
-        </a:solidFill>
-        <a:effectLst/>
-      </p:bgPr>
-    </p:bg>
-    <p:spTree>
-      <p:nvGrpSpPr>
-        <p:cNvPr id="1" name="">
-          <a:extLst>
-            <a:ext uri="{FF2B5EF4-FFF2-40B4-BE49-F238E27FC236}">
-              <a16:creationId xmlns:a16="http://schemas.microsoft.com/office/drawing/2014/main" id="{804B59AA-C2FC-5D5B-688C-2CB4457CBB3D}"/>
-            </a:ext>
-          </a:extLst>
-        </p:cNvPr>
-        <p:cNvGrpSpPr/>
-        <p:nvPr/>
-      </p:nvGrpSpPr>
-      <p:grpSpPr>
-        <a:xfrm>
-          <a:off x="0" y="0"/>
-          <a:ext cx="0" cy="0"/>
-          <a:chOff x="0" y="0"/>
-          <a:chExt cx="0" cy="0"/>
-        </a:xfrm>
-      </p:grpSpPr>
-      <p:sp>
-        <p:nvSpPr>
-          <p:cNvPr id="5" name="TextBox 4">
-            <a:extLst>
-              <a:ext uri="{FF2B5EF4-FFF2-40B4-BE49-F238E27FC236}">
-                <a16:creationId xmlns:a16="http://schemas.microsoft.com/office/drawing/2014/main" id="{C51EFF4C-6D0D-B1A7-7ACD-A1722EFC2D36}"/>
-              </a:ext>
-            </a:extLst>
-          </p:cNvPr>
-          <p:cNvSpPr txBox="1"/>
-          <p:nvPr/>
-        </p:nvSpPr>
-        <p:spPr>
-          <a:xfrm>
-            <a:off x="8043084" y="0"/>
-            <a:ext cx="3700815" cy="468000"/>
-          </a:xfrm>
-          <a:prstGeom prst="rect">
-            <a:avLst/>
-          </a:prstGeom>
-          <a:solidFill>
-            <a:srgbClr val="96A0A7"/>
-          </a:solidFill>
-        </p:spPr>
-        <p:txBody>
-          <a:bodyPr wrap="square" rtlCol="0">
-            <a:spAutoFit/>
-          </a:bodyPr>
-          <a:lstStyle/>
-          <a:p>
-            <a:pPr algn="ctr"/>
-            <a:endParaRPr lang="en-IL" sz="700" dirty="0">
-              <a:solidFill>
-                <a:schemeClr val="bg1"/>
-              </a:solidFill>
-            </a:endParaRPr>
-          </a:p>
-          <a:p>
-            <a:pPr algn="ctr"/>
-            <a:r>
-              <a:rPr lang="en-IL" sz="1400" i="1" dirty="0">
-                <a:solidFill>
-                  <a:schemeClr val="bg1"/>
-                </a:solidFill>
-                <a:latin typeface="Abadi MT Condensed Light" panose="020B0306030101010103" pitchFamily="34" charset="77"/>
-                <a:ea typeface="Batang" panose="02030600000101010101" pitchFamily="18" charset="-127"/>
-                <a:cs typeface="Corsiva Hebrew" pitchFamily="2" charset="-79"/>
-              </a:rPr>
-              <a:t>Discussion</a:t>
-            </a:r>
-          </a:p>
-        </p:txBody>
-      </p:sp>
-      <p:sp>
-        <p:nvSpPr>
-          <p:cNvPr id="3" name="Title 1">
-            <a:extLst>
-              <a:ext uri="{FF2B5EF4-FFF2-40B4-BE49-F238E27FC236}">
-                <a16:creationId xmlns:a16="http://schemas.microsoft.com/office/drawing/2014/main" id="{763DACFC-91D9-69A5-56DC-A764E8036EC8}"/>
-              </a:ext>
-            </a:extLst>
-          </p:cNvPr>
-          <p:cNvSpPr txBox="1">
-            <a:spLocks/>
-          </p:cNvSpPr>
-          <p:nvPr/>
-        </p:nvSpPr>
-        <p:spPr>
-          <a:xfrm>
-            <a:off x="1020801" y="822800"/>
-            <a:ext cx="10395551" cy="624060"/>
-          </a:xfrm>
-          <a:prstGeom prst="rect">
-            <a:avLst/>
-          </a:prstGeom>
-        </p:spPr>
-        <p:txBody>
-          <a:bodyPr vert="horz" lIns="91440" tIns="45720" rIns="91440" bIns="45720" rtlCol="0" anchor="b">
-            <a:normAutofit/>
-          </a:bodyPr>
-          <a:lstStyle>
-            <a:lvl1pPr algn="l" defTabSz="457200" rtl="0" eaLnBrk="1" latinLnBrk="0" hangingPunct="1">
-              <a:spcBef>
-                <a:spcPct val="0"/>
-              </a:spcBef>
-              <a:buNone/>
-              <a:defRPr sz="2800" b="0" kern="1200" cap="all">
-                <a:solidFill>
-                  <a:schemeClr val="bg1"/>
-                </a:solidFill>
-                <a:latin typeface="+mj-lt"/>
-                <a:ea typeface="+mj-ea"/>
-                <a:cs typeface="+mj-cs"/>
-              </a:defRPr>
-            </a:lvl1pPr>
-            <a:lvl2pPr eaLnBrk="1" hangingPunct="1">
-              <a:defRPr>
-                <a:solidFill>
-                  <a:schemeClr val="tx2"/>
-                </a:solidFill>
-              </a:defRPr>
-            </a:lvl2pPr>
-            <a:lvl3pPr eaLnBrk="1" hangingPunct="1">
-              <a:defRPr>
-                <a:solidFill>
-                  <a:schemeClr val="tx2"/>
-                </a:solidFill>
-              </a:defRPr>
-            </a:lvl3pPr>
-            <a:lvl4pPr eaLnBrk="1" hangingPunct="1">
-              <a:defRPr>
-                <a:solidFill>
-                  <a:schemeClr val="tx2"/>
-                </a:solidFill>
-              </a:defRPr>
-            </a:lvl4pPr>
-            <a:lvl5pPr eaLnBrk="1" hangingPunct="1">
-              <a:defRPr>
-                <a:solidFill>
-                  <a:schemeClr val="tx2"/>
-                </a:solidFill>
-              </a:defRPr>
-            </a:lvl5pPr>
-            <a:lvl6pPr eaLnBrk="1" hangingPunct="1">
-              <a:defRPr>
-                <a:solidFill>
-                  <a:schemeClr val="tx2"/>
-                </a:solidFill>
-              </a:defRPr>
-            </a:lvl6pPr>
-            <a:lvl7pPr eaLnBrk="1" hangingPunct="1">
-              <a:defRPr>
-                <a:solidFill>
-                  <a:schemeClr val="tx2"/>
-                </a:solidFill>
-              </a:defRPr>
-            </a:lvl7pPr>
-            <a:lvl8pPr eaLnBrk="1" hangingPunct="1">
-              <a:defRPr>
-                <a:solidFill>
-                  <a:schemeClr val="tx2"/>
-                </a:solidFill>
-              </a:defRPr>
-            </a:lvl8pPr>
-            <a:lvl9pPr eaLnBrk="1" hangingPunct="1">
-              <a:defRPr>
-                <a:solidFill>
-                  <a:schemeClr val="tx2"/>
-                </a:solidFill>
-              </a:defRPr>
-            </a:lvl9pPr>
-          </a:lstStyle>
-          <a:p>
-            <a:r>
-              <a:rPr lang="en-US" dirty="0"/>
-              <a:t>Conclusions</a:t>
-            </a:r>
-          </a:p>
-        </p:txBody>
-      </p:sp>
-      <p:sp>
-        <p:nvSpPr>
-          <p:cNvPr id="7" name="TextBox 6">
-            <a:extLst>
-              <a:ext uri="{FF2B5EF4-FFF2-40B4-BE49-F238E27FC236}">
-                <a16:creationId xmlns:a16="http://schemas.microsoft.com/office/drawing/2014/main" id="{B5508A9F-418E-84DC-5FE9-AABEE2687AFA}"/>
-              </a:ext>
-            </a:extLst>
-          </p:cNvPr>
-          <p:cNvSpPr txBox="1"/>
-          <p:nvPr/>
-        </p:nvSpPr>
-        <p:spPr>
-          <a:xfrm>
-            <a:off x="1020801" y="2333767"/>
-            <a:ext cx="9931527" cy="954107"/>
-          </a:xfrm>
-          <a:prstGeom prst="rect">
-            <a:avLst/>
-          </a:prstGeom>
-          <a:noFill/>
-        </p:spPr>
-        <p:txBody>
-          <a:bodyPr wrap="square" rtlCol="0">
-            <a:spAutoFit/>
-          </a:bodyPr>
-          <a:lstStyle/>
-          <a:p>
-            <a:pPr marL="285750" indent="-285750">
-              <a:buFont typeface="Wingdings" pitchFamily="2" charset="2"/>
-              <a:buChar char="Ø"/>
-            </a:pPr>
-            <a:r>
-              <a:rPr lang="en-US" sz="2800" dirty="0"/>
-              <a:t>EFS derived from one lung cell line. That may not generalize across tissues</a:t>
-            </a:r>
-          </a:p>
-        </p:txBody>
-      </p:sp>
-      <p:sp>
-        <p:nvSpPr>
-          <p:cNvPr id="2" name="TextBox 1">
-            <a:extLst>
-              <a:ext uri="{FF2B5EF4-FFF2-40B4-BE49-F238E27FC236}">
-                <a16:creationId xmlns:a16="http://schemas.microsoft.com/office/drawing/2014/main" id="{5B443CA9-DD0B-9E6C-F746-8A4B863685D0}"/>
-              </a:ext>
-            </a:extLst>
-          </p:cNvPr>
-          <p:cNvSpPr txBox="1"/>
-          <p:nvPr/>
-        </p:nvSpPr>
-        <p:spPr>
-          <a:xfrm>
-            <a:off x="1020801" y="3570127"/>
-            <a:ext cx="9931527" cy="954107"/>
-          </a:xfrm>
-          <a:prstGeom prst="rect">
-            <a:avLst/>
-          </a:prstGeom>
-          <a:noFill/>
-        </p:spPr>
-        <p:txBody>
-          <a:bodyPr wrap="square" rtlCol="0">
-            <a:spAutoFit/>
-          </a:bodyPr>
-          <a:lstStyle/>
-          <a:p>
-            <a:pPr marL="285750" indent="-285750">
-              <a:buFont typeface="Wingdings" pitchFamily="2" charset="2"/>
-              <a:buChar char="Ø"/>
-            </a:pPr>
-            <a:r>
-              <a:rPr lang="en-US" sz="2800" dirty="0"/>
-              <a:t>FGA is a bulk measure, and it doesn’t capture which specific chromosomal regions break</a:t>
-            </a:r>
-          </a:p>
-        </p:txBody>
-      </p:sp>
-    </p:spTree>
-    <p:extLst>
-      <p:ext uri="{BB962C8B-B14F-4D97-AF65-F5344CB8AC3E}">
-        <p14:creationId xmlns:p14="http://schemas.microsoft.com/office/powerpoint/2010/main" val="1871680158"/>
-      </p:ext>
-    </p:extLst>
-  </p:cSld>
-  <p:clrMapOvr>
-    <a:masterClrMapping/>
-  </p:clrMapOvr>
-</p:sld>
-</file>
-
-<file path=ppt/slides/slide21.xml><?xml version="1.0" encoding="utf-8"?>
-<p:sld xmlns:a="http://schemas.openxmlformats.org/drawingml/2006/main" xmlns:r="http://schemas.openxmlformats.org/officeDocument/2006/relationships" xmlns:p="http://schemas.openxmlformats.org/presentationml/2006/main">
-  <p:cSld>
-    <p:bg>
-      <p:bgPr>
-        <a:solidFill>
-          <a:schemeClr val="bg1"/>
-        </a:solidFill>
-        <a:effectLst/>
-      </p:bgPr>
-    </p:bg>
-    <p:spTree>
-      <p:nvGrpSpPr>
-        <p:cNvPr id="1" name="">
-          <a:extLst>
-            <a:ext uri="{FF2B5EF4-FFF2-40B4-BE49-F238E27FC236}">
-              <a16:creationId xmlns:a16="http://schemas.microsoft.com/office/drawing/2014/main" id="{C4659005-9761-7A24-3731-DDAE032BB353}"/>
-            </a:ext>
-          </a:extLst>
-        </p:cNvPr>
-        <p:cNvGrpSpPr/>
-        <p:nvPr/>
-      </p:nvGrpSpPr>
-      <p:grpSpPr>
-        <a:xfrm>
-          <a:off x="0" y="0"/>
-          <a:ext cx="0" cy="0"/>
-          <a:chOff x="0" y="0"/>
-          <a:chExt cx="0" cy="0"/>
-        </a:xfrm>
-      </p:grpSpPr>
-      <p:sp>
-        <p:nvSpPr>
-          <p:cNvPr id="5" name="TextBox 4">
-            <a:extLst>
-              <a:ext uri="{FF2B5EF4-FFF2-40B4-BE49-F238E27FC236}">
-                <a16:creationId xmlns:a16="http://schemas.microsoft.com/office/drawing/2014/main" id="{9D08189D-EE63-A69D-B4E2-FAAF437EAC02}"/>
-              </a:ext>
-            </a:extLst>
-          </p:cNvPr>
-          <p:cNvSpPr txBox="1"/>
-          <p:nvPr/>
-        </p:nvSpPr>
-        <p:spPr>
-          <a:xfrm>
-            <a:off x="8043084" y="0"/>
-            <a:ext cx="3700815" cy="468000"/>
-          </a:xfrm>
-          <a:prstGeom prst="rect">
-            <a:avLst/>
-          </a:prstGeom>
-          <a:solidFill>
-            <a:srgbClr val="96A0A7"/>
-          </a:solidFill>
-        </p:spPr>
-        <p:txBody>
-          <a:bodyPr wrap="square" rtlCol="0">
-            <a:spAutoFit/>
-          </a:bodyPr>
-          <a:lstStyle/>
-          <a:p>
-            <a:pPr algn="ctr"/>
-            <a:endParaRPr lang="en-IL" sz="700" dirty="0">
-              <a:solidFill>
-                <a:schemeClr val="bg1"/>
-              </a:solidFill>
-            </a:endParaRPr>
-          </a:p>
-          <a:p>
-            <a:pPr algn="ctr"/>
-            <a:r>
-              <a:rPr lang="en-IL" sz="1400" i="1" dirty="0">
-                <a:solidFill>
-                  <a:schemeClr val="bg1"/>
-                </a:solidFill>
-                <a:latin typeface="Abadi MT Condensed Light" panose="020B0306030101010103" pitchFamily="34" charset="77"/>
-                <a:ea typeface="Batang" panose="02030600000101010101" pitchFamily="18" charset="-127"/>
-                <a:cs typeface="Corsiva Hebrew" pitchFamily="2" charset="-79"/>
-              </a:rPr>
-              <a:t>Discussion</a:t>
-            </a:r>
-          </a:p>
-        </p:txBody>
-      </p:sp>
-      <p:sp>
-        <p:nvSpPr>
-          <p:cNvPr id="3" name="Title 1">
-            <a:extLst>
-              <a:ext uri="{FF2B5EF4-FFF2-40B4-BE49-F238E27FC236}">
-                <a16:creationId xmlns:a16="http://schemas.microsoft.com/office/drawing/2014/main" id="{2315B551-78A5-80AC-8BF1-AFBB22F5C9A4}"/>
-              </a:ext>
-            </a:extLst>
-          </p:cNvPr>
-          <p:cNvSpPr txBox="1">
-            <a:spLocks/>
-          </p:cNvSpPr>
-          <p:nvPr/>
-        </p:nvSpPr>
-        <p:spPr>
-          <a:xfrm>
-            <a:off x="1020801" y="822800"/>
-            <a:ext cx="10395551" cy="624060"/>
-          </a:xfrm>
-          <a:prstGeom prst="rect">
-            <a:avLst/>
-          </a:prstGeom>
-        </p:spPr>
-        <p:txBody>
-          <a:bodyPr vert="horz" lIns="91440" tIns="45720" rIns="91440" bIns="45720" rtlCol="0" anchor="b">
-            <a:normAutofit/>
-          </a:bodyPr>
-          <a:lstStyle>
-            <a:lvl1pPr algn="l" defTabSz="457200" rtl="0" eaLnBrk="1" latinLnBrk="0" hangingPunct="1">
-              <a:spcBef>
-                <a:spcPct val="0"/>
-              </a:spcBef>
-              <a:buNone/>
-              <a:defRPr sz="2800" b="0" kern="1200" cap="all">
-                <a:solidFill>
-                  <a:schemeClr val="bg1"/>
-                </a:solidFill>
-                <a:latin typeface="+mj-lt"/>
-                <a:ea typeface="+mj-ea"/>
-                <a:cs typeface="+mj-cs"/>
-              </a:defRPr>
-            </a:lvl1pPr>
-            <a:lvl2pPr eaLnBrk="1" hangingPunct="1">
-              <a:defRPr>
-                <a:solidFill>
-                  <a:schemeClr val="tx2"/>
-                </a:solidFill>
-              </a:defRPr>
-            </a:lvl2pPr>
-            <a:lvl3pPr eaLnBrk="1" hangingPunct="1">
-              <a:defRPr>
-                <a:solidFill>
-                  <a:schemeClr val="tx2"/>
-                </a:solidFill>
-              </a:defRPr>
-            </a:lvl3pPr>
-            <a:lvl4pPr eaLnBrk="1" hangingPunct="1">
-              <a:defRPr>
-                <a:solidFill>
-                  <a:schemeClr val="tx2"/>
-                </a:solidFill>
-              </a:defRPr>
-            </a:lvl4pPr>
-            <a:lvl5pPr eaLnBrk="1" hangingPunct="1">
-              <a:defRPr>
-                <a:solidFill>
-                  <a:schemeClr val="tx2"/>
-                </a:solidFill>
-              </a:defRPr>
-            </a:lvl5pPr>
-            <a:lvl6pPr eaLnBrk="1" hangingPunct="1">
-              <a:defRPr>
-                <a:solidFill>
-                  <a:schemeClr val="tx2"/>
-                </a:solidFill>
-              </a:defRPr>
-            </a:lvl6pPr>
-            <a:lvl7pPr eaLnBrk="1" hangingPunct="1">
-              <a:defRPr>
-                <a:solidFill>
-                  <a:schemeClr val="tx2"/>
-                </a:solidFill>
-              </a:defRPr>
-            </a:lvl7pPr>
-            <a:lvl8pPr eaLnBrk="1" hangingPunct="1">
-              <a:defRPr>
-                <a:solidFill>
-                  <a:schemeClr val="tx2"/>
-                </a:solidFill>
-              </a:defRPr>
-            </a:lvl8pPr>
-            <a:lvl9pPr eaLnBrk="1" hangingPunct="1">
-              <a:defRPr>
-                <a:solidFill>
-                  <a:schemeClr val="tx2"/>
-                </a:solidFill>
-              </a:defRPr>
-            </a:lvl9pPr>
-          </a:lstStyle>
-          <a:p>
-            <a:r>
-              <a:rPr lang="en-US" dirty="0"/>
-              <a:t>Conclusions</a:t>
-            </a:r>
-          </a:p>
-        </p:txBody>
-      </p:sp>
-      <p:sp>
-        <p:nvSpPr>
-          <p:cNvPr id="7" name="TextBox 6">
-            <a:extLst>
-              <a:ext uri="{FF2B5EF4-FFF2-40B4-BE49-F238E27FC236}">
-                <a16:creationId xmlns:a16="http://schemas.microsoft.com/office/drawing/2014/main" id="{515D867E-2040-5650-B54E-F434E6687274}"/>
-              </a:ext>
-            </a:extLst>
-          </p:cNvPr>
-          <p:cNvSpPr txBox="1"/>
-          <p:nvPr/>
-        </p:nvSpPr>
-        <p:spPr>
-          <a:xfrm>
-            <a:off x="1130236" y="2929190"/>
-            <a:ext cx="9931527" cy="1384995"/>
-          </a:xfrm>
-          <a:prstGeom prst="rect">
-            <a:avLst/>
-          </a:prstGeom>
-          <a:noFill/>
-        </p:spPr>
-        <p:txBody>
-          <a:bodyPr wrap="square" rtlCol="0">
-            <a:spAutoFit/>
-          </a:bodyPr>
-          <a:lstStyle/>
-          <a:p>
-            <a:pPr algn="ctr"/>
-            <a:r>
-              <a:rPr lang="en-US" sz="2800" dirty="0"/>
-              <a:t>TP53 loss drives genomic instability as a class effect, which in turn selectively amplifies oncogenic growth pathways, which explains why TP53 mutation is such a universal and aggressive cancer event.</a:t>
-            </a:r>
-          </a:p>
-        </p:txBody>
-      </p:sp>
-    </p:spTree>
-    <p:extLst>
-      <p:ext uri="{BB962C8B-B14F-4D97-AF65-F5344CB8AC3E}">
-        <p14:creationId xmlns:p14="http://schemas.microsoft.com/office/powerpoint/2010/main" val="1256860430"/>
-      </p:ext>
-    </p:extLst>
-  </p:cSld>
-  <p:clrMapOvr>
-    <a:masterClrMapping/>
-  </p:clrMapOvr>
-</p:sld>
-</file>
-
-<file path=ppt/slides/slide22.xml><?xml version="1.0" encoding="utf-8"?>
-<p:sld xmlns:a="http://schemas.openxmlformats.org/drawingml/2006/main" xmlns:r="http://schemas.openxmlformats.org/officeDocument/2006/relationships" xmlns:p="http://schemas.openxmlformats.org/presentationml/2006/main">
-  <p:cSld>
-    <p:bg>
-      <p:bgPr>
-        <a:solidFill>
-          <a:schemeClr val="bg1"/>
-        </a:solidFill>
-        <a:effectLst/>
-      </p:bgPr>
-    </p:bg>
-    <p:spTree>
-      <p:nvGrpSpPr>
-        <p:cNvPr id="1" name="">
-          <a:extLst>
-            <a:ext uri="{FF2B5EF4-FFF2-40B4-BE49-F238E27FC236}">
-              <a16:creationId xmlns:a16="http://schemas.microsoft.com/office/drawing/2014/main" id="{0C7B6FD1-38A4-D753-E777-86AD4369D57A}"/>
-            </a:ext>
-          </a:extLst>
-        </p:cNvPr>
-        <p:cNvGrpSpPr/>
-        <p:nvPr/>
-      </p:nvGrpSpPr>
-      <p:grpSpPr>
-        <a:xfrm>
-          <a:off x="0" y="0"/>
-          <a:ext cx="0" cy="0"/>
-          <a:chOff x="0" y="0"/>
-          <a:chExt cx="0" cy="0"/>
-        </a:xfrm>
-      </p:grpSpPr>
-      <p:sp>
-        <p:nvSpPr>
-          <p:cNvPr id="2" name="Title 1">
-            <a:extLst>
-              <a:ext uri="{FF2B5EF4-FFF2-40B4-BE49-F238E27FC236}">
-                <a16:creationId xmlns:a16="http://schemas.microsoft.com/office/drawing/2014/main" id="{42BE7E1C-DBED-BE8A-25C1-FF54E557790A}"/>
-              </a:ext>
-            </a:extLst>
-          </p:cNvPr>
-          <p:cNvSpPr>
-            <a:spLocks noGrp="1"/>
-          </p:cNvSpPr>
-          <p:nvPr>
-            <p:ph type="ctrTitle"/>
-          </p:nvPr>
-        </p:nvSpPr>
-        <p:spPr>
-          <a:xfrm>
-            <a:off x="1852977" y="378485"/>
-            <a:ext cx="8486046" cy="2876471"/>
-          </a:xfrm>
-        </p:spPr>
-        <p:txBody>
-          <a:bodyPr anchor="ctr">
-            <a:normAutofit/>
-          </a:bodyPr>
-          <a:lstStyle/>
-          <a:p>
-            <a:pPr algn="ctr"/>
-            <a:r>
-              <a:rPr lang="en-US" dirty="0">
-                <a:solidFill>
-                  <a:schemeClr val="accent1">
-                    <a:lumMod val="50000"/>
-                  </a:schemeClr>
-                </a:solidFill>
-              </a:rPr>
-              <a:t>Thank you!</a:t>
-            </a:r>
-          </a:p>
-        </p:txBody>
-      </p:sp>
-    </p:spTree>
-    <p:extLst>
-      <p:ext uri="{BB962C8B-B14F-4D97-AF65-F5344CB8AC3E}">
-        <p14:creationId xmlns:p14="http://schemas.microsoft.com/office/powerpoint/2010/main" val="3900602769"/>
-      </p:ext>
-    </p:extLst>
-  </p:cSld>
-  <p:clrMapOvr>
-    <a:masterClrMapping/>
-  </p:clrMapOvr>
-</p:sld>
-</file>
-
 <file path=ppt/slides/slide3.xml><?xml version="1.0" encoding="utf-8"?>
 <p:sld xmlns:a="http://schemas.openxmlformats.org/drawingml/2006/main" xmlns:r="http://schemas.openxmlformats.org/officeDocument/2006/relationships" xmlns:p="http://schemas.openxmlformats.org/presentationml/2006/main">
   <p:cSld>
@@ -16759,6 +15712,168 @@
   <p:clrMapOvr>
     <a:masterClrMapping/>
   </p:clrMapOvr>
+  <p:timing>
+    <p:tnLst>
+      <p:par>
+        <p:cTn id="1" dur="indefinite" restart="never" nodeType="tmRoot">
+          <p:childTnLst>
+            <p:seq concurrent="1" nextAc="seek">
+              <p:cTn id="2" dur="indefinite" nodeType="mainSeq">
+                <p:childTnLst>
+                  <p:par>
+                    <p:cTn id="3" fill="hold">
+                      <p:stCondLst>
+                        <p:cond delay="indefinite"/>
+                      </p:stCondLst>
+                      <p:childTnLst>
+                        <p:par>
+                          <p:cTn id="4" fill="hold">
+                            <p:stCondLst>
+                              <p:cond delay="0"/>
+                            </p:stCondLst>
+                            <p:childTnLst>
+                              <p:par>
+                                <p:cTn id="5" presetID="1" presetClass="entr" presetSubtype="0" fill="hold" grpId="0" nodeType="clickEffect">
+                                  <p:stCondLst>
+                                    <p:cond delay="0"/>
+                                  </p:stCondLst>
+                                  <p:childTnLst>
+                                    <p:set>
+                                      <p:cBhvr>
+                                        <p:cTn id="6" dur="1" fill="hold">
+                                          <p:stCondLst>
+                                            <p:cond delay="0"/>
+                                          </p:stCondLst>
+                                        </p:cTn>
+                                        <p:tgtEl>
+                                          <p:spTgt spid="10"/>
+                                        </p:tgtEl>
+                                        <p:attrNameLst>
+                                          <p:attrName>style.visibility</p:attrName>
+                                        </p:attrNameLst>
+                                      </p:cBhvr>
+                                      <p:to>
+                                        <p:strVal val="visible"/>
+                                      </p:to>
+                                    </p:set>
+                                  </p:childTnLst>
+                                </p:cTn>
+                              </p:par>
+                              <p:par>
+                                <p:cTn id="7" presetID="1" presetClass="entr" presetSubtype="0" fill="hold" grpId="0" nodeType="withEffect">
+                                  <p:stCondLst>
+                                    <p:cond delay="0"/>
+                                  </p:stCondLst>
+                                  <p:childTnLst>
+                                    <p:set>
+                                      <p:cBhvr>
+                                        <p:cTn id="8" dur="1" fill="hold">
+                                          <p:stCondLst>
+                                            <p:cond delay="0"/>
+                                          </p:stCondLst>
+                                        </p:cTn>
+                                        <p:tgtEl>
+                                          <p:spTgt spid="15"/>
+                                        </p:tgtEl>
+                                        <p:attrNameLst>
+                                          <p:attrName>style.visibility</p:attrName>
+                                        </p:attrNameLst>
+                                      </p:cBhvr>
+                                      <p:to>
+                                        <p:strVal val="visible"/>
+                                      </p:to>
+                                    </p:set>
+                                  </p:childTnLst>
+                                </p:cTn>
+                              </p:par>
+                              <p:par>
+                                <p:cTn id="9" presetID="1" presetClass="entr" presetSubtype="0" fill="hold" grpId="0" nodeType="withEffect">
+                                  <p:stCondLst>
+                                    <p:cond delay="0"/>
+                                  </p:stCondLst>
+                                  <p:childTnLst>
+                                    <p:set>
+                                      <p:cBhvr>
+                                        <p:cTn id="10" dur="1" fill="hold">
+                                          <p:stCondLst>
+                                            <p:cond delay="0"/>
+                                          </p:stCondLst>
+                                        </p:cTn>
+                                        <p:tgtEl>
+                                          <p:spTgt spid="16"/>
+                                        </p:tgtEl>
+                                        <p:attrNameLst>
+                                          <p:attrName>style.visibility</p:attrName>
+                                        </p:attrNameLst>
+                                      </p:cBhvr>
+                                      <p:to>
+                                        <p:strVal val="visible"/>
+                                      </p:to>
+                                    </p:set>
+                                  </p:childTnLst>
+                                </p:cTn>
+                              </p:par>
+                              <p:par>
+                                <p:cTn id="11" presetID="1" presetClass="entr" presetSubtype="0" fill="hold" grpId="0" nodeType="withEffect">
+                                  <p:stCondLst>
+                                    <p:cond delay="0"/>
+                                  </p:stCondLst>
+                                  <p:childTnLst>
+                                    <p:set>
+                                      <p:cBhvr>
+                                        <p:cTn id="12" dur="1" fill="hold">
+                                          <p:stCondLst>
+                                            <p:cond delay="0"/>
+                                          </p:stCondLst>
+                                        </p:cTn>
+                                        <p:tgtEl>
+                                          <p:spTgt spid="17"/>
+                                        </p:tgtEl>
+                                        <p:attrNameLst>
+                                          <p:attrName>style.visibility</p:attrName>
+                                        </p:attrNameLst>
+                                      </p:cBhvr>
+                                      <p:to>
+                                        <p:strVal val="visible"/>
+                                      </p:to>
+                                    </p:set>
+                                  </p:childTnLst>
+                                </p:cTn>
+                              </p:par>
+                            </p:childTnLst>
+                          </p:cTn>
+                        </p:par>
+                      </p:childTnLst>
+                    </p:cTn>
+                  </p:par>
+                </p:childTnLst>
+              </p:cTn>
+              <p:prevCondLst>
+                <p:cond evt="onPrev" delay="0">
+                  <p:tgtEl>
+                    <p:sldTgt/>
+                  </p:tgtEl>
+                </p:cond>
+              </p:prevCondLst>
+              <p:nextCondLst>
+                <p:cond evt="onNext" delay="0">
+                  <p:tgtEl>
+                    <p:sldTgt/>
+                  </p:tgtEl>
+                </p:cond>
+              </p:nextCondLst>
+            </p:seq>
+          </p:childTnLst>
+        </p:cTn>
+      </p:par>
+    </p:tnLst>
+    <p:bldLst>
+      <p:bldP spid="10" grpId="0"/>
+      <p:bldP spid="15" grpId="0"/>
+      <p:bldP spid="16" grpId="0"/>
+      <p:bldP spid="17" grpId="0"/>
+    </p:bldLst>
+  </p:timing>
 </p:sld>
 </file>
 
@@ -18179,41 +17294,6 @@
       </p:sp>
       <p:sp>
         <p:nvSpPr>
-          <p:cNvPr id="25" name="TextBox 24">
-            <a:extLst>
-              <a:ext uri="{FF2B5EF4-FFF2-40B4-BE49-F238E27FC236}">
-                <a16:creationId xmlns:a16="http://schemas.microsoft.com/office/drawing/2014/main" id="{DCC035F0-2526-D268-0E3B-75AB79A12D8E}"/>
-              </a:ext>
-            </a:extLst>
-          </p:cNvPr>
-          <p:cNvSpPr txBox="1"/>
-          <p:nvPr/>
-        </p:nvSpPr>
-        <p:spPr>
-          <a:xfrm>
-            <a:off x="8712017" y="5472237"/>
-            <a:ext cx="3276783" cy="400110"/>
-          </a:xfrm>
-          <a:prstGeom prst="rect">
-            <a:avLst/>
-          </a:prstGeom>
-          <a:noFill/>
-        </p:spPr>
-        <p:txBody>
-          <a:bodyPr wrap="square" lIns="0" rIns="0" rtlCol="0" anchor="b">
-            <a:spAutoFit/>
-          </a:bodyPr>
-          <a:lstStyle/>
-          <a:p>
-            <a:r>
-              <a:rPr lang="en-US" sz="2000" b="1" noProof="1"/>
-              <a:t>Calculate Functional Score</a:t>
-            </a:r>
-          </a:p>
-        </p:txBody>
-      </p:sp>
-      <p:sp>
-        <p:nvSpPr>
           <p:cNvPr id="28" name="TextBox 27">
             <a:extLst>
               <a:ext uri="{FF2B5EF4-FFF2-40B4-BE49-F238E27FC236}">
@@ -18351,84 +17431,6 @@
           </a:p>
           <a:p>
             <a:endParaRPr lang="en-IL" dirty="0"/>
-          </a:p>
-        </p:txBody>
-      </p:sp>
-      <p:sp>
-        <p:nvSpPr>
-          <p:cNvPr id="43" name="TextBox 42">
-            <a:extLst>
-              <a:ext uri="{FF2B5EF4-FFF2-40B4-BE49-F238E27FC236}">
-                <a16:creationId xmlns:a16="http://schemas.microsoft.com/office/drawing/2014/main" id="{AA5A31B5-9DA9-E651-98CD-877FEF8DF613}"/>
-              </a:ext>
-            </a:extLst>
-          </p:cNvPr>
-          <p:cNvSpPr txBox="1"/>
-          <p:nvPr/>
-        </p:nvSpPr>
-        <p:spPr>
-          <a:xfrm>
-            <a:off x="9121803" y="4301847"/>
-            <a:ext cx="3092506" cy="1123384"/>
-          </a:xfrm>
-          <a:prstGeom prst="rect">
-            <a:avLst/>
-          </a:prstGeom>
-          <a:noFill/>
-        </p:spPr>
-        <p:txBody>
-          <a:bodyPr wrap="square" rtlCol="0">
-            <a:spAutoFit/>
-          </a:bodyPr>
-          <a:lstStyle/>
-          <a:p>
-            <a:pPr algn="ctr"/>
-            <a:r>
-              <a:rPr lang="en-US" sz="1400" dirty="0"/>
-              <a:t>[Z(</a:t>
-            </a:r>
-            <a:r>
-              <a:rPr lang="en-US" sz="1400" dirty="0" err="1"/>
-              <a:t>WT+nutlin</a:t>
-            </a:r>
-            <a:r>
-              <a:rPr lang="en-US" sz="1400" dirty="0"/>
-              <a:t>) + Z(</a:t>
-            </a:r>
-            <a:r>
-              <a:rPr lang="en-US" sz="1400" dirty="0" err="1"/>
-              <a:t>NULL+nutlin</a:t>
-            </a:r>
-            <a:r>
-              <a:rPr lang="en-US" sz="1400" dirty="0"/>
-              <a:t>) - Z(</a:t>
-            </a:r>
-            <a:r>
-              <a:rPr lang="en-US" sz="1400" dirty="0" err="1"/>
-              <a:t>NULL+etop</a:t>
-            </a:r>
-            <a:r>
-              <a:rPr lang="en-US" sz="1400" dirty="0"/>
-              <a:t>)]</a:t>
-            </a:r>
-          </a:p>
-          <a:p>
-            <a:pPr algn="ctr"/>
-            <a:r>
-              <a:rPr lang="en-US" sz="1400" dirty="0"/>
-              <a:t>____________________________</a:t>
-            </a:r>
-          </a:p>
-          <a:p>
-            <a:pPr algn="ctr"/>
-            <a:endParaRPr lang="en-US" sz="1100" dirty="0"/>
-          </a:p>
-          <a:p>
-            <a:pPr algn="ctr"/>
-            <a:r>
-              <a:rPr lang="en-US" sz="1400" dirty="0"/>
-              <a:t>3</a:t>
-            </a:r>
           </a:p>
         </p:txBody>
       </p:sp>
@@ -18539,10 +17541,10 @@
       </p:pic>
       <p:sp>
         <p:nvSpPr>
-          <p:cNvPr id="3" name="TextBox 2">
+          <p:cNvPr id="5" name="TextBox 4">
             <a:extLst>
               <a:ext uri="{FF2B5EF4-FFF2-40B4-BE49-F238E27FC236}">
-                <a16:creationId xmlns:a16="http://schemas.microsoft.com/office/drawing/2014/main" id="{1CDA35C3-4077-C672-BA3D-0AA38FDDB1B7}"/>
+                <a16:creationId xmlns:a16="http://schemas.microsoft.com/office/drawing/2014/main" id="{B2017DD6-D740-DA0B-9FD4-35A26585108D}"/>
               </a:ext>
             </a:extLst>
           </p:cNvPr>
@@ -18551,8 +17553,8 @@
         </p:nvSpPr>
         <p:spPr>
           <a:xfrm>
-            <a:off x="8454706" y="4795246"/>
-            <a:ext cx="514885" cy="369332"/>
+            <a:off x="8559805" y="4600659"/>
+            <a:ext cx="3276783" cy="400110"/>
           </a:xfrm>
           <a:prstGeom prst="rect">
             <a:avLst/>
@@ -18560,49 +17562,14 @@
           <a:noFill/>
         </p:spPr>
         <p:txBody>
-          <a:bodyPr wrap="none" rtlCol="0">
+          <a:bodyPr wrap="square" lIns="0" rIns="0" rtlCol="0" anchor="b">
             <a:spAutoFit/>
           </a:bodyPr>
           <a:lstStyle/>
           <a:p>
             <a:r>
-              <a:rPr lang="en-IL" dirty="0"/>
-              <a:t>EFS</a:t>
-            </a:r>
-          </a:p>
-        </p:txBody>
-      </p:sp>
-      <p:sp>
-        <p:nvSpPr>
-          <p:cNvPr id="4" name="TextBox 3">
-            <a:extLst>
-              <a:ext uri="{FF2B5EF4-FFF2-40B4-BE49-F238E27FC236}">
-                <a16:creationId xmlns:a16="http://schemas.microsoft.com/office/drawing/2014/main" id="{59C311CA-F832-98C7-E784-880E33075162}"/>
-              </a:ext>
-            </a:extLst>
-          </p:cNvPr>
-          <p:cNvSpPr txBox="1"/>
-          <p:nvPr/>
-        </p:nvSpPr>
-        <p:spPr>
-          <a:xfrm>
-            <a:off x="8962144" y="4795246"/>
-            <a:ext cx="319318" cy="369332"/>
-          </a:xfrm>
-          <a:prstGeom prst="rect">
-            <a:avLst/>
-          </a:prstGeom>
-          <a:noFill/>
-        </p:spPr>
-        <p:txBody>
-          <a:bodyPr wrap="none" rtlCol="0">
-            <a:spAutoFit/>
-          </a:bodyPr>
-          <a:lstStyle/>
-          <a:p>
-            <a:r>
-              <a:rPr lang="en-IL" dirty="0"/>
-              <a:t>=</a:t>
+              <a:rPr lang="en-US" sz="2000" b="1" noProof="1"/>
+              <a:t>Calculate Functional Score</a:t>
             </a:r>
           </a:p>
         </p:txBody>
@@ -20112,10 +19079,10 @@
       </p:pic>
       <p:sp>
         <p:nvSpPr>
-          <p:cNvPr id="11" name="TextBox 10">
+          <p:cNvPr id="22" name="TextBox 21">
             <a:extLst>
               <a:ext uri="{FF2B5EF4-FFF2-40B4-BE49-F238E27FC236}">
-                <a16:creationId xmlns:a16="http://schemas.microsoft.com/office/drawing/2014/main" id="{0A5BB6FA-4B71-EADA-848F-85CE375EC46F}"/>
+                <a16:creationId xmlns:a16="http://schemas.microsoft.com/office/drawing/2014/main" id="{E2C4D7A4-18DC-99E0-5260-56985152EFDE}"/>
               </a:ext>
             </a:extLst>
           </p:cNvPr>
@@ -20124,7 +19091,7 @@
         </p:nvSpPr>
         <p:spPr>
           <a:xfrm>
-            <a:off x="8712017" y="5472237"/>
+            <a:off x="8559805" y="4600659"/>
             <a:ext cx="3276783" cy="400110"/>
           </a:xfrm>
           <a:prstGeom prst="rect">
@@ -20141,154 +19108,6 @@
             <a:r>
               <a:rPr lang="en-US" sz="2000" b="1" noProof="1"/>
               <a:t>Calculate Functional Score</a:t>
-            </a:r>
-          </a:p>
-        </p:txBody>
-      </p:sp>
-      <p:sp>
-        <p:nvSpPr>
-          <p:cNvPr id="12" name="TextBox 11">
-            <a:extLst>
-              <a:ext uri="{FF2B5EF4-FFF2-40B4-BE49-F238E27FC236}">
-                <a16:creationId xmlns:a16="http://schemas.microsoft.com/office/drawing/2014/main" id="{B495DDAB-13AE-21BC-8873-636E480C1934}"/>
-              </a:ext>
-            </a:extLst>
-          </p:cNvPr>
-          <p:cNvSpPr txBox="1"/>
-          <p:nvPr/>
-        </p:nvSpPr>
-        <p:spPr>
-          <a:xfrm>
-            <a:off x="9121803" y="4301847"/>
-            <a:ext cx="3092506" cy="1123384"/>
-          </a:xfrm>
-          <a:prstGeom prst="rect">
-            <a:avLst/>
-          </a:prstGeom>
-          <a:noFill/>
-        </p:spPr>
-        <p:txBody>
-          <a:bodyPr wrap="square" rtlCol="0">
-            <a:spAutoFit/>
-          </a:bodyPr>
-          <a:lstStyle/>
-          <a:p>
-            <a:pPr algn="ctr"/>
-            <a:r>
-              <a:rPr lang="en-US" sz="1400" dirty="0"/>
-              <a:t>[Z(</a:t>
-            </a:r>
-            <a:r>
-              <a:rPr lang="en-US" sz="1400" dirty="0" err="1"/>
-              <a:t>WT+nutlin</a:t>
-            </a:r>
-            <a:r>
-              <a:rPr lang="en-US" sz="1400" dirty="0"/>
-              <a:t>) + Z(</a:t>
-            </a:r>
-            <a:r>
-              <a:rPr lang="en-US" sz="1400" dirty="0" err="1"/>
-              <a:t>NULL+nutlin</a:t>
-            </a:r>
-            <a:r>
-              <a:rPr lang="en-US" sz="1400" dirty="0"/>
-              <a:t>) - Z(</a:t>
-            </a:r>
-            <a:r>
-              <a:rPr lang="en-US" sz="1400" dirty="0" err="1"/>
-              <a:t>NULL+etop</a:t>
-            </a:r>
-            <a:r>
-              <a:rPr lang="en-US" sz="1400" dirty="0"/>
-              <a:t>)]</a:t>
-            </a:r>
-          </a:p>
-          <a:p>
-            <a:pPr algn="ctr"/>
-            <a:r>
-              <a:rPr lang="en-US" sz="1400" dirty="0"/>
-              <a:t>____________________________</a:t>
-            </a:r>
-          </a:p>
-          <a:p>
-            <a:pPr algn="ctr"/>
-            <a:endParaRPr lang="en-US" sz="1100" dirty="0"/>
-          </a:p>
-          <a:p>
-            <a:pPr algn="ctr"/>
-            <a:r>
-              <a:rPr lang="en-US" sz="1400" dirty="0"/>
-              <a:t>3</a:t>
-            </a:r>
-          </a:p>
-        </p:txBody>
-      </p:sp>
-      <p:sp>
-        <p:nvSpPr>
-          <p:cNvPr id="13" name="TextBox 12">
-            <a:extLst>
-              <a:ext uri="{FF2B5EF4-FFF2-40B4-BE49-F238E27FC236}">
-                <a16:creationId xmlns:a16="http://schemas.microsoft.com/office/drawing/2014/main" id="{C3C2DBD0-19DA-6708-B5EE-2462DB06F568}"/>
-              </a:ext>
-            </a:extLst>
-          </p:cNvPr>
-          <p:cNvSpPr txBox="1"/>
-          <p:nvPr/>
-        </p:nvSpPr>
-        <p:spPr>
-          <a:xfrm>
-            <a:off x="8454706" y="4795246"/>
-            <a:ext cx="514885" cy="369332"/>
-          </a:xfrm>
-          <a:prstGeom prst="rect">
-            <a:avLst/>
-          </a:prstGeom>
-          <a:noFill/>
-        </p:spPr>
-        <p:txBody>
-          <a:bodyPr wrap="none" rtlCol="0">
-            <a:spAutoFit/>
-          </a:bodyPr>
-          <a:lstStyle/>
-          <a:p>
-            <a:r>
-              <a:rPr lang="en-IL" dirty="0"/>
-              <a:t>EFS</a:t>
-            </a:r>
-          </a:p>
-        </p:txBody>
-      </p:sp>
-      <p:sp>
-        <p:nvSpPr>
-          <p:cNvPr id="21" name="TextBox 20">
-            <a:extLst>
-              <a:ext uri="{FF2B5EF4-FFF2-40B4-BE49-F238E27FC236}">
-                <a16:creationId xmlns:a16="http://schemas.microsoft.com/office/drawing/2014/main" id="{9A1E7E06-600D-22AB-A470-C6EF9A97C940}"/>
-              </a:ext>
-            </a:extLst>
-          </p:cNvPr>
-          <p:cNvSpPr txBox="1"/>
-          <p:nvPr/>
-        </p:nvSpPr>
-        <p:spPr>
-          <a:xfrm>
-            <a:off x="8962144" y="4795246"/>
-            <a:ext cx="319318" cy="369332"/>
-          </a:xfrm>
-          <a:prstGeom prst="rect">
-            <a:avLst/>
-          </a:prstGeom>
-          <a:noFill/>
-        </p:spPr>
-        <p:txBody>
-          <a:bodyPr wrap="none" rtlCol="0">
-            <a:spAutoFit/>
-          </a:bodyPr>
-          <a:lstStyle/>
-          <a:p>
-            <a:r>
-              <a:rPr lang="en-IL" dirty="0"/>
-              <a:t>=</a:t>
             </a:r>
           </a:p>
         </p:txBody>
@@ -21732,58 +20551,6 @@
           </a:p>
         </p:txBody>
       </p:sp>
-      <p:pic>
-        <p:nvPicPr>
-          <p:cNvPr id="3074" name="Picture 2" descr="Fig. 2: Comprehensive mutational scanning of TP53.">
-            <a:extLst>
-              <a:ext uri="{FF2B5EF4-FFF2-40B4-BE49-F238E27FC236}">
-                <a16:creationId xmlns:a16="http://schemas.microsoft.com/office/drawing/2014/main" id="{4A796C30-8577-A525-450C-DAEC0E23AD6E}"/>
-              </a:ext>
-            </a:extLst>
-          </p:cNvPr>
-          <p:cNvPicPr>
-            <a:picLocks noChangeAspect="1" noChangeArrowheads="1"/>
-          </p:cNvPicPr>
-          <p:nvPr/>
-        </p:nvPicPr>
-        <p:blipFill rotWithShape="1">
-          <a:blip r:embed="rId4">
-            <a:extLst>
-              <a:ext uri="{28A0092B-C50C-407E-A947-70E740481C1C}">
-                <a14:useLocalDpi xmlns:a14="http://schemas.microsoft.com/office/drawing/2010/main" val="0"/>
-              </a:ext>
-            </a:extLst>
-          </a:blip>
-          <a:srcRect l="31186" t="83484" r="-628" b="-1789"/>
-          <a:stretch>
-            <a:fillRect/>
-          </a:stretch>
-        </p:blipFill>
-        <p:spPr bwMode="auto">
-          <a:xfrm>
-            <a:off x="7532593" y="2169116"/>
-            <a:ext cx="4229434" cy="861774"/>
-          </a:xfrm>
-          <a:prstGeom prst="rect">
-            <a:avLst/>
-          </a:prstGeom>
-          <a:noFill/>
-          <a:ln w="12700">
-            <a:solidFill>
-              <a:schemeClr val="tx1"/>
-            </a:solidFill>
-          </a:ln>
-          <a:extLst>
-            <a:ext uri="{909E8E84-426E-40DD-AFC4-6F175D3DCCD1}">
-              <a14:hiddenFill xmlns:a14="http://schemas.microsoft.com/office/drawing/2010/main">
-                <a:solidFill>
-                  <a:srgbClr val="FFFFFF"/>
-                </a:solidFill>
-              </a14:hiddenFill>
-            </a:ext>
-          </a:extLst>
-        </p:spPr>
-      </p:pic>
       <p:sp>
         <p:nvSpPr>
           <p:cNvPr id="11" name="TextBox 10">
@@ -21798,7 +20565,7 @@
         </p:nvSpPr>
         <p:spPr>
           <a:xfrm>
-            <a:off x="8712017" y="5472237"/>
+            <a:off x="8559805" y="4600659"/>
             <a:ext cx="3276783" cy="400110"/>
           </a:xfrm>
           <a:prstGeom prst="rect">
@@ -21837,7 +20604,7 @@
         </p:nvSpPr>
         <p:spPr>
           <a:xfrm>
-            <a:off x="9121803" y="4301847"/>
+            <a:off x="8712017" y="2377178"/>
             <a:ext cx="3092506" cy="1123384"/>
           </a:xfrm>
           <a:prstGeom prst="rect">
@@ -21915,7 +20682,7 @@
         </p:nvSpPr>
         <p:spPr>
           <a:xfrm>
-            <a:off x="8454706" y="4795246"/>
+            <a:off x="8044920" y="2870577"/>
             <a:ext cx="514885" cy="369332"/>
           </a:xfrm>
           <a:prstGeom prst="rect">
@@ -21950,7 +20717,7 @@
         </p:nvSpPr>
         <p:spPr>
           <a:xfrm>
-            <a:off x="8962144" y="4795246"/>
+            <a:off x="8552358" y="2870577"/>
             <a:ext cx="319318" cy="369332"/>
           </a:xfrm>
           <a:prstGeom prst="rect">
@@ -22085,7 +20852,21 @@
             </a:r>
             <a:r>
               <a:rPr lang="en-US" sz="4000" dirty="0"/>
-              <a:t>the lowest </a:t>
+              <a:t>the</a:t>
+            </a:r>
+            <a:endParaRPr lang="he-IL" sz="4000" dirty="0"/>
+          </a:p>
+          <a:p>
+            <a:pPr marL="0" indent="0" algn="ctr">
+              <a:buNone/>
+            </a:pPr>
+            <a:r>
+              <a:rPr lang="en-US" sz="4000" dirty="0"/>
+              <a:t>lowest</a:t>
+            </a:r>
+            <a:r>
+              <a:rPr lang="he-IL" sz="4000" dirty="0"/>
+              <a:t> </a:t>
             </a:r>
             <a:r>
               <a:rPr lang="en-US" sz="4000" dirty="0">
@@ -22097,7 +20878,17 @@
             </a:r>
             <a:r>
               <a:rPr lang="en-US" sz="4000" dirty="0"/>
-              <a:t>will show the highest </a:t>
+              <a:t>will show </a:t>
+            </a:r>
+            <a:endParaRPr lang="he-IL" sz="4000" dirty="0"/>
+          </a:p>
+          <a:p>
+            <a:pPr marL="0" indent="0" algn="ctr">
+              <a:buNone/>
+            </a:pPr>
+            <a:r>
+              <a:rPr lang="en-US" sz="4000" dirty="0"/>
+              <a:t>the highest </a:t>
             </a:r>
             <a:r>
               <a:rPr lang="en-US" sz="4000" dirty="0">
@@ -22535,7 +21326,7 @@
         </p:nvSpPr>
         <p:spPr>
           <a:xfrm>
-            <a:off x="6096000" y="2125487"/>
+            <a:off x="6308306" y="1988231"/>
             <a:ext cx="3981164" cy="3880773"/>
           </a:xfrm>
         </p:spPr>
@@ -22545,12 +21336,20 @@
           </a:bodyPr>
           <a:lstStyle/>
           <a:p>
+            <a:pPr>
+              <a:buFont typeface="Wingdings" pitchFamily="2" charset="2"/>
+              <a:buChar char="Ø"/>
+            </a:pPr>
             <a:r>
               <a:rPr lang="en-US" dirty="0"/>
               <a:t>Giacomelli et al., Nature Genetics, 2018 (25,217 variants, 8,274 unique)</a:t>
             </a:r>
           </a:p>
           <a:p>
+            <a:pPr>
+              <a:buFont typeface="Wingdings" pitchFamily="2" charset="2"/>
+              <a:buChar char="Ø"/>
+            </a:pPr>
             <a:r>
               <a:rPr lang="en-US" dirty="0"/>
               <a:t>Role: Experimental "fitness" scores for every possible TP53 mutation - </a:t>
@@ -22561,6 +21360,10 @@
             </a:r>
           </a:p>
           <a:p>
+            <a:pPr>
+              <a:buFont typeface="Wingdings" pitchFamily="2" charset="2"/>
+              <a:buChar char="Ø"/>
+            </a:pPr>
             <a:r>
               <a:rPr lang="en-US" dirty="0"/>
               <a:t>Metric: Experimental Functional Score (derived from cell line fitness screens) quantifies exactly how well each specific TP53 mutant can suppress tumor growth in a controlled lab setting</a:t>
@@ -22584,7 +21387,7 @@
         </p:nvSpPr>
         <p:spPr>
           <a:xfrm>
-            <a:off x="2303060" y="2491881"/>
+            <a:off x="1440834" y="2162599"/>
             <a:ext cx="3821288" cy="3880773"/>
           </a:xfrm>
           <a:prstGeom prst="rect">
@@ -22823,12 +21626,20 @@
             </a:lvl9pPr>
           </a:lstStyle>
           <a:p>
+            <a:pPr>
+              <a:buFont typeface="Wingdings" pitchFamily="2" charset="2"/>
+              <a:buChar char="Ø"/>
+            </a:pPr>
             <a:r>
               <a:rPr lang="en-US" dirty="0"/>
               <a:t>AACR GENIE v19.0 (~271,000 samples, 100,418 with FGA).</a:t>
             </a:r>
           </a:p>
           <a:p>
+            <a:pPr>
+              <a:buFont typeface="Wingdings" pitchFamily="2" charset="2"/>
+              <a:buChar char="Ø"/>
+            </a:pPr>
             <a:r>
               <a:rPr lang="en-US" dirty="0"/>
               <a:t>Role: Real-world patient data - </a:t>
@@ -22839,18 +21650,30 @@
             </a:r>
           </a:p>
           <a:p>
+            <a:pPr>
+              <a:buFont typeface="Wingdings" pitchFamily="2" charset="2"/>
+              <a:buChar char="Ø"/>
+            </a:pPr>
             <a:r>
               <a:rPr lang="en-US" dirty="0"/>
               <a:t>Metric: FRACTION_GENOME_ALTERED (FGA), a quantitative measure of chromosomal instability</a:t>
             </a:r>
           </a:p>
           <a:p>
+            <a:pPr>
+              <a:buFont typeface="Wingdings" pitchFamily="2" charset="2"/>
+              <a:buChar char="Ø"/>
+            </a:pPr>
             <a:r>
               <a:rPr lang="en-US" dirty="0"/>
               <a:t>35,357 TP53-mutant</a:t>
             </a:r>
           </a:p>
           <a:p>
+            <a:pPr>
+              <a:buFont typeface="Wingdings" pitchFamily="2" charset="2"/>
+              <a:buChar char="Ø"/>
+            </a:pPr>
             <a:r>
               <a:rPr lang="en-US" dirty="0"/>
               <a:t>65,061 TP53-WT</a:t>

--- a/project/project_background/Final Project Presentation - Ornit - Cancer Bioinfo March 2026.pptx
+++ b/project/project_background/Final Project Presentation - Ornit - Cancer Bioinfo March 2026.pptx
@@ -3264,7 +3264,7 @@
           <a:p>
             <a:fld id="{4FCD6A08-F84D-254F-876D-619DDBFD23F2}" type="datetimeFigureOut">
               <a:rPr lang="en-IL" smtClean="0"/>
-              <a:t>18/03/2026</a:t>
+              <a:t>19/03/2026</a:t>
             </a:fld>
             <a:endParaRPr lang="en-IL"/>
           </a:p>
@@ -3705,6 +3705,17 @@
             <a:pPr marL="0" algn="r" defTabSz="914400" rtl="1" eaLnBrk="1" latinLnBrk="0" hangingPunct="1"/>
             <a:r>
               <a:rPr lang="he-IL" dirty="0"/>
+              <a:t>ונעבור לתוצאות:</a:t>
+            </a:r>
+          </a:p>
+          <a:p>
+            <a:pPr marL="0" algn="r" defTabSz="914400" rtl="1" eaLnBrk="1" latinLnBrk="0" hangingPunct="1"/>
+            <a:endParaRPr lang="he-IL" dirty="0"/>
+          </a:p>
+          <a:p>
+            <a:pPr marL="0" algn="r" defTabSz="914400" rtl="1" eaLnBrk="1" latinLnBrk="0" hangingPunct="1"/>
+            <a:r>
+              <a:rPr lang="he-IL" dirty="0"/>
               <a:t>אז לקחתי את </a:t>
             </a:r>
             <a:r>
@@ -5058,7 +5069,18 @@
             </a:r>
             <a:r>
               <a:rPr lang="he-IL" dirty="0"/>
-              <a:t>. אפשר להגיד שיש לנו כאן איזשהו מודל של </a:t>
+              <a:t>.</a:t>
+            </a:r>
+          </a:p>
+          <a:p>
+            <a:pPr marL="0" algn="r" defTabSz="914400" rtl="1" eaLnBrk="1" latinLnBrk="0" hangingPunct="1"/>
+            <a:endParaRPr lang="he-IL" dirty="0"/>
+          </a:p>
+          <a:p>
+            <a:pPr marL="0" algn="r" defTabSz="914400" rtl="1" eaLnBrk="1" latinLnBrk="0" hangingPunct="1"/>
+            <a:r>
+              <a:rPr lang="he-IL" dirty="0"/>
+              <a:t>אפשר להגיד שיש לנו כאן איזשהו מודל של </a:t>
             </a:r>
             <a:r>
               <a:rPr lang="en-US" dirty="0"/>
@@ -5100,6 +5122,10 @@
               <a:rPr lang="he-IL" dirty="0"/>
               <a:t>.</a:t>
             </a:r>
+          </a:p>
+          <a:p>
+            <a:pPr marL="0" algn="r" defTabSz="914400" rtl="1" eaLnBrk="1" latinLnBrk="0" hangingPunct="1"/>
+            <a:endParaRPr lang="he-IL" dirty="0"/>
           </a:p>
           <a:p>
             <a:pPr marL="0" algn="r" defTabSz="914400" rtl="1" eaLnBrk="1" latinLnBrk="0" hangingPunct="1"/>
@@ -5519,6 +5545,10 @@
           </a:p>
           <a:p>
             <a:pPr marL="0" algn="r" defTabSz="914400" rtl="1" eaLnBrk="1" latinLnBrk="0" hangingPunct="1"/>
+            <a:endParaRPr lang="he-IL" dirty="0"/>
+          </a:p>
+          <a:p>
+            <a:pPr marL="0" algn="r" defTabSz="914400" rtl="1" eaLnBrk="1" latinLnBrk="0" hangingPunct="1"/>
             <a:r>
               <a:rPr lang="he-IL" dirty="0"/>
               <a:t>עוד דבר שהיה נחמד לעשות, זה לבדוק </a:t>
@@ -6048,61 +6078,6 @@
               <a:t> ולא מדובר באחד יחיד.</a:t>
             </a:r>
           </a:p>
-          <a:p>
-            <a:pPr marL="0" algn="r" defTabSz="914400" rtl="1" eaLnBrk="1" latinLnBrk="0" hangingPunct="1"/>
-            <a:endParaRPr lang="he-IL" dirty="0"/>
-          </a:p>
-          <a:p>
-            <a:pPr marL="0" marR="0" lvl="0" indent="0" algn="r" defTabSz="914400" rtl="1" eaLnBrk="1" fontAlgn="auto" latinLnBrk="0" hangingPunct="1">
-              <a:lnSpc>
-                <a:spcPct val="100000"/>
-              </a:lnSpc>
-              <a:spcBef>
-                <a:spcPts val="0"/>
-              </a:spcBef>
-              <a:spcAft>
-                <a:spcPts val="0"/>
-              </a:spcAft>
-              <a:buClrTx/>
-              <a:buSzTx/>
-              <a:buFontTx/>
-              <a:buNone/>
-              <a:tabLst/>
-              <a:defRPr/>
-            </a:pPr>
-            <a:r>
-              <a:rPr lang="he-IL" dirty="0"/>
-              <a:t>אחת ההשערות שלי היא ש-</a:t>
-            </a:r>
-            <a:r>
-              <a:rPr lang="en-US" dirty="0"/>
-              <a:t>TP53</a:t>
-            </a:r>
-            <a:r>
-              <a:rPr lang="he-IL" dirty="0"/>
-              <a:t> פגום יכול להוביל ל-</a:t>
-            </a:r>
-            <a:r>
-              <a:rPr lang="en-US" dirty="0"/>
-              <a:t>Copy number variation</a:t>
-            </a:r>
-            <a:r>
-              <a:rPr lang="he-IL" dirty="0"/>
-              <a:t> וכתוצאה מכך לכאוס </a:t>
-            </a:r>
-            <a:r>
-              <a:rPr lang="he-IL" dirty="0" err="1"/>
-              <a:t>גנומי</a:t>
-            </a:r>
-            <a:r>
-              <a:rPr lang="he-IL" dirty="0"/>
-              <a:t>.</a:t>
-            </a:r>
-          </a:p>
-          <a:p>
-            <a:pPr marL="0" algn="r" defTabSz="914400" rtl="1" eaLnBrk="1" latinLnBrk="0" hangingPunct="1"/>
-            <a:endParaRPr lang="he-IL" dirty="0"/>
-          </a:p>
         </p:txBody>
       </p:sp>
       <p:sp>
@@ -6518,6 +6493,14 @@
             </a:r>
             <a:r>
               <a:rPr lang="he-IL" dirty="0"/>
+              <a:t> ביחס למוטציות </a:t>
+            </a:r>
+            <a:r>
+              <a:rPr lang="en-US" dirty="0"/>
+              <a:t>TP53</a:t>
+            </a:r>
+            <a:r>
+              <a:rPr lang="he-IL" dirty="0"/>
               <a:t>, נעזרתי במאמר של </a:t>
             </a:r>
             <a:r>
@@ -6868,7 +6851,7 @@
             </a:r>
             <a:r>
               <a:rPr lang="he-IL" dirty="0"/>
-              <a:t>, 2) כאילו הוא לא נמצא, 3) או משהו באמצע. מהשילוב של שלושת המדידות האלה קיבלנו מספר יחיד, שזה ה-</a:t>
+              <a:t>, 2) כאילו הוא לא נמצא, 3) או משהו באמצע. מהשילוב של שלוש המדידות האלה קיבלנו מספר יחיד, שזה ה-</a:t>
             </a:r>
             <a:r>
               <a:rPr lang="en-US" dirty="0"/>
@@ -7923,7 +7906,7 @@
             <a:fld id="{A37D6D71-8B28-4ED6-B932-04B197003D23}" type="datetimeFigureOut">
               <a:rPr lang="en-US" smtClean="0"/>
               <a:pPr algn="r"/>
-              <a:t>3/18/26</a:t>
+              <a:t>3/19/26</a:t>
             </a:fld>
             <a:endParaRPr lang="en-US" dirty="0"/>
           </a:p>
@@ -8193,7 +8176,7 @@
             <a:fld id="{A37D6D71-8B28-4ED6-B932-04B197003D23}" type="datetimeFigureOut">
               <a:rPr lang="en-US" smtClean="0"/>
               <a:pPr algn="r"/>
-              <a:t>3/18/26</a:t>
+              <a:t>3/19/26</a:t>
             </a:fld>
             <a:endParaRPr lang="en-US" dirty="0"/>
           </a:p>
@@ -8436,7 +8419,7 @@
             <a:fld id="{A37D6D71-8B28-4ED6-B932-04B197003D23}" type="datetimeFigureOut">
               <a:rPr lang="en-US" smtClean="0"/>
               <a:pPr algn="r"/>
-              <a:t>3/18/26</a:t>
+              <a:t>3/19/26</a:t>
             </a:fld>
             <a:endParaRPr lang="en-US" dirty="0"/>
           </a:p>
@@ -8691,7 +8674,7 @@
             <a:fld id="{A37D6D71-8B28-4ED6-B932-04B197003D23}" type="datetimeFigureOut">
               <a:rPr lang="en-US" smtClean="0"/>
               <a:pPr algn="r"/>
-              <a:t>3/18/26</a:t>
+              <a:t>3/19/26</a:t>
             </a:fld>
             <a:endParaRPr lang="en-US" dirty="0"/>
           </a:p>
@@ -9006,7 +8989,7 @@
             <a:fld id="{A37D6D71-8B28-4ED6-B932-04B197003D23}" type="datetimeFigureOut">
               <a:rPr lang="en-US" smtClean="0"/>
               <a:pPr algn="r"/>
-              <a:t>3/18/26</a:t>
+              <a:t>3/19/26</a:t>
             </a:fld>
             <a:endParaRPr lang="en-US" dirty="0"/>
           </a:p>
@@ -9316,7 +9299,7 @@
             <a:fld id="{A37D6D71-8B28-4ED6-B932-04B197003D23}" type="datetimeFigureOut">
               <a:rPr lang="en-US" smtClean="0"/>
               <a:pPr algn="r"/>
-              <a:t>3/18/26</a:t>
+              <a:t>3/19/26</a:t>
             </a:fld>
             <a:endParaRPr lang="en-US" dirty="0"/>
           </a:p>
@@ -9746,7 +9729,7 @@
             <a:fld id="{A37D6D71-8B28-4ED6-B932-04B197003D23}" type="datetimeFigureOut">
               <a:rPr lang="en-US" smtClean="0"/>
               <a:pPr algn="r"/>
-              <a:t>3/18/26</a:t>
+              <a:t>3/19/26</a:t>
             </a:fld>
             <a:endParaRPr lang="en-US" spc="50" dirty="0"/>
           </a:p>
@@ -9912,7 +9895,7 @@
             <a:fld id="{A37D6D71-8B28-4ED6-B932-04B197003D23}" type="datetimeFigureOut">
               <a:rPr lang="en-US" smtClean="0"/>
               <a:pPr algn="r"/>
-              <a:t>3/18/26</a:t>
+              <a:t>3/19/26</a:t>
             </a:fld>
             <a:endParaRPr lang="en-US" dirty="0"/>
           </a:p>
@@ -10015,7 +9998,7 @@
             <a:fld id="{A37D6D71-8B28-4ED6-B932-04B197003D23}" type="datetimeFigureOut">
               <a:rPr lang="en-US" smtClean="0"/>
               <a:pPr algn="r"/>
-              <a:t>3/18/26</a:t>
+              <a:t>3/19/26</a:t>
             </a:fld>
             <a:endParaRPr lang="en-US" dirty="0"/>
           </a:p>
@@ -10401,7 +10384,7 @@
             <a:fld id="{A37D6D71-8B28-4ED6-B932-04B197003D23}" type="datetimeFigureOut">
               <a:rPr lang="en-US" smtClean="0"/>
               <a:pPr algn="r"/>
-              <a:t>3/18/26</a:t>
+              <a:t>3/19/26</a:t>
             </a:fld>
             <a:endParaRPr lang="en-US" dirty="0"/>
           </a:p>
@@ -10698,7 +10681,7 @@
             <a:fld id="{A37D6D71-8B28-4ED6-B932-04B197003D23}" type="datetimeFigureOut">
               <a:rPr lang="en-US" smtClean="0"/>
               <a:pPr algn="r"/>
-              <a:t>3/18/26</a:t>
+              <a:t>3/19/26</a:t>
             </a:fld>
             <a:endParaRPr lang="en-US" spc="50" dirty="0"/>
           </a:p>
@@ -10913,7 +10896,7 @@
             <a:fld id="{A37D6D71-8B28-4ED6-B932-04B197003D23}" type="datetimeFigureOut">
               <a:rPr lang="en-US" smtClean="0"/>
               <a:pPr algn="r"/>
-              <a:t>3/18/26</a:t>
+              <a:t>3/19/26</a:t>
             </a:fld>
             <a:endParaRPr lang="en-US" spc="50" dirty="0"/>
           </a:p>
@@ -12313,7 +12296,7 @@
         </p:blipFill>
         <p:spPr>
           <a:xfrm>
-            <a:off x="3817096" y="2093428"/>
+            <a:off x="3817096" y="2064852"/>
             <a:ext cx="4553129" cy="3948596"/>
           </a:xfrm>
           <a:prstGeom prst="rect">
@@ -21326,7 +21309,7 @@
         </p:nvSpPr>
         <p:spPr>
           <a:xfrm>
-            <a:off x="6308306" y="1988231"/>
+            <a:off x="6784289" y="2018271"/>
             <a:ext cx="3981164" cy="3880773"/>
           </a:xfrm>
         </p:spPr>
@@ -21387,7 +21370,7 @@
         </p:nvSpPr>
         <p:spPr>
           <a:xfrm>
-            <a:off x="1440834" y="2162599"/>
+            <a:off x="1426547" y="2306927"/>
             <a:ext cx="3821288" cy="3880773"/>
           </a:xfrm>
           <a:prstGeom prst="rect">
